--- a/FP_Talk_2026/nastachku/final_presentation.pptx
+++ b/FP_Talk_2026/nastachku/final_presentation.pptx
@@ -29,7 +29,18 @@
     <p:sldId id="274" r:id="rId34"/>
     <p:sldId id="275" r:id="rId35"/>
     <p:sldId id="276" r:id="rId36"/>
-    <p:sldId id="269" r:id="rId20"/>
+    <p:sldId id="279" r:id="rId38"/>
+    <p:sldId id="280" r:id="rId39"/>
+    <p:sldId id="281" r:id="rId40"/>
+    <p:sldId id="282" r:id="rId41"/>
+    <p:sldId id="283" r:id="rId42"/>
+    <p:sldId id="284" r:id="rId43"/>
+    <p:sldId id="290" r:id="rId49"/>
+    <p:sldId id="291" r:id="rId50"/>
+    <p:sldId id="292" r:id="rId51"/>
+    <p:sldId id="293" r:id="rId52"/>
+    <p:sldId id="294" r:id="rId53"/>
+    <p:sldId id="295" r:id="rId54"/>
   </p:sldIdLst>
   <p:sldSz cy="6858000" cx="12192000"/>
   <p:notesSz cx="12192000" cy="6858000"/>
@@ -1365,123 +1376,6 @@
             <a:endParaRPr/>
           </a:p>
         </p:txBody>
-      </p:sp>
-    </p:spTree>
-  </p:cSld>
-  <p:clrMapOvr>
-    <a:masterClrMapping/>
-  </p:clrMapOvr>
-</p:notes>
-</file>
-
-<file path=ppt/notesSlides/notesSlide14.xml><?xml version="1.0" encoding="utf-8"?>
-<p:notes xmlns:a="http://schemas.openxmlformats.org/drawingml/2006/main" xmlns:r="http://schemas.openxmlformats.org/officeDocument/2006/relationships" xmlns:mc="http://schemas.openxmlformats.org/markup-compatibility/2006" xmlns:mv="urn:schemas-microsoft-com:mac:vml" xmlns:p="http://schemas.openxmlformats.org/presentationml/2006/main" xmlns:c="http://schemas.openxmlformats.org/drawingml/2006/chart" xmlns:dgm="http://schemas.openxmlformats.org/drawingml/2006/diagram" xmlns:o="urn:schemas-microsoft-com:office:office" xmlns:v="urn:schemas-microsoft-com:vml" xmlns:pvml="urn:schemas-microsoft-com:office:powerpoint" xmlns:com="http://schemas.openxmlformats.org/drawingml/2006/compatibility" xmlns:p14="http://schemas.microsoft.com/office/powerpoint/2010/main" xmlns:p15="http://schemas.microsoft.com/office/powerpoint/2012/main" xmlns:ahyp="http://schemas.microsoft.com/office/drawing/2018/hyperlinkcolor" showMasterPhAnim="0" showMasterSp="0">
-  <p:cSld>
-    <p:spTree>
-      <p:nvGrpSpPr>
-        <p:cNvPr id="175" name="Shape 175"/>
-        <p:cNvGrpSpPr/>
-        <p:nvPr/>
-      </p:nvGrpSpPr>
-      <p:grpSpPr>
-        <a:xfrm>
-          <a:off x="0" y="0"/>
-          <a:ext cx="0" cy="0"/>
-          <a:chOff x="0" y="0"/>
-          <a:chExt cx="0" cy="0"/>
-        </a:xfrm>
-      </p:grpSpPr>
-      <p:sp>
-        <p:nvSpPr>
-          <p:cNvPr id="176" name="Google Shape;176;p5:notes"/>
-          <p:cNvSpPr txBox="1"/>
-          <p:nvPr>
-            <p:ph idx="1" type="body"/>
-          </p:nvPr>
-        </p:nvSpPr>
-        <p:spPr>
-          <a:xfrm>
-            <a:off x="1219200" y="3257550"/>
-            <a:ext cx="9753600" cy="3086100"/>
-          </a:xfrm>
-          <a:prstGeom prst="rect">
-            <a:avLst/>
-          </a:prstGeom>
-          <a:noFill/>
-          <a:ln>
-            <a:noFill/>
-          </a:ln>
-        </p:spPr>
-        <p:txBody>
-          <a:bodyPr anchorCtr="0" anchor="t" bIns="91425" lIns="91425" spcFirstLastPara="1" rIns="91425" wrap="square" tIns="91425">
-            <a:noAutofit/>
-          </a:bodyPr>
-          <a:lstStyle/>
-          <a:p>
-            <a:pPr indent="0" lvl="0" marL="0" rtl="0" algn="l">
-              <a:lnSpc>
-                <a:spcPct val="100000"/>
-              </a:lnSpc>
-              <a:spcBef>
-                <a:spcPts val="0"/>
-              </a:spcBef>
-              <a:spcAft>
-                <a:spcPts val="0"/>
-              </a:spcAft>
-              <a:buSzPts val="1100"/>
-              <a:buNone/>
-            </a:pPr>
-            <a:r>
-              <a:t/>
-            </a:r>
-            <a:endParaRPr/>
-          </a:p>
-        </p:txBody>
-      </p:sp>
-      <p:sp>
-        <p:nvSpPr>
-          <p:cNvPr id="177" name="Google Shape;177;p5:notes"/>
-          <p:cNvSpPr/>
-          <p:nvPr>
-            <p:ph idx="2" type="sldImg"/>
-          </p:nvPr>
-        </p:nvSpPr>
-        <p:spPr>
-          <a:xfrm>
-            <a:off x="2032400" y="514350"/>
-            <a:ext cx="8128400" cy="2571750"/>
-          </a:xfrm>
-          <a:custGeom>
-            <a:rect b="b" l="l" r="r" t="t"/>
-            <a:pathLst>
-              <a:path extrusionOk="0" h="120000" w="120000">
-                <a:moveTo>
-                  <a:pt x="0" y="0"/>
-                </a:moveTo>
-                <a:lnTo>
-                  <a:pt x="120000" y="0"/>
-                </a:lnTo>
-                <a:lnTo>
-                  <a:pt x="120000" y="120000"/>
-                </a:lnTo>
-                <a:lnTo>
-                  <a:pt x="0" y="120000"/>
-                </a:lnTo>
-                <a:close/>
-              </a:path>
-            </a:pathLst>
-          </a:custGeom>
-          <a:noFill/>
-          <a:ln cap="flat" cmpd="sng" w="9525">
-            <a:solidFill>
-              <a:srgbClr val="000000"/>
-            </a:solidFill>
-            <a:prstDash val="solid"/>
-            <a:round/>
-            <a:headEnd len="sm" w="sm" type="none"/>
-            <a:tailEnd len="sm" w="sm" type="none"/>
-          </a:ln>
-        </p:spPr>
       </p:sp>
     </p:spTree>
   </p:cSld>
@@ -25944,11 +25838,11 @@
 </file>
 
 <file path=ppt/slides/slide22.xml><?xml version="1.0" encoding="utf-8"?>
-<p:sld xmlns:a="http://schemas.openxmlformats.org/drawingml/2006/main" xmlns:r="http://schemas.openxmlformats.org/officeDocument/2006/relationships" xmlns:mc="http://schemas.openxmlformats.org/markup-compatibility/2006" xmlns:mv="urn:schemas-microsoft-com:mac:vml" xmlns:p="http://schemas.openxmlformats.org/presentationml/2006/main" xmlns:c="http://schemas.openxmlformats.org/drawingml/2006/chart" xmlns:dgm="http://schemas.openxmlformats.org/drawingml/2006/diagram" xmlns:o="urn:schemas-microsoft-com:office:office" xmlns:v="urn:schemas-microsoft-com:vml" xmlns:pvml="urn:schemas-microsoft-com:office:powerpoint" xmlns:com="http://schemas.openxmlformats.org/drawingml/2006/compatibility" xmlns:p14="http://schemas.microsoft.com/office/powerpoint/2010/main" xmlns:p15="http://schemas.microsoft.com/office/powerpoint/2012/main" xmlns:ahyp="http://schemas.microsoft.com/office/drawing/2018/hyperlinkcolor">
+<p:sld xmlns:a="http://schemas.openxmlformats.org/drawingml/2006/main" xmlns:p="http://schemas.openxmlformats.org/presentationml/2006/main" xmlns:r="http://schemas.openxmlformats.org/officeDocument/2006/relationships">
   <p:cSld>
     <p:spTree>
       <p:nvGrpSpPr>
-        <p:cNvPr id="178" name="Shape 178"/>
+        <p:cNvPr id="116" name="Shape 116"/>
         <p:cNvGrpSpPr/>
         <p:nvPr/>
       </p:nvGrpSpPr>
@@ -25962,22 +25856,59 @@
       </p:grpSpPr>
       <p:sp>
         <p:nvSpPr>
-          <p:cNvPr id="179" name="Google Shape;179;p5"/>
+          <p:cNvPr id="117" name="Google Shape;117;g3d09141108f_0_27"/>
           <p:cNvSpPr txBox="1"/>
-          <p:nvPr/>
+          <p:nvPr>
+            <p:ph type="title"/>
+          </p:nvPr>
         </p:nvSpPr>
         <p:spPr>
           <a:xfrm>
-            <a:off x="6096000" y="1594852"/>
-            <a:ext cx="5241925" cy="1063625"/>
+            <a:off x="838200" y="2766218"/>
+            <a:ext cx="10515600" cy="1325700"/>
           </a:xfrm>
           <a:prstGeom prst="rect">
             <a:avLst/>
           </a:prstGeom>
-          <a:noFill/>
-          <a:ln>
-            <a:noFill/>
-          </a:ln>
+        </p:spPr>
+        <p:txBody>
+          <a:bodyPr anchorCtr="0" anchor="ctr" bIns="45700" lIns="91425" spcFirstLastPara="1" rIns="91425" wrap="square" tIns="45700">
+            <a:noAutofit/>
+          </a:bodyPr>
+          <a:lstStyle/>
+          <a:p>
+            <a:pPr indent="0" lvl="0" marL="0" rtl="0" algn="l">
+              <a:spcBef>
+                <a:spcPts val="1000"/>
+              </a:spcBef>
+              <a:spcAft>
+                <a:spcPts val="0"/>
+              </a:spcAft>
+              <a:buNone/>
+            </a:pPr>
+            <a:r>
+              <a:rPr lang="ru-RU"/>
+              <a:t>Функции как значения</a:t>
+            </a:r>
+          </a:p>
+        </p:txBody>
+      </p:sp>
+      <p:sp>
+        <p:nvSpPr>
+          <p:cNvPr id="118" name="Google Shape;118;g3d09141108f_0_27"/>
+          <p:cNvSpPr txBox="1"/>
+          <p:nvPr>
+            <p:ph idx="12" type="sldNum"/>
+          </p:nvPr>
+        </p:nvSpPr>
+        <p:spPr>
+          <a:xfrm>
+            <a:off x="8610600" y="6356350"/>
+            <a:ext cx="2743200" cy="365100"/>
+          </a:xfrm>
+          <a:prstGeom prst="rect">
+            <a:avLst/>
+          </a:prstGeom>
         </p:spPr>
         <p:txBody>
           <a:bodyPr anchorCtr="0" anchor="t" bIns="45700" lIns="91425" spcFirstLastPara="1" rIns="91425" wrap="square" tIns="45700">
@@ -25985,61 +25916,69 @@
           </a:bodyPr>
           <a:lstStyle/>
           <a:p>
-            <a:pPr indent="0" lvl="0" marL="0" marR="0" rtl="0" algn="l">
-              <a:lnSpc>
-                <a:spcPct val="90000"/>
-              </a:lnSpc>
-              <a:spcBef>
-                <a:spcPts val="0"/>
-              </a:spcBef>
-              <a:spcAft>
-                <a:spcPts val="0"/>
-              </a:spcAft>
-              <a:buClr>
-                <a:schemeClr val="dk1"/>
-              </a:buClr>
-              <a:buSzPts val="4400"/>
+            <a:pPr indent="0" lvl="0" marL="0" rtl="0" algn="r">
+              <a:spcBef>
+                <a:spcPts val="0"/>
+              </a:spcBef>
+              <a:spcAft>
+                <a:spcPts val="0"/>
+              </a:spcAft>
+              <a:buClr>
+                <a:srgbClr val="000000"/>
+              </a:buClr>
+              <a:buSzPts val="1800"/>
               <a:buFont typeface="Arial"/>
               <a:buNone/>
             </a:pPr>
-            <a:r>
-              <a:rPr b="1" i="1" lang="ru-RU" sz="4400">
-                <a:solidFill>
-                  <a:schemeClr val="dk1"/>
-                </a:solidFill>
-              </a:rPr>
-              <a:t>Павел Аргентов</a:t>
-            </a:r>
-            <a:endParaRPr b="0" i="0" sz="2800" u="none" cap="none" strike="noStrike">
-              <a:solidFill>
-                <a:schemeClr val="dk1"/>
-              </a:solidFill>
-              <a:latin typeface="Calibri"/>
-              <a:ea typeface="Calibri"/>
-              <a:cs typeface="Calibri"/>
-              <a:sym typeface="Calibri"/>
-            </a:endParaRPr>
+            <a:fld id="{00000000-1234-1234-1234-123412341234}" type="slidenum">
+              <a:rPr lang="ru-RU"/>
+              <a:t>‹#›</a:t>
+            </a:fld>
+            <a:endParaRPr/>
           </a:p>
         </p:txBody>
       </p:sp>
+    </p:spTree>
+  </p:cSld>
+  <p:clrMapOvr>
+    <a:masterClrMapping/>
+  </p:clrMapOvr>
+</p:sld>
+</file>
+
+<file path=ppt/slides/slide23.xml><?xml version="1.0" encoding="utf-8"?>
+<p:sld xmlns:a="http://schemas.openxmlformats.org/drawingml/2006/main" xmlns:p="http://schemas.openxmlformats.org/presentationml/2006/main" xmlns:r="http://schemas.openxmlformats.org/officeDocument/2006/relationships">
+  <p:cSld>
+    <p:spTree>
+      <p:nvGrpSpPr>
+        <p:cNvPr id="122" name="Shape 122"/>
+        <p:cNvGrpSpPr/>
+        <p:nvPr/>
+      </p:nvGrpSpPr>
+      <p:grpSpPr>
+        <a:xfrm>
+          <a:off x="0" y="0"/>
+          <a:ext cx="0" cy="0"/>
+          <a:chOff x="0" y="0"/>
+          <a:chExt cx="0" cy="0"/>
+        </a:xfrm>
+      </p:grpSpPr>
       <p:sp>
         <p:nvSpPr>
-          <p:cNvPr id="180" name="Google Shape;180;p5"/>
+          <p:cNvPr id="123" name="Google Shape;123;g3d09141108f_0_33"/>
           <p:cNvSpPr txBox="1"/>
-          <p:nvPr/>
+          <p:nvPr>
+            <p:ph idx="12" type="sldNum"/>
+          </p:nvPr>
         </p:nvSpPr>
         <p:spPr>
           <a:xfrm>
-            <a:off x="6110607" y="3239501"/>
-            <a:ext cx="5241925" cy="2097882"/>
+            <a:off x="8610600" y="6356350"/>
+            <a:ext cx="2743200" cy="365100"/>
           </a:xfrm>
           <a:prstGeom prst="rect">
             <a:avLst/>
           </a:prstGeom>
-          <a:noFill/>
-          <a:ln>
-            <a:noFill/>
-          </a:ln>
         </p:spPr>
         <p:txBody>
           <a:bodyPr anchorCtr="0" anchor="t" bIns="45700" lIns="91425" spcFirstLastPara="1" rIns="91425" wrap="square" tIns="45700">
@@ -26047,144 +25986,3405 @@
           </a:bodyPr>
           <a:lstStyle/>
           <a:p>
-            <a:pPr indent="0" lvl="0" marL="0" marR="0" rtl="0" algn="l">
-              <a:lnSpc>
-                <a:spcPct val="90000"/>
-              </a:lnSpc>
-              <a:spcBef>
-                <a:spcPts val="1000"/>
-              </a:spcBef>
-              <a:spcAft>
-                <a:spcPts val="0"/>
-              </a:spcAft>
-              <a:buClr>
-                <a:schemeClr val="dk1"/>
-              </a:buClr>
-              <a:buSzPts val="2800"/>
+            <a:pPr indent="0" lvl="0" marL="0" rtl="0" algn="r">
+              <a:spcBef>
+                <a:spcPts val="0"/>
+              </a:spcBef>
+              <a:spcAft>
+                <a:spcPts val="0"/>
+              </a:spcAft>
+              <a:buClr>
+                <a:srgbClr val="000000"/>
+              </a:buClr>
+              <a:buSzPts val="1800"/>
               <a:buFont typeface="Arial"/>
               <a:buNone/>
             </a:pPr>
-            <a:r>
-              <a:rPr b="0" i="1" lang="ru-RU" sz="2800" u="none" cap="none" strike="noStrike">
-                <a:solidFill>
-                  <a:schemeClr val="dk1"/>
-                </a:solidFill>
-                <a:latin typeface="Arial"/>
-                <a:ea typeface="Arial"/>
-                <a:cs typeface="Arial"/>
-                <a:sym typeface="Arial"/>
-              </a:rPr>
-              <a:t>Tg: @</a:t>
-            </a:r>
-            <a:r>
-              <a:rPr i="1" lang="ru-RU" sz="2800">
-                <a:solidFill>
-                  <a:schemeClr val="dk1"/>
-                </a:solidFill>
-              </a:rPr>
-              <a:t>argent_smith</a:t>
-            </a:r>
-            <a:endParaRPr b="0" i="0" sz="1400" u="none" cap="none" strike="noStrike">
-              <a:solidFill>
-                <a:srgbClr val="000000"/>
-              </a:solidFill>
-              <a:latin typeface="Arial"/>
-              <a:ea typeface="Arial"/>
-              <a:cs typeface="Arial"/>
-              <a:sym typeface="Arial"/>
-            </a:endParaRPr>
-          </a:p>
-          <a:p>
-            <a:pPr indent="0" lvl="0" marL="0" marR="0" rtl="0" algn="l">
-              <a:lnSpc>
-                <a:spcPct val="90000"/>
-              </a:lnSpc>
-              <a:spcBef>
-                <a:spcPts val="1000"/>
-              </a:spcBef>
-              <a:spcAft>
-                <a:spcPts val="0"/>
-              </a:spcAft>
-              <a:buClr>
-                <a:schemeClr val="dk1"/>
-              </a:buClr>
-              <a:buSzPts val="2800"/>
-              <a:buFont typeface="Arial"/>
-              <a:buNone/>
-            </a:pPr>
-            <a:r>
-              <a:t/>
-            </a:r>
-            <a:endParaRPr b="0" i="1" sz="2800" u="none" cap="none" strike="noStrike">
-              <a:solidFill>
-                <a:schemeClr val="dk1"/>
-              </a:solidFill>
-              <a:latin typeface="Arial"/>
-              <a:ea typeface="Arial"/>
-              <a:cs typeface="Arial"/>
-              <a:sym typeface="Arial"/>
-            </a:endParaRPr>
-          </a:p>
-          <a:p>
-            <a:pPr indent="0" lvl="0" marL="0" marR="0" rtl="0" algn="l">
-              <a:lnSpc>
-                <a:spcPct val="90000"/>
-              </a:lnSpc>
-              <a:spcBef>
-                <a:spcPts val="1000"/>
-              </a:spcBef>
-              <a:spcAft>
-                <a:spcPts val="0"/>
-              </a:spcAft>
-              <a:buClr>
-                <a:schemeClr val="dk1"/>
-              </a:buClr>
-              <a:buSzPts val="2800"/>
-              <a:buFont typeface="Arial"/>
-              <a:buNone/>
-            </a:pPr>
-            <a:r>
-              <a:t/>
-            </a:r>
-            <a:endParaRPr b="0" i="1" sz="2800" u="none" cap="none" strike="noStrike">
-              <a:solidFill>
-                <a:schemeClr val="dk1"/>
-              </a:solidFill>
-              <a:latin typeface="Arial"/>
-              <a:ea typeface="Arial"/>
-              <a:cs typeface="Arial"/>
-              <a:sym typeface="Arial"/>
-            </a:endParaRPr>
+            <a:fld id="{00000000-1234-1234-1234-123412341234}" type="slidenum">
+              <a:rPr lang="ru-RU"/>
+              <a:t>‹#›</a:t>
+            </a:fld>
+            <a:endParaRPr/>
           </a:p>
         </p:txBody>
       </p:sp>
-      <p:pic>
-        <p:nvPicPr>
-          <p:cNvPr id="181" name="Google Shape;181;p5"/>
-          <p:cNvPicPr preferRelativeResize="0"/>
-          <p:nvPr/>
-        </p:nvPicPr>
-        <p:blipFill rotWithShape="1">
-          <a:blip r:embed="rId3">
-            <a:alphaModFix/>
-          </a:blip>
-          <a:srcRect b="0" l="0" r="0" t="0"/>
-          <a:stretch/>
-        </p:blipFill>
+      <p:sp>
+        <p:nvSpPr>
+          <p:cNvPr id="124" name="Google Shape;124;g3d09141108f_0_33"/>
+          <p:cNvSpPr txBox="1"/>
+          <p:nvPr>
+            <p:ph idx="1" type="body"/>
+          </p:nvPr>
+        </p:nvSpPr>
         <p:spPr>
           <a:xfrm>
-            <a:off x="567954" y="810796"/>
-            <a:ext cx="4857410" cy="4857410"/>
+            <a:off x="838198" y="543878"/>
+            <a:ext cx="10942500" cy="1219200"/>
           </a:xfrm>
           <a:prstGeom prst="rect">
             <a:avLst/>
           </a:prstGeom>
-          <a:noFill/>
-          <a:ln>
-            <a:noFill/>
-          </a:ln>
         </p:spPr>
-      </p:pic>
+        <p:txBody>
+          <a:bodyPr anchorCtr="0" anchor="ctr" bIns="45700" lIns="91425" spcFirstLastPara="1" rIns="91425" wrap="square" tIns="45700">
+            <a:noAutofit/>
+          </a:bodyPr>
+          <a:lstStyle/>
+          <a:p>
+            <a:pPr indent="0" lvl="0" marL="0" rtl="0" algn="l">
+              <a:spcBef>
+                <a:spcPts val="1000"/>
+              </a:spcBef>
+              <a:spcAft>
+                <a:spcPts val="0"/>
+              </a:spcAft>
+              <a:buNone/>
+            </a:pPr>
+            <a:r>
+              <a:rPr lang="ru-RU"/>
+              <a:t>Функции как значения</a:t>
+            </a:r>
+          </a:p>
+        </p:txBody>
+      </p:sp>
+      <p:sp>
+        <p:nvSpPr>
+          <p:cNvPr id="125" name="Google Shape;125;g3d09141108f_0_33"/>
+          <p:cNvSpPr txBox="1"/>
+          <p:nvPr>
+            <p:ph idx="2" type="body"/>
+          </p:nvPr>
+        </p:nvSpPr>
+        <p:spPr>
+          <a:xfrm>
+            <a:off x="838200" y="2170113"/>
+            <a:ext cx="10942500" cy="3254400"/>
+          </a:xfrm>
+          <a:prstGeom prst="rect">
+            <a:avLst/>
+          </a:prstGeom>
+        </p:spPr>
+        <p:txBody>
+          <a:bodyPr anchorCtr="0" anchor="t" bIns="45700" lIns="91425" spcFirstLastPara="1" rIns="91425" wrap="square" tIns="45700">
+            <a:noAutofit/>
+          </a:bodyPr>
+          <a:lstStyle/>
+          <a:p>
+            <a:pPr indent="-406400" lvl="0" marL="457200" rtl="0" algn="l">
+              <a:spcBef>
+                <a:spcPts val="1000"/>
+              </a:spcBef>
+              <a:spcAft>
+                <a:spcPts val="0"/>
+              </a:spcAft>
+              <a:buSzPts val="2800"/>
+            </a:pPr>
+            <a:endParaRPr/>
+            <a:r>
+              <a:t>Функция — </a:t>
+            </a:r>
+            <a:r>
+              <a:rPr b="1"/>
+              <a:t>first-class value</a:t>
+            </a:r>
+            <a:r>
+              <a:t>: передаётся аргументом, связывается с переменной, возвращается из функции</a:t>
+            </a:r>
+          </a:p>
+          <a:p>
+            <a:pPr indent="-406400" lvl="0" marL="457200" rtl="0" algn="l">
+              <a:spcBef>
+                <a:spcPts val="1000"/>
+              </a:spcBef>
+              <a:spcAft>
+                <a:spcPts val="0"/>
+              </a:spcAft>
+              <a:buSzPts val="2800"/>
+            </a:pPr>
+            <a:endParaRPr/>
+            <a:r>
+              <a:t>HOF — принимает или возвращает функцию:</a:t>
+            </a:r>
+            <a:br/>
+            <a:r>
+              <a:rPr b="1"/>
+              <a:t>map, filter, fold</a:t>
+            </a:r>
+          </a:p>
+          <a:p>
+            <a:pPr indent="-406400" lvl="0" marL="457200" rtl="0" algn="l">
+              <a:spcBef>
+                <a:spcPts val="1000"/>
+              </a:spcBef>
+              <a:spcAft>
+                <a:spcPts val="0"/>
+              </a:spcAft>
+              <a:buSzPts val="2800"/>
+            </a:pPr>
+            <a:endParaRPr/>
+            <a:r>
+              <a:t>Замыкание — захват лексического окружения</a:t>
+            </a:r>
+          </a:p>
+          <a:p>
+            <a:pPr indent="-406400" lvl="0" marL="457200" rtl="0" algn="l">
+              <a:spcBef>
+                <a:spcPts val="1000"/>
+              </a:spcBef>
+              <a:spcAft>
+                <a:spcPts val="0"/>
+              </a:spcAft>
+              <a:buSzPts val="2800"/>
+            </a:pPr>
+            <a:endParaRPr/>
+            <a:r>
+              <a:t>Каррирование — </a:t>
+            </a:r>
+            <a:r>
+              <a:rPr b="1"/>
+              <a:t>f(a, b) → f(a)(b)</a:t>
+            </a:r>
+          </a:p>
+        </p:txBody>
+      </p:sp>
+    </p:spTree>
+  </p:cSld>
+  <p:clrMapOvr>
+    <a:masterClrMapping/>
+  </p:clrMapOvr>
+</p:sld>
+</file>
+
+<file path=ppt/slides/slide24.xml><?xml version="1.0" encoding="utf-8"?>
+<p:sld xmlns:a="http://schemas.openxmlformats.org/drawingml/2006/main" xmlns:p="http://schemas.openxmlformats.org/presentationml/2006/main" xmlns:r="http://schemas.openxmlformats.org/officeDocument/2006/relationships">
+  <p:cSld>
+    <p:spTree>
+      <p:nvGrpSpPr>
+        <p:cNvPr id="136" name="Shape 136"/>
+        <p:cNvGrpSpPr/>
+        <p:nvPr/>
+      </p:nvGrpSpPr>
+      <p:grpSpPr>
+        <a:xfrm>
+          <a:off x="0" y="0"/>
+          <a:ext cx="0" cy="0"/>
+          <a:chOff x="0" y="0"/>
+          <a:chExt cx="0" cy="0"/>
+        </a:xfrm>
+      </p:grpSpPr>
+      <p:sp>
+        <p:nvSpPr>
+          <p:cNvPr id="137" name="Google Shape;137;g3d09141108f_0_73"/>
+          <p:cNvSpPr txBox="1"/>
+          <p:nvPr>
+            <p:ph idx="12" type="sldNum"/>
+          </p:nvPr>
+        </p:nvSpPr>
+        <p:spPr>
+          <a:xfrm>
+            <a:off x="8610600" y="6356350"/>
+            <a:ext cx="2743200" cy="365100"/>
+          </a:xfrm>
+          <a:prstGeom prst="rect">
+            <a:avLst/>
+          </a:prstGeom>
+        </p:spPr>
+        <p:txBody>
+          <a:bodyPr anchorCtr="0" anchor="t" bIns="45700" lIns="91425" spcFirstLastPara="1" rIns="91425" wrap="square" tIns="45700">
+            <a:noAutofit/>
+          </a:bodyPr>
+          <a:lstStyle/>
+          <a:p>
+            <a:pPr indent="0" lvl="0" marL="0" rtl="0" algn="r">
+              <a:spcBef>
+                <a:spcPts val="0"/>
+              </a:spcBef>
+              <a:spcAft>
+                <a:spcPts val="0"/>
+              </a:spcAft>
+              <a:buNone/>
+            </a:pPr>
+            <a:fld id="{00000000-1234-1234-1234-123412341234}" type="slidenum">
+              <a:rPr lang="ru-RU"/>
+              <a:t>‹#›</a:t>
+            </a:fld>
+            <a:endParaRPr/>
+          </a:p>
+        </p:txBody>
+      </p:sp>
+      <p:sp>
+        <p:nvSpPr>
+          <p:cNvPr id="138" name="Google Shape;138;g3d09141108f_0_73"/>
+          <p:cNvSpPr txBox="1"/>
+          <p:nvPr>
+            <p:ph idx="1" type="body"/>
+          </p:nvPr>
+        </p:nvSpPr>
+        <p:spPr>
+          <a:xfrm>
+            <a:off x="838198" y="543878"/>
+            <a:ext cx="10942500" cy="1219200"/>
+          </a:xfrm>
+          <a:prstGeom prst="rect">
+            <a:avLst/>
+          </a:prstGeom>
+        </p:spPr>
+        <p:txBody>
+          <a:bodyPr anchorCtr="0" anchor="ctr" bIns="45700" lIns="91425" spcFirstLastPara="1" rIns="91425" wrap="square" tIns="45700">
+            <a:noAutofit/>
+          </a:bodyPr>
+          <a:lstStyle/>
+          <a:p>
+            <a:pPr indent="0" lvl="0" marL="0" rtl="0" algn="l">
+              <a:spcBef>
+                <a:spcPts val="1000"/>
+              </a:spcBef>
+              <a:spcAft>
+                <a:spcPts val="0"/>
+              </a:spcAft>
+              <a:buNone/>
+            </a:pPr>
+            <a:r>
+              <a:rPr lang="ru-RU"/>
+              <a:t>Функции как значения: задача</a:t>
+            </a:r>
+          </a:p>
+        </p:txBody>
+      </p:sp>
+      <p:sp>
+        <p:nvSpPr>
+          <p:cNvPr id="139" name="Google Shape;139;g3d09141108f_0_73"/>
+          <p:cNvSpPr txBox="1"/>
+          <p:nvPr>
+            <p:ph idx="2" type="body"/>
+          </p:nvPr>
+        </p:nvSpPr>
+        <p:spPr>
+          <a:xfrm>
+            <a:off x="838200" y="2170113"/>
+            <a:ext cx="10942500" cy="3254400"/>
+          </a:xfrm>
+          <a:prstGeom prst="rect">
+            <a:avLst/>
+          </a:prstGeom>
+        </p:spPr>
+        <p:txBody>
+          <a:bodyPr anchorCtr="0" anchor="t" bIns="45700" lIns="91425" spcFirstLastPara="1" rIns="91425" wrap="square" tIns="45700">
+            <a:noAutofit/>
+          </a:bodyPr>
+          <a:lstStyle/>
+          <a:p>
+            <a:pPr indent="0" lvl="0" marL="0" rtl="0" algn="l">
+              <a:spcBef>
+                <a:spcPts val="1000"/>
+              </a:spcBef>
+              <a:spcAft>
+                <a:spcPts val="0"/>
+              </a:spcAft>
+              <a:buNone/>
+            </a:pPr>
+            <a:r>
+              <a:rPr lang="ru-RU"/>
+              <a:t>Создать умножитель с коэффициентом и применить к списку.</a:t>
+            </a:r>
+          </a:p>
+        </p:txBody>
+      </p:sp>
+    </p:spTree>
+  </p:cSld>
+  <p:clrMapOvr>
+    <a:masterClrMapping/>
+  </p:clrMapOvr>
+</p:sld>
+</file>
+
+<file path=ppt/slides/slide25.xml><?xml version="1.0" encoding="utf-8"?>
+<p:sld xmlns:a="http://schemas.openxmlformats.org/drawingml/2006/main" xmlns:p="http://schemas.openxmlformats.org/presentationml/2006/main" xmlns:r="http://schemas.openxmlformats.org/officeDocument/2006/relationships">
+  <p:cSld>
+    <p:spTree>
+      <p:nvGrpSpPr>
+        <p:cNvPr id="150" name="Shape 150"/>
+        <p:cNvGrpSpPr/>
+        <p:nvPr/>
+      </p:nvGrpSpPr>
+      <p:grpSpPr>
+        <a:xfrm>
+          <a:off x="0" y="0"/>
+          <a:ext cx="0" cy="0"/>
+          <a:chOff x="0" y="0"/>
+          <a:chExt cx="0" cy="0"/>
+        </a:xfrm>
+      </p:grpSpPr>
+      <p:sp>
+        <p:nvSpPr>
+          <p:cNvPr id="151" name="Google Shape;151;g3d09141108f_0_54"/>
+          <p:cNvSpPr txBox="1"/>
+          <p:nvPr>
+            <p:ph idx="12" type="sldNum"/>
+          </p:nvPr>
+        </p:nvSpPr>
+        <p:spPr>
+          <a:xfrm>
+            <a:off x="8610600" y="6356350"/>
+            <a:ext cx="2743200" cy="365100"/>
+          </a:xfrm>
+          <a:prstGeom prst="rect">
+            <a:avLst/>
+          </a:prstGeom>
+        </p:spPr>
+        <p:txBody>
+          <a:bodyPr anchorCtr="0" anchor="t" bIns="45700" lIns="91425" spcFirstLastPara="1" rIns="91425" wrap="square" tIns="45700">
+            <a:noAutofit/>
+          </a:bodyPr>
+          <a:lstStyle/>
+          <a:p>
+            <a:pPr indent="0" lvl="0" marL="0" rtl="0" algn="r">
+              <a:spcBef>
+                <a:spcPts val="0"/>
+              </a:spcBef>
+              <a:spcAft>
+                <a:spcPts val="0"/>
+              </a:spcAft>
+              <a:buNone/>
+            </a:pPr>
+            <a:fld id="{00000000-1234-1234-1234-123412341234}" type="slidenum">
+              <a:rPr lang="ru-RU"/>
+              <a:t>‹#›</a:t>
+            </a:fld>
+            <a:endParaRPr/>
+          </a:p>
+        </p:txBody>
+      </p:sp>
+      <p:sp>
+        <p:nvSpPr>
+          <p:cNvPr id="152" name="Google Shape;152;g3d09141108f_0_54"/>
+          <p:cNvSpPr txBox="1"/>
+          <p:nvPr>
+            <p:ph idx="1" type="body"/>
+          </p:nvPr>
+        </p:nvSpPr>
+        <p:spPr>
+          <a:xfrm>
+            <a:off x="838198" y="543878"/>
+            <a:ext cx="10942500" cy="1219200"/>
+          </a:xfrm>
+          <a:prstGeom prst="rect">
+            <a:avLst/>
+          </a:prstGeom>
+        </p:spPr>
+        <p:txBody>
+          <a:bodyPr anchorCtr="0" anchor="ctr" bIns="45700" lIns="91425" spcFirstLastPara="1" rIns="91425" wrap="square" tIns="45700">
+            <a:noAutofit/>
+          </a:bodyPr>
+          <a:lstStyle/>
+          <a:p>
+            <a:pPr indent="0" lvl="0" marL="0" rtl="0" algn="l">
+              <a:spcBef>
+                <a:spcPts val="1000"/>
+              </a:spcBef>
+              <a:spcAft>
+                <a:spcPts val="0"/>
+              </a:spcAft>
+              <a:buNone/>
+            </a:pPr>
+            <a:r>
+              <a:rPr lang="ru-RU"/>
+              <a:t>Функции как значения: OCaml</a:t>
+            </a:r>
+          </a:p>
+        </p:txBody>
+      </p:sp>
+      <p:sp>
+        <p:nvSpPr>
+          <p:cNvPr id="153" name="Google Shape;153;g3d09141108f_0_54"/>
+          <p:cNvSpPr txBox="1"/>
+          <p:nvPr>
+            <p:ph idx="2" type="body"/>
+          </p:nvPr>
+        </p:nvSpPr>
+        <p:spPr>
+          <a:xfrm>
+            <a:off x="1138200" y="1763063"/>
+            <a:ext cx="10642500" cy="3254400"/>
+          </a:xfrm>
+          <a:prstGeom prst="rect">
+            <a:avLst/>
+          </a:prstGeom>
+        </p:spPr>
+        <p:txBody>
+          <a:bodyPr anchorCtr="0" anchor="t" bIns="45700" lIns="91425" spcFirstLastPara="1" rIns="91425" wrap="square" tIns="45700">
+            <a:noAutofit/>
+          </a:bodyPr>
+          <a:lstStyle/>
+          <a:p>
+            <a:pPr indent="0" lvl="0" marL="0" rtl="0" algn="l">
+              <a:spcBef>
+                <a:spcPts val="1000"/>
+              </a:spcBef>
+              <a:spcAft>
+                <a:spcPts val="0"/>
+              </a:spcAft>
+              <a:buNone/>
+            </a:pPr>
+            <a:endParaRPr>
+              <a:latin typeface="JetBrains Mono"/>
+              <a:ea typeface="JetBrains Mono"/>
+              <a:cs typeface="JetBrains Mono"/>
+              <a:sym typeface="JetBrains Mono"/>
+            </a:endParaRPr>
+            <a:r>
+              <a:rPr lang="ru-RU" altLang="en-US">
+                <a:latin typeface="JetBrains Mono"/>
+                <a:ea typeface="JetBrains Mono"/>
+                <a:cs typeface="JetBrains Mono"/>
+                <a:sym typeface="JetBrains Mono"/>
+                <a:solidFill>
+                  <a:srgbClr val="95a5a6"/>
+                </a:solidFill>
+              </a:rPr>
+              <a:t>(* каррирование по умолчанию *)</a:t>
+            </a:r>
+          </a:p>
+          <a:p>
+            <a:pPr indent="0" lvl="0" marL="0" rtl="0" algn="l">
+              <a:spcBef>
+                <a:spcPts val="1000"/>
+              </a:spcBef>
+              <a:spcAft>
+                <a:spcPts val="0"/>
+              </a:spcAft>
+              <a:buNone/>
+            </a:pPr>
+            <a:endParaRPr>
+              <a:latin typeface="JetBrains Mono"/>
+              <a:ea typeface="JetBrains Mono"/>
+              <a:cs typeface="JetBrains Mono"/>
+              <a:sym typeface="JetBrains Mono"/>
+            </a:endParaRPr>
+            <a:r>
+              <a:rPr lang="ru-RU" altLang="en-US">
+                <a:latin typeface="JetBrains Mono"/>
+                <a:ea typeface="JetBrains Mono"/>
+                <a:cs typeface="JetBrains Mono"/>
+                <a:sym typeface="JetBrains Mono"/>
+                <a:solidFill>
+                  <a:srgbClr val="c0392b"/>
+                </a:solidFill>
+              </a:rPr>
+              <a:t>let</a:t>
+            </a:r>
+            <a:r>
+              <a:rPr lang="ru-RU" altLang="en-US">
+                <a:latin typeface="JetBrains Mono"/>
+                <a:ea typeface="JetBrains Mono"/>
+                <a:cs typeface="JetBrains Mono"/>
+                <a:sym typeface="JetBrains Mono"/>
+                <a:solidFill>
+                  <a:srgbClr val="1a1a1a"/>
+                </a:solidFill>
+              </a:rPr>
+              <a:t> multiply factor x = x * factor</a:t>
+            </a:r>
+          </a:p>
+          <a:p>
+            <a:pPr indent="0" lvl="0" marL="0" rtl="0" algn="l">
+              <a:spcBef>
+                <a:spcPts val="1000"/>
+              </a:spcBef>
+              <a:spcAft>
+                <a:spcPts val="0"/>
+              </a:spcAft>
+              <a:buNone/>
+            </a:pPr>
+            <a:endParaRPr>
+              <a:latin typeface="JetBrains Mono"/>
+              <a:ea typeface="JetBrains Mono"/>
+              <a:cs typeface="JetBrains Mono"/>
+              <a:sym typeface="JetBrains Mono"/>
+            </a:endParaRPr>
+            <a:r>
+              <a:rPr lang="ru-RU" altLang="en-US">
+                <a:latin typeface="JetBrains Mono"/>
+                <a:ea typeface="JetBrains Mono"/>
+                <a:cs typeface="JetBrains Mono"/>
+                <a:sym typeface="JetBrains Mono"/>
+                <a:solidFill>
+                  <a:srgbClr val="c0392b"/>
+                </a:solidFill>
+              </a:rPr>
+              <a:t>let</a:t>
+            </a:r>
+            <a:r>
+              <a:rPr lang="ru-RU" altLang="en-US">
+                <a:latin typeface="JetBrains Mono"/>
+                <a:ea typeface="JetBrains Mono"/>
+                <a:cs typeface="JetBrains Mono"/>
+                <a:sym typeface="JetBrains Mono"/>
+                <a:solidFill>
+                  <a:srgbClr val="1a1a1a"/>
+                </a:solidFill>
+              </a:rPr>
+              <a:t> triple = multiply </a:t>
+            </a:r>
+            <a:r>
+              <a:rPr lang="ru-RU" altLang="en-US">
+                <a:latin typeface="JetBrains Mono"/>
+                <a:ea typeface="JetBrains Mono"/>
+                <a:cs typeface="JetBrains Mono"/>
+                <a:sym typeface="JetBrains Mono"/>
+                <a:solidFill>
+                  <a:srgbClr val="7f8c8d"/>
+                </a:solidFill>
+              </a:rPr>
+              <a:t>3</a:t>
+            </a:r>
+          </a:p>
+          <a:p>
+            <a:pPr indent="0" lvl="0" marL="0" rtl="0" algn="l">
+              <a:spcBef>
+                <a:spcPts val="1000"/>
+              </a:spcBef>
+              <a:spcAft>
+                <a:spcPts val="0"/>
+              </a:spcAft>
+              <a:buNone/>
+            </a:pPr>
+            <a:endParaRPr>
+              <a:latin typeface="JetBrains Mono"/>
+              <a:ea typeface="JetBrains Mono"/>
+              <a:cs typeface="JetBrains Mono"/>
+              <a:sym typeface="JetBrains Mono"/>
+            </a:endParaRPr>
+            <a:r>
+              <a:rPr lang="ru-RU" altLang="en-US">
+                <a:latin typeface="JetBrains Mono"/>
+                <a:ea typeface="JetBrains Mono"/>
+                <a:cs typeface="JetBrains Mono"/>
+                <a:sym typeface="JetBrains Mono"/>
+                <a:solidFill>
+                  <a:srgbClr val="95a5a6"/>
+                </a:solidFill>
+              </a:rPr>
+              <a:t>(* замыкание *)</a:t>
+            </a:r>
+          </a:p>
+          <a:p>
+            <a:pPr indent="0" lvl="0" marL="0" rtl="0" algn="l">
+              <a:spcBef>
+                <a:spcPts val="1000"/>
+              </a:spcBef>
+              <a:spcAft>
+                <a:spcPts val="0"/>
+              </a:spcAft>
+              <a:buNone/>
+            </a:pPr>
+            <a:endParaRPr>
+              <a:latin typeface="JetBrains Mono"/>
+              <a:ea typeface="JetBrains Mono"/>
+              <a:cs typeface="JetBrains Mono"/>
+              <a:sym typeface="JetBrains Mono"/>
+            </a:endParaRPr>
+            <a:r>
+              <a:rPr lang="ru-RU" altLang="en-US">
+                <a:latin typeface="JetBrains Mono"/>
+                <a:ea typeface="JetBrains Mono"/>
+                <a:cs typeface="JetBrains Mono"/>
+                <a:sym typeface="JetBrains Mono"/>
+                <a:solidFill>
+                  <a:srgbClr val="c0392b"/>
+                </a:solidFill>
+              </a:rPr>
+              <a:t>let</a:t>
+            </a:r>
+            <a:r>
+              <a:rPr lang="ru-RU" altLang="en-US">
+                <a:latin typeface="JetBrains Mono"/>
+                <a:ea typeface="JetBrains Mono"/>
+                <a:cs typeface="JetBrains Mono"/>
+                <a:sym typeface="JetBrains Mono"/>
+                <a:solidFill>
+                  <a:srgbClr val="1a1a1a"/>
+                </a:solidFill>
+              </a:rPr>
+              <a:t> make_adder base = </a:t>
+            </a:r>
+            <a:r>
+              <a:rPr lang="ru-RU" altLang="en-US">
+                <a:latin typeface="JetBrains Mono"/>
+                <a:ea typeface="JetBrains Mono"/>
+                <a:cs typeface="JetBrains Mono"/>
+                <a:sym typeface="JetBrains Mono"/>
+                <a:solidFill>
+                  <a:srgbClr val="c0392b"/>
+                </a:solidFill>
+              </a:rPr>
+              <a:t>fun</a:t>
+            </a:r>
+            <a:r>
+              <a:rPr lang="ru-RU" altLang="en-US">
+                <a:latin typeface="JetBrains Mono"/>
+                <a:ea typeface="JetBrains Mono"/>
+                <a:cs typeface="JetBrains Mono"/>
+                <a:sym typeface="JetBrains Mono"/>
+                <a:solidFill>
+                  <a:srgbClr val="1a1a1a"/>
+                </a:solidFill>
+              </a:rPr>
+              <a:t> x -&gt; base + x</a:t>
+            </a:r>
+          </a:p>
+          <a:p>
+            <a:pPr indent="0" lvl="0" marL="0" rtl="0" algn="l">
+              <a:spcBef>
+                <a:spcPts val="1000"/>
+              </a:spcBef>
+              <a:spcAft>
+                <a:spcPts val="0"/>
+              </a:spcAft>
+              <a:buNone/>
+            </a:pPr>
+            <a:endParaRPr>
+              <a:latin typeface="JetBrains Mono"/>
+              <a:ea typeface="JetBrains Mono"/>
+              <a:cs typeface="JetBrains Mono"/>
+              <a:sym typeface="JetBrains Mono"/>
+            </a:endParaRPr>
+            <a:r>
+              <a:rPr lang="ru-RU" altLang="en-US">
+                <a:latin typeface="JetBrains Mono"/>
+                <a:ea typeface="JetBrains Mono"/>
+                <a:cs typeface="JetBrains Mono"/>
+                <a:sym typeface="JetBrains Mono"/>
+                <a:solidFill>
+                  <a:srgbClr val="c0392b"/>
+                </a:solidFill>
+              </a:rPr>
+              <a:t>let</a:t>
+            </a:r>
+            <a:r>
+              <a:rPr lang="ru-RU" altLang="en-US">
+                <a:latin typeface="JetBrains Mono"/>
+                <a:ea typeface="JetBrains Mono"/>
+                <a:cs typeface="JetBrains Mono"/>
+                <a:sym typeface="JetBrains Mono"/>
+                <a:solidFill>
+                  <a:srgbClr val="1a1a1a"/>
+                </a:solidFill>
+              </a:rPr>
+              <a:t> add10 = make_adder </a:t>
+            </a:r>
+            <a:r>
+              <a:rPr lang="ru-RU" altLang="en-US">
+                <a:latin typeface="JetBrains Mono"/>
+                <a:ea typeface="JetBrains Mono"/>
+                <a:cs typeface="JetBrains Mono"/>
+                <a:sym typeface="JetBrains Mono"/>
+                <a:solidFill>
+                  <a:srgbClr val="7f8c8d"/>
+                </a:solidFill>
+              </a:rPr>
+              <a:t>10</a:t>
+            </a:r>
+          </a:p>
+          <a:p>
+            <a:pPr indent="0" lvl="0" marL="0" rtl="0" algn="l">
+              <a:spcBef>
+                <a:spcPts val="1000"/>
+              </a:spcBef>
+              <a:spcAft>
+                <a:spcPts val="0"/>
+              </a:spcAft>
+              <a:buNone/>
+            </a:pPr>
+            <a:endParaRPr>
+              <a:latin typeface="JetBrains Mono"/>
+              <a:ea typeface="JetBrains Mono"/>
+              <a:cs typeface="JetBrains Mono"/>
+              <a:sym typeface="JetBrains Mono"/>
+            </a:endParaRPr>
+            <a:r>
+              <a:rPr lang="ru-RU" altLang="en-US">
+                <a:latin typeface="JetBrains Mono"/>
+                <a:ea typeface="JetBrains Mono"/>
+                <a:cs typeface="JetBrains Mono"/>
+                <a:sym typeface="JetBrains Mono"/>
+                <a:solidFill>
+                  <a:srgbClr val="95a5a6"/>
+                </a:solidFill>
+              </a:rPr>
+              <a:t>(* HOF *)</a:t>
+            </a:r>
+          </a:p>
+          <a:p>
+            <a:pPr indent="0" lvl="0" marL="0" rtl="0" algn="l">
+              <a:spcBef>
+                <a:spcPts val="1000"/>
+              </a:spcBef>
+              <a:spcAft>
+                <a:spcPts val="0"/>
+              </a:spcAft>
+              <a:buNone/>
+            </a:pPr>
+            <a:endParaRPr>
+              <a:latin typeface="JetBrains Mono"/>
+              <a:ea typeface="JetBrains Mono"/>
+              <a:cs typeface="JetBrains Mono"/>
+              <a:sym typeface="JetBrains Mono"/>
+            </a:endParaRPr>
+            <a:r>
+              <a:rPr lang="ru-RU" altLang="en-US">
+                <a:latin typeface="JetBrains Mono"/>
+                <a:ea typeface="JetBrains Mono"/>
+                <a:cs typeface="JetBrains Mono"/>
+                <a:sym typeface="JetBrains Mono"/>
+                <a:solidFill>
+                  <a:srgbClr val="c0392b"/>
+                </a:solidFill>
+              </a:rPr>
+              <a:t>let</a:t>
+            </a:r>
+            <a:r>
+              <a:rPr lang="ru-RU" altLang="en-US">
+                <a:latin typeface="JetBrains Mono"/>
+                <a:ea typeface="JetBrains Mono"/>
+                <a:cs typeface="JetBrains Mono"/>
+                <a:sym typeface="JetBrains Mono"/>
+                <a:solidFill>
+                  <a:srgbClr val="1a1a1a"/>
+                </a:solidFill>
+              </a:rPr>
+              <a:t> result = </a:t>
+            </a:r>
+            <a:r>
+              <a:rPr lang="ru-RU" altLang="en-US">
+                <a:latin typeface="JetBrains Mono"/>
+                <a:ea typeface="JetBrains Mono"/>
+                <a:cs typeface="JetBrains Mono"/>
+                <a:sym typeface="JetBrains Mono"/>
+                <a:solidFill>
+                  <a:srgbClr val="2c6fa6"/>
+                </a:solidFill>
+              </a:rPr>
+              <a:t>List</a:t>
+            </a:r>
+            <a:r>
+              <a:rPr lang="ru-RU" altLang="en-US">
+                <a:latin typeface="JetBrains Mono"/>
+                <a:ea typeface="JetBrains Mono"/>
+                <a:cs typeface="JetBrains Mono"/>
+                <a:sym typeface="JetBrains Mono"/>
+                <a:solidFill>
+                  <a:srgbClr val="1a1a1a"/>
+                </a:solidFill>
+              </a:rPr>
+              <a:t>.map triple [</a:t>
+            </a:r>
+            <a:r>
+              <a:rPr lang="ru-RU" altLang="en-US">
+                <a:latin typeface="JetBrains Mono"/>
+                <a:ea typeface="JetBrains Mono"/>
+                <a:cs typeface="JetBrains Mono"/>
+                <a:sym typeface="JetBrains Mono"/>
+                <a:solidFill>
+                  <a:srgbClr val="7f8c8d"/>
+                </a:solidFill>
+              </a:rPr>
+              <a:t>1</a:t>
+            </a:r>
+            <a:r>
+              <a:rPr lang="ru-RU" altLang="en-US">
+                <a:latin typeface="JetBrains Mono"/>
+                <a:ea typeface="JetBrains Mono"/>
+                <a:cs typeface="JetBrains Mono"/>
+                <a:sym typeface="JetBrains Mono"/>
+                <a:solidFill>
+                  <a:srgbClr val="1a1a1a"/>
+                </a:solidFill>
+              </a:rPr>
+              <a:t>; </a:t>
+            </a:r>
+            <a:r>
+              <a:rPr lang="ru-RU" altLang="en-US">
+                <a:latin typeface="JetBrains Mono"/>
+                <a:ea typeface="JetBrains Mono"/>
+                <a:cs typeface="JetBrains Mono"/>
+                <a:sym typeface="JetBrains Mono"/>
+                <a:solidFill>
+                  <a:srgbClr val="7f8c8d"/>
+                </a:solidFill>
+              </a:rPr>
+              <a:t>2</a:t>
+            </a:r>
+            <a:r>
+              <a:rPr lang="ru-RU" altLang="en-US">
+                <a:latin typeface="JetBrains Mono"/>
+                <a:ea typeface="JetBrains Mono"/>
+                <a:cs typeface="JetBrains Mono"/>
+                <a:sym typeface="JetBrains Mono"/>
+                <a:solidFill>
+                  <a:srgbClr val="1a1a1a"/>
+                </a:solidFill>
+              </a:rPr>
+              <a:t>; </a:t>
+            </a:r>
+            <a:r>
+              <a:rPr lang="ru-RU" altLang="en-US">
+                <a:latin typeface="JetBrains Mono"/>
+                <a:ea typeface="JetBrains Mono"/>
+                <a:cs typeface="JetBrains Mono"/>
+                <a:sym typeface="JetBrains Mono"/>
+                <a:solidFill>
+                  <a:srgbClr val="7f8c8d"/>
+                </a:solidFill>
+              </a:rPr>
+              <a:t>3</a:t>
+            </a:r>
+            <a:r>
+              <a:rPr lang="ru-RU" altLang="en-US">
+                <a:latin typeface="JetBrains Mono"/>
+                <a:ea typeface="JetBrains Mono"/>
+                <a:cs typeface="JetBrains Mono"/>
+                <a:sym typeface="JetBrains Mono"/>
+                <a:solidFill>
+                  <a:srgbClr val="1a1a1a"/>
+                </a:solidFill>
+              </a:rPr>
+              <a:t>; </a:t>
+            </a:r>
+            <a:r>
+              <a:rPr lang="ru-RU" altLang="en-US">
+                <a:latin typeface="JetBrains Mono"/>
+                <a:ea typeface="JetBrains Mono"/>
+                <a:cs typeface="JetBrains Mono"/>
+                <a:sym typeface="JetBrains Mono"/>
+                <a:solidFill>
+                  <a:srgbClr val="7f8c8d"/>
+                </a:solidFill>
+              </a:rPr>
+              <a:t>4</a:t>
+            </a:r>
+            <a:r>
+              <a:rPr lang="ru-RU" altLang="en-US">
+                <a:latin typeface="JetBrains Mono"/>
+                <a:ea typeface="JetBrains Mono"/>
+                <a:cs typeface="JetBrains Mono"/>
+                <a:sym typeface="JetBrains Mono"/>
+                <a:solidFill>
+                  <a:srgbClr val="1a1a1a"/>
+                </a:solidFill>
+              </a:rPr>
+              <a:t>; </a:t>
+            </a:r>
+            <a:r>
+              <a:rPr lang="ru-RU" altLang="en-US">
+                <a:latin typeface="JetBrains Mono"/>
+                <a:ea typeface="JetBrains Mono"/>
+                <a:cs typeface="JetBrains Mono"/>
+                <a:sym typeface="JetBrains Mono"/>
+                <a:solidFill>
+                  <a:srgbClr val="7f8c8d"/>
+                </a:solidFill>
+              </a:rPr>
+              <a:t>5</a:t>
+            </a:r>
+            <a:r>
+              <a:rPr lang="ru-RU" altLang="en-US">
+                <a:latin typeface="JetBrains Mono"/>
+                <a:ea typeface="JetBrains Mono"/>
+                <a:cs typeface="JetBrains Mono"/>
+                <a:sym typeface="JetBrains Mono"/>
+                <a:solidFill>
+                  <a:srgbClr val="1a1a1a"/>
+                </a:solidFill>
+              </a:rPr>
+              <a:t>]</a:t>
+            </a:r>
+          </a:p>
+        </p:txBody>
+      </p:sp>
+    </p:spTree>
+  </p:cSld>
+  <p:clrMapOvr>
+    <a:masterClrMapping/>
+  </p:clrMapOvr>
+</p:sld>
+</file>
+
+<file path=ppt/slides/slide26.xml><?xml version="1.0" encoding="utf-8"?>
+<p:sld xmlns:a="http://schemas.openxmlformats.org/drawingml/2006/main" xmlns:p="http://schemas.openxmlformats.org/presentationml/2006/main" xmlns:r="http://schemas.openxmlformats.org/officeDocument/2006/relationships">
+  <p:cSld>
+    <p:spTree>
+      <p:nvGrpSpPr>
+        <p:cNvPr id="150" name="Shape 150"/>
+        <p:cNvGrpSpPr/>
+        <p:nvPr/>
+      </p:nvGrpSpPr>
+      <p:grpSpPr>
+        <a:xfrm>
+          <a:off x="0" y="0"/>
+          <a:ext cx="0" cy="0"/>
+          <a:chOff x="0" y="0"/>
+          <a:chExt cx="0" cy="0"/>
+        </a:xfrm>
+      </p:grpSpPr>
+      <p:sp>
+        <p:nvSpPr>
+          <p:cNvPr id="151" name="Google Shape;151;g3d09141108f_0_54"/>
+          <p:cNvSpPr txBox="1"/>
+          <p:nvPr>
+            <p:ph idx="12" type="sldNum"/>
+          </p:nvPr>
+        </p:nvSpPr>
+        <p:spPr>
+          <a:xfrm>
+            <a:off x="8610600" y="6356350"/>
+            <a:ext cx="2743200" cy="365100"/>
+          </a:xfrm>
+          <a:prstGeom prst="rect">
+            <a:avLst/>
+          </a:prstGeom>
+        </p:spPr>
+        <p:txBody>
+          <a:bodyPr anchorCtr="0" anchor="t" bIns="45700" lIns="91425" spcFirstLastPara="1" rIns="91425" wrap="square" tIns="45700">
+            <a:noAutofit/>
+          </a:bodyPr>
+          <a:lstStyle/>
+          <a:p>
+            <a:pPr indent="0" lvl="0" marL="0" rtl="0" algn="r">
+              <a:spcBef>
+                <a:spcPts val="0"/>
+              </a:spcBef>
+              <a:spcAft>
+                <a:spcPts val="0"/>
+              </a:spcAft>
+              <a:buNone/>
+            </a:pPr>
+            <a:fld id="{00000000-1234-1234-1234-123412341234}" type="slidenum">
+              <a:rPr lang="ru-RU"/>
+              <a:t>‹#›</a:t>
+            </a:fld>
+            <a:endParaRPr/>
+          </a:p>
+        </p:txBody>
+      </p:sp>
+      <p:sp>
+        <p:nvSpPr>
+          <p:cNvPr id="152" name="Google Shape;152;g3d09141108f_0_54"/>
+          <p:cNvSpPr txBox="1"/>
+          <p:nvPr>
+            <p:ph idx="1" type="body"/>
+          </p:nvPr>
+        </p:nvSpPr>
+        <p:spPr>
+          <a:xfrm>
+            <a:off x="838198" y="543878"/>
+            <a:ext cx="10942500" cy="1219200"/>
+          </a:xfrm>
+          <a:prstGeom prst="rect">
+            <a:avLst/>
+          </a:prstGeom>
+        </p:spPr>
+        <p:txBody>
+          <a:bodyPr anchorCtr="0" anchor="ctr" bIns="45700" lIns="91425" spcFirstLastPara="1" rIns="91425" wrap="square" tIns="45700">
+            <a:noAutofit/>
+          </a:bodyPr>
+          <a:lstStyle/>
+          <a:p>
+            <a:pPr indent="0" lvl="0" marL="0" rtl="0" algn="l">
+              <a:spcBef>
+                <a:spcPts val="1000"/>
+              </a:spcBef>
+              <a:spcAft>
+                <a:spcPts val="0"/>
+              </a:spcAft>
+              <a:buNone/>
+            </a:pPr>
+            <a:r>
+              <a:rPr lang="ru-RU"/>
+              <a:t>Функции как значения: Scala</a:t>
+            </a:r>
+          </a:p>
+        </p:txBody>
+      </p:sp>
+      <p:sp>
+        <p:nvSpPr>
+          <p:cNvPr id="153" name="Google Shape;153;g3d09141108f_0_54"/>
+          <p:cNvSpPr txBox="1"/>
+          <p:nvPr>
+            <p:ph idx="2" type="body"/>
+          </p:nvPr>
+        </p:nvSpPr>
+        <p:spPr>
+          <a:xfrm>
+            <a:off x="1138200" y="1763063"/>
+            <a:ext cx="10642500" cy="3254400"/>
+          </a:xfrm>
+          <a:prstGeom prst="rect">
+            <a:avLst/>
+          </a:prstGeom>
+        </p:spPr>
+        <p:txBody>
+          <a:bodyPr anchorCtr="0" anchor="t" bIns="45700" lIns="91425" spcFirstLastPara="1" rIns="91425" wrap="square" tIns="45700">
+            <a:noAutofit/>
+          </a:bodyPr>
+          <a:lstStyle/>
+          <a:p>
+            <a:pPr indent="0" lvl="0" marL="0" rtl="0" algn="l">
+              <a:spcBef>
+                <a:spcPts val="1000"/>
+              </a:spcBef>
+              <a:spcAft>
+                <a:spcPts val="0"/>
+              </a:spcAft>
+              <a:buNone/>
+            </a:pPr>
+            <a:endParaRPr>
+              <a:latin typeface="JetBrains Mono"/>
+              <a:ea typeface="JetBrains Mono"/>
+              <a:cs typeface="JetBrains Mono"/>
+              <a:sym typeface="JetBrains Mono"/>
+            </a:endParaRPr>
+            <a:r>
+              <a:rPr lang="ru-RU" altLang="en-US">
+                <a:latin typeface="JetBrains Mono"/>
+                <a:ea typeface="JetBrains Mono"/>
+                <a:cs typeface="JetBrains Mono"/>
+                <a:sym typeface="JetBrains Mono"/>
+                <a:solidFill>
+                  <a:srgbClr val="95a5a6"/>
+                </a:solidFill>
+              </a:rPr>
+              <a:t>// каррирование (multiple param lists)</a:t>
+            </a:r>
+          </a:p>
+          <a:p>
+            <a:pPr indent="0" lvl="0" marL="0" rtl="0" algn="l">
+              <a:spcBef>
+                <a:spcPts val="1000"/>
+              </a:spcBef>
+              <a:spcAft>
+                <a:spcPts val="0"/>
+              </a:spcAft>
+              <a:buNone/>
+            </a:pPr>
+            <a:endParaRPr>
+              <a:latin typeface="JetBrains Mono"/>
+              <a:ea typeface="JetBrains Mono"/>
+              <a:cs typeface="JetBrains Mono"/>
+              <a:sym typeface="JetBrains Mono"/>
+            </a:endParaRPr>
+            <a:r>
+              <a:rPr lang="ru-RU" altLang="en-US">
+                <a:latin typeface="JetBrains Mono"/>
+                <a:ea typeface="JetBrains Mono"/>
+                <a:cs typeface="JetBrains Mono"/>
+                <a:sym typeface="JetBrains Mono"/>
+                <a:solidFill>
+                  <a:srgbClr val="c0392b"/>
+                </a:solidFill>
+              </a:rPr>
+              <a:t>def</a:t>
+            </a:r>
+            <a:r>
+              <a:rPr lang="ru-RU" altLang="en-US">
+                <a:latin typeface="JetBrains Mono"/>
+                <a:ea typeface="JetBrains Mono"/>
+                <a:cs typeface="JetBrains Mono"/>
+                <a:sym typeface="JetBrains Mono"/>
+                <a:solidFill>
+                  <a:srgbClr val="1a1a1a"/>
+                </a:solidFill>
+              </a:rPr>
+              <a:t> multiply(factor: </a:t>
+            </a:r>
+            <a:r>
+              <a:rPr lang="ru-RU" altLang="en-US">
+                <a:latin typeface="JetBrains Mono"/>
+                <a:ea typeface="JetBrains Mono"/>
+                <a:cs typeface="JetBrains Mono"/>
+                <a:sym typeface="JetBrains Mono"/>
+                <a:solidFill>
+                  <a:srgbClr val="2c6fa6"/>
+                </a:solidFill>
+              </a:rPr>
+              <a:t>Int</a:t>
+            </a:r>
+            <a:r>
+              <a:rPr lang="ru-RU" altLang="en-US">
+                <a:latin typeface="JetBrains Mono"/>
+                <a:ea typeface="JetBrains Mono"/>
+                <a:cs typeface="JetBrains Mono"/>
+                <a:sym typeface="JetBrains Mono"/>
+                <a:solidFill>
+                  <a:srgbClr val="1a1a1a"/>
+                </a:solidFill>
+              </a:rPr>
+              <a:t>)(x: </a:t>
+            </a:r>
+            <a:r>
+              <a:rPr lang="ru-RU" altLang="en-US">
+                <a:latin typeface="JetBrains Mono"/>
+                <a:ea typeface="JetBrains Mono"/>
+                <a:cs typeface="JetBrains Mono"/>
+                <a:sym typeface="JetBrains Mono"/>
+                <a:solidFill>
+                  <a:srgbClr val="2c6fa6"/>
+                </a:solidFill>
+              </a:rPr>
+              <a:t>Int</a:t>
+            </a:r>
+            <a:r>
+              <a:rPr lang="ru-RU" altLang="en-US">
+                <a:latin typeface="JetBrains Mono"/>
+                <a:ea typeface="JetBrains Mono"/>
+                <a:cs typeface="JetBrains Mono"/>
+                <a:sym typeface="JetBrains Mono"/>
+                <a:solidFill>
+                  <a:srgbClr val="1a1a1a"/>
+                </a:solidFill>
+              </a:rPr>
+              <a:t>) = factor * x</a:t>
+            </a:r>
+          </a:p>
+          <a:p>
+            <a:pPr indent="0" lvl="0" marL="0" rtl="0" algn="l">
+              <a:spcBef>
+                <a:spcPts val="1000"/>
+              </a:spcBef>
+              <a:spcAft>
+                <a:spcPts val="0"/>
+              </a:spcAft>
+              <a:buNone/>
+            </a:pPr>
+            <a:endParaRPr>
+              <a:latin typeface="JetBrains Mono"/>
+              <a:ea typeface="JetBrains Mono"/>
+              <a:cs typeface="JetBrains Mono"/>
+              <a:sym typeface="JetBrains Mono"/>
+            </a:endParaRPr>
+            <a:r>
+              <a:rPr lang="ru-RU" altLang="en-US">
+                <a:latin typeface="JetBrains Mono"/>
+                <a:ea typeface="JetBrains Mono"/>
+                <a:cs typeface="JetBrains Mono"/>
+                <a:sym typeface="JetBrains Mono"/>
+                <a:solidFill>
+                  <a:srgbClr val="c0392b"/>
+                </a:solidFill>
+              </a:rPr>
+              <a:t>val</a:t>
+            </a:r>
+            <a:r>
+              <a:rPr lang="ru-RU" altLang="en-US">
+                <a:latin typeface="JetBrains Mono"/>
+                <a:ea typeface="JetBrains Mono"/>
+                <a:cs typeface="JetBrains Mono"/>
+                <a:sym typeface="JetBrains Mono"/>
+                <a:solidFill>
+                  <a:srgbClr val="1a1a1a"/>
+                </a:solidFill>
+              </a:rPr>
+              <a:t> triple: </a:t>
+            </a:r>
+            <a:r>
+              <a:rPr lang="ru-RU" altLang="en-US">
+                <a:latin typeface="JetBrains Mono"/>
+                <a:ea typeface="JetBrains Mono"/>
+                <a:cs typeface="JetBrains Mono"/>
+                <a:sym typeface="JetBrains Mono"/>
+                <a:solidFill>
+                  <a:srgbClr val="2c6fa6"/>
+                </a:solidFill>
+              </a:rPr>
+              <a:t>Int</a:t>
+            </a:r>
+            <a:r>
+              <a:rPr lang="ru-RU" altLang="en-US">
+                <a:latin typeface="JetBrains Mono"/>
+                <a:ea typeface="JetBrains Mono"/>
+                <a:cs typeface="JetBrains Mono"/>
+                <a:sym typeface="JetBrains Mono"/>
+                <a:solidFill>
+                  <a:srgbClr val="1a1a1a"/>
+                </a:solidFill>
+              </a:rPr>
+              <a:t> =&gt; </a:t>
+            </a:r>
+            <a:r>
+              <a:rPr lang="ru-RU" altLang="en-US">
+                <a:latin typeface="JetBrains Mono"/>
+                <a:ea typeface="JetBrains Mono"/>
+                <a:cs typeface="JetBrains Mono"/>
+                <a:sym typeface="JetBrains Mono"/>
+                <a:solidFill>
+                  <a:srgbClr val="2c6fa6"/>
+                </a:solidFill>
+              </a:rPr>
+              <a:t>Int</a:t>
+            </a:r>
+            <a:r>
+              <a:rPr lang="ru-RU" altLang="en-US">
+                <a:latin typeface="JetBrains Mono"/>
+                <a:ea typeface="JetBrains Mono"/>
+                <a:cs typeface="JetBrains Mono"/>
+                <a:sym typeface="JetBrains Mono"/>
+                <a:solidFill>
+                  <a:srgbClr val="1a1a1a"/>
+                </a:solidFill>
+              </a:rPr>
+              <a:t> = multiply(</a:t>
+            </a:r>
+            <a:r>
+              <a:rPr lang="ru-RU" altLang="en-US">
+                <a:latin typeface="JetBrains Mono"/>
+                <a:ea typeface="JetBrains Mono"/>
+                <a:cs typeface="JetBrains Mono"/>
+                <a:sym typeface="JetBrains Mono"/>
+                <a:solidFill>
+                  <a:srgbClr val="7f8c8d"/>
+                </a:solidFill>
+              </a:rPr>
+              <a:t>3</a:t>
+            </a:r>
+            <a:r>
+              <a:rPr lang="ru-RU" altLang="en-US">
+                <a:latin typeface="JetBrains Mono"/>
+                <a:ea typeface="JetBrains Mono"/>
+                <a:cs typeface="JetBrains Mono"/>
+                <a:sym typeface="JetBrains Mono"/>
+                <a:solidFill>
+                  <a:srgbClr val="1a1a1a"/>
+                </a:solidFill>
+              </a:rPr>
+              <a:t>)</a:t>
+            </a:r>
+          </a:p>
+          <a:p>
+            <a:pPr indent="0" lvl="0" marL="0" rtl="0" algn="l">
+              <a:spcBef>
+                <a:spcPts val="1000"/>
+              </a:spcBef>
+              <a:spcAft>
+                <a:spcPts val="0"/>
+              </a:spcAft>
+              <a:buNone/>
+            </a:pPr>
+            <a:endParaRPr>
+              <a:latin typeface="JetBrains Mono"/>
+              <a:ea typeface="JetBrains Mono"/>
+              <a:cs typeface="JetBrains Mono"/>
+              <a:sym typeface="JetBrains Mono"/>
+            </a:endParaRPr>
+            <a:r>
+              <a:rPr lang="ru-RU" altLang="en-US">
+                <a:latin typeface="JetBrains Mono"/>
+                <a:ea typeface="JetBrains Mono"/>
+                <a:cs typeface="JetBrains Mono"/>
+                <a:sym typeface="JetBrains Mono"/>
+                <a:solidFill>
+                  <a:srgbClr val="95a5a6"/>
+                </a:solidFill>
+              </a:rPr>
+              <a:t>// замыкание</a:t>
+            </a:r>
+          </a:p>
+          <a:p>
+            <a:pPr indent="0" lvl="0" marL="0" rtl="0" algn="l">
+              <a:spcBef>
+                <a:spcPts val="1000"/>
+              </a:spcBef>
+              <a:spcAft>
+                <a:spcPts val="0"/>
+              </a:spcAft>
+              <a:buNone/>
+            </a:pPr>
+            <a:endParaRPr>
+              <a:latin typeface="JetBrains Mono"/>
+              <a:ea typeface="JetBrains Mono"/>
+              <a:cs typeface="JetBrains Mono"/>
+              <a:sym typeface="JetBrains Mono"/>
+            </a:endParaRPr>
+            <a:r>
+              <a:rPr lang="ru-RU" altLang="en-US">
+                <a:latin typeface="JetBrains Mono"/>
+                <a:ea typeface="JetBrains Mono"/>
+                <a:cs typeface="JetBrains Mono"/>
+                <a:sym typeface="JetBrains Mono"/>
+                <a:solidFill>
+                  <a:srgbClr val="c0392b"/>
+                </a:solidFill>
+              </a:rPr>
+              <a:t>val</a:t>
+            </a:r>
+            <a:r>
+              <a:rPr lang="ru-RU" altLang="en-US">
+                <a:latin typeface="JetBrains Mono"/>
+                <a:ea typeface="JetBrains Mono"/>
+                <a:cs typeface="JetBrains Mono"/>
+                <a:sym typeface="JetBrains Mono"/>
+                <a:solidFill>
+                  <a:srgbClr val="1a1a1a"/>
+                </a:solidFill>
+              </a:rPr>
+              <a:t> base = </a:t>
+            </a:r>
+            <a:r>
+              <a:rPr lang="ru-RU" altLang="en-US">
+                <a:latin typeface="JetBrains Mono"/>
+                <a:ea typeface="JetBrains Mono"/>
+                <a:cs typeface="JetBrains Mono"/>
+                <a:sym typeface="JetBrains Mono"/>
+                <a:solidFill>
+                  <a:srgbClr val="7f8c8d"/>
+                </a:solidFill>
+              </a:rPr>
+              <a:t>10</a:t>
+            </a:r>
+          </a:p>
+          <a:p>
+            <a:pPr indent="0" lvl="0" marL="0" rtl="0" algn="l">
+              <a:spcBef>
+                <a:spcPts val="1000"/>
+              </a:spcBef>
+              <a:spcAft>
+                <a:spcPts val="0"/>
+              </a:spcAft>
+              <a:buNone/>
+            </a:pPr>
+            <a:endParaRPr>
+              <a:latin typeface="JetBrains Mono"/>
+              <a:ea typeface="JetBrains Mono"/>
+              <a:cs typeface="JetBrains Mono"/>
+              <a:sym typeface="JetBrains Mono"/>
+            </a:endParaRPr>
+            <a:r>
+              <a:rPr lang="ru-RU" altLang="en-US">
+                <a:latin typeface="JetBrains Mono"/>
+                <a:ea typeface="JetBrains Mono"/>
+                <a:cs typeface="JetBrains Mono"/>
+                <a:sym typeface="JetBrains Mono"/>
+                <a:solidFill>
+                  <a:srgbClr val="c0392b"/>
+                </a:solidFill>
+              </a:rPr>
+              <a:t>val</a:t>
+            </a:r>
+            <a:r>
+              <a:rPr lang="ru-RU" altLang="en-US">
+                <a:latin typeface="JetBrains Mono"/>
+                <a:ea typeface="JetBrains Mono"/>
+                <a:cs typeface="JetBrains Mono"/>
+                <a:sym typeface="JetBrains Mono"/>
+                <a:solidFill>
+                  <a:srgbClr val="1a1a1a"/>
+                </a:solidFill>
+              </a:rPr>
+              <a:t> addBase: </a:t>
+            </a:r>
+            <a:r>
+              <a:rPr lang="ru-RU" altLang="en-US">
+                <a:latin typeface="JetBrains Mono"/>
+                <a:ea typeface="JetBrains Mono"/>
+                <a:cs typeface="JetBrains Mono"/>
+                <a:sym typeface="JetBrains Mono"/>
+                <a:solidFill>
+                  <a:srgbClr val="2c6fa6"/>
+                </a:solidFill>
+              </a:rPr>
+              <a:t>Int</a:t>
+            </a:r>
+            <a:r>
+              <a:rPr lang="ru-RU" altLang="en-US">
+                <a:latin typeface="JetBrains Mono"/>
+                <a:ea typeface="JetBrains Mono"/>
+                <a:cs typeface="JetBrains Mono"/>
+                <a:sym typeface="JetBrains Mono"/>
+                <a:solidFill>
+                  <a:srgbClr val="1a1a1a"/>
+                </a:solidFill>
+              </a:rPr>
+              <a:t> =&gt; </a:t>
+            </a:r>
+            <a:r>
+              <a:rPr lang="ru-RU" altLang="en-US">
+                <a:latin typeface="JetBrains Mono"/>
+                <a:ea typeface="JetBrains Mono"/>
+                <a:cs typeface="JetBrains Mono"/>
+                <a:sym typeface="JetBrains Mono"/>
+                <a:solidFill>
+                  <a:srgbClr val="2c6fa6"/>
+                </a:solidFill>
+              </a:rPr>
+              <a:t>Int</a:t>
+            </a:r>
+            <a:r>
+              <a:rPr lang="ru-RU" altLang="en-US">
+                <a:latin typeface="JetBrains Mono"/>
+                <a:ea typeface="JetBrains Mono"/>
+                <a:cs typeface="JetBrains Mono"/>
+                <a:sym typeface="JetBrains Mono"/>
+                <a:solidFill>
+                  <a:srgbClr val="1a1a1a"/>
+                </a:solidFill>
+              </a:rPr>
+              <a:t> = x =&gt; x + base</a:t>
+            </a:r>
+          </a:p>
+          <a:p>
+            <a:pPr indent="0" lvl="0" marL="0" rtl="0" algn="l">
+              <a:spcBef>
+                <a:spcPts val="1000"/>
+              </a:spcBef>
+              <a:spcAft>
+                <a:spcPts val="0"/>
+              </a:spcAft>
+              <a:buNone/>
+            </a:pPr>
+            <a:endParaRPr>
+              <a:latin typeface="JetBrains Mono"/>
+              <a:ea typeface="JetBrains Mono"/>
+              <a:cs typeface="JetBrains Mono"/>
+              <a:sym typeface="JetBrains Mono"/>
+            </a:endParaRPr>
+            <a:r>
+              <a:rPr lang="ru-RU" altLang="en-US">
+                <a:latin typeface="JetBrains Mono"/>
+                <a:ea typeface="JetBrains Mono"/>
+                <a:cs typeface="JetBrains Mono"/>
+                <a:sym typeface="JetBrains Mono"/>
+                <a:solidFill>
+                  <a:srgbClr val="95a5a6"/>
+                </a:solidFill>
+              </a:rPr>
+              <a:t>// HOF</a:t>
+            </a:r>
+          </a:p>
+          <a:p>
+            <a:pPr indent="0" lvl="0" marL="0" rtl="0" algn="l">
+              <a:spcBef>
+                <a:spcPts val="1000"/>
+              </a:spcBef>
+              <a:spcAft>
+                <a:spcPts val="0"/>
+              </a:spcAft>
+              <a:buNone/>
+            </a:pPr>
+            <a:endParaRPr>
+              <a:latin typeface="JetBrains Mono"/>
+              <a:ea typeface="JetBrains Mono"/>
+              <a:cs typeface="JetBrains Mono"/>
+              <a:sym typeface="JetBrains Mono"/>
+            </a:endParaRPr>
+            <a:r>
+              <a:rPr lang="ru-RU" altLang="en-US">
+                <a:latin typeface="JetBrains Mono"/>
+                <a:ea typeface="JetBrains Mono"/>
+                <a:cs typeface="JetBrains Mono"/>
+                <a:sym typeface="JetBrains Mono"/>
+                <a:solidFill>
+                  <a:srgbClr val="c0392b"/>
+                </a:solidFill>
+              </a:rPr>
+              <a:t>val</a:t>
+            </a:r>
+            <a:r>
+              <a:rPr lang="ru-RU" altLang="en-US">
+                <a:latin typeface="JetBrains Mono"/>
+                <a:ea typeface="JetBrains Mono"/>
+                <a:cs typeface="JetBrains Mono"/>
+                <a:sym typeface="JetBrains Mono"/>
+                <a:solidFill>
+                  <a:srgbClr val="1a1a1a"/>
+                </a:solidFill>
+              </a:rPr>
+              <a:t> result = </a:t>
+            </a:r>
+            <a:r>
+              <a:rPr lang="ru-RU" altLang="en-US">
+                <a:latin typeface="JetBrains Mono"/>
+                <a:ea typeface="JetBrains Mono"/>
+                <a:cs typeface="JetBrains Mono"/>
+                <a:sym typeface="JetBrains Mono"/>
+                <a:solidFill>
+                  <a:srgbClr val="2c6fa6"/>
+                </a:solidFill>
+              </a:rPr>
+              <a:t>List</a:t>
+            </a:r>
+            <a:r>
+              <a:rPr lang="ru-RU" altLang="en-US">
+                <a:latin typeface="JetBrains Mono"/>
+                <a:ea typeface="JetBrains Mono"/>
+                <a:cs typeface="JetBrains Mono"/>
+                <a:sym typeface="JetBrains Mono"/>
+                <a:solidFill>
+                  <a:srgbClr val="1a1a1a"/>
+                </a:solidFill>
+              </a:rPr>
+              <a:t>(</a:t>
+            </a:r>
+            <a:r>
+              <a:rPr lang="ru-RU" altLang="en-US">
+                <a:latin typeface="JetBrains Mono"/>
+                <a:ea typeface="JetBrains Mono"/>
+                <a:cs typeface="JetBrains Mono"/>
+                <a:sym typeface="JetBrains Mono"/>
+                <a:solidFill>
+                  <a:srgbClr val="7f8c8d"/>
+                </a:solidFill>
+              </a:rPr>
+              <a:t>1</a:t>
+            </a:r>
+            <a:r>
+              <a:rPr lang="ru-RU" altLang="en-US">
+                <a:latin typeface="JetBrains Mono"/>
+                <a:ea typeface="JetBrains Mono"/>
+                <a:cs typeface="JetBrains Mono"/>
+                <a:sym typeface="JetBrains Mono"/>
+                <a:solidFill>
+                  <a:srgbClr val="1a1a1a"/>
+                </a:solidFill>
+              </a:rPr>
+              <a:t>, </a:t>
+            </a:r>
+            <a:r>
+              <a:rPr lang="ru-RU" altLang="en-US">
+                <a:latin typeface="JetBrains Mono"/>
+                <a:ea typeface="JetBrains Mono"/>
+                <a:cs typeface="JetBrains Mono"/>
+                <a:sym typeface="JetBrains Mono"/>
+                <a:solidFill>
+                  <a:srgbClr val="7f8c8d"/>
+                </a:solidFill>
+              </a:rPr>
+              <a:t>2</a:t>
+            </a:r>
+            <a:r>
+              <a:rPr lang="ru-RU" altLang="en-US">
+                <a:latin typeface="JetBrains Mono"/>
+                <a:ea typeface="JetBrains Mono"/>
+                <a:cs typeface="JetBrains Mono"/>
+                <a:sym typeface="JetBrains Mono"/>
+                <a:solidFill>
+                  <a:srgbClr val="1a1a1a"/>
+                </a:solidFill>
+              </a:rPr>
+              <a:t>, </a:t>
+            </a:r>
+            <a:r>
+              <a:rPr lang="ru-RU" altLang="en-US">
+                <a:latin typeface="JetBrains Mono"/>
+                <a:ea typeface="JetBrains Mono"/>
+                <a:cs typeface="JetBrains Mono"/>
+                <a:sym typeface="JetBrains Mono"/>
+                <a:solidFill>
+                  <a:srgbClr val="7f8c8d"/>
+                </a:solidFill>
+              </a:rPr>
+              <a:t>3</a:t>
+            </a:r>
+            <a:r>
+              <a:rPr lang="ru-RU" altLang="en-US">
+                <a:latin typeface="JetBrains Mono"/>
+                <a:ea typeface="JetBrains Mono"/>
+                <a:cs typeface="JetBrains Mono"/>
+                <a:sym typeface="JetBrains Mono"/>
+                <a:solidFill>
+                  <a:srgbClr val="1a1a1a"/>
+                </a:solidFill>
+              </a:rPr>
+              <a:t>, </a:t>
+            </a:r>
+            <a:r>
+              <a:rPr lang="ru-RU" altLang="en-US">
+                <a:latin typeface="JetBrains Mono"/>
+                <a:ea typeface="JetBrains Mono"/>
+                <a:cs typeface="JetBrains Mono"/>
+                <a:sym typeface="JetBrains Mono"/>
+                <a:solidFill>
+                  <a:srgbClr val="7f8c8d"/>
+                </a:solidFill>
+              </a:rPr>
+              <a:t>4</a:t>
+            </a:r>
+            <a:r>
+              <a:rPr lang="ru-RU" altLang="en-US">
+                <a:latin typeface="JetBrains Mono"/>
+                <a:ea typeface="JetBrains Mono"/>
+                <a:cs typeface="JetBrains Mono"/>
+                <a:sym typeface="JetBrains Mono"/>
+                <a:solidFill>
+                  <a:srgbClr val="1a1a1a"/>
+                </a:solidFill>
+              </a:rPr>
+              <a:t>, </a:t>
+            </a:r>
+            <a:r>
+              <a:rPr lang="ru-RU" altLang="en-US">
+                <a:latin typeface="JetBrains Mono"/>
+                <a:ea typeface="JetBrains Mono"/>
+                <a:cs typeface="JetBrains Mono"/>
+                <a:sym typeface="JetBrains Mono"/>
+                <a:solidFill>
+                  <a:srgbClr val="7f8c8d"/>
+                </a:solidFill>
+              </a:rPr>
+              <a:t>5</a:t>
+            </a:r>
+            <a:r>
+              <a:rPr lang="ru-RU" altLang="en-US">
+                <a:latin typeface="JetBrains Mono"/>
+                <a:ea typeface="JetBrains Mono"/>
+                <a:cs typeface="JetBrains Mono"/>
+                <a:sym typeface="JetBrains Mono"/>
+                <a:solidFill>
+                  <a:srgbClr val="1a1a1a"/>
+                </a:solidFill>
+              </a:rPr>
+              <a:t>).map(triple)</a:t>
+            </a:r>
+          </a:p>
+        </p:txBody>
+      </p:sp>
+    </p:spTree>
+  </p:cSld>
+  <p:clrMapOvr>
+    <a:masterClrMapping/>
+  </p:clrMapOvr>
+</p:sld>
+</file>
+
+<file path=ppt/slides/slide27.xml><?xml version="1.0" encoding="utf-8"?>
+<p:sld xmlns:a="http://schemas.openxmlformats.org/drawingml/2006/main" xmlns:p="http://schemas.openxmlformats.org/presentationml/2006/main" xmlns:r="http://schemas.openxmlformats.org/officeDocument/2006/relationships">
+  <p:cSld>
+    <p:spTree>
+      <p:nvGrpSpPr>
+        <p:cNvPr id="157" name="Shape 157"/>
+        <p:cNvGrpSpPr/>
+        <p:nvPr/>
+      </p:nvGrpSpPr>
+      <p:grpSpPr>
+        <a:xfrm>
+          <a:off x="0" y="0"/>
+          <a:ext cx="0" cy="0"/>
+          <a:chOff x="0" y="0"/>
+          <a:chExt cx="0" cy="0"/>
+        </a:xfrm>
+      </p:grpSpPr>
+      <p:sp>
+        <p:nvSpPr>
+          <p:cNvPr id="158" name="Google Shape;158;g3d09141108f_0_60"/>
+          <p:cNvSpPr txBox="1"/>
+          <p:nvPr>
+            <p:ph idx="12" type="sldNum"/>
+          </p:nvPr>
+        </p:nvSpPr>
+        <p:spPr>
+          <a:xfrm>
+            <a:off x="8610600" y="6356350"/>
+            <a:ext cx="2743200" cy="365100"/>
+          </a:xfrm>
+          <a:prstGeom prst="rect">
+            <a:avLst/>
+          </a:prstGeom>
+        </p:spPr>
+        <p:txBody>
+          <a:bodyPr anchorCtr="0" anchor="t" bIns="45700" lIns="91425" spcFirstLastPara="1" rIns="91425" wrap="square" tIns="45700">
+            <a:noAutofit/>
+          </a:bodyPr>
+          <a:lstStyle/>
+          <a:p>
+            <a:pPr indent="0" lvl="0" marL="0" rtl="0" algn="r">
+              <a:spcBef>
+                <a:spcPts val="0"/>
+              </a:spcBef>
+              <a:spcAft>
+                <a:spcPts val="0"/>
+              </a:spcAft>
+              <a:buNone/>
+            </a:pPr>
+            <a:fld id="{00000000-1234-1234-1234-123412341234}" type="slidenum">
+              <a:rPr lang="ru-RU"/>
+              <a:t>‹#›</a:t>
+            </a:fld>
+            <a:endParaRPr/>
+          </a:p>
+        </p:txBody>
+      </p:sp>
+      <p:sp>
+        <p:nvSpPr>
+          <p:cNvPr id="159" name="Google Shape;159;g3d09141108f_0_60"/>
+          <p:cNvSpPr txBox="1"/>
+          <p:nvPr>
+            <p:ph idx="1" type="body"/>
+          </p:nvPr>
+        </p:nvSpPr>
+        <p:spPr>
+          <a:xfrm>
+            <a:off x="838198" y="543878"/>
+            <a:ext cx="10942500" cy="1219200"/>
+          </a:xfrm>
+          <a:prstGeom prst="rect">
+            <a:avLst/>
+          </a:prstGeom>
+        </p:spPr>
+        <p:txBody>
+          <a:bodyPr anchorCtr="0" anchor="ctr" bIns="45700" lIns="91425" spcFirstLastPara="1" rIns="91425" wrap="square" tIns="45700">
+            <a:noAutofit/>
+          </a:bodyPr>
+          <a:lstStyle/>
+          <a:p>
+            <a:pPr indent="0" lvl="0" marL="0" rtl="0" algn="l">
+              <a:spcBef>
+                <a:spcPts val="1000"/>
+              </a:spcBef>
+              <a:spcAft>
+                <a:spcPts val="0"/>
+              </a:spcAft>
+              <a:buNone/>
+            </a:pPr>
+            <a:r>
+              <a:rPr lang="ru-RU"/>
+              <a:t>Функции как значения: Rust</a:t>
+            </a:r>
+          </a:p>
+        </p:txBody>
+      </p:sp>
+      <p:sp>
+        <p:nvSpPr>
+          <p:cNvPr id="160" name="Google Shape;160;g3d09141108f_0_60"/>
+          <p:cNvSpPr txBox="1"/>
+          <p:nvPr>
+            <p:ph idx="2" type="body"/>
+          </p:nvPr>
+        </p:nvSpPr>
+        <p:spPr>
+          <a:xfrm>
+            <a:off x="1138200" y="1763063"/>
+            <a:ext cx="10642500" cy="3254400"/>
+          </a:xfrm>
+          <a:prstGeom prst="rect">
+            <a:avLst/>
+          </a:prstGeom>
+        </p:spPr>
+        <p:txBody>
+          <a:bodyPr anchorCtr="0" anchor="t" bIns="45700" lIns="91425" spcFirstLastPara="1" rIns="91425" wrap="square" tIns="45700">
+            <a:noAutofit/>
+          </a:bodyPr>
+          <a:lstStyle/>
+          <a:p>
+            <a:pPr indent="0" lvl="0" marL="0" rtl="0" algn="l">
+              <a:spcBef>
+                <a:spcPts val="1000"/>
+              </a:spcBef>
+              <a:spcAft>
+                <a:spcPts val="0"/>
+              </a:spcAft>
+              <a:buNone/>
+            </a:pPr>
+            <a:endParaRPr sz="2300">
+              <a:latin typeface="JetBrains Mono"/>
+              <a:ea typeface="JetBrains Mono"/>
+              <a:cs typeface="JetBrains Mono"/>
+              <a:sym typeface="JetBrains Mono"/>
+            </a:endParaRPr>
+            <a:r>
+              <a:rPr lang="ru-RU" altLang="en-US" sz="2300">
+                <a:latin typeface="JetBrains Mono"/>
+                <a:ea typeface="JetBrains Mono"/>
+                <a:cs typeface="JetBrains Mono"/>
+                <a:sym typeface="JetBrains Mono"/>
+                <a:solidFill>
+                  <a:srgbClr val="c0392b"/>
+                </a:solidFill>
+              </a:rPr>
+              <a:t>use</a:t>
+            </a:r>
+            <a:r>
+              <a:rPr lang="ru-RU" altLang="en-US" sz="2300">
+                <a:latin typeface="JetBrains Mono"/>
+                <a:ea typeface="JetBrains Mono"/>
+                <a:cs typeface="JetBrains Mono"/>
+                <a:sym typeface="JetBrains Mono"/>
+                <a:solidFill>
+                  <a:srgbClr val="1a1a1a"/>
+                </a:solidFill>
+              </a:rPr>
+              <a:t> auto_curry::curry;</a:t>
+            </a:r>
+          </a:p>
+          <a:p>
+            <a:pPr indent="0" lvl="0" marL="0" rtl="0" algn="l">
+              <a:spcBef>
+                <a:spcPts val="1000"/>
+              </a:spcBef>
+              <a:spcAft>
+                <a:spcPts val="0"/>
+              </a:spcAft>
+              <a:buNone/>
+            </a:pPr>
+            <a:endParaRPr sz="2300">
+              <a:latin typeface="JetBrains Mono"/>
+              <a:ea typeface="JetBrains Mono"/>
+              <a:cs typeface="JetBrains Mono"/>
+              <a:sym typeface="JetBrains Mono"/>
+            </a:endParaRPr>
+            <a:r>
+              <a:rPr lang="ru-RU" altLang="en-US" sz="2300">
+                <a:latin typeface="JetBrains Mono"/>
+                <a:ea typeface="JetBrains Mono"/>
+                <a:cs typeface="JetBrains Mono"/>
+                <a:sym typeface="JetBrains Mono"/>
+                <a:solidFill>
+                  <a:srgbClr val="95a5a6"/>
+                </a:solidFill>
+              </a:rPr>
+              <a:t>// #[curry] — процедурный макрос, каррирует функцию</a:t>
+            </a:r>
+          </a:p>
+          <a:p>
+            <a:pPr indent="0" lvl="0" marL="0" rtl="0" algn="l">
+              <a:spcBef>
+                <a:spcPts val="1000"/>
+              </a:spcBef>
+              <a:spcAft>
+                <a:spcPts val="0"/>
+              </a:spcAft>
+              <a:buNone/>
+            </a:pPr>
+            <a:endParaRPr sz="2300">
+              <a:latin typeface="JetBrains Mono"/>
+              <a:ea typeface="JetBrains Mono"/>
+              <a:cs typeface="JetBrains Mono"/>
+              <a:sym typeface="JetBrains Mono"/>
+            </a:endParaRPr>
+            <a:r>
+              <a:rPr lang="ru-RU" altLang="en-US" sz="2300">
+                <a:latin typeface="JetBrains Mono"/>
+                <a:ea typeface="JetBrains Mono"/>
+                <a:cs typeface="JetBrains Mono"/>
+                <a:sym typeface="JetBrains Mono"/>
+                <a:solidFill>
+                  <a:srgbClr val="2c6fa6"/>
+                </a:solidFill>
+              </a:rPr>
+              <a:t>#[curry]</a:t>
+            </a:r>
+          </a:p>
+          <a:p>
+            <a:pPr indent="0" lvl="0" marL="0" rtl="0" algn="l">
+              <a:spcBef>
+                <a:spcPts val="1000"/>
+              </a:spcBef>
+              <a:spcAft>
+                <a:spcPts val="0"/>
+              </a:spcAft>
+              <a:buNone/>
+            </a:pPr>
+            <a:endParaRPr sz="2300">
+              <a:latin typeface="JetBrains Mono"/>
+              <a:ea typeface="JetBrains Mono"/>
+              <a:cs typeface="JetBrains Mono"/>
+              <a:sym typeface="JetBrains Mono"/>
+            </a:endParaRPr>
+            <a:r>
+              <a:rPr lang="ru-RU" altLang="en-US" sz="2300">
+                <a:latin typeface="JetBrains Mono"/>
+                <a:ea typeface="JetBrains Mono"/>
+                <a:cs typeface="JetBrains Mono"/>
+                <a:sym typeface="JetBrains Mono"/>
+                <a:solidFill>
+                  <a:srgbClr val="c0392b"/>
+                </a:solidFill>
+              </a:rPr>
+              <a:t>fn</a:t>
+            </a:r>
+            <a:r>
+              <a:rPr lang="ru-RU" altLang="en-US" sz="2300">
+                <a:latin typeface="JetBrains Mono"/>
+                <a:ea typeface="JetBrains Mono"/>
+                <a:cs typeface="JetBrains Mono"/>
+                <a:sym typeface="JetBrains Mono"/>
+                <a:solidFill>
+                  <a:srgbClr val="1a1a1a"/>
+                </a:solidFill>
+              </a:rPr>
+              <a:t> multiply(factor: </a:t>
+            </a:r>
+            <a:r>
+              <a:rPr lang="ru-RU" altLang="en-US" sz="2300">
+                <a:latin typeface="JetBrains Mono"/>
+                <a:ea typeface="JetBrains Mono"/>
+                <a:cs typeface="JetBrains Mono"/>
+                <a:sym typeface="JetBrains Mono"/>
+                <a:solidFill>
+                  <a:srgbClr val="2c6fa6"/>
+                </a:solidFill>
+              </a:rPr>
+              <a:t>i32</a:t>
+            </a:r>
+            <a:r>
+              <a:rPr lang="ru-RU" altLang="en-US" sz="2300">
+                <a:latin typeface="JetBrains Mono"/>
+                <a:ea typeface="JetBrains Mono"/>
+                <a:cs typeface="JetBrains Mono"/>
+                <a:sym typeface="JetBrains Mono"/>
+                <a:solidFill>
+                  <a:srgbClr val="1a1a1a"/>
+                </a:solidFill>
+              </a:rPr>
+              <a:t>, x: </a:t>
+            </a:r>
+            <a:r>
+              <a:rPr lang="ru-RU" altLang="en-US" sz="2300">
+                <a:latin typeface="JetBrains Mono"/>
+                <a:ea typeface="JetBrains Mono"/>
+                <a:cs typeface="JetBrains Mono"/>
+                <a:sym typeface="JetBrains Mono"/>
+                <a:solidFill>
+                  <a:srgbClr val="2c6fa6"/>
+                </a:solidFill>
+              </a:rPr>
+              <a:t>i32</a:t>
+            </a:r>
+            <a:r>
+              <a:rPr lang="ru-RU" altLang="en-US" sz="2300">
+                <a:latin typeface="JetBrains Mono"/>
+                <a:ea typeface="JetBrains Mono"/>
+                <a:cs typeface="JetBrains Mono"/>
+                <a:sym typeface="JetBrains Mono"/>
+                <a:solidFill>
+                  <a:srgbClr val="1a1a1a"/>
+                </a:solidFill>
+              </a:rPr>
+              <a:t>) -&gt; </a:t>
+            </a:r>
+            <a:r>
+              <a:rPr lang="ru-RU" altLang="en-US" sz="2300">
+                <a:latin typeface="JetBrains Mono"/>
+                <a:ea typeface="JetBrains Mono"/>
+                <a:cs typeface="JetBrains Mono"/>
+                <a:sym typeface="JetBrains Mono"/>
+                <a:solidFill>
+                  <a:srgbClr val="2c6fa6"/>
+                </a:solidFill>
+              </a:rPr>
+              <a:t>i32</a:t>
+            </a:r>
+            <a:r>
+              <a:rPr lang="ru-RU" altLang="en-US" sz="2300">
+                <a:latin typeface="JetBrains Mono"/>
+                <a:ea typeface="JetBrains Mono"/>
+                <a:cs typeface="JetBrains Mono"/>
+                <a:sym typeface="JetBrains Mono"/>
+                <a:solidFill>
+                  <a:srgbClr val="1a1a1a"/>
+                </a:solidFill>
+              </a:rPr>
+              <a:t> { factor * x }</a:t>
+            </a:r>
+          </a:p>
+          <a:p>
+            <a:pPr indent="0" lvl="0" marL="0" rtl="0" algn="l">
+              <a:spcBef>
+                <a:spcPts val="1000"/>
+              </a:spcBef>
+              <a:spcAft>
+                <a:spcPts val="0"/>
+              </a:spcAft>
+              <a:buNone/>
+            </a:pPr>
+            <a:endParaRPr sz="2300">
+              <a:latin typeface="JetBrains Mono"/>
+              <a:ea typeface="JetBrains Mono"/>
+              <a:cs typeface="JetBrains Mono"/>
+              <a:sym typeface="JetBrains Mono"/>
+            </a:endParaRPr>
+            <a:r>
+              <a:rPr lang="ru-RU" altLang="en-US" sz="2300">
+                <a:latin typeface="JetBrains Mono"/>
+                <a:ea typeface="JetBrains Mono"/>
+                <a:cs typeface="JetBrains Mono"/>
+                <a:sym typeface="JetBrains Mono"/>
+                <a:solidFill>
+                  <a:srgbClr val="c0392b"/>
+                </a:solidFill>
+              </a:rPr>
+              <a:t>let</a:t>
+            </a:r>
+            <a:r>
+              <a:rPr lang="ru-RU" altLang="en-US" sz="2300">
+                <a:latin typeface="JetBrains Mono"/>
+                <a:ea typeface="JetBrains Mono"/>
+                <a:cs typeface="JetBrains Mono"/>
+                <a:sym typeface="JetBrains Mono"/>
+                <a:solidFill>
+                  <a:srgbClr val="1a1a1a"/>
+                </a:solidFill>
+              </a:rPr>
+              <a:t> triple: </a:t>
+            </a:r>
+            <a:r>
+              <a:rPr lang="ru-RU" altLang="en-US" sz="2300">
+                <a:latin typeface="JetBrains Mono"/>
+                <a:ea typeface="JetBrains Mono"/>
+                <a:cs typeface="JetBrains Mono"/>
+                <a:sym typeface="JetBrains Mono"/>
+                <a:solidFill>
+                  <a:srgbClr val="c0392b"/>
+                </a:solidFill>
+              </a:rPr>
+              <a:t>impl</a:t>
+            </a:r>
+            <a:r>
+              <a:rPr lang="ru-RU" altLang="en-US" sz="2300">
+                <a:latin typeface="JetBrains Mono"/>
+                <a:ea typeface="JetBrains Mono"/>
+                <a:cs typeface="JetBrains Mono"/>
+                <a:sym typeface="JetBrains Mono"/>
+                <a:solidFill>
+                  <a:srgbClr val="1a1a1a"/>
+                </a:solidFill>
+              </a:rPr>
+              <a:t> </a:t>
+            </a:r>
+            <a:r>
+              <a:rPr lang="ru-RU" altLang="en-US" sz="2300">
+                <a:latin typeface="JetBrains Mono"/>
+                <a:ea typeface="JetBrains Mono"/>
+                <a:cs typeface="JetBrains Mono"/>
+                <a:sym typeface="JetBrains Mono"/>
+                <a:solidFill>
+                  <a:srgbClr val="2c6fa6"/>
+                </a:solidFill>
+              </a:rPr>
+              <a:t>Fn</a:t>
+            </a:r>
+            <a:r>
+              <a:rPr lang="ru-RU" altLang="en-US" sz="2300">
+                <a:latin typeface="JetBrains Mono"/>
+                <a:ea typeface="JetBrains Mono"/>
+                <a:cs typeface="JetBrains Mono"/>
+                <a:sym typeface="JetBrains Mono"/>
+                <a:solidFill>
+                  <a:srgbClr val="1a1a1a"/>
+                </a:solidFill>
+              </a:rPr>
+              <a:t>(</a:t>
+            </a:r>
+            <a:r>
+              <a:rPr lang="ru-RU" altLang="en-US" sz="2300">
+                <a:latin typeface="JetBrains Mono"/>
+                <a:ea typeface="JetBrains Mono"/>
+                <a:cs typeface="JetBrains Mono"/>
+                <a:sym typeface="JetBrains Mono"/>
+                <a:solidFill>
+                  <a:srgbClr val="2c6fa6"/>
+                </a:solidFill>
+              </a:rPr>
+              <a:t>i32</a:t>
+            </a:r>
+            <a:r>
+              <a:rPr lang="ru-RU" altLang="en-US" sz="2300">
+                <a:latin typeface="JetBrains Mono"/>
+                <a:ea typeface="JetBrains Mono"/>
+                <a:cs typeface="JetBrains Mono"/>
+                <a:sym typeface="JetBrains Mono"/>
+                <a:solidFill>
+                  <a:srgbClr val="1a1a1a"/>
+                </a:solidFill>
+              </a:rPr>
+              <a:t>) -&gt; </a:t>
+            </a:r>
+            <a:r>
+              <a:rPr lang="ru-RU" altLang="en-US" sz="2300">
+                <a:latin typeface="JetBrains Mono"/>
+                <a:ea typeface="JetBrains Mono"/>
+                <a:cs typeface="JetBrains Mono"/>
+                <a:sym typeface="JetBrains Mono"/>
+                <a:solidFill>
+                  <a:srgbClr val="2c6fa6"/>
+                </a:solidFill>
+              </a:rPr>
+              <a:t>i32</a:t>
+            </a:r>
+            <a:r>
+              <a:rPr lang="ru-RU" altLang="en-US" sz="2300">
+                <a:latin typeface="JetBrains Mono"/>
+                <a:ea typeface="JetBrains Mono"/>
+                <a:cs typeface="JetBrains Mono"/>
+                <a:sym typeface="JetBrains Mono"/>
+                <a:solidFill>
+                  <a:srgbClr val="1a1a1a"/>
+                </a:solidFill>
+              </a:rPr>
+              <a:t> = multiply(</a:t>
+            </a:r>
+            <a:r>
+              <a:rPr lang="ru-RU" altLang="en-US" sz="2300">
+                <a:latin typeface="JetBrains Mono"/>
+                <a:ea typeface="JetBrains Mono"/>
+                <a:cs typeface="JetBrains Mono"/>
+                <a:sym typeface="JetBrains Mono"/>
+                <a:solidFill>
+                  <a:srgbClr val="7f8c8d"/>
+                </a:solidFill>
+              </a:rPr>
+              <a:t>3</a:t>
+            </a:r>
+            <a:r>
+              <a:rPr lang="ru-RU" altLang="en-US" sz="2300">
+                <a:latin typeface="JetBrains Mono"/>
+                <a:ea typeface="JetBrains Mono"/>
+                <a:cs typeface="JetBrains Mono"/>
+                <a:sym typeface="JetBrains Mono"/>
+                <a:solidFill>
+                  <a:srgbClr val="1a1a1a"/>
+                </a:solidFill>
+              </a:rPr>
+              <a:t>);</a:t>
+            </a:r>
+          </a:p>
+        </p:txBody>
+      </p:sp>
+    </p:spTree>
+  </p:cSld>
+  <p:clrMapOvr>
+    <a:masterClrMapping/>
+  </p:clrMapOvr>
+</p:sld>
+</file>
+
+<file path=ppt/slides/slide28.xml><?xml version="1.0" encoding="utf-8"?>
+<p:sld xmlns:a="http://schemas.openxmlformats.org/drawingml/2006/main" xmlns:p="http://schemas.openxmlformats.org/presentationml/2006/main" xmlns:r="http://schemas.openxmlformats.org/officeDocument/2006/relationships">
+  <p:cSld>
+    <p:spTree>
+      <p:nvGrpSpPr>
+        <p:cNvPr id="157" name="Shape 157"/>
+        <p:cNvGrpSpPr/>
+        <p:nvPr/>
+      </p:nvGrpSpPr>
+      <p:grpSpPr>
+        <a:xfrm>
+          <a:off x="0" y="0"/>
+          <a:ext cx="0" cy="0"/>
+          <a:chOff x="0" y="0"/>
+          <a:chExt cx="0" cy="0"/>
+        </a:xfrm>
+      </p:grpSpPr>
+      <p:sp>
+        <p:nvSpPr>
+          <p:cNvPr id="158" name="Google Shape;158;g3d09141108f_0_60"/>
+          <p:cNvSpPr txBox="1"/>
+          <p:nvPr>
+            <p:ph idx="12" type="sldNum"/>
+          </p:nvPr>
+        </p:nvSpPr>
+        <p:spPr>
+          <a:xfrm>
+            <a:off x="8610600" y="6356350"/>
+            <a:ext cx="2743200" cy="365100"/>
+          </a:xfrm>
+          <a:prstGeom prst="rect">
+            <a:avLst/>
+          </a:prstGeom>
+        </p:spPr>
+        <p:txBody>
+          <a:bodyPr anchorCtr="0" anchor="t" bIns="45700" lIns="91425" spcFirstLastPara="1" rIns="91425" wrap="square" tIns="45700">
+            <a:noAutofit/>
+          </a:bodyPr>
+          <a:lstStyle/>
+          <a:p>
+            <a:pPr indent="0" lvl="0" marL="0" rtl="0" algn="r">
+              <a:spcBef>
+                <a:spcPts val="0"/>
+              </a:spcBef>
+              <a:spcAft>
+                <a:spcPts val="0"/>
+              </a:spcAft>
+              <a:buNone/>
+            </a:pPr>
+            <a:fld id="{00000000-1234-1234-1234-123412341234}" type="slidenum">
+              <a:rPr lang="ru-RU"/>
+              <a:t>‹#›</a:t>
+            </a:fld>
+            <a:endParaRPr/>
+          </a:p>
+        </p:txBody>
+      </p:sp>
+      <p:sp>
+        <p:nvSpPr>
+          <p:cNvPr id="159" name="Google Shape;159;g3d09141108f_0_60"/>
+          <p:cNvSpPr txBox="1"/>
+          <p:nvPr>
+            <p:ph idx="1" type="body"/>
+          </p:nvPr>
+        </p:nvSpPr>
+        <p:spPr>
+          <a:xfrm>
+            <a:off x="838198" y="543878"/>
+            <a:ext cx="10942500" cy="1219200"/>
+          </a:xfrm>
+          <a:prstGeom prst="rect">
+            <a:avLst/>
+          </a:prstGeom>
+        </p:spPr>
+        <p:txBody>
+          <a:bodyPr anchorCtr="0" anchor="ctr" bIns="45700" lIns="91425" spcFirstLastPara="1" rIns="91425" wrap="square" tIns="45700">
+            <a:noAutofit/>
+          </a:bodyPr>
+          <a:lstStyle/>
+          <a:p>
+            <a:pPr indent="0" lvl="0" marL="0" rtl="0" algn="l">
+              <a:spcBef>
+                <a:spcPts val="1000"/>
+              </a:spcBef>
+              <a:spcAft>
+                <a:spcPts val="0"/>
+              </a:spcAft>
+              <a:buNone/>
+            </a:pPr>
+            <a:r>
+              <a:rPr lang="ru-RU"/>
+              <a:t>Функции как значения: Rust</a:t>
+            </a:r>
+          </a:p>
+        </p:txBody>
+      </p:sp>
+      <p:sp>
+        <p:nvSpPr>
+          <p:cNvPr id="160" name="Google Shape;160;g3d09141108f_0_60"/>
+          <p:cNvSpPr txBox="1"/>
+          <p:nvPr>
+            <p:ph idx="2" type="body"/>
+          </p:nvPr>
+        </p:nvSpPr>
+        <p:spPr>
+          <a:xfrm>
+            <a:off x="1138200" y="1763063"/>
+            <a:ext cx="10642500" cy="3254400"/>
+          </a:xfrm>
+          <a:prstGeom prst="rect">
+            <a:avLst/>
+          </a:prstGeom>
+        </p:spPr>
+        <p:txBody>
+          <a:bodyPr anchorCtr="0" anchor="t" bIns="45700" lIns="91425" spcFirstLastPara="1" rIns="91425" wrap="square" tIns="45700">
+            <a:noAutofit/>
+          </a:bodyPr>
+          <a:lstStyle/>
+          <a:p>
+            <a:pPr indent="0" lvl="0" marL="0" rtl="0" algn="l">
+              <a:spcBef>
+                <a:spcPts val="1000"/>
+              </a:spcBef>
+              <a:spcAft>
+                <a:spcPts val="0"/>
+              </a:spcAft>
+              <a:buNone/>
+            </a:pPr>
+            <a:endParaRPr sz="2300">
+              <a:latin typeface="JetBrains Mono"/>
+              <a:ea typeface="JetBrains Mono"/>
+              <a:cs typeface="JetBrains Mono"/>
+              <a:sym typeface="JetBrains Mono"/>
+            </a:endParaRPr>
+            <a:r>
+              <a:rPr lang="ru-RU" altLang="en-US" sz="2300">
+                <a:latin typeface="JetBrains Mono"/>
+                <a:ea typeface="JetBrains Mono"/>
+                <a:cs typeface="JetBrains Mono"/>
+                <a:sym typeface="JetBrains Mono"/>
+                <a:solidFill>
+                  <a:srgbClr val="95a5a6"/>
+                </a:solidFill>
+              </a:rPr>
+              <a:t>// triple — multiply, каррированный по factor</a:t>
+            </a:r>
+          </a:p>
+          <a:p>
+            <a:pPr indent="0" lvl="0" marL="0" rtl="0" algn="l">
+              <a:spcBef>
+                <a:spcPts val="1000"/>
+              </a:spcBef>
+              <a:spcAft>
+                <a:spcPts val="0"/>
+              </a:spcAft>
+              <a:buNone/>
+            </a:pPr>
+            <a:endParaRPr sz="2300">
+              <a:latin typeface="JetBrains Mono"/>
+              <a:ea typeface="JetBrains Mono"/>
+              <a:cs typeface="JetBrains Mono"/>
+              <a:sym typeface="JetBrains Mono"/>
+            </a:endParaRPr>
+            <a:r>
+              <a:rPr lang="ru-RU" altLang="en-US" sz="2300">
+                <a:latin typeface="JetBrains Mono"/>
+                <a:ea typeface="JetBrains Mono"/>
+                <a:cs typeface="JetBrains Mono"/>
+                <a:sym typeface="JetBrains Mono"/>
+                <a:solidFill>
+                  <a:srgbClr val="95a5a6"/>
+                </a:solidFill>
+              </a:rPr>
+              <a:t>// add_base — замыкание: base захвачен из окружения</a:t>
+            </a:r>
+          </a:p>
+          <a:p>
+            <a:pPr indent="0" lvl="0" marL="0" rtl="0" algn="l">
+              <a:spcBef>
+                <a:spcPts val="1000"/>
+              </a:spcBef>
+              <a:spcAft>
+                <a:spcPts val="0"/>
+              </a:spcAft>
+              <a:buNone/>
+            </a:pPr>
+            <a:endParaRPr sz="2300">
+              <a:latin typeface="JetBrains Mono"/>
+              <a:ea typeface="JetBrains Mono"/>
+              <a:cs typeface="JetBrains Mono"/>
+              <a:sym typeface="JetBrains Mono"/>
+            </a:endParaRPr>
+            <a:r>
+              <a:rPr lang="ru-RU" altLang="en-US" sz="2300">
+                <a:latin typeface="JetBrains Mono"/>
+                <a:ea typeface="JetBrains Mono"/>
+                <a:cs typeface="JetBrains Mono"/>
+                <a:sym typeface="JetBrains Mono"/>
+                <a:solidFill>
+                  <a:srgbClr val="c0392b"/>
+                </a:solidFill>
+              </a:rPr>
+              <a:t>let</a:t>
+            </a:r>
+            <a:r>
+              <a:rPr lang="ru-RU" altLang="en-US" sz="2300">
+                <a:latin typeface="JetBrains Mono"/>
+                <a:ea typeface="JetBrains Mono"/>
+                <a:cs typeface="JetBrains Mono"/>
+                <a:sym typeface="JetBrains Mono"/>
+                <a:solidFill>
+                  <a:srgbClr val="1a1a1a"/>
+                </a:solidFill>
+              </a:rPr>
+              <a:t> base = </a:t>
+            </a:r>
+            <a:r>
+              <a:rPr lang="ru-RU" altLang="en-US" sz="2300">
+                <a:latin typeface="JetBrains Mono"/>
+                <a:ea typeface="JetBrains Mono"/>
+                <a:cs typeface="JetBrains Mono"/>
+                <a:sym typeface="JetBrains Mono"/>
+                <a:solidFill>
+                  <a:srgbClr val="7f8c8d"/>
+                </a:solidFill>
+              </a:rPr>
+              <a:t>10</a:t>
+            </a:r>
+            <a:r>
+              <a:rPr lang="ru-RU" altLang="en-US" sz="2300">
+                <a:latin typeface="JetBrains Mono"/>
+                <a:ea typeface="JetBrains Mono"/>
+                <a:cs typeface="JetBrains Mono"/>
+                <a:sym typeface="JetBrains Mono"/>
+                <a:solidFill>
+                  <a:srgbClr val="1a1a1a"/>
+                </a:solidFill>
+              </a:rPr>
+              <a:t>;</a:t>
+            </a:r>
+          </a:p>
+          <a:p>
+            <a:pPr indent="0" lvl="0" marL="0" rtl="0" algn="l">
+              <a:spcBef>
+                <a:spcPts val="1000"/>
+              </a:spcBef>
+              <a:spcAft>
+                <a:spcPts val="0"/>
+              </a:spcAft>
+              <a:buNone/>
+            </a:pPr>
+            <a:endParaRPr sz="2300">
+              <a:latin typeface="JetBrains Mono"/>
+              <a:ea typeface="JetBrains Mono"/>
+              <a:cs typeface="JetBrains Mono"/>
+              <a:sym typeface="JetBrains Mono"/>
+            </a:endParaRPr>
+            <a:r>
+              <a:rPr lang="ru-RU" altLang="en-US" sz="2300">
+                <a:latin typeface="JetBrains Mono"/>
+                <a:ea typeface="JetBrains Mono"/>
+                <a:cs typeface="JetBrains Mono"/>
+                <a:sym typeface="JetBrains Mono"/>
+                <a:solidFill>
+                  <a:srgbClr val="c0392b"/>
+                </a:solidFill>
+              </a:rPr>
+              <a:t>let</a:t>
+            </a:r>
+            <a:r>
+              <a:rPr lang="ru-RU" altLang="en-US" sz="2300">
+                <a:latin typeface="JetBrains Mono"/>
+                <a:ea typeface="JetBrains Mono"/>
+                <a:cs typeface="JetBrains Mono"/>
+                <a:sym typeface="JetBrains Mono"/>
+                <a:solidFill>
+                  <a:srgbClr val="1a1a1a"/>
+                </a:solidFill>
+              </a:rPr>
+              <a:t> add_base: </a:t>
+            </a:r>
+            <a:r>
+              <a:rPr lang="ru-RU" altLang="en-US" sz="2300">
+                <a:latin typeface="JetBrains Mono"/>
+                <a:ea typeface="JetBrains Mono"/>
+                <a:cs typeface="JetBrains Mono"/>
+                <a:sym typeface="JetBrains Mono"/>
+                <a:solidFill>
+                  <a:srgbClr val="c0392b"/>
+                </a:solidFill>
+              </a:rPr>
+              <a:t>impl</a:t>
+            </a:r>
+            <a:r>
+              <a:rPr lang="ru-RU" altLang="en-US" sz="2300">
+                <a:latin typeface="JetBrains Mono"/>
+                <a:ea typeface="JetBrains Mono"/>
+                <a:cs typeface="JetBrains Mono"/>
+                <a:sym typeface="JetBrains Mono"/>
+                <a:solidFill>
+                  <a:srgbClr val="1a1a1a"/>
+                </a:solidFill>
+              </a:rPr>
+              <a:t> </a:t>
+            </a:r>
+            <a:r>
+              <a:rPr lang="ru-RU" altLang="en-US" sz="2300">
+                <a:latin typeface="JetBrains Mono"/>
+                <a:ea typeface="JetBrains Mono"/>
+                <a:cs typeface="JetBrains Mono"/>
+                <a:sym typeface="JetBrains Mono"/>
+                <a:solidFill>
+                  <a:srgbClr val="2c6fa6"/>
+                </a:solidFill>
+              </a:rPr>
+              <a:t>Fn</a:t>
+            </a:r>
+            <a:r>
+              <a:rPr lang="ru-RU" altLang="en-US" sz="2300">
+                <a:latin typeface="JetBrains Mono"/>
+                <a:ea typeface="JetBrains Mono"/>
+                <a:cs typeface="JetBrains Mono"/>
+                <a:sym typeface="JetBrains Mono"/>
+                <a:solidFill>
+                  <a:srgbClr val="1a1a1a"/>
+                </a:solidFill>
+              </a:rPr>
+              <a:t>(</a:t>
+            </a:r>
+            <a:r>
+              <a:rPr lang="ru-RU" altLang="en-US" sz="2300">
+                <a:latin typeface="JetBrains Mono"/>
+                <a:ea typeface="JetBrains Mono"/>
+                <a:cs typeface="JetBrains Mono"/>
+                <a:sym typeface="JetBrains Mono"/>
+                <a:solidFill>
+                  <a:srgbClr val="2c6fa6"/>
+                </a:solidFill>
+              </a:rPr>
+              <a:t>i32</a:t>
+            </a:r>
+            <a:r>
+              <a:rPr lang="ru-RU" altLang="en-US" sz="2300">
+                <a:latin typeface="JetBrains Mono"/>
+                <a:ea typeface="JetBrains Mono"/>
+                <a:cs typeface="JetBrains Mono"/>
+                <a:sym typeface="JetBrains Mono"/>
+                <a:solidFill>
+                  <a:srgbClr val="1a1a1a"/>
+                </a:solidFill>
+              </a:rPr>
+              <a:t>) -&gt; </a:t>
+            </a:r>
+            <a:r>
+              <a:rPr lang="ru-RU" altLang="en-US" sz="2300">
+                <a:latin typeface="JetBrains Mono"/>
+                <a:ea typeface="JetBrains Mono"/>
+                <a:cs typeface="JetBrains Mono"/>
+                <a:sym typeface="JetBrains Mono"/>
+                <a:solidFill>
+                  <a:srgbClr val="2c6fa6"/>
+                </a:solidFill>
+              </a:rPr>
+              <a:t>i32</a:t>
+            </a:r>
+            <a:r>
+              <a:rPr lang="ru-RU" altLang="en-US" sz="2300">
+                <a:latin typeface="JetBrains Mono"/>
+                <a:ea typeface="JetBrains Mono"/>
+                <a:cs typeface="JetBrains Mono"/>
+                <a:sym typeface="JetBrains Mono"/>
+                <a:solidFill>
+                  <a:srgbClr val="1a1a1a"/>
+                </a:solidFill>
+              </a:rPr>
+              <a:t> = </a:t>
+            </a:r>
+            <a:r>
+              <a:rPr lang="ru-RU" altLang="en-US" sz="2300">
+                <a:latin typeface="JetBrains Mono"/>
+                <a:ea typeface="JetBrains Mono"/>
+                <a:cs typeface="JetBrains Mono"/>
+                <a:sym typeface="JetBrains Mono"/>
+                <a:solidFill>
+                  <a:srgbClr val="c0392b"/>
+                </a:solidFill>
+              </a:rPr>
+              <a:t>move</a:t>
+            </a:r>
+            <a:r>
+              <a:rPr lang="ru-RU" altLang="en-US" sz="2300">
+                <a:latin typeface="JetBrains Mono"/>
+                <a:ea typeface="JetBrains Mono"/>
+                <a:cs typeface="JetBrains Mono"/>
+                <a:sym typeface="JetBrains Mono"/>
+                <a:solidFill>
+                  <a:srgbClr val="1a1a1a"/>
+                </a:solidFill>
+              </a:rPr>
+              <a:t> |x| x + base;</a:t>
+            </a:r>
+          </a:p>
+          <a:p>
+            <a:pPr indent="0" lvl="0" marL="0" rtl="0" algn="l">
+              <a:spcBef>
+                <a:spcPts val="1000"/>
+              </a:spcBef>
+              <a:spcAft>
+                <a:spcPts val="0"/>
+              </a:spcAft>
+              <a:buNone/>
+            </a:pPr>
+            <a:endParaRPr sz="2300">
+              <a:latin typeface="JetBrains Mono"/>
+              <a:ea typeface="JetBrains Mono"/>
+              <a:cs typeface="JetBrains Mono"/>
+              <a:sym typeface="JetBrains Mono"/>
+            </a:endParaRPr>
+            <a:r>
+              <a:rPr lang="ru-RU" altLang="en-US" sz="2300">
+                <a:latin typeface="JetBrains Mono"/>
+                <a:ea typeface="JetBrains Mono"/>
+                <a:cs typeface="JetBrains Mono"/>
+                <a:sym typeface="JetBrains Mono"/>
+                <a:solidFill>
+                  <a:srgbClr val="95a5a6"/>
+                </a:solidFill>
+              </a:rPr>
+              <a:t/>
+            </a:r>
+          </a:p>
+          <a:p>
+            <a:pPr indent="0" lvl="0" marL="0" rtl="0" algn="l">
+              <a:spcBef>
+                <a:spcPts val="1000"/>
+              </a:spcBef>
+              <a:spcAft>
+                <a:spcPts val="0"/>
+              </a:spcAft>
+              <a:buNone/>
+            </a:pPr>
+            <a:endParaRPr sz="2300">
+              <a:latin typeface="JetBrains Mono"/>
+              <a:ea typeface="JetBrains Mono"/>
+              <a:cs typeface="JetBrains Mono"/>
+              <a:sym typeface="JetBrains Mono"/>
+            </a:endParaRPr>
+            <a:r>
+              <a:rPr lang="ru-RU" altLang="en-US" sz="2300">
+                <a:latin typeface="JetBrains Mono"/>
+                <a:ea typeface="JetBrains Mono"/>
+                <a:cs typeface="JetBrains Mono"/>
+                <a:sym typeface="JetBrains Mono"/>
+                <a:solidFill>
+                  <a:srgbClr val="95a5a6"/>
+                </a:solidFill>
+              </a:rPr>
+              <a:t>// HOF: map принимает функцию аргументом</a:t>
+            </a:r>
+          </a:p>
+          <a:p>
+            <a:pPr indent="0" lvl="0" marL="0" rtl="0" algn="l">
+              <a:spcBef>
+                <a:spcPts val="1000"/>
+              </a:spcBef>
+              <a:spcAft>
+                <a:spcPts val="0"/>
+              </a:spcAft>
+              <a:buNone/>
+            </a:pPr>
+            <a:endParaRPr sz="2300">
+              <a:latin typeface="JetBrains Mono"/>
+              <a:ea typeface="JetBrains Mono"/>
+              <a:cs typeface="JetBrains Mono"/>
+              <a:sym typeface="JetBrains Mono"/>
+            </a:endParaRPr>
+            <a:r>
+              <a:rPr lang="ru-RU" altLang="en-US" sz="2300">
+                <a:latin typeface="JetBrains Mono"/>
+                <a:ea typeface="JetBrains Mono"/>
+                <a:cs typeface="JetBrains Mono"/>
+                <a:sym typeface="JetBrains Mono"/>
+                <a:solidFill>
+                  <a:srgbClr val="c0392b"/>
+                </a:solidFill>
+              </a:rPr>
+              <a:t>let</a:t>
+            </a:r>
+            <a:r>
+              <a:rPr lang="ru-RU" altLang="en-US" sz="2300">
+                <a:latin typeface="JetBrains Mono"/>
+                <a:ea typeface="JetBrains Mono"/>
+                <a:cs typeface="JetBrains Mono"/>
+                <a:sym typeface="JetBrains Mono"/>
+                <a:solidFill>
+                  <a:srgbClr val="1a1a1a"/>
+                </a:solidFill>
+              </a:rPr>
+              <a:t> result: </a:t>
+            </a:r>
+            <a:r>
+              <a:rPr lang="ru-RU" altLang="en-US" sz="2300">
+                <a:latin typeface="JetBrains Mono"/>
+                <a:ea typeface="JetBrains Mono"/>
+                <a:cs typeface="JetBrains Mono"/>
+                <a:sym typeface="JetBrains Mono"/>
+                <a:solidFill>
+                  <a:srgbClr val="2c6fa6"/>
+                </a:solidFill>
+              </a:rPr>
+              <a:t>Vec</a:t>
+            </a:r>
+            <a:r>
+              <a:rPr lang="ru-RU" altLang="en-US" sz="2300">
+                <a:latin typeface="JetBrains Mono"/>
+                <a:ea typeface="JetBrains Mono"/>
+                <a:cs typeface="JetBrains Mono"/>
+                <a:sym typeface="JetBrains Mono"/>
+                <a:solidFill>
+                  <a:srgbClr val="1a1a1a"/>
+                </a:solidFill>
+              </a:rPr>
+              <a:t>&lt;</a:t>
+            </a:r>
+            <a:r>
+              <a:rPr lang="ru-RU" altLang="en-US" sz="2300">
+                <a:latin typeface="JetBrains Mono"/>
+                <a:ea typeface="JetBrains Mono"/>
+                <a:cs typeface="JetBrains Mono"/>
+                <a:sym typeface="JetBrains Mono"/>
+                <a:solidFill>
+                  <a:srgbClr val="2c6fa6"/>
+                </a:solidFill>
+              </a:rPr>
+              <a:t>i32</a:t>
+            </a:r>
+            <a:r>
+              <a:rPr lang="ru-RU" altLang="en-US" sz="2300">
+                <a:latin typeface="JetBrains Mono"/>
+                <a:ea typeface="JetBrains Mono"/>
+                <a:cs typeface="JetBrains Mono"/>
+                <a:sym typeface="JetBrains Mono"/>
+                <a:solidFill>
+                  <a:srgbClr val="1a1a1a"/>
+                </a:solidFill>
+              </a:rPr>
+              <a:t>&gt; =</a:t>
+            </a:r>
+          </a:p>
+          <a:p>
+            <a:pPr indent="0" lvl="0" marL="0" rtl="0" algn="l">
+              <a:spcBef>
+                <a:spcPts val="1000"/>
+              </a:spcBef>
+              <a:spcAft>
+                <a:spcPts val="0"/>
+              </a:spcAft>
+              <a:buNone/>
+            </a:pPr>
+            <a:endParaRPr sz="2300">
+              <a:latin typeface="JetBrains Mono"/>
+              <a:ea typeface="JetBrains Mono"/>
+              <a:cs typeface="JetBrains Mono"/>
+              <a:sym typeface="JetBrains Mono"/>
+            </a:endParaRPr>
+            <a:r>
+              <a:rPr lang="ru-RU" altLang="en-US" sz="2300">
+                <a:latin typeface="JetBrains Mono"/>
+                <a:ea typeface="JetBrains Mono"/>
+                <a:cs typeface="JetBrains Mono"/>
+                <a:sym typeface="JetBrains Mono"/>
+                <a:solidFill>
+                  <a:srgbClr val="1a1a1a"/>
+                </a:solidFill>
+              </a:rPr>
+              <a:t>    vec![</a:t>
+            </a:r>
+            <a:r>
+              <a:rPr lang="ru-RU" altLang="en-US" sz="2300">
+                <a:latin typeface="JetBrains Mono"/>
+                <a:ea typeface="JetBrains Mono"/>
+                <a:cs typeface="JetBrains Mono"/>
+                <a:sym typeface="JetBrains Mono"/>
+                <a:solidFill>
+                  <a:srgbClr val="7f8c8d"/>
+                </a:solidFill>
+              </a:rPr>
+              <a:t>1</a:t>
+            </a:r>
+            <a:r>
+              <a:rPr lang="ru-RU" altLang="en-US" sz="2300">
+                <a:latin typeface="JetBrains Mono"/>
+                <a:ea typeface="JetBrains Mono"/>
+                <a:cs typeface="JetBrains Mono"/>
+                <a:sym typeface="JetBrains Mono"/>
+                <a:solidFill>
+                  <a:srgbClr val="1a1a1a"/>
+                </a:solidFill>
+              </a:rPr>
+              <a:t>, </a:t>
+            </a:r>
+            <a:r>
+              <a:rPr lang="ru-RU" altLang="en-US" sz="2300">
+                <a:latin typeface="JetBrains Mono"/>
+                <a:ea typeface="JetBrains Mono"/>
+                <a:cs typeface="JetBrains Mono"/>
+                <a:sym typeface="JetBrains Mono"/>
+                <a:solidFill>
+                  <a:srgbClr val="7f8c8d"/>
+                </a:solidFill>
+              </a:rPr>
+              <a:t>2</a:t>
+            </a:r>
+            <a:r>
+              <a:rPr lang="ru-RU" altLang="en-US" sz="2300">
+                <a:latin typeface="JetBrains Mono"/>
+                <a:ea typeface="JetBrains Mono"/>
+                <a:cs typeface="JetBrains Mono"/>
+                <a:sym typeface="JetBrains Mono"/>
+                <a:solidFill>
+                  <a:srgbClr val="1a1a1a"/>
+                </a:solidFill>
+              </a:rPr>
+              <a:t>, </a:t>
+            </a:r>
+            <a:r>
+              <a:rPr lang="ru-RU" altLang="en-US" sz="2300">
+                <a:latin typeface="JetBrains Mono"/>
+                <a:ea typeface="JetBrains Mono"/>
+                <a:cs typeface="JetBrains Mono"/>
+                <a:sym typeface="JetBrains Mono"/>
+                <a:solidFill>
+                  <a:srgbClr val="7f8c8d"/>
+                </a:solidFill>
+              </a:rPr>
+              <a:t>3</a:t>
+            </a:r>
+            <a:r>
+              <a:rPr lang="ru-RU" altLang="en-US" sz="2300">
+                <a:latin typeface="JetBrains Mono"/>
+                <a:ea typeface="JetBrains Mono"/>
+                <a:cs typeface="JetBrains Mono"/>
+                <a:sym typeface="JetBrains Mono"/>
+                <a:solidFill>
+                  <a:srgbClr val="1a1a1a"/>
+                </a:solidFill>
+              </a:rPr>
+              <a:t>, </a:t>
+            </a:r>
+            <a:r>
+              <a:rPr lang="ru-RU" altLang="en-US" sz="2300">
+                <a:latin typeface="JetBrains Mono"/>
+                <a:ea typeface="JetBrains Mono"/>
+                <a:cs typeface="JetBrains Mono"/>
+                <a:sym typeface="JetBrains Mono"/>
+                <a:solidFill>
+                  <a:srgbClr val="7f8c8d"/>
+                </a:solidFill>
+              </a:rPr>
+              <a:t>4</a:t>
+            </a:r>
+            <a:r>
+              <a:rPr lang="ru-RU" altLang="en-US" sz="2300">
+                <a:latin typeface="JetBrains Mono"/>
+                <a:ea typeface="JetBrains Mono"/>
+                <a:cs typeface="JetBrains Mono"/>
+                <a:sym typeface="JetBrains Mono"/>
+                <a:solidFill>
+                  <a:srgbClr val="1a1a1a"/>
+                </a:solidFill>
+              </a:rPr>
+              <a:t>, </a:t>
+            </a:r>
+            <a:r>
+              <a:rPr lang="ru-RU" altLang="en-US" sz="2300">
+                <a:latin typeface="JetBrains Mono"/>
+                <a:ea typeface="JetBrains Mono"/>
+                <a:cs typeface="JetBrains Mono"/>
+                <a:sym typeface="JetBrains Mono"/>
+                <a:solidFill>
+                  <a:srgbClr val="7f8c8d"/>
+                </a:solidFill>
+              </a:rPr>
+              <a:t>5</a:t>
+            </a:r>
+            <a:r>
+              <a:rPr lang="ru-RU" altLang="en-US" sz="2300">
+                <a:latin typeface="JetBrains Mono"/>
+                <a:ea typeface="JetBrains Mono"/>
+                <a:cs typeface="JetBrains Mono"/>
+                <a:sym typeface="JetBrains Mono"/>
+                <a:solidFill>
+                  <a:srgbClr val="1a1a1a"/>
+                </a:solidFill>
+              </a:rPr>
+              <a:t>].into_iter().map(triple).collect();</a:t>
+            </a:r>
+          </a:p>
+        </p:txBody>
+      </p:sp>
+    </p:spTree>
+  </p:cSld>
+  <p:clrMapOvr>
+    <a:masterClrMapping/>
+  </p:clrMapOvr>
+</p:sld>
+</file>
+
+<file path=ppt/slides/slide29.xml><?xml version="1.0" encoding="utf-8"?>
+<p:sld xmlns:a="http://schemas.openxmlformats.org/drawingml/2006/main" xmlns:p="http://schemas.openxmlformats.org/presentationml/2006/main" xmlns:r="http://schemas.openxmlformats.org/officeDocument/2006/relationships">
+  <p:cSld>
+    <p:spTree>
+      <p:nvGrpSpPr>
+        <p:cNvPr id="157" name="Shape 157"/>
+        <p:cNvGrpSpPr/>
+        <p:nvPr/>
+      </p:nvGrpSpPr>
+      <p:grpSpPr>
+        <a:xfrm>
+          <a:off x="0" y="0"/>
+          <a:ext cx="0" cy="0"/>
+          <a:chOff x="0" y="0"/>
+          <a:chExt cx="0" cy="0"/>
+        </a:xfrm>
+      </p:grpSpPr>
+      <p:sp>
+        <p:nvSpPr>
+          <p:cNvPr id="158" name="Google Shape;158;g3d09141108f_0_60"/>
+          <p:cNvSpPr txBox="1"/>
+          <p:nvPr>
+            <p:ph idx="12" type="sldNum"/>
+          </p:nvPr>
+        </p:nvSpPr>
+        <p:spPr>
+          <a:xfrm>
+            <a:off x="8610600" y="6356350"/>
+            <a:ext cx="2743200" cy="365100"/>
+          </a:xfrm>
+          <a:prstGeom prst="rect">
+            <a:avLst/>
+          </a:prstGeom>
+        </p:spPr>
+        <p:txBody>
+          <a:bodyPr anchorCtr="0" anchor="t" bIns="45700" lIns="91425" spcFirstLastPara="1" rIns="91425" wrap="square" tIns="45700">
+            <a:noAutofit/>
+          </a:bodyPr>
+          <a:lstStyle/>
+          <a:p>
+            <a:pPr indent="0" lvl="0" marL="0" rtl="0" algn="r">
+              <a:spcBef>
+                <a:spcPts val="0"/>
+              </a:spcBef>
+              <a:spcAft>
+                <a:spcPts val="0"/>
+              </a:spcAft>
+              <a:buNone/>
+            </a:pPr>
+            <a:fld id="{00000000-1234-1234-1234-123412341234}" type="slidenum">
+              <a:rPr lang="ru-RU"/>
+              <a:t>‹#›</a:t>
+            </a:fld>
+            <a:endParaRPr/>
+          </a:p>
+        </p:txBody>
+      </p:sp>
+      <p:sp>
+        <p:nvSpPr>
+          <p:cNvPr id="159" name="Google Shape;159;g3d09141108f_0_60"/>
+          <p:cNvSpPr txBox="1"/>
+          <p:nvPr>
+            <p:ph idx="1" type="body"/>
+          </p:nvPr>
+        </p:nvSpPr>
+        <p:spPr>
+          <a:xfrm>
+            <a:off x="838198" y="543878"/>
+            <a:ext cx="10942500" cy="1219200"/>
+          </a:xfrm>
+          <a:prstGeom prst="rect">
+            <a:avLst/>
+          </a:prstGeom>
+        </p:spPr>
+        <p:txBody>
+          <a:bodyPr anchorCtr="0" anchor="ctr" bIns="45700" lIns="91425" spcFirstLastPara="1" rIns="91425" wrap="square" tIns="45700">
+            <a:noAutofit/>
+          </a:bodyPr>
+          <a:lstStyle/>
+          <a:p>
+            <a:pPr indent="0" lvl="0" marL="0" rtl="0" algn="l">
+              <a:spcBef>
+                <a:spcPts val="1000"/>
+              </a:spcBef>
+              <a:spcAft>
+                <a:spcPts val="0"/>
+              </a:spcAft>
+              <a:buNone/>
+            </a:pPr>
+            <a:r>
+              <a:rPr lang="ru-RU"/>
+              <a:t>Функции как значения: Python</a:t>
+            </a:r>
+          </a:p>
+        </p:txBody>
+      </p:sp>
+      <p:sp>
+        <p:nvSpPr>
+          <p:cNvPr id="160" name="Google Shape;160;g3d09141108f_0_60"/>
+          <p:cNvSpPr txBox="1"/>
+          <p:nvPr>
+            <p:ph idx="2" type="body"/>
+          </p:nvPr>
+        </p:nvSpPr>
+        <p:spPr>
+          <a:xfrm>
+            <a:off x="1138200" y="1763063"/>
+            <a:ext cx="10642500" cy="3254400"/>
+          </a:xfrm>
+          <a:prstGeom prst="rect">
+            <a:avLst/>
+          </a:prstGeom>
+        </p:spPr>
+        <p:txBody>
+          <a:bodyPr anchorCtr="0" anchor="t" bIns="45700" lIns="91425" spcFirstLastPara="1" rIns="91425" wrap="square" tIns="45700">
+            <a:noAutofit/>
+          </a:bodyPr>
+          <a:lstStyle/>
+          <a:p>
+            <a:pPr indent="0" lvl="0" marL="0" rtl="0" algn="l">
+              <a:spcBef>
+                <a:spcPts val="1000"/>
+              </a:spcBef>
+              <a:spcAft>
+                <a:spcPts val="0"/>
+              </a:spcAft>
+              <a:buNone/>
+            </a:pPr>
+            <a:endParaRPr>
+              <a:latin typeface="JetBrains Mono"/>
+              <a:ea typeface="JetBrains Mono"/>
+              <a:cs typeface="JetBrains Mono"/>
+              <a:sym typeface="JetBrains Mono"/>
+            </a:endParaRPr>
+            <a:r>
+              <a:rPr lang="ru-RU" altLang="en-US">
+                <a:latin typeface="JetBrains Mono"/>
+                <a:ea typeface="JetBrains Mono"/>
+                <a:cs typeface="JetBrains Mono"/>
+                <a:sym typeface="JetBrains Mono"/>
+                <a:solidFill>
+                  <a:srgbClr val="c0392b"/>
+                </a:solidFill>
+              </a:rPr>
+              <a:t>from</a:t>
+            </a:r>
+            <a:r>
+              <a:rPr lang="ru-RU" altLang="en-US">
+                <a:latin typeface="JetBrains Mono"/>
+                <a:ea typeface="JetBrains Mono"/>
+                <a:cs typeface="JetBrains Mono"/>
+                <a:sym typeface="JetBrains Mono"/>
+                <a:solidFill>
+                  <a:srgbClr val="1a1a1a"/>
+                </a:solidFill>
+              </a:rPr>
+              <a:t> functools </a:t>
+            </a:r>
+            <a:r>
+              <a:rPr lang="ru-RU" altLang="en-US">
+                <a:latin typeface="JetBrains Mono"/>
+                <a:ea typeface="JetBrains Mono"/>
+                <a:cs typeface="JetBrains Mono"/>
+                <a:sym typeface="JetBrains Mono"/>
+                <a:solidFill>
+                  <a:srgbClr val="c0392b"/>
+                </a:solidFill>
+              </a:rPr>
+              <a:t>import</a:t>
+            </a:r>
+            <a:r>
+              <a:rPr lang="ru-RU" altLang="en-US">
+                <a:latin typeface="JetBrains Mono"/>
+                <a:ea typeface="JetBrains Mono"/>
+                <a:cs typeface="JetBrains Mono"/>
+                <a:sym typeface="JetBrains Mono"/>
+                <a:solidFill>
+                  <a:srgbClr val="1a1a1a"/>
+                </a:solidFill>
+              </a:rPr>
+              <a:t> partial</a:t>
+            </a:r>
+          </a:p>
+          <a:p>
+            <a:pPr indent="0" lvl="0" marL="0" rtl="0" algn="l">
+              <a:spcBef>
+                <a:spcPts val="1000"/>
+              </a:spcBef>
+              <a:spcAft>
+                <a:spcPts val="0"/>
+              </a:spcAft>
+              <a:buNone/>
+            </a:pPr>
+            <a:endParaRPr>
+              <a:latin typeface="JetBrains Mono"/>
+              <a:ea typeface="JetBrains Mono"/>
+              <a:cs typeface="JetBrains Mono"/>
+              <a:sym typeface="JetBrains Mono"/>
+            </a:endParaRPr>
+            <a:r>
+              <a:rPr lang="ru-RU" altLang="en-US">
+                <a:latin typeface="JetBrains Mono"/>
+                <a:ea typeface="JetBrains Mono"/>
+                <a:cs typeface="JetBrains Mono"/>
+                <a:sym typeface="JetBrains Mono"/>
+                <a:solidFill>
+                  <a:srgbClr val="c0392b"/>
+                </a:solidFill>
+              </a:rPr>
+              <a:t>def</a:t>
+            </a:r>
+            <a:r>
+              <a:rPr lang="ru-RU" altLang="en-US">
+                <a:latin typeface="JetBrains Mono"/>
+                <a:ea typeface="JetBrains Mono"/>
+                <a:cs typeface="JetBrains Mono"/>
+                <a:sym typeface="JetBrains Mono"/>
+                <a:solidFill>
+                  <a:srgbClr val="1a1a1a"/>
+                </a:solidFill>
+              </a:rPr>
+              <a:t> multiply(factor, x): </a:t>
+            </a:r>
+            <a:r>
+              <a:rPr lang="ru-RU" altLang="en-US">
+                <a:latin typeface="JetBrains Mono"/>
+                <a:ea typeface="JetBrains Mono"/>
+                <a:cs typeface="JetBrains Mono"/>
+                <a:sym typeface="JetBrains Mono"/>
+                <a:solidFill>
+                  <a:srgbClr val="c0392b"/>
+                </a:solidFill>
+              </a:rPr>
+              <a:t>return</a:t>
+            </a:r>
+            <a:r>
+              <a:rPr lang="ru-RU" altLang="en-US">
+                <a:latin typeface="JetBrains Mono"/>
+                <a:ea typeface="JetBrains Mono"/>
+                <a:cs typeface="JetBrains Mono"/>
+                <a:sym typeface="JetBrains Mono"/>
+                <a:solidFill>
+                  <a:srgbClr val="1a1a1a"/>
+                </a:solidFill>
+              </a:rPr>
+              <a:t> factor * x</a:t>
+            </a:r>
+          </a:p>
+          <a:p>
+            <a:pPr indent="0" lvl="0" marL="0" rtl="0" algn="l">
+              <a:spcBef>
+                <a:spcPts val="1000"/>
+              </a:spcBef>
+              <a:spcAft>
+                <a:spcPts val="0"/>
+              </a:spcAft>
+              <a:buNone/>
+            </a:pPr>
+            <a:endParaRPr>
+              <a:latin typeface="JetBrains Mono"/>
+              <a:ea typeface="JetBrains Mono"/>
+              <a:cs typeface="JetBrains Mono"/>
+              <a:sym typeface="JetBrains Mono"/>
+            </a:endParaRPr>
+            <a:r>
+              <a:rPr lang="ru-RU" altLang="en-US">
+                <a:latin typeface="JetBrains Mono"/>
+                <a:ea typeface="JetBrains Mono"/>
+                <a:cs typeface="JetBrains Mono"/>
+                <a:sym typeface="JetBrains Mono"/>
+                <a:solidFill>
+                  <a:srgbClr val="1a1a1a"/>
+                </a:solidFill>
+              </a:rPr>
+              <a:t>triple = partial(multiply, </a:t>
+            </a:r>
+            <a:r>
+              <a:rPr lang="ru-RU" altLang="en-US">
+                <a:latin typeface="JetBrains Mono"/>
+                <a:ea typeface="JetBrains Mono"/>
+                <a:cs typeface="JetBrains Mono"/>
+                <a:sym typeface="JetBrains Mono"/>
+                <a:solidFill>
+                  <a:srgbClr val="7f8c8d"/>
+                </a:solidFill>
+              </a:rPr>
+              <a:t>3</a:t>
+            </a:r>
+            <a:r>
+              <a:rPr lang="ru-RU" altLang="en-US">
+                <a:latin typeface="JetBrains Mono"/>
+                <a:ea typeface="JetBrains Mono"/>
+                <a:cs typeface="JetBrains Mono"/>
+                <a:sym typeface="JetBrains Mono"/>
+                <a:solidFill>
+                  <a:srgbClr val="1a1a1a"/>
+                </a:solidFill>
+              </a:rPr>
+              <a:t>)  </a:t>
+            </a:r>
+            <a:r>
+              <a:rPr lang="ru-RU" altLang="en-US">
+                <a:latin typeface="JetBrains Mono"/>
+                <a:ea typeface="JetBrains Mono"/>
+                <a:cs typeface="JetBrains Mono"/>
+                <a:sym typeface="JetBrains Mono"/>
+                <a:solidFill>
+                  <a:srgbClr val="95a5a6"/>
+                </a:solidFill>
+              </a:rPr>
+              <a:t># каррирование</a:t>
+            </a:r>
+          </a:p>
+          <a:p>
+            <a:pPr indent="0" lvl="0" marL="0" rtl="0" algn="l">
+              <a:spcBef>
+                <a:spcPts val="1000"/>
+              </a:spcBef>
+              <a:spcAft>
+                <a:spcPts val="0"/>
+              </a:spcAft>
+              <a:buNone/>
+            </a:pPr>
+            <a:endParaRPr>
+              <a:latin typeface="JetBrains Mono"/>
+              <a:ea typeface="JetBrains Mono"/>
+              <a:cs typeface="JetBrains Mono"/>
+              <a:sym typeface="JetBrains Mono"/>
+            </a:endParaRPr>
+            <a:r>
+              <a:rPr lang="ru-RU" altLang="en-US">
+                <a:latin typeface="JetBrains Mono"/>
+                <a:ea typeface="JetBrains Mono"/>
+                <a:cs typeface="JetBrains Mono"/>
+                <a:sym typeface="JetBrains Mono"/>
+                <a:solidFill>
+                  <a:srgbClr val="95a5a6"/>
+                </a:solidFill>
+              </a:rPr>
+              <a:t># HOF: map принимает функцию аргументом</a:t>
+            </a:r>
+          </a:p>
+          <a:p>
+            <a:pPr indent="0" lvl="0" marL="0" rtl="0" algn="l">
+              <a:spcBef>
+                <a:spcPts val="1000"/>
+              </a:spcBef>
+              <a:spcAft>
+                <a:spcPts val="0"/>
+              </a:spcAft>
+              <a:buNone/>
+            </a:pPr>
+            <a:endParaRPr>
+              <a:latin typeface="JetBrains Mono"/>
+              <a:ea typeface="JetBrains Mono"/>
+              <a:cs typeface="JetBrains Mono"/>
+              <a:sym typeface="JetBrains Mono"/>
+            </a:endParaRPr>
+            <a:r>
+              <a:rPr lang="ru-RU" altLang="en-US">
+                <a:latin typeface="JetBrains Mono"/>
+                <a:ea typeface="JetBrains Mono"/>
+                <a:cs typeface="JetBrains Mono"/>
+                <a:sym typeface="JetBrains Mono"/>
+                <a:solidFill>
+                  <a:srgbClr val="1a1a1a"/>
+                </a:solidFill>
+              </a:rPr>
+              <a:t>result = list(map(triple, [</a:t>
+            </a:r>
+            <a:r>
+              <a:rPr lang="ru-RU" altLang="en-US">
+                <a:latin typeface="JetBrains Mono"/>
+                <a:ea typeface="JetBrains Mono"/>
+                <a:cs typeface="JetBrains Mono"/>
+                <a:sym typeface="JetBrains Mono"/>
+                <a:solidFill>
+                  <a:srgbClr val="7f8c8d"/>
+                </a:solidFill>
+              </a:rPr>
+              <a:t>1</a:t>
+            </a:r>
+            <a:r>
+              <a:rPr lang="ru-RU" altLang="en-US">
+                <a:latin typeface="JetBrains Mono"/>
+                <a:ea typeface="JetBrains Mono"/>
+                <a:cs typeface="JetBrains Mono"/>
+                <a:sym typeface="JetBrains Mono"/>
+                <a:solidFill>
+                  <a:srgbClr val="1a1a1a"/>
+                </a:solidFill>
+              </a:rPr>
+              <a:t>, </a:t>
+            </a:r>
+            <a:r>
+              <a:rPr lang="ru-RU" altLang="en-US">
+                <a:latin typeface="JetBrains Mono"/>
+                <a:ea typeface="JetBrains Mono"/>
+                <a:cs typeface="JetBrains Mono"/>
+                <a:sym typeface="JetBrains Mono"/>
+                <a:solidFill>
+                  <a:srgbClr val="7f8c8d"/>
+                </a:solidFill>
+              </a:rPr>
+              <a:t>2</a:t>
+            </a:r>
+            <a:r>
+              <a:rPr lang="ru-RU" altLang="en-US">
+                <a:latin typeface="JetBrains Mono"/>
+                <a:ea typeface="JetBrains Mono"/>
+                <a:cs typeface="JetBrains Mono"/>
+                <a:sym typeface="JetBrains Mono"/>
+                <a:solidFill>
+                  <a:srgbClr val="1a1a1a"/>
+                </a:solidFill>
+              </a:rPr>
+              <a:t>, </a:t>
+            </a:r>
+            <a:r>
+              <a:rPr lang="ru-RU" altLang="en-US">
+                <a:latin typeface="JetBrains Mono"/>
+                <a:ea typeface="JetBrains Mono"/>
+                <a:cs typeface="JetBrains Mono"/>
+                <a:sym typeface="JetBrains Mono"/>
+                <a:solidFill>
+                  <a:srgbClr val="7f8c8d"/>
+                </a:solidFill>
+              </a:rPr>
+              <a:t>3</a:t>
+            </a:r>
+            <a:r>
+              <a:rPr lang="ru-RU" altLang="en-US">
+                <a:latin typeface="JetBrains Mono"/>
+                <a:ea typeface="JetBrains Mono"/>
+                <a:cs typeface="JetBrains Mono"/>
+                <a:sym typeface="JetBrains Mono"/>
+                <a:solidFill>
+                  <a:srgbClr val="1a1a1a"/>
+                </a:solidFill>
+              </a:rPr>
+              <a:t>, </a:t>
+            </a:r>
+            <a:r>
+              <a:rPr lang="ru-RU" altLang="en-US">
+                <a:latin typeface="JetBrains Mono"/>
+                <a:ea typeface="JetBrains Mono"/>
+                <a:cs typeface="JetBrains Mono"/>
+                <a:sym typeface="JetBrains Mono"/>
+                <a:solidFill>
+                  <a:srgbClr val="7f8c8d"/>
+                </a:solidFill>
+              </a:rPr>
+              <a:t>4</a:t>
+            </a:r>
+            <a:r>
+              <a:rPr lang="ru-RU" altLang="en-US">
+                <a:latin typeface="JetBrains Mono"/>
+                <a:ea typeface="JetBrains Mono"/>
+                <a:cs typeface="JetBrains Mono"/>
+                <a:sym typeface="JetBrains Mono"/>
+                <a:solidFill>
+                  <a:srgbClr val="1a1a1a"/>
+                </a:solidFill>
+              </a:rPr>
+              <a:t>, </a:t>
+            </a:r>
+            <a:r>
+              <a:rPr lang="ru-RU" altLang="en-US">
+                <a:latin typeface="JetBrains Mono"/>
+                <a:ea typeface="JetBrains Mono"/>
+                <a:cs typeface="JetBrains Mono"/>
+                <a:sym typeface="JetBrains Mono"/>
+                <a:solidFill>
+                  <a:srgbClr val="7f8c8d"/>
+                </a:solidFill>
+              </a:rPr>
+              <a:t>5</a:t>
+            </a:r>
+            <a:r>
+              <a:rPr lang="ru-RU" altLang="en-US">
+                <a:latin typeface="JetBrains Mono"/>
+                <a:ea typeface="JetBrains Mono"/>
+                <a:cs typeface="JetBrains Mono"/>
+                <a:sym typeface="JetBrains Mono"/>
+                <a:solidFill>
+                  <a:srgbClr val="1a1a1a"/>
+                </a:solidFill>
+              </a:rPr>
+              <a:t>]))</a:t>
+            </a:r>
+          </a:p>
+          <a:p>
+            <a:pPr indent="0" lvl="0" marL="0" rtl="0" algn="l">
+              <a:spcBef>
+                <a:spcPts val="1000"/>
+              </a:spcBef>
+              <a:spcAft>
+                <a:spcPts val="0"/>
+              </a:spcAft>
+              <a:buNone/>
+            </a:pPr>
+            <a:endParaRPr>
+              <a:latin typeface="JetBrains Mono"/>
+              <a:ea typeface="JetBrains Mono"/>
+              <a:cs typeface="JetBrains Mono"/>
+              <a:sym typeface="JetBrains Mono"/>
+            </a:endParaRPr>
+            <a:r>
+              <a:rPr lang="ru-RU" altLang="en-US">
+                <a:latin typeface="JetBrains Mono"/>
+                <a:ea typeface="JetBrains Mono"/>
+                <a:cs typeface="JetBrains Mono"/>
+                <a:sym typeface="JetBrains Mono"/>
+                <a:solidFill>
+                  <a:srgbClr val="95a5a6"/>
+                </a:solidFill>
+              </a:rPr>
+              <a:t># [3, 6, 9, 12, 15]</a:t>
+            </a:r>
+          </a:p>
+        </p:txBody>
+      </p:sp>
     </p:spTree>
   </p:cSld>
   <p:clrMapOvr>
@@ -26435,6 +29635,1611 @@
           </a:p>
         </p:txBody>
       </p:sp>
+    </p:spTree>
+  </p:cSld>
+  <p:clrMapOvr>
+    <a:masterClrMapping/>
+  </p:clrMapOvr>
+</p:sld>
+</file>
+
+<file path=ppt/slides/slide30.xml><?xml version="1.0" encoding="utf-8"?>
+<p:sld xmlns:a="http://schemas.openxmlformats.org/drawingml/2006/main" xmlns:p="http://schemas.openxmlformats.org/presentationml/2006/main" xmlns:r="http://schemas.openxmlformats.org/officeDocument/2006/relationships">
+  <p:cSld>
+    <p:spTree>
+      <p:nvGrpSpPr>
+        <p:cNvPr id="157" name="Shape 157"/>
+        <p:cNvGrpSpPr/>
+        <p:nvPr/>
+      </p:nvGrpSpPr>
+      <p:grpSpPr>
+        <a:xfrm>
+          <a:off x="0" y="0"/>
+          <a:ext cx="0" cy="0"/>
+          <a:chOff x="0" y="0"/>
+          <a:chExt cx="0" cy="0"/>
+        </a:xfrm>
+      </p:grpSpPr>
+      <p:sp>
+        <p:nvSpPr>
+          <p:cNvPr id="158" name="Google Shape;158;g3d09141108f_0_60"/>
+          <p:cNvSpPr txBox="1"/>
+          <p:nvPr>
+            <p:ph idx="12" type="sldNum"/>
+          </p:nvPr>
+        </p:nvSpPr>
+        <p:spPr>
+          <a:xfrm>
+            <a:off x="8610600" y="6356350"/>
+            <a:ext cx="2743200" cy="365100"/>
+          </a:xfrm>
+          <a:prstGeom prst="rect">
+            <a:avLst/>
+          </a:prstGeom>
+        </p:spPr>
+        <p:txBody>
+          <a:bodyPr anchorCtr="0" anchor="t" bIns="45700" lIns="91425" spcFirstLastPara="1" rIns="91425" wrap="square" tIns="45700">
+            <a:noAutofit/>
+          </a:bodyPr>
+          <a:lstStyle/>
+          <a:p>
+            <a:pPr indent="0" lvl="0" marL="0" rtl="0" algn="r">
+              <a:spcBef>
+                <a:spcPts val="0"/>
+              </a:spcBef>
+              <a:spcAft>
+                <a:spcPts val="0"/>
+              </a:spcAft>
+              <a:buNone/>
+            </a:pPr>
+            <a:fld id="{00000000-1234-1234-1234-123412341234}" type="slidenum">
+              <a:rPr lang="ru-RU"/>
+              <a:t>‹#›</a:t>
+            </a:fld>
+            <a:endParaRPr/>
+          </a:p>
+        </p:txBody>
+      </p:sp>
+      <p:sp>
+        <p:nvSpPr>
+          <p:cNvPr id="159" name="Google Shape;159;g3d09141108f_0_60"/>
+          <p:cNvSpPr txBox="1"/>
+          <p:nvPr>
+            <p:ph idx="1" type="body"/>
+          </p:nvPr>
+        </p:nvSpPr>
+        <p:spPr>
+          <a:xfrm>
+            <a:off x="838198" y="543878"/>
+            <a:ext cx="10942500" cy="1219200"/>
+          </a:xfrm>
+          <a:prstGeom prst="rect">
+            <a:avLst/>
+          </a:prstGeom>
+        </p:spPr>
+        <p:txBody>
+          <a:bodyPr anchorCtr="0" anchor="ctr" bIns="45700" lIns="91425" spcFirstLastPara="1" rIns="91425" wrap="square" tIns="45700">
+            <a:noAutofit/>
+          </a:bodyPr>
+          <a:lstStyle/>
+          <a:p>
+            <a:pPr indent="0" lvl="0" marL="0" rtl="0" algn="l">
+              <a:spcBef>
+                <a:spcPts val="1000"/>
+              </a:spcBef>
+              <a:spcAft>
+                <a:spcPts val="0"/>
+              </a:spcAft>
+              <a:buNone/>
+            </a:pPr>
+            <a:r>
+              <a:rPr lang="ru-RU"/>
+              <a:t>Функции как значения: Python</a:t>
+            </a:r>
+          </a:p>
+        </p:txBody>
+      </p:sp>
+      <p:sp>
+        <p:nvSpPr>
+          <p:cNvPr id="160" name="Google Shape;160;g3d09141108f_0_60"/>
+          <p:cNvSpPr txBox="1"/>
+          <p:nvPr>
+            <p:ph idx="2" type="body"/>
+          </p:nvPr>
+        </p:nvSpPr>
+        <p:spPr>
+          <a:xfrm>
+            <a:off x="1138200" y="1763063"/>
+            <a:ext cx="10642500" cy="3254400"/>
+          </a:xfrm>
+          <a:prstGeom prst="rect">
+            <a:avLst/>
+          </a:prstGeom>
+        </p:spPr>
+        <p:txBody>
+          <a:bodyPr anchorCtr="0" anchor="t" bIns="45700" lIns="91425" spcFirstLastPara="1" rIns="91425" wrap="square" tIns="45700">
+            <a:noAutofit/>
+          </a:bodyPr>
+          <a:lstStyle/>
+          <a:p>
+            <a:pPr indent="0" lvl="0" marL="0" rtl="0" algn="l">
+              <a:spcBef>
+                <a:spcPts val="1000"/>
+              </a:spcBef>
+              <a:spcAft>
+                <a:spcPts val="0"/>
+              </a:spcAft>
+              <a:buNone/>
+            </a:pPr>
+            <a:endParaRPr>
+              <a:latin typeface="JetBrains Mono"/>
+              <a:ea typeface="JetBrains Mono"/>
+              <a:cs typeface="JetBrains Mono"/>
+              <a:sym typeface="JetBrains Mono"/>
+            </a:endParaRPr>
+            <a:r>
+              <a:rPr lang="ru-RU" altLang="en-US">
+                <a:latin typeface="JetBrains Mono"/>
+                <a:ea typeface="JetBrains Mono"/>
+                <a:cs typeface="JetBrains Mono"/>
+                <a:sym typeface="JetBrains Mono"/>
+                <a:solidFill>
+                  <a:srgbClr val="95a5a6"/>
+                </a:solidFill>
+              </a:rPr>
+              <a:t># result = list(map(triple, [1, 2, 3, 4, 5]))</a:t>
+            </a:r>
+          </a:p>
+          <a:p>
+            <a:pPr indent="0" lvl="0" marL="0" rtl="0" algn="l">
+              <a:spcBef>
+                <a:spcPts val="1000"/>
+              </a:spcBef>
+              <a:spcAft>
+                <a:spcPts val="0"/>
+              </a:spcAft>
+              <a:buNone/>
+            </a:pPr>
+            <a:endParaRPr>
+              <a:latin typeface="JetBrains Mono"/>
+              <a:ea typeface="JetBrains Mono"/>
+              <a:cs typeface="JetBrains Mono"/>
+              <a:sym typeface="JetBrains Mono"/>
+            </a:endParaRPr>
+            <a:r>
+              <a:rPr lang="ru-RU" altLang="en-US">
+                <a:latin typeface="JetBrains Mono"/>
+                <a:ea typeface="JetBrains Mono"/>
+                <a:cs typeface="JetBrains Mono"/>
+                <a:sym typeface="JetBrains Mono"/>
+                <a:solidFill>
+                  <a:srgbClr val="95a5a6"/>
+                </a:solidFill>
+              </a:rPr>
+              <a:t># декоратор = HOF: fn → fn</a:t>
+            </a:r>
+          </a:p>
+          <a:p>
+            <a:pPr indent="0" lvl="0" marL="0" rtl="0" algn="l">
+              <a:spcBef>
+                <a:spcPts val="1000"/>
+              </a:spcBef>
+              <a:spcAft>
+                <a:spcPts val="0"/>
+              </a:spcAft>
+              <a:buNone/>
+            </a:pPr>
+            <a:endParaRPr>
+              <a:latin typeface="JetBrains Mono"/>
+              <a:ea typeface="JetBrains Mono"/>
+              <a:cs typeface="JetBrains Mono"/>
+              <a:sym typeface="JetBrains Mono"/>
+            </a:endParaRPr>
+            <a:r>
+              <a:rPr lang="ru-RU" altLang="en-US">
+                <a:latin typeface="JetBrains Mono"/>
+                <a:ea typeface="JetBrains Mono"/>
+                <a:cs typeface="JetBrains Mono"/>
+                <a:sym typeface="JetBrains Mono"/>
+                <a:solidFill>
+                  <a:srgbClr val="c0392b"/>
+                </a:solidFill>
+              </a:rPr>
+              <a:t>def</a:t>
+            </a:r>
+            <a:r>
+              <a:rPr lang="ru-RU" altLang="en-US">
+                <a:latin typeface="JetBrains Mono"/>
+                <a:ea typeface="JetBrains Mono"/>
+                <a:cs typeface="JetBrains Mono"/>
+                <a:sym typeface="JetBrains Mono"/>
+                <a:solidFill>
+                  <a:srgbClr val="1a1a1a"/>
+                </a:solidFill>
+              </a:rPr>
+              <a:t> logged(fn):</a:t>
+            </a:r>
+          </a:p>
+          <a:p>
+            <a:pPr indent="0" lvl="0" marL="0" rtl="0" algn="l">
+              <a:spcBef>
+                <a:spcPts val="1000"/>
+              </a:spcBef>
+              <a:spcAft>
+                <a:spcPts val="0"/>
+              </a:spcAft>
+              <a:buNone/>
+            </a:pPr>
+            <a:endParaRPr>
+              <a:latin typeface="JetBrains Mono"/>
+              <a:ea typeface="JetBrains Mono"/>
+              <a:cs typeface="JetBrains Mono"/>
+              <a:sym typeface="JetBrains Mono"/>
+            </a:endParaRPr>
+            <a:r>
+              <a:rPr lang="ru-RU" altLang="en-US">
+                <a:latin typeface="JetBrains Mono"/>
+                <a:ea typeface="JetBrains Mono"/>
+                <a:cs typeface="JetBrains Mono"/>
+                <a:sym typeface="JetBrains Mono"/>
+                <a:solidFill>
+                  <a:srgbClr val="1a1a1a"/>
+                </a:solidFill>
+              </a:rPr>
+              <a:t>    </a:t>
+            </a:r>
+            <a:r>
+              <a:rPr lang="ru-RU" altLang="en-US">
+                <a:latin typeface="JetBrains Mono"/>
+                <a:ea typeface="JetBrains Mono"/>
+                <a:cs typeface="JetBrains Mono"/>
+                <a:sym typeface="JetBrains Mono"/>
+                <a:solidFill>
+                  <a:srgbClr val="c0392b"/>
+                </a:solidFill>
+              </a:rPr>
+              <a:t>def</a:t>
+            </a:r>
+            <a:r>
+              <a:rPr lang="ru-RU" altLang="en-US">
+                <a:latin typeface="JetBrains Mono"/>
+                <a:ea typeface="JetBrains Mono"/>
+                <a:cs typeface="JetBrains Mono"/>
+                <a:sym typeface="JetBrains Mono"/>
+                <a:solidFill>
+                  <a:srgbClr val="1a1a1a"/>
+                </a:solidFill>
+              </a:rPr>
+              <a:t> wrapper(*a): </a:t>
+            </a:r>
+            <a:r>
+              <a:rPr lang="ru-RU" altLang="en-US">
+                <a:latin typeface="JetBrains Mono"/>
+                <a:ea typeface="JetBrains Mono"/>
+                <a:cs typeface="JetBrains Mono"/>
+                <a:sym typeface="JetBrains Mono"/>
+                <a:solidFill>
+                  <a:srgbClr val="c0392b"/>
+                </a:solidFill>
+              </a:rPr>
+              <a:t>return</a:t>
+            </a:r>
+            <a:r>
+              <a:rPr lang="ru-RU" altLang="en-US">
+                <a:latin typeface="JetBrains Mono"/>
+                <a:ea typeface="JetBrains Mono"/>
+                <a:cs typeface="JetBrains Mono"/>
+                <a:sym typeface="JetBrains Mono"/>
+                <a:solidFill>
+                  <a:srgbClr val="1a1a1a"/>
+                </a:solidFill>
+              </a:rPr>
+              <a:t> fn(*a)</a:t>
+            </a:r>
+          </a:p>
+          <a:p>
+            <a:pPr indent="0" lvl="0" marL="0" rtl="0" algn="l">
+              <a:spcBef>
+                <a:spcPts val="1000"/>
+              </a:spcBef>
+              <a:spcAft>
+                <a:spcPts val="0"/>
+              </a:spcAft>
+              <a:buNone/>
+            </a:pPr>
+            <a:endParaRPr>
+              <a:latin typeface="JetBrains Mono"/>
+              <a:ea typeface="JetBrains Mono"/>
+              <a:cs typeface="JetBrains Mono"/>
+              <a:sym typeface="JetBrains Mono"/>
+            </a:endParaRPr>
+            <a:r>
+              <a:rPr lang="ru-RU" altLang="en-US">
+                <a:latin typeface="JetBrains Mono"/>
+                <a:ea typeface="JetBrains Mono"/>
+                <a:cs typeface="JetBrains Mono"/>
+                <a:sym typeface="JetBrains Mono"/>
+                <a:solidFill>
+                  <a:srgbClr val="1a1a1a"/>
+                </a:solidFill>
+              </a:rPr>
+              <a:t>    </a:t>
+            </a:r>
+            <a:r>
+              <a:rPr lang="ru-RU" altLang="en-US">
+                <a:latin typeface="JetBrains Mono"/>
+                <a:ea typeface="JetBrains Mono"/>
+                <a:cs typeface="JetBrains Mono"/>
+                <a:sym typeface="JetBrains Mono"/>
+                <a:solidFill>
+                  <a:srgbClr val="c0392b"/>
+                </a:solidFill>
+              </a:rPr>
+              <a:t>return</a:t>
+            </a:r>
+            <a:r>
+              <a:rPr lang="ru-RU" altLang="en-US">
+                <a:latin typeface="JetBrains Mono"/>
+                <a:ea typeface="JetBrains Mono"/>
+                <a:cs typeface="JetBrains Mono"/>
+                <a:sym typeface="JetBrains Mono"/>
+                <a:solidFill>
+                  <a:srgbClr val="1a1a1a"/>
+                </a:solidFill>
+              </a:rPr>
+              <a:t> wrapper</a:t>
+            </a:r>
+          </a:p>
+          <a:p>
+            <a:pPr indent="0" lvl="0" marL="0" rtl="0" algn="l">
+              <a:spcBef>
+                <a:spcPts val="1000"/>
+              </a:spcBef>
+              <a:spcAft>
+                <a:spcPts val="0"/>
+              </a:spcAft>
+              <a:buNone/>
+            </a:pPr>
+            <a:endParaRPr>
+              <a:latin typeface="JetBrains Mono"/>
+              <a:ea typeface="JetBrains Mono"/>
+              <a:cs typeface="JetBrains Mono"/>
+              <a:sym typeface="JetBrains Mono"/>
+            </a:endParaRPr>
+            <a:r>
+              <a:rPr lang="ru-RU" altLang="en-US">
+                <a:latin typeface="JetBrains Mono"/>
+                <a:ea typeface="JetBrains Mono"/>
+                <a:cs typeface="JetBrains Mono"/>
+                <a:sym typeface="JetBrains Mono"/>
+                <a:solidFill>
+                  <a:srgbClr val="2c6fa6"/>
+                </a:solidFill>
+              </a:rPr>
+              <a:t>@logged</a:t>
+            </a:r>
+          </a:p>
+          <a:p>
+            <a:pPr indent="0" lvl="0" marL="0" rtl="0" algn="l">
+              <a:spcBef>
+                <a:spcPts val="1000"/>
+              </a:spcBef>
+              <a:spcAft>
+                <a:spcPts val="0"/>
+              </a:spcAft>
+              <a:buNone/>
+            </a:pPr>
+            <a:endParaRPr>
+              <a:latin typeface="JetBrains Mono"/>
+              <a:ea typeface="JetBrains Mono"/>
+              <a:cs typeface="JetBrains Mono"/>
+              <a:sym typeface="JetBrains Mono"/>
+            </a:endParaRPr>
+            <a:r>
+              <a:rPr lang="ru-RU" altLang="en-US">
+                <a:latin typeface="JetBrains Mono"/>
+                <a:ea typeface="JetBrains Mono"/>
+                <a:cs typeface="JetBrains Mono"/>
+                <a:sym typeface="JetBrains Mono"/>
+                <a:solidFill>
+                  <a:srgbClr val="c0392b"/>
+                </a:solidFill>
+              </a:rPr>
+              <a:t>def</a:t>
+            </a:r>
+            <a:r>
+              <a:rPr lang="ru-RU" altLang="en-US">
+                <a:latin typeface="JetBrains Mono"/>
+                <a:ea typeface="JetBrains Mono"/>
+                <a:cs typeface="JetBrains Mono"/>
+                <a:sym typeface="JetBrains Mono"/>
+                <a:solidFill>
+                  <a:srgbClr val="1a1a1a"/>
+                </a:solidFill>
+              </a:rPr>
+              <a:t> triple2(x): </a:t>
+            </a:r>
+            <a:r>
+              <a:rPr lang="ru-RU" altLang="en-US">
+                <a:latin typeface="JetBrains Mono"/>
+                <a:ea typeface="JetBrains Mono"/>
+                <a:cs typeface="JetBrains Mono"/>
+                <a:sym typeface="JetBrains Mono"/>
+                <a:solidFill>
+                  <a:srgbClr val="c0392b"/>
+                </a:solidFill>
+              </a:rPr>
+              <a:t>return</a:t>
+            </a:r>
+            <a:r>
+              <a:rPr lang="ru-RU" altLang="en-US">
+                <a:latin typeface="JetBrains Mono"/>
+                <a:ea typeface="JetBrains Mono"/>
+                <a:cs typeface="JetBrains Mono"/>
+                <a:sym typeface="JetBrains Mono"/>
+                <a:solidFill>
+                  <a:srgbClr val="1a1a1a"/>
+                </a:solidFill>
+              </a:rPr>
+              <a:t> x * </a:t>
+            </a:r>
+            <a:r>
+              <a:rPr lang="ru-RU" altLang="en-US">
+                <a:latin typeface="JetBrains Mono"/>
+                <a:ea typeface="JetBrains Mono"/>
+                <a:cs typeface="JetBrains Mono"/>
+                <a:sym typeface="JetBrains Mono"/>
+                <a:solidFill>
+                  <a:srgbClr val="7f8c8d"/>
+                </a:solidFill>
+              </a:rPr>
+              <a:t>3</a:t>
+            </a:r>
+          </a:p>
+        </p:txBody>
+      </p:sp>
+    </p:spTree>
+  </p:cSld>
+  <p:clrMapOvr>
+    <a:masterClrMapping/>
+  </p:clrMapOvr>
+</p:sld>
+</file>
+
+<file path=ppt/slides/slide31.xml><?xml version="1.0" encoding="utf-8"?>
+<p:sld xmlns:a="http://schemas.openxmlformats.org/drawingml/2006/main" xmlns:p="http://schemas.openxmlformats.org/presentationml/2006/main" xmlns:r="http://schemas.openxmlformats.org/officeDocument/2006/relationships">
+  <p:cSld>
+    <p:spTree>
+      <p:nvGrpSpPr>
+        <p:cNvPr id="157" name="Shape 157"/>
+        <p:cNvGrpSpPr/>
+        <p:nvPr/>
+      </p:nvGrpSpPr>
+      <p:grpSpPr>
+        <a:xfrm>
+          <a:off x="0" y="0"/>
+          <a:ext cx="0" cy="0"/>
+          <a:chOff x="0" y="0"/>
+          <a:chExt cx="0" cy="0"/>
+        </a:xfrm>
+      </p:grpSpPr>
+      <p:sp>
+        <p:nvSpPr>
+          <p:cNvPr id="158" name="Google Shape;158;g3d09141108f_0_60"/>
+          <p:cNvSpPr txBox="1"/>
+          <p:nvPr>
+            <p:ph idx="12" type="sldNum"/>
+          </p:nvPr>
+        </p:nvSpPr>
+        <p:spPr>
+          <a:xfrm>
+            <a:off x="8610600" y="6356350"/>
+            <a:ext cx="2743200" cy="365100"/>
+          </a:xfrm>
+          <a:prstGeom prst="rect">
+            <a:avLst/>
+          </a:prstGeom>
+        </p:spPr>
+        <p:txBody>
+          <a:bodyPr anchorCtr="0" anchor="t" bIns="45700" lIns="91425" spcFirstLastPara="1" rIns="91425" wrap="square" tIns="45700">
+            <a:noAutofit/>
+          </a:bodyPr>
+          <a:lstStyle/>
+          <a:p>
+            <a:pPr indent="0" lvl="0" marL="0" rtl="0" algn="r">
+              <a:spcBef>
+                <a:spcPts val="0"/>
+              </a:spcBef>
+              <a:spcAft>
+                <a:spcPts val="0"/>
+              </a:spcAft>
+              <a:buNone/>
+            </a:pPr>
+            <a:fld id="{00000000-1234-1234-1234-123412341234}" type="slidenum">
+              <a:rPr lang="ru-RU"/>
+              <a:t>‹#›</a:t>
+            </a:fld>
+            <a:endParaRPr/>
+          </a:p>
+        </p:txBody>
+      </p:sp>
+      <p:sp>
+        <p:nvSpPr>
+          <p:cNvPr id="159" name="Google Shape;159;g3d09141108f_0_60"/>
+          <p:cNvSpPr txBox="1"/>
+          <p:nvPr>
+            <p:ph idx="1" type="body"/>
+          </p:nvPr>
+        </p:nvSpPr>
+        <p:spPr>
+          <a:xfrm>
+            <a:off x="838198" y="543878"/>
+            <a:ext cx="10942500" cy="1219200"/>
+          </a:xfrm>
+          <a:prstGeom prst="rect">
+            <a:avLst/>
+          </a:prstGeom>
+        </p:spPr>
+        <p:txBody>
+          <a:bodyPr anchorCtr="0" anchor="ctr" bIns="45700" lIns="91425" spcFirstLastPara="1" rIns="91425" wrap="square" tIns="45700">
+            <a:noAutofit/>
+          </a:bodyPr>
+          <a:lstStyle/>
+          <a:p>
+            <a:pPr indent="0" lvl="0" marL="0" rtl="0" algn="l">
+              <a:spcBef>
+                <a:spcPts val="1000"/>
+              </a:spcBef>
+              <a:spcAft>
+                <a:spcPts val="0"/>
+              </a:spcAft>
+              <a:buNone/>
+            </a:pPr>
+            <a:r>
+              <a:rPr lang="ru-RU"/>
+              <a:t>Функции как значения: JS</a:t>
+            </a:r>
+          </a:p>
+        </p:txBody>
+      </p:sp>
+      <p:sp>
+        <p:nvSpPr>
+          <p:cNvPr id="160" name="Google Shape;160;g3d09141108f_0_60"/>
+          <p:cNvSpPr txBox="1"/>
+          <p:nvPr>
+            <p:ph idx="2" type="body"/>
+          </p:nvPr>
+        </p:nvSpPr>
+        <p:spPr>
+          <a:xfrm>
+            <a:off x="1138200" y="1763063"/>
+            <a:ext cx="10642500" cy="3254400"/>
+          </a:xfrm>
+          <a:prstGeom prst="rect">
+            <a:avLst/>
+          </a:prstGeom>
+        </p:spPr>
+        <p:txBody>
+          <a:bodyPr anchorCtr="0" anchor="t" bIns="45700" lIns="91425" spcFirstLastPara="1" rIns="91425" wrap="square" tIns="45700">
+            <a:noAutofit/>
+          </a:bodyPr>
+          <a:lstStyle/>
+          <a:p>
+            <a:pPr indent="0" lvl="0" marL="0" rtl="0" algn="l">
+              <a:spcBef>
+                <a:spcPts val="1000"/>
+              </a:spcBef>
+              <a:spcAft>
+                <a:spcPts val="0"/>
+              </a:spcAft>
+              <a:buNone/>
+            </a:pPr>
+            <a:endParaRPr sz="2300">
+              <a:latin typeface="JetBrains Mono"/>
+              <a:ea typeface="JetBrains Mono"/>
+              <a:cs typeface="JetBrains Mono"/>
+              <a:sym typeface="JetBrains Mono"/>
+            </a:endParaRPr>
+            <a:r>
+              <a:rPr lang="ru-RU" altLang="en-US" sz="2300">
+                <a:latin typeface="JetBrains Mono"/>
+                <a:ea typeface="JetBrains Mono"/>
+                <a:cs typeface="JetBrains Mono"/>
+                <a:sym typeface="JetBrains Mono"/>
+                <a:solidFill>
+                  <a:srgbClr val="c0392b"/>
+                </a:solidFill>
+              </a:rPr>
+              <a:t>import</a:t>
+            </a:r>
+            <a:r>
+              <a:rPr lang="ru-RU" altLang="en-US" sz="2300">
+                <a:latin typeface="JetBrains Mono"/>
+                <a:ea typeface="JetBrains Mono"/>
+                <a:cs typeface="JetBrains Mono"/>
+                <a:sym typeface="JetBrains Mono"/>
+                <a:solidFill>
+                  <a:srgbClr val="1a1a1a"/>
+                </a:solidFill>
+              </a:rPr>
+              <a:t> * as R </a:t>
+            </a:r>
+            <a:r>
+              <a:rPr lang="ru-RU" altLang="en-US" sz="2300">
+                <a:latin typeface="JetBrains Mono"/>
+                <a:ea typeface="JetBrains Mono"/>
+                <a:cs typeface="JetBrains Mono"/>
+                <a:sym typeface="JetBrains Mono"/>
+                <a:solidFill>
+                  <a:srgbClr val="c0392b"/>
+                </a:solidFill>
+              </a:rPr>
+              <a:t>from</a:t>
+            </a:r>
+            <a:r>
+              <a:rPr lang="ru-RU" altLang="en-US" sz="2300">
+                <a:latin typeface="JetBrains Mono"/>
+                <a:ea typeface="JetBrains Mono"/>
+                <a:cs typeface="JetBrains Mono"/>
+                <a:sym typeface="JetBrains Mono"/>
+                <a:solidFill>
+                  <a:srgbClr val="1a1a1a"/>
+                </a:solidFill>
+              </a:rPr>
+              <a:t> </a:t>
+            </a:r>
+            <a:r>
+              <a:rPr lang="ru-RU" altLang="en-US" sz="2300">
+                <a:latin typeface="JetBrains Mono"/>
+                <a:ea typeface="JetBrains Mono"/>
+                <a:cs typeface="JetBrains Mono"/>
+                <a:sym typeface="JetBrains Mono"/>
+                <a:solidFill>
+                  <a:srgbClr val="7f8c8d"/>
+                </a:solidFill>
+              </a:rPr>
+              <a:t>"ramda"</a:t>
+            </a:r>
+            <a:r>
+              <a:rPr lang="ru-RU" altLang="en-US" sz="2300">
+                <a:latin typeface="JetBrains Mono"/>
+                <a:ea typeface="JetBrains Mono"/>
+                <a:cs typeface="JetBrains Mono"/>
+                <a:sym typeface="JetBrains Mono"/>
+                <a:solidFill>
+                  <a:srgbClr val="1a1a1a"/>
+                </a:solidFill>
+              </a:rPr>
+              <a:t>;</a:t>
+            </a:r>
+          </a:p>
+          <a:p>
+            <a:pPr indent="0" lvl="0" marL="0" rtl="0" algn="l">
+              <a:spcBef>
+                <a:spcPts val="1000"/>
+              </a:spcBef>
+              <a:spcAft>
+                <a:spcPts val="0"/>
+              </a:spcAft>
+              <a:buNone/>
+            </a:pPr>
+            <a:endParaRPr sz="2300">
+              <a:latin typeface="JetBrains Mono"/>
+              <a:ea typeface="JetBrains Mono"/>
+              <a:cs typeface="JetBrains Mono"/>
+              <a:sym typeface="JetBrains Mono"/>
+            </a:endParaRPr>
+            <a:r>
+              <a:rPr lang="ru-RU" altLang="en-US" sz="2300">
+                <a:latin typeface="JetBrains Mono"/>
+                <a:ea typeface="JetBrains Mono"/>
+                <a:cs typeface="JetBrains Mono"/>
+                <a:sym typeface="JetBrains Mono"/>
+                <a:solidFill>
+                  <a:srgbClr val="95a5a6"/>
+                </a:solidFill>
+              </a:rPr>
+              <a:t>// R.curry — каррирование через библиотеку Ramda</a:t>
+            </a:r>
+          </a:p>
+          <a:p>
+            <a:pPr indent="0" lvl="0" marL="0" rtl="0" algn="l">
+              <a:spcBef>
+                <a:spcPts val="1000"/>
+              </a:spcBef>
+              <a:spcAft>
+                <a:spcPts val="0"/>
+              </a:spcAft>
+              <a:buNone/>
+            </a:pPr>
+            <a:endParaRPr sz="2300">
+              <a:latin typeface="JetBrains Mono"/>
+              <a:ea typeface="JetBrains Mono"/>
+              <a:cs typeface="JetBrains Mono"/>
+              <a:sym typeface="JetBrains Mono"/>
+            </a:endParaRPr>
+            <a:r>
+              <a:rPr lang="ru-RU" altLang="en-US" sz="2300">
+                <a:latin typeface="JetBrains Mono"/>
+                <a:ea typeface="JetBrains Mono"/>
+                <a:cs typeface="JetBrains Mono"/>
+                <a:sym typeface="JetBrains Mono"/>
+                <a:solidFill>
+                  <a:srgbClr val="c0392b"/>
+                </a:solidFill>
+              </a:rPr>
+              <a:t>const</a:t>
+            </a:r>
+            <a:r>
+              <a:rPr lang="ru-RU" altLang="en-US" sz="2300">
+                <a:latin typeface="JetBrains Mono"/>
+                <a:ea typeface="JetBrains Mono"/>
+                <a:cs typeface="JetBrains Mono"/>
+                <a:sym typeface="JetBrains Mono"/>
+                <a:solidFill>
+                  <a:srgbClr val="1a1a1a"/>
+                </a:solidFill>
+              </a:rPr>
+              <a:t> multiply = R.curry((factor, x) =&gt; factor * x);</a:t>
+            </a:r>
+          </a:p>
+          <a:p>
+            <a:pPr indent="0" lvl="0" marL="0" rtl="0" algn="l">
+              <a:spcBef>
+                <a:spcPts val="1000"/>
+              </a:spcBef>
+              <a:spcAft>
+                <a:spcPts val="0"/>
+              </a:spcAft>
+              <a:buNone/>
+            </a:pPr>
+            <a:endParaRPr sz="2300">
+              <a:latin typeface="JetBrains Mono"/>
+              <a:ea typeface="JetBrains Mono"/>
+              <a:cs typeface="JetBrains Mono"/>
+              <a:sym typeface="JetBrains Mono"/>
+            </a:endParaRPr>
+            <a:r>
+              <a:rPr lang="ru-RU" altLang="en-US" sz="2300">
+                <a:latin typeface="JetBrains Mono"/>
+                <a:ea typeface="JetBrains Mono"/>
+                <a:cs typeface="JetBrains Mono"/>
+                <a:sym typeface="JetBrains Mono"/>
+                <a:solidFill>
+                  <a:srgbClr val="c0392b"/>
+                </a:solidFill>
+              </a:rPr>
+              <a:t>const</a:t>
+            </a:r>
+            <a:r>
+              <a:rPr lang="ru-RU" altLang="en-US" sz="2300">
+                <a:latin typeface="JetBrains Mono"/>
+                <a:ea typeface="JetBrains Mono"/>
+                <a:cs typeface="JetBrains Mono"/>
+                <a:sym typeface="JetBrains Mono"/>
+                <a:solidFill>
+                  <a:srgbClr val="1a1a1a"/>
+                </a:solidFill>
+              </a:rPr>
+              <a:t> triple = multiply(</a:t>
+            </a:r>
+            <a:r>
+              <a:rPr lang="ru-RU" altLang="en-US" sz="2300">
+                <a:latin typeface="JetBrains Mono"/>
+                <a:ea typeface="JetBrains Mono"/>
+                <a:cs typeface="JetBrains Mono"/>
+                <a:sym typeface="JetBrains Mono"/>
+                <a:solidFill>
+                  <a:srgbClr val="7f8c8d"/>
+                </a:solidFill>
+              </a:rPr>
+              <a:t>3</a:t>
+            </a:r>
+            <a:r>
+              <a:rPr lang="ru-RU" altLang="en-US" sz="2300">
+                <a:latin typeface="JetBrains Mono"/>
+                <a:ea typeface="JetBrains Mono"/>
+                <a:cs typeface="JetBrains Mono"/>
+                <a:sym typeface="JetBrains Mono"/>
+                <a:solidFill>
+                  <a:srgbClr val="1a1a1a"/>
+                </a:solidFill>
+              </a:rPr>
+              <a:t>);</a:t>
+            </a:r>
+          </a:p>
+          <a:p>
+            <a:pPr indent="0" lvl="0" marL="0" rtl="0" algn="l">
+              <a:spcBef>
+                <a:spcPts val="1000"/>
+              </a:spcBef>
+              <a:spcAft>
+                <a:spcPts val="0"/>
+              </a:spcAft>
+              <a:buNone/>
+            </a:pPr>
+            <a:endParaRPr sz="2300">
+              <a:latin typeface="JetBrains Mono"/>
+              <a:ea typeface="JetBrains Mono"/>
+              <a:cs typeface="JetBrains Mono"/>
+              <a:sym typeface="JetBrains Mono"/>
+            </a:endParaRPr>
+            <a:r>
+              <a:rPr lang="ru-RU" altLang="en-US" sz="2300">
+                <a:latin typeface="JetBrains Mono"/>
+                <a:ea typeface="JetBrains Mono"/>
+                <a:cs typeface="JetBrains Mono"/>
+                <a:sym typeface="JetBrains Mono"/>
+                <a:solidFill>
+                  <a:srgbClr val="95a5a6"/>
+                </a:solidFill>
+              </a:rPr>
+              <a:t>// addBase — замыкание: base захвачен из окружения</a:t>
+            </a:r>
+          </a:p>
+          <a:p>
+            <a:pPr indent="0" lvl="0" marL="0" rtl="0" algn="l">
+              <a:spcBef>
+                <a:spcPts val="1000"/>
+              </a:spcBef>
+              <a:spcAft>
+                <a:spcPts val="0"/>
+              </a:spcAft>
+              <a:buNone/>
+            </a:pPr>
+            <a:endParaRPr sz="2300">
+              <a:latin typeface="JetBrains Mono"/>
+              <a:ea typeface="JetBrains Mono"/>
+              <a:cs typeface="JetBrains Mono"/>
+              <a:sym typeface="JetBrains Mono"/>
+            </a:endParaRPr>
+            <a:r>
+              <a:rPr lang="ru-RU" altLang="en-US" sz="2300">
+                <a:latin typeface="JetBrains Mono"/>
+                <a:ea typeface="JetBrains Mono"/>
+                <a:cs typeface="JetBrains Mono"/>
+                <a:sym typeface="JetBrains Mono"/>
+                <a:solidFill>
+                  <a:srgbClr val="c0392b"/>
+                </a:solidFill>
+              </a:rPr>
+              <a:t>const</a:t>
+            </a:r>
+            <a:r>
+              <a:rPr lang="ru-RU" altLang="en-US" sz="2300">
+                <a:latin typeface="JetBrains Mono"/>
+                <a:ea typeface="JetBrains Mono"/>
+                <a:cs typeface="JetBrains Mono"/>
+                <a:sym typeface="JetBrains Mono"/>
+                <a:solidFill>
+                  <a:srgbClr val="1a1a1a"/>
+                </a:solidFill>
+              </a:rPr>
+              <a:t> base = </a:t>
+            </a:r>
+            <a:r>
+              <a:rPr lang="ru-RU" altLang="en-US" sz="2300">
+                <a:latin typeface="JetBrains Mono"/>
+                <a:ea typeface="JetBrains Mono"/>
+                <a:cs typeface="JetBrains Mono"/>
+                <a:sym typeface="JetBrains Mono"/>
+                <a:solidFill>
+                  <a:srgbClr val="7f8c8d"/>
+                </a:solidFill>
+              </a:rPr>
+              <a:t>10</a:t>
+            </a:r>
+            <a:r>
+              <a:rPr lang="ru-RU" altLang="en-US" sz="2300">
+                <a:latin typeface="JetBrains Mono"/>
+                <a:ea typeface="JetBrains Mono"/>
+                <a:cs typeface="JetBrains Mono"/>
+                <a:sym typeface="JetBrains Mono"/>
+                <a:solidFill>
+                  <a:srgbClr val="1a1a1a"/>
+                </a:solidFill>
+              </a:rPr>
+              <a:t>;</a:t>
+            </a:r>
+          </a:p>
+          <a:p>
+            <a:pPr indent="0" lvl="0" marL="0" rtl="0" algn="l">
+              <a:spcBef>
+                <a:spcPts val="1000"/>
+              </a:spcBef>
+              <a:spcAft>
+                <a:spcPts val="0"/>
+              </a:spcAft>
+              <a:buNone/>
+            </a:pPr>
+            <a:endParaRPr sz="2300">
+              <a:latin typeface="JetBrains Mono"/>
+              <a:ea typeface="JetBrains Mono"/>
+              <a:cs typeface="JetBrains Mono"/>
+              <a:sym typeface="JetBrains Mono"/>
+            </a:endParaRPr>
+            <a:r>
+              <a:rPr lang="ru-RU" altLang="en-US" sz="2300">
+                <a:latin typeface="JetBrains Mono"/>
+                <a:ea typeface="JetBrains Mono"/>
+                <a:cs typeface="JetBrains Mono"/>
+                <a:sym typeface="JetBrains Mono"/>
+                <a:solidFill>
+                  <a:srgbClr val="c0392b"/>
+                </a:solidFill>
+              </a:rPr>
+              <a:t>const</a:t>
+            </a:r>
+            <a:r>
+              <a:rPr lang="ru-RU" altLang="en-US" sz="2300">
+                <a:latin typeface="JetBrains Mono"/>
+                <a:ea typeface="JetBrains Mono"/>
+                <a:cs typeface="JetBrains Mono"/>
+                <a:sym typeface="JetBrains Mono"/>
+                <a:solidFill>
+                  <a:srgbClr val="1a1a1a"/>
+                </a:solidFill>
+              </a:rPr>
+              <a:t> addBase = (x) =&gt; x + base;</a:t>
+            </a:r>
+          </a:p>
+        </p:txBody>
+      </p:sp>
+    </p:spTree>
+  </p:cSld>
+  <p:clrMapOvr>
+    <a:masterClrMapping/>
+  </p:clrMapOvr>
+</p:sld>
+</file>
+
+<file path=ppt/slides/slide32.xml><?xml version="1.0" encoding="utf-8"?>
+<p:sld xmlns:a="http://schemas.openxmlformats.org/drawingml/2006/main" xmlns:p="http://schemas.openxmlformats.org/presentationml/2006/main" xmlns:r="http://schemas.openxmlformats.org/officeDocument/2006/relationships">
+  <p:cSld>
+    <p:spTree>
+      <p:nvGrpSpPr>
+        <p:cNvPr id="157" name="Shape 157"/>
+        <p:cNvGrpSpPr/>
+        <p:nvPr/>
+      </p:nvGrpSpPr>
+      <p:grpSpPr>
+        <a:xfrm>
+          <a:off x="0" y="0"/>
+          <a:ext cx="0" cy="0"/>
+          <a:chOff x="0" y="0"/>
+          <a:chExt cx="0" cy="0"/>
+        </a:xfrm>
+      </p:grpSpPr>
+      <p:sp>
+        <p:nvSpPr>
+          <p:cNvPr id="158" name="Google Shape;158;g3d09141108f_0_60"/>
+          <p:cNvSpPr txBox="1"/>
+          <p:nvPr>
+            <p:ph idx="12" type="sldNum"/>
+          </p:nvPr>
+        </p:nvSpPr>
+        <p:spPr>
+          <a:xfrm>
+            <a:off x="8610600" y="6356350"/>
+            <a:ext cx="2743200" cy="365100"/>
+          </a:xfrm>
+          <a:prstGeom prst="rect">
+            <a:avLst/>
+          </a:prstGeom>
+        </p:spPr>
+        <p:txBody>
+          <a:bodyPr anchorCtr="0" anchor="t" bIns="45700" lIns="91425" spcFirstLastPara="1" rIns="91425" wrap="square" tIns="45700">
+            <a:noAutofit/>
+          </a:bodyPr>
+          <a:lstStyle/>
+          <a:p>
+            <a:pPr indent="0" lvl="0" marL="0" rtl="0" algn="r">
+              <a:spcBef>
+                <a:spcPts val="0"/>
+              </a:spcBef>
+              <a:spcAft>
+                <a:spcPts val="0"/>
+              </a:spcAft>
+              <a:buNone/>
+            </a:pPr>
+            <a:fld id="{00000000-1234-1234-1234-123412341234}" type="slidenum">
+              <a:rPr lang="ru-RU"/>
+              <a:t>‹#›</a:t>
+            </a:fld>
+            <a:endParaRPr/>
+          </a:p>
+        </p:txBody>
+      </p:sp>
+      <p:sp>
+        <p:nvSpPr>
+          <p:cNvPr id="159" name="Google Shape;159;g3d09141108f_0_60"/>
+          <p:cNvSpPr txBox="1"/>
+          <p:nvPr>
+            <p:ph idx="1" type="body"/>
+          </p:nvPr>
+        </p:nvSpPr>
+        <p:spPr>
+          <a:xfrm>
+            <a:off x="838198" y="543878"/>
+            <a:ext cx="10942500" cy="1219200"/>
+          </a:xfrm>
+          <a:prstGeom prst="rect">
+            <a:avLst/>
+          </a:prstGeom>
+        </p:spPr>
+        <p:txBody>
+          <a:bodyPr anchorCtr="0" anchor="ctr" bIns="45700" lIns="91425" spcFirstLastPara="1" rIns="91425" wrap="square" tIns="45700">
+            <a:noAutofit/>
+          </a:bodyPr>
+          <a:lstStyle/>
+          <a:p>
+            <a:pPr indent="0" lvl="0" marL="0" rtl="0" algn="l">
+              <a:spcBef>
+                <a:spcPts val="1000"/>
+              </a:spcBef>
+              <a:spcAft>
+                <a:spcPts val="0"/>
+              </a:spcAft>
+              <a:buNone/>
+            </a:pPr>
+            <a:r>
+              <a:rPr lang="ru-RU"/>
+              <a:t>Функции как значения: JS</a:t>
+            </a:r>
+          </a:p>
+        </p:txBody>
+      </p:sp>
+      <p:sp>
+        <p:nvSpPr>
+          <p:cNvPr id="160" name="Google Shape;160;g3d09141108f_0_60"/>
+          <p:cNvSpPr txBox="1"/>
+          <p:nvPr>
+            <p:ph idx="2" type="body"/>
+          </p:nvPr>
+        </p:nvSpPr>
+        <p:spPr>
+          <a:xfrm>
+            <a:off x="1138200" y="1763063"/>
+            <a:ext cx="10642500" cy="3254400"/>
+          </a:xfrm>
+          <a:prstGeom prst="rect">
+            <a:avLst/>
+          </a:prstGeom>
+        </p:spPr>
+        <p:txBody>
+          <a:bodyPr anchorCtr="0" anchor="t" bIns="45700" lIns="91425" spcFirstLastPara="1" rIns="91425" wrap="square" tIns="45700">
+            <a:noAutofit/>
+          </a:bodyPr>
+          <a:lstStyle/>
+          <a:p>
+            <a:pPr indent="0" lvl="0" marL="0" rtl="0" algn="l">
+              <a:spcBef>
+                <a:spcPts val="1000"/>
+              </a:spcBef>
+              <a:spcAft>
+                <a:spcPts val="0"/>
+              </a:spcAft>
+              <a:buNone/>
+            </a:pPr>
+            <a:endParaRPr sz="2300">
+              <a:latin typeface="JetBrains Mono"/>
+              <a:ea typeface="JetBrains Mono"/>
+              <a:cs typeface="JetBrains Mono"/>
+              <a:sym typeface="JetBrains Mono"/>
+            </a:endParaRPr>
+            <a:r>
+              <a:rPr lang="ru-RU" altLang="en-US" sz="2300">
+                <a:latin typeface="JetBrains Mono"/>
+                <a:ea typeface="JetBrains Mono"/>
+                <a:cs typeface="JetBrains Mono"/>
+                <a:sym typeface="JetBrains Mono"/>
+                <a:solidFill>
+                  <a:srgbClr val="95a5a6"/>
+                </a:solidFill>
+              </a:rPr>
+              <a:t>// const triple = multiply(3)</a:t>
+            </a:r>
+          </a:p>
+          <a:p>
+            <a:pPr indent="0" lvl="0" marL="0" rtl="0" algn="l">
+              <a:spcBef>
+                <a:spcPts val="1000"/>
+              </a:spcBef>
+              <a:spcAft>
+                <a:spcPts val="0"/>
+              </a:spcAft>
+              <a:buNone/>
+            </a:pPr>
+            <a:endParaRPr sz="2300">
+              <a:latin typeface="JetBrains Mono"/>
+              <a:ea typeface="JetBrains Mono"/>
+              <a:cs typeface="JetBrains Mono"/>
+              <a:sym typeface="JetBrains Mono"/>
+            </a:endParaRPr>
+            <a:r>
+              <a:rPr lang="ru-RU" altLang="en-US" sz="2300">
+                <a:latin typeface="JetBrains Mono"/>
+                <a:ea typeface="JetBrains Mono"/>
+                <a:cs typeface="JetBrains Mono"/>
+                <a:sym typeface="JetBrains Mono"/>
+                <a:solidFill>
+                  <a:srgbClr val="95a5a6"/>
+                </a:solidFill>
+              </a:rPr>
+              <a:t>// const addBase = (x) =&gt; x + base</a:t>
+            </a:r>
+          </a:p>
+          <a:p>
+            <a:pPr indent="0" lvl="0" marL="0" rtl="0" algn="l">
+              <a:spcBef>
+                <a:spcPts val="1000"/>
+              </a:spcBef>
+              <a:spcAft>
+                <a:spcPts val="0"/>
+              </a:spcAft>
+              <a:buNone/>
+            </a:pPr>
+            <a:endParaRPr sz="2300">
+              <a:latin typeface="JetBrains Mono"/>
+              <a:ea typeface="JetBrains Mono"/>
+              <a:cs typeface="JetBrains Mono"/>
+              <a:sym typeface="JetBrains Mono"/>
+            </a:endParaRPr>
+            <a:r>
+              <a:rPr lang="ru-RU" altLang="en-US" sz="2300">
+                <a:latin typeface="JetBrains Mono"/>
+                <a:ea typeface="JetBrains Mono"/>
+                <a:cs typeface="JetBrains Mono"/>
+                <a:sym typeface="JetBrains Mono"/>
+                <a:solidFill>
+                  <a:srgbClr val="95a5a6"/>
+                </a:solidFill>
+              </a:rPr>
+              <a:t>// HOF: map принимает функцию аргументом</a:t>
+            </a:r>
+          </a:p>
+          <a:p>
+            <a:pPr indent="0" lvl="0" marL="0" rtl="0" algn="l">
+              <a:spcBef>
+                <a:spcPts val="1000"/>
+              </a:spcBef>
+              <a:spcAft>
+                <a:spcPts val="0"/>
+              </a:spcAft>
+              <a:buNone/>
+            </a:pPr>
+            <a:endParaRPr sz="2300">
+              <a:latin typeface="JetBrains Mono"/>
+              <a:ea typeface="JetBrains Mono"/>
+              <a:cs typeface="JetBrains Mono"/>
+              <a:sym typeface="JetBrains Mono"/>
+            </a:endParaRPr>
+            <a:r>
+              <a:rPr lang="ru-RU" altLang="en-US" sz="2300">
+                <a:latin typeface="JetBrains Mono"/>
+                <a:ea typeface="JetBrains Mono"/>
+                <a:cs typeface="JetBrains Mono"/>
+                <a:sym typeface="JetBrains Mono"/>
+                <a:solidFill>
+                  <a:srgbClr val="c0392b"/>
+                </a:solidFill>
+              </a:rPr>
+              <a:t>const</a:t>
+            </a:r>
+            <a:r>
+              <a:rPr lang="ru-RU" altLang="en-US" sz="2300">
+                <a:latin typeface="JetBrains Mono"/>
+                <a:ea typeface="JetBrains Mono"/>
+                <a:cs typeface="JetBrains Mono"/>
+                <a:sym typeface="JetBrains Mono"/>
+                <a:solidFill>
+                  <a:srgbClr val="1a1a1a"/>
+                </a:solidFill>
+              </a:rPr>
+              <a:t> result = [</a:t>
+            </a:r>
+            <a:r>
+              <a:rPr lang="ru-RU" altLang="en-US" sz="2300">
+                <a:latin typeface="JetBrains Mono"/>
+                <a:ea typeface="JetBrains Mono"/>
+                <a:cs typeface="JetBrains Mono"/>
+                <a:sym typeface="JetBrains Mono"/>
+                <a:solidFill>
+                  <a:srgbClr val="7f8c8d"/>
+                </a:solidFill>
+              </a:rPr>
+              <a:t>1</a:t>
+            </a:r>
+            <a:r>
+              <a:rPr lang="ru-RU" altLang="en-US" sz="2300">
+                <a:latin typeface="JetBrains Mono"/>
+                <a:ea typeface="JetBrains Mono"/>
+                <a:cs typeface="JetBrains Mono"/>
+                <a:sym typeface="JetBrains Mono"/>
+                <a:solidFill>
+                  <a:srgbClr val="1a1a1a"/>
+                </a:solidFill>
+              </a:rPr>
+              <a:t>, </a:t>
+            </a:r>
+            <a:r>
+              <a:rPr lang="ru-RU" altLang="en-US" sz="2300">
+                <a:latin typeface="JetBrains Mono"/>
+                <a:ea typeface="JetBrains Mono"/>
+                <a:cs typeface="JetBrains Mono"/>
+                <a:sym typeface="JetBrains Mono"/>
+                <a:solidFill>
+                  <a:srgbClr val="7f8c8d"/>
+                </a:solidFill>
+              </a:rPr>
+              <a:t>2</a:t>
+            </a:r>
+            <a:r>
+              <a:rPr lang="ru-RU" altLang="en-US" sz="2300">
+                <a:latin typeface="JetBrains Mono"/>
+                <a:ea typeface="JetBrains Mono"/>
+                <a:cs typeface="JetBrains Mono"/>
+                <a:sym typeface="JetBrains Mono"/>
+                <a:solidFill>
+                  <a:srgbClr val="1a1a1a"/>
+                </a:solidFill>
+              </a:rPr>
+              <a:t>, </a:t>
+            </a:r>
+            <a:r>
+              <a:rPr lang="ru-RU" altLang="en-US" sz="2300">
+                <a:latin typeface="JetBrains Mono"/>
+                <a:ea typeface="JetBrains Mono"/>
+                <a:cs typeface="JetBrains Mono"/>
+                <a:sym typeface="JetBrains Mono"/>
+                <a:solidFill>
+                  <a:srgbClr val="7f8c8d"/>
+                </a:solidFill>
+              </a:rPr>
+              <a:t>3</a:t>
+            </a:r>
+            <a:r>
+              <a:rPr lang="ru-RU" altLang="en-US" sz="2300">
+                <a:latin typeface="JetBrains Mono"/>
+                <a:ea typeface="JetBrains Mono"/>
+                <a:cs typeface="JetBrains Mono"/>
+                <a:sym typeface="JetBrains Mono"/>
+                <a:solidFill>
+                  <a:srgbClr val="1a1a1a"/>
+                </a:solidFill>
+              </a:rPr>
+              <a:t>, </a:t>
+            </a:r>
+            <a:r>
+              <a:rPr lang="ru-RU" altLang="en-US" sz="2300">
+                <a:latin typeface="JetBrains Mono"/>
+                <a:ea typeface="JetBrains Mono"/>
+                <a:cs typeface="JetBrains Mono"/>
+                <a:sym typeface="JetBrains Mono"/>
+                <a:solidFill>
+                  <a:srgbClr val="7f8c8d"/>
+                </a:solidFill>
+              </a:rPr>
+              <a:t>4</a:t>
+            </a:r>
+            <a:r>
+              <a:rPr lang="ru-RU" altLang="en-US" sz="2300">
+                <a:latin typeface="JetBrains Mono"/>
+                <a:ea typeface="JetBrains Mono"/>
+                <a:cs typeface="JetBrains Mono"/>
+                <a:sym typeface="JetBrains Mono"/>
+                <a:solidFill>
+                  <a:srgbClr val="1a1a1a"/>
+                </a:solidFill>
+              </a:rPr>
+              <a:t>, </a:t>
+            </a:r>
+            <a:r>
+              <a:rPr lang="ru-RU" altLang="en-US" sz="2300">
+                <a:latin typeface="JetBrains Mono"/>
+                <a:ea typeface="JetBrains Mono"/>
+                <a:cs typeface="JetBrains Mono"/>
+                <a:sym typeface="JetBrains Mono"/>
+                <a:solidFill>
+                  <a:srgbClr val="7f8c8d"/>
+                </a:solidFill>
+              </a:rPr>
+              <a:t>5</a:t>
+            </a:r>
+            <a:r>
+              <a:rPr lang="ru-RU" altLang="en-US" sz="2300">
+                <a:latin typeface="JetBrains Mono"/>
+                <a:ea typeface="JetBrains Mono"/>
+                <a:cs typeface="JetBrains Mono"/>
+                <a:sym typeface="JetBrains Mono"/>
+                <a:solidFill>
+                  <a:srgbClr val="1a1a1a"/>
+                </a:solidFill>
+              </a:rPr>
+              <a:t>].map(triple);</a:t>
+            </a:r>
+          </a:p>
+          <a:p>
+            <a:pPr indent="0" lvl="0" marL="0" rtl="0" algn="l">
+              <a:spcBef>
+                <a:spcPts val="1000"/>
+              </a:spcBef>
+              <a:spcAft>
+                <a:spcPts val="0"/>
+              </a:spcAft>
+              <a:buNone/>
+            </a:pPr>
+            <a:endParaRPr sz="2300">
+              <a:latin typeface="JetBrains Mono"/>
+              <a:ea typeface="JetBrains Mono"/>
+              <a:cs typeface="JetBrains Mono"/>
+              <a:sym typeface="JetBrains Mono"/>
+            </a:endParaRPr>
+            <a:r>
+              <a:rPr lang="ru-RU" altLang="en-US" sz="2300">
+                <a:latin typeface="JetBrains Mono"/>
+                <a:ea typeface="JetBrains Mono"/>
+                <a:cs typeface="JetBrains Mono"/>
+                <a:sym typeface="JetBrains Mono"/>
+                <a:solidFill>
+                  <a:srgbClr val="95a5a6"/>
+                </a:solidFill>
+              </a:rPr>
+              <a:t>// [3, 6, 9, 12, 15]</a:t>
+            </a:r>
+          </a:p>
+        </p:txBody>
+      </p:sp>
+    </p:spTree>
+  </p:cSld>
+  <p:clrMapOvr>
+    <a:masterClrMapping/>
+  </p:clrMapOvr>
+</p:sld>
+</file>
+
+<file path=ppt/slides/slide33.xml><?xml version="1.0" encoding="utf-8"?>
+<p:sld xmlns:a="http://schemas.openxmlformats.org/drawingml/2006/main" xmlns:p="http://schemas.openxmlformats.org/presentationml/2006/main" xmlns:r="http://schemas.openxmlformats.org/officeDocument/2006/relationships">
+  <p:cSld>
+    <p:spTree>
+      <p:nvGrpSpPr>
+        <p:cNvPr id="178" name="Shape 178"/>
+        <p:cNvGrpSpPr/>
+        <p:nvPr/>
+      </p:nvGrpSpPr>
+      <p:grpSpPr>
+        <a:xfrm>
+          <a:off x="0" y="0"/>
+          <a:ext cx="0" cy="0"/>
+          <a:chOff x="0" y="0"/>
+          <a:chExt cx="0" cy="0"/>
+        </a:xfrm>
+      </p:grpSpPr>
+      <p:sp>
+        <p:nvSpPr>
+          <p:cNvPr id="179" name="Google Shape;179;p5"/>
+          <p:cNvSpPr txBox="1"/>
+          <p:nvPr/>
+        </p:nvSpPr>
+        <p:spPr>
+          <a:xfrm>
+            <a:off x="6096000" y="1594852"/>
+            <a:ext cx="5241925" cy="1063625"/>
+          </a:xfrm>
+          <a:prstGeom prst="rect">
+            <a:avLst/>
+          </a:prstGeom>
+          <a:noFill/>
+          <a:ln>
+            <a:noFill/>
+          </a:ln>
+        </p:spPr>
+        <p:txBody>
+          <a:bodyPr anchorCtr="0" anchor="t" bIns="45700" lIns="91425" spcFirstLastPara="1" rIns="91425" wrap="square" tIns="45700">
+            <a:noAutofit/>
+          </a:bodyPr>
+          <a:lstStyle/>
+          <a:p>
+            <a:pPr indent="0" lvl="0" marL="0" marR="0" rtl="0" algn="l">
+              <a:lnSpc>
+                <a:spcPct val="90000"/>
+              </a:lnSpc>
+              <a:spcBef>
+                <a:spcPts val="0"/>
+              </a:spcBef>
+              <a:spcAft>
+                <a:spcPts val="0"/>
+              </a:spcAft>
+              <a:buClr>
+                <a:schemeClr val="dk1"/>
+              </a:buClr>
+              <a:buSzPts val="4400"/>
+              <a:buFont typeface="Arial"/>
+              <a:buNone/>
+            </a:pPr>
+            <a:r>
+              <a:rPr b="1" i="1" lang="ru-RU" sz="4400">
+                <a:solidFill>
+                  <a:schemeClr val="dk1"/>
+                </a:solidFill>
+              </a:rPr>
+              <a:t>Павел Аргентов</a:t>
+            </a:r>
+            <a:endParaRPr b="0" i="0" sz="2800" u="none" cap="none" strike="noStrike">
+              <a:solidFill>
+                <a:schemeClr val="dk1"/>
+              </a:solidFill>
+              <a:latin typeface="Calibri"/>
+              <a:ea typeface="Calibri"/>
+              <a:cs typeface="Calibri"/>
+              <a:sym typeface="Calibri"/>
+            </a:endParaRPr>
+          </a:p>
+        </p:txBody>
+      </p:sp>
+      <p:sp>
+        <p:nvSpPr>
+          <p:cNvPr id="180" name="Google Shape;180;p5"/>
+          <p:cNvSpPr txBox="1"/>
+          <p:nvPr/>
+        </p:nvSpPr>
+        <p:spPr>
+          <a:xfrm>
+            <a:off x="6110607" y="3239501"/>
+            <a:ext cx="5241925" cy="2097882"/>
+          </a:xfrm>
+          <a:prstGeom prst="rect">
+            <a:avLst/>
+          </a:prstGeom>
+          <a:noFill/>
+          <a:ln>
+            <a:noFill/>
+          </a:ln>
+        </p:spPr>
+        <p:txBody>
+          <a:bodyPr anchorCtr="0" anchor="t" bIns="45700" lIns="91425" spcFirstLastPara="1" rIns="91425" wrap="square" tIns="45700">
+            <a:noAutofit/>
+          </a:bodyPr>
+          <a:lstStyle/>
+          <a:p>
+            <a:pPr indent="0" lvl="0" marL="0" marR="0" rtl="0" algn="l">
+              <a:lnSpc>
+                <a:spcPct val="90000"/>
+              </a:lnSpc>
+              <a:spcBef>
+                <a:spcPts val="1000"/>
+              </a:spcBef>
+              <a:spcAft>
+                <a:spcPts val="0"/>
+              </a:spcAft>
+              <a:buClr>
+                <a:schemeClr val="dk1"/>
+              </a:buClr>
+              <a:buSzPts val="2800"/>
+              <a:buFont typeface="Arial"/>
+              <a:buNone/>
+            </a:pPr>
+            <a:r>
+              <a:rPr b="0" i="1" lang="ru-RU" sz="2800" u="none" cap="none" strike="noStrike">
+                <a:solidFill>
+                  <a:schemeClr val="dk1"/>
+                </a:solidFill>
+                <a:latin typeface="Arial"/>
+                <a:ea typeface="Arial"/>
+                <a:cs typeface="Arial"/>
+                <a:sym typeface="Arial"/>
+              </a:rPr>
+              <a:t>Tg: @</a:t>
+            </a:r>
+            <a:r>
+              <a:rPr i="1" lang="ru-RU" sz="2800">
+                <a:solidFill>
+                  <a:schemeClr val="dk1"/>
+                </a:solidFill>
+              </a:rPr>
+              <a:t>argent_smith</a:t>
+            </a:r>
+            <a:endParaRPr b="0" i="0" sz="1400" u="none" cap="none" strike="noStrike">
+              <a:solidFill>
+                <a:srgbClr val="000000"/>
+              </a:solidFill>
+              <a:latin typeface="Arial"/>
+              <a:ea typeface="Arial"/>
+              <a:cs typeface="Arial"/>
+              <a:sym typeface="Arial"/>
+            </a:endParaRPr>
+          </a:p>
+          <a:p>
+            <a:pPr indent="0" lvl="0" marL="0" marR="0" rtl="0" algn="l">
+              <a:lnSpc>
+                <a:spcPct val="90000"/>
+              </a:lnSpc>
+              <a:spcBef>
+                <a:spcPts val="1000"/>
+              </a:spcBef>
+              <a:spcAft>
+                <a:spcPts val="0"/>
+              </a:spcAft>
+              <a:buClr>
+                <a:schemeClr val="dk1"/>
+              </a:buClr>
+              <a:buSzPts val="2800"/>
+              <a:buFont typeface="Arial"/>
+              <a:buNone/>
+            </a:pPr>
+            <a:r>
+              <a:t/>
+            </a:r>
+            <a:endParaRPr b="0" i="1" sz="2800" u="none" cap="none" strike="noStrike">
+              <a:solidFill>
+                <a:schemeClr val="dk1"/>
+              </a:solidFill>
+              <a:latin typeface="Arial"/>
+              <a:ea typeface="Arial"/>
+              <a:cs typeface="Arial"/>
+              <a:sym typeface="Arial"/>
+            </a:endParaRPr>
+          </a:p>
+          <a:p>
+            <a:pPr indent="0" lvl="0" marL="0" marR="0" rtl="0" algn="l">
+              <a:lnSpc>
+                <a:spcPct val="90000"/>
+              </a:lnSpc>
+              <a:spcBef>
+                <a:spcPts val="1000"/>
+              </a:spcBef>
+              <a:spcAft>
+                <a:spcPts val="0"/>
+              </a:spcAft>
+              <a:buClr>
+                <a:schemeClr val="dk1"/>
+              </a:buClr>
+              <a:buSzPts val="2800"/>
+              <a:buFont typeface="Arial"/>
+              <a:buNone/>
+            </a:pPr>
+            <a:r>
+              <a:t/>
+            </a:r>
+            <a:endParaRPr b="0" i="1" sz="2800" u="none" cap="none" strike="noStrike">
+              <a:solidFill>
+                <a:schemeClr val="dk1"/>
+              </a:solidFill>
+              <a:latin typeface="Arial"/>
+              <a:ea typeface="Arial"/>
+              <a:cs typeface="Arial"/>
+              <a:sym typeface="Arial"/>
+            </a:endParaRPr>
+          </a:p>
+        </p:txBody>
+      </p:sp>
+      <p:pic>
+        <p:nvPicPr>
+          <p:cNvPr id="181" name="Google Shape;181;p5"/>
+          <p:cNvPicPr preferRelativeResize="0"/>
+          <p:nvPr/>
+        </p:nvPicPr>
+        <p:blipFill rotWithShape="1">
+          <a:blip r:embed="rId3">
+            <a:alphaModFix/>
+          </a:blip>
+          <a:srcRect b="0" l="0" r="0" t="0"/>
+          <a:stretch/>
+        </p:blipFill>
+        <p:spPr>
+          <a:xfrm>
+            <a:off x="567954" y="810796"/>
+            <a:ext cx="4857410" cy="4857410"/>
+          </a:xfrm>
+          <a:prstGeom prst="rect">
+            <a:avLst/>
+          </a:prstGeom>
+          <a:noFill/>
+          <a:ln>
+            <a:noFill/>
+          </a:ln>
+        </p:spPr>
+      </p:pic>
     </p:spTree>
   </p:cSld>
   <p:clrMapOvr>

--- a/FP_Talk_2026/nastachku/final_presentation.pptx
+++ b/FP_Talk_2026/nastachku/final_presentation.pptx
@@ -40,6 +40,14 @@
     <p:sldId id="292" r:id="rId51"/>
     <p:sldId id="293" r:id="rId52"/>
     <p:sldId id="294" r:id="rId53"/>
+    <p:sldId id="296" r:id="rId55"/>
+    <p:sldId id="297" r:id="rId56"/>
+    <p:sldId id="303" r:id="rId62"/>
+    <p:sldId id="298" r:id="rId57"/>
+    <p:sldId id="299" r:id="rId58"/>
+    <p:sldId id="300" r:id="rId59"/>
+    <p:sldId id="301" r:id="rId60"/>
+    <p:sldId id="302" r:id="rId61"/>
     <p:sldId id="295" r:id="rId54"/>
   </p:sldIdLst>
   <p:sldSz cy="6858000" cx="12192000"/>
@@ -31003,7 +31011,7 @@
   <p:cSld>
     <p:spTree>
       <p:nvGrpSpPr>
-        <p:cNvPr id="178" name="Shape 178"/>
+        <p:cNvPr id="116" name="Shape 116"/>
         <p:cNvGrpSpPr/>
         <p:nvPr/>
       </p:nvGrpSpPr>
@@ -31017,22 +31025,59 @@
       </p:grpSpPr>
       <p:sp>
         <p:nvSpPr>
-          <p:cNvPr id="179" name="Google Shape;179;p5"/>
+          <p:cNvPr id="117" name="Google Shape;117;g3d09141108f_0_27"/>
           <p:cNvSpPr txBox="1"/>
-          <p:nvPr/>
+          <p:nvPr>
+            <p:ph type="title"/>
+          </p:nvPr>
         </p:nvSpPr>
         <p:spPr>
           <a:xfrm>
-            <a:off x="6096000" y="1594852"/>
-            <a:ext cx="5241925" cy="1063625"/>
+            <a:off x="838200" y="2766218"/>
+            <a:ext cx="10515600" cy="1325700"/>
           </a:xfrm>
           <a:prstGeom prst="rect">
             <a:avLst/>
           </a:prstGeom>
-          <a:noFill/>
-          <a:ln>
-            <a:noFill/>
-          </a:ln>
+        </p:spPr>
+        <p:txBody>
+          <a:bodyPr anchorCtr="0" anchor="ctr" bIns="45700" lIns="91425" spcFirstLastPara="1" rIns="91425" wrap="square" tIns="45700">
+            <a:noAutofit/>
+          </a:bodyPr>
+          <a:lstStyle/>
+          <a:p>
+            <a:pPr indent="0" lvl="0" marL="0" rtl="0" algn="l">
+              <a:spcBef>
+                <a:spcPts val="1000"/>
+              </a:spcBef>
+              <a:spcAft>
+                <a:spcPts val="0"/>
+              </a:spcAft>
+              <a:buNone/>
+            </a:pPr>
+            <a:r>
+              <a:rPr lang="ru-RU"/>
+              <a:t>Ссылочная прозрачность</a:t>
+            </a:r>
+          </a:p>
+        </p:txBody>
+      </p:sp>
+      <p:sp>
+        <p:nvSpPr>
+          <p:cNvPr id="118" name="Google Shape;118;g3d09141108f_0_27"/>
+          <p:cNvSpPr txBox="1"/>
+          <p:nvPr>
+            <p:ph idx="12" type="sldNum"/>
+          </p:nvPr>
+        </p:nvSpPr>
+        <p:spPr>
+          <a:xfrm>
+            <a:off x="8610600" y="6356350"/>
+            <a:ext cx="2743200" cy="365100"/>
+          </a:xfrm>
+          <a:prstGeom prst="rect">
+            <a:avLst/>
+          </a:prstGeom>
         </p:spPr>
         <p:txBody>
           <a:bodyPr anchorCtr="0" anchor="t" bIns="45700" lIns="91425" spcFirstLastPara="1" rIns="91425" wrap="square" tIns="45700">
@@ -31040,10 +31085,7 @@
           </a:bodyPr>
           <a:lstStyle/>
           <a:p>
-            <a:pPr indent="0" lvl="0" marL="0" marR="0" rtl="0" algn="l">
-              <a:lnSpc>
-                <a:spcPct val="90000"/>
-              </a:lnSpc>
+            <a:pPr indent="0" lvl="0" marL="0" rtl="0" algn="r">
               <a:spcBef>
                 <a:spcPts val="0"/>
               </a:spcBef>
@@ -31051,50 +31093,61 @@
                 <a:spcPts val="0"/>
               </a:spcAft>
               <a:buClr>
-                <a:schemeClr val="dk1"/>
+                <a:srgbClr val="000000"/>
               </a:buClr>
-              <a:buSzPts val="4400"/>
+              <a:buSzPts val="1800"/>
               <a:buFont typeface="Arial"/>
               <a:buNone/>
             </a:pPr>
-            <a:r>
-              <a:rPr b="1" i="1" lang="ru-RU" sz="4400">
-                <a:solidFill>
-                  <a:schemeClr val="dk1"/>
-                </a:solidFill>
-              </a:rPr>
-              <a:t>Павел Аргентов</a:t>
-            </a:r>
-            <a:endParaRPr b="0" i="0" sz="2800" u="none" cap="none" strike="noStrike">
-              <a:solidFill>
-                <a:schemeClr val="dk1"/>
-              </a:solidFill>
-              <a:latin typeface="Calibri"/>
-              <a:ea typeface="Calibri"/>
-              <a:cs typeface="Calibri"/>
-              <a:sym typeface="Calibri"/>
-            </a:endParaRPr>
+            <a:fld id="{00000000-1234-1234-1234-123412341234}" type="slidenum">
+              <a:rPr lang="ru-RU"/>
+              <a:t>‹#›</a:t>
+            </a:fld>
+            <a:endParaRPr/>
           </a:p>
         </p:txBody>
       </p:sp>
+    </p:spTree>
+  </p:cSld>
+  <p:clrMapOvr>
+    <a:masterClrMapping/>
+  </p:clrMapOvr>
+</p:sld>
+</file>
+
+<file path=ppt/slides/slide34.xml><?xml version="1.0" encoding="utf-8"?>
+<p:sld xmlns:a="http://schemas.openxmlformats.org/drawingml/2006/main" xmlns:p="http://schemas.openxmlformats.org/presentationml/2006/main" xmlns:r="http://schemas.openxmlformats.org/officeDocument/2006/relationships">
+  <p:cSld>
+    <p:spTree>
+      <p:nvGrpSpPr>
+        <p:cNvPr id="122" name="Shape 122"/>
+        <p:cNvGrpSpPr/>
+        <p:nvPr/>
+      </p:nvGrpSpPr>
+      <p:grpSpPr>
+        <a:xfrm>
+          <a:off x="0" y="0"/>
+          <a:ext cx="0" cy="0"/>
+          <a:chOff x="0" y="0"/>
+          <a:chExt cx="0" cy="0"/>
+        </a:xfrm>
+      </p:grpSpPr>
       <p:sp>
         <p:nvSpPr>
-          <p:cNvPr id="180" name="Google Shape;180;p5"/>
+          <p:cNvPr id="123" name="Google Shape;123;g3d09141108f_0_33"/>
           <p:cNvSpPr txBox="1"/>
-          <p:nvPr/>
+          <p:nvPr>
+            <p:ph idx="12" type="sldNum"/>
+          </p:nvPr>
         </p:nvSpPr>
         <p:spPr>
           <a:xfrm>
-            <a:off x="6110607" y="3239501"/>
-            <a:ext cx="5241925" cy="2097882"/>
+            <a:off x="8610600" y="6356350"/>
+            <a:ext cx="2743200" cy="365100"/>
           </a:xfrm>
           <a:prstGeom prst="rect">
             <a:avLst/>
           </a:prstGeom>
-          <a:noFill/>
-          <a:ln>
-            <a:noFill/>
-          </a:ln>
         </p:spPr>
         <p:txBody>
           <a:bodyPr anchorCtr="0" anchor="t" bIns="45700" lIns="91425" spcFirstLastPara="1" rIns="91425" wrap="square" tIns="45700">
@@ -31102,144 +31155,2988 @@
           </a:bodyPr>
           <a:lstStyle/>
           <a:p>
-            <a:pPr indent="0" lvl="0" marL="0" marR="0" rtl="0" algn="l">
-              <a:lnSpc>
-                <a:spcPct val="90000"/>
-              </a:lnSpc>
-              <a:spcBef>
-                <a:spcPts val="1000"/>
+            <a:pPr indent="0" lvl="0" marL="0" rtl="0" algn="r">
+              <a:spcBef>
+                <a:spcPts val="0"/>
               </a:spcBef>
               <a:spcAft>
                 <a:spcPts val="0"/>
               </a:spcAft>
               <a:buClr>
-                <a:schemeClr val="dk1"/>
+                <a:srgbClr val="000000"/>
               </a:buClr>
-              <a:buSzPts val="2800"/>
+              <a:buSzPts val="1800"/>
               <a:buFont typeface="Arial"/>
               <a:buNone/>
             </a:pPr>
-            <a:r>
-              <a:rPr b="0" i="1" lang="ru-RU" sz="2800" u="none" cap="none" strike="noStrike">
-                <a:solidFill>
-                  <a:schemeClr val="dk1"/>
-                </a:solidFill>
-                <a:latin typeface="Arial"/>
-                <a:ea typeface="Arial"/>
-                <a:cs typeface="Arial"/>
-                <a:sym typeface="Arial"/>
-              </a:rPr>
-              <a:t>Tg: @</a:t>
-            </a:r>
-            <a:r>
-              <a:rPr i="1" lang="ru-RU" sz="2800">
-                <a:solidFill>
-                  <a:schemeClr val="dk1"/>
-                </a:solidFill>
-              </a:rPr>
-              <a:t>argent_smith</a:t>
-            </a:r>
-            <a:endParaRPr b="0" i="0" sz="1400" u="none" cap="none" strike="noStrike">
-              <a:solidFill>
-                <a:srgbClr val="000000"/>
-              </a:solidFill>
-              <a:latin typeface="Arial"/>
-              <a:ea typeface="Arial"/>
-              <a:cs typeface="Arial"/>
-              <a:sym typeface="Arial"/>
-            </a:endParaRPr>
-          </a:p>
-          <a:p>
-            <a:pPr indent="0" lvl="0" marL="0" marR="0" rtl="0" algn="l">
-              <a:lnSpc>
-                <a:spcPct val="90000"/>
-              </a:lnSpc>
-              <a:spcBef>
-                <a:spcPts val="1000"/>
-              </a:spcBef>
-              <a:spcAft>
-                <a:spcPts val="0"/>
-              </a:spcAft>
-              <a:buClr>
-                <a:schemeClr val="dk1"/>
-              </a:buClr>
-              <a:buSzPts val="2800"/>
-              <a:buFont typeface="Arial"/>
-              <a:buNone/>
-            </a:pPr>
-            <a:r>
-              <a:t/>
-            </a:r>
-            <a:endParaRPr b="0" i="1" sz="2800" u="none" cap="none" strike="noStrike">
-              <a:solidFill>
-                <a:schemeClr val="dk1"/>
-              </a:solidFill>
-              <a:latin typeface="Arial"/>
-              <a:ea typeface="Arial"/>
-              <a:cs typeface="Arial"/>
-              <a:sym typeface="Arial"/>
-            </a:endParaRPr>
-          </a:p>
-          <a:p>
-            <a:pPr indent="0" lvl="0" marL="0" marR="0" rtl="0" algn="l">
-              <a:lnSpc>
-                <a:spcPct val="90000"/>
-              </a:lnSpc>
-              <a:spcBef>
-                <a:spcPts val="1000"/>
-              </a:spcBef>
-              <a:spcAft>
-                <a:spcPts val="0"/>
-              </a:spcAft>
-              <a:buClr>
-                <a:schemeClr val="dk1"/>
-              </a:buClr>
-              <a:buSzPts val="2800"/>
-              <a:buFont typeface="Arial"/>
-              <a:buNone/>
-            </a:pPr>
-            <a:r>
-              <a:t/>
-            </a:r>
-            <a:endParaRPr b="0" i="1" sz="2800" u="none" cap="none" strike="noStrike">
-              <a:solidFill>
-                <a:schemeClr val="dk1"/>
-              </a:solidFill>
-              <a:latin typeface="Arial"/>
-              <a:ea typeface="Arial"/>
-              <a:cs typeface="Arial"/>
-              <a:sym typeface="Arial"/>
-            </a:endParaRPr>
+            <a:fld id="{00000000-1234-1234-1234-123412341234}" type="slidenum">
+              <a:rPr lang="ru-RU"/>
+              <a:t>‹#›</a:t>
+            </a:fld>
+            <a:endParaRPr/>
           </a:p>
         </p:txBody>
       </p:sp>
-      <p:pic>
-        <p:nvPicPr>
-          <p:cNvPr id="181" name="Google Shape;181;p5"/>
-          <p:cNvPicPr preferRelativeResize="0"/>
-          <p:nvPr/>
-        </p:nvPicPr>
-        <p:blipFill rotWithShape="1">
-          <a:blip r:embed="rId3">
-            <a:alphaModFix/>
-          </a:blip>
-          <a:srcRect b="0" l="0" r="0" t="0"/>
-          <a:stretch/>
-        </p:blipFill>
+      <p:sp>
+        <p:nvSpPr>
+          <p:cNvPr id="124" name="Google Shape;124;g3d09141108f_0_33"/>
+          <p:cNvSpPr txBox="1"/>
+          <p:nvPr>
+            <p:ph idx="1" type="body"/>
+          </p:nvPr>
+        </p:nvSpPr>
         <p:spPr>
           <a:xfrm>
-            <a:off x="567954" y="810796"/>
-            <a:ext cx="4857410" cy="4857410"/>
+            <a:off x="838198" y="543878"/>
+            <a:ext cx="10942500" cy="1219200"/>
           </a:xfrm>
           <a:prstGeom prst="rect">
             <a:avLst/>
           </a:prstGeom>
-          <a:noFill/>
-          <a:ln>
-            <a:noFill/>
-          </a:ln>
         </p:spPr>
-      </p:pic>
+        <p:txBody>
+          <a:bodyPr anchorCtr="0" anchor="ctr" bIns="45700" lIns="91425" spcFirstLastPara="1" rIns="91425" wrap="square" tIns="45700">
+            <a:noAutofit/>
+          </a:bodyPr>
+          <a:lstStyle/>
+          <a:p>
+            <a:pPr indent="0" lvl="0" marL="0" rtl="0" algn="l">
+              <a:spcBef>
+                <a:spcPts val="1000"/>
+              </a:spcBef>
+              <a:spcAft>
+                <a:spcPts val="0"/>
+              </a:spcAft>
+              <a:buNone/>
+            </a:pPr>
+            <a:r>
+              <a:rPr lang="ru-RU"/>
+              <a:t>Ссылочная прозрачность</a:t>
+            </a:r>
+          </a:p>
+        </p:txBody>
+      </p:sp>
+      <p:sp>
+        <p:nvSpPr>
+          <p:cNvPr id="125" name="Google Shape;125;g3d09141108f_0_33"/>
+          <p:cNvSpPr txBox="1"/>
+          <p:nvPr>
+            <p:ph idx="2" type="body"/>
+          </p:nvPr>
+        </p:nvSpPr>
+        <p:spPr>
+          <a:xfrm>
+            <a:off x="838200" y="2170113"/>
+            <a:ext cx="10942500" cy="3254400"/>
+          </a:xfrm>
+          <a:prstGeom prst="rect">
+            <a:avLst/>
+          </a:prstGeom>
+        </p:spPr>
+        <p:txBody>
+          <a:bodyPr anchorCtr="0" anchor="t" bIns="45700" lIns="91425" spcFirstLastPara="1" rIns="91425" wrap="square" tIns="45700">
+            <a:noAutofit/>
+          </a:bodyPr>
+          <a:lstStyle/>
+          <a:p>
+            <a:pPr indent="-406400" lvl="0" marL="457200" rtl="0" algn="l">
+              <a:spcBef>
+                <a:spcPts val="1000"/>
+              </a:spcBef>
+              <a:spcAft>
+                <a:spcPts val="0"/>
+              </a:spcAft>
+              <a:buSzPts val="2800"/>
+            </a:pPr>
+            <a:endParaRPr/>
+            <a:r>
+              <a:rPr lang="ru-RU"/>
+              <a:t>Чистая функция: возвращаемое значение зависит только от аргументов; </a:t>
+            </a:r>
+            <a:r>
+              <a:rPr lang="ru-RU" b="1"/>
+              <a:t>нет побочных эффектов.</a:t>
+            </a:r>
+          </a:p>
+          <a:p>
+            <a:pPr indent="-406400" lvl="0" marL="457200" rtl="0" algn="l">
+              <a:spcBef>
+                <a:spcPts val="1000"/>
+              </a:spcBef>
+              <a:spcAft>
+                <a:spcPts val="0"/>
+              </a:spcAft>
+              <a:buSzPts val="2800"/>
+            </a:pPr>
+            <a:endParaRPr/>
+            <a:r>
+              <a:rPr lang="ru-RU"/>
+              <a:t>Следствия: </a:t>
+            </a:r>
+            <a:r>
+              <a:rPr lang="ru-RU" b="1"/>
+              <a:t>мемоизация; независимость порядка вычислений; data race–free параллелизм.</a:t>
+            </a:r>
+          </a:p>
+          <a:p>
+            <a:pPr indent="-406400" lvl="0" marL="457200" rtl="0" algn="l">
+              <a:spcBef>
+                <a:spcPts val="1000"/>
+              </a:spcBef>
+              <a:spcAft>
+                <a:spcPts val="0"/>
+              </a:spcAft>
+              <a:buSzPts val="2800"/>
+            </a:pPr>
+            <a:endParaRPr/>
+            <a:r>
+              <a:rPr lang="ru-RU"/>
+              <a:t>Эффекты неизбежны (I/O, время, состояние). Стратегия — </a:t>
+            </a:r>
+            <a:r>
+              <a:rPr lang="ru-RU" b="1"/>
+              <a:t>изоляция на границах системы.</a:t>
+            </a:r>
+          </a:p>
+        </p:txBody>
+      </p:sp>
+    </p:spTree>
+  </p:cSld>
+  <p:clrMapOvr>
+    <a:masterClrMapping/>
+  </p:clrMapOvr>
+</p:sld>
+</file>
+
+<file path=ppt/slides/slide35.xml><?xml version="1.0" encoding="utf-8"?>
+<p:sld xmlns:a="http://schemas.openxmlformats.org/drawingml/2006/main" xmlns:p="http://schemas.openxmlformats.org/presentationml/2006/main" xmlns:r="http://schemas.openxmlformats.org/officeDocument/2006/relationships">
+  <p:cSld>
+    <p:spTree>
+      <p:nvGrpSpPr>
+        <p:cNvPr id="150" name="Shape 150"/>
+        <p:cNvGrpSpPr/>
+        <p:nvPr/>
+      </p:nvGrpSpPr>
+      <p:grpSpPr>
+        <a:xfrm>
+          <a:off x="0" y="0"/>
+          <a:ext cx="0" cy="0"/>
+          <a:chOff x="0" y="0"/>
+          <a:chExt cx="0" cy="0"/>
+        </a:xfrm>
+      </p:grpSpPr>
+      <p:sp>
+        <p:nvSpPr>
+          <p:cNvPr id="151" name="Google Shape;151;g3d09141108f_0_54"/>
+          <p:cNvSpPr txBox="1"/>
+          <p:nvPr>
+            <p:ph idx="12" type="sldNum"/>
+          </p:nvPr>
+        </p:nvSpPr>
+        <p:spPr>
+          <a:xfrm>
+            <a:off x="8610600" y="6356350"/>
+            <a:ext cx="2743200" cy="365100"/>
+          </a:xfrm>
+          <a:prstGeom prst="rect">
+            <a:avLst/>
+          </a:prstGeom>
+        </p:spPr>
+        <p:txBody>
+          <a:bodyPr anchorCtr="0" anchor="t" bIns="45700" lIns="91425" spcFirstLastPara="1" rIns="91425" wrap="square" tIns="45700">
+            <a:noAutofit/>
+          </a:bodyPr>
+          <a:lstStyle/>
+          <a:p>
+            <a:pPr indent="0" lvl="0" marL="0" rtl="0" algn="r">
+              <a:spcBef>
+                <a:spcPts val="0"/>
+              </a:spcBef>
+              <a:spcAft>
+                <a:spcPts val="0"/>
+              </a:spcAft>
+              <a:buNone/>
+            </a:pPr>
+            <a:fld id="{00000000-1234-1234-1234-123412341234}" type="slidenum">
+              <a:rPr lang="ru-RU"/>
+              <a:t>‹#›</a:t>
+            </a:fld>
+            <a:endParaRPr/>
+          </a:p>
+        </p:txBody>
+      </p:sp>
+      <p:sp>
+        <p:nvSpPr>
+          <p:cNvPr id="152" name="Google Shape;152;g3d09141108f_0_54"/>
+          <p:cNvSpPr txBox="1"/>
+          <p:nvPr>
+            <p:ph idx="1" type="body"/>
+          </p:nvPr>
+        </p:nvSpPr>
+        <p:spPr>
+          <a:xfrm>
+            <a:off x="838198" y="543878"/>
+            <a:ext cx="10942500" cy="1219200"/>
+          </a:xfrm>
+          <a:prstGeom prst="rect">
+            <a:avLst/>
+          </a:prstGeom>
+        </p:spPr>
+        <p:txBody>
+          <a:bodyPr anchorCtr="0" anchor="ctr" bIns="45700" lIns="91425" spcFirstLastPara="1" rIns="91425" wrap="square" tIns="45700">
+            <a:noAutofit/>
+          </a:bodyPr>
+          <a:lstStyle/>
+          <a:p>
+            <a:pPr indent="0" lvl="0" marL="0" rtl="0" algn="l">
+              <a:spcBef>
+                <a:spcPts val="1000"/>
+              </a:spcBef>
+              <a:spcAft>
+                <a:spcPts val="0"/>
+              </a:spcAft>
+              <a:buNone/>
+            </a:pPr>
+            <a:r>
+              <a:rPr lang="ru-RU"/>
+              <a:t>Ссылочная прозрачность: OCaml</a:t>
+            </a:r>
+          </a:p>
+        </p:txBody>
+      </p:sp>
+      <p:sp>
+        <p:nvSpPr>
+          <p:cNvPr id="153" name="Google Shape;153;g3d09141108f_0_54"/>
+          <p:cNvSpPr txBox="1"/>
+          <p:nvPr>
+            <p:ph idx="2" type="body"/>
+          </p:nvPr>
+        </p:nvSpPr>
+        <p:spPr>
+          <a:xfrm>
+            <a:off x="1138200" y="1763063"/>
+            <a:ext cx="10642500" cy="3254400"/>
+          </a:xfrm>
+          <a:prstGeom prst="rect">
+            <a:avLst/>
+          </a:prstGeom>
+        </p:spPr>
+        <p:txBody>
+          <a:bodyPr anchorCtr="0" anchor="t" bIns="45700" lIns="91425" spcFirstLastPara="1" rIns="91425" wrap="square" tIns="45700">
+            <a:noAutofit/>
+          </a:bodyPr>
+          <a:lstStyle/>
+          <a:p>
+            <a:pPr indent="0" lvl="0" marL="0" rtl="0" algn="l">
+              <a:spcBef>
+                <a:spcPts val="1000"/>
+              </a:spcBef>
+              <a:spcAft>
+                <a:spcPts val="0"/>
+              </a:spcAft>
+              <a:buNone/>
+            </a:pPr>
+            <a:endParaRPr>
+              <a:latin typeface="JetBrains Mono"/>
+              <a:ea typeface="JetBrains Mono"/>
+              <a:cs typeface="JetBrains Mono"/>
+              <a:sym typeface="JetBrains Mono"/>
+            </a:endParaRPr>
+            <a:r>
+              <a:rPr lang="ru-RU" altLang="en-US" sz="2300">
+                <a:latin typeface="JetBrains Mono"/>
+                <a:ea typeface="JetBrains Mono"/>
+                <a:cs typeface="JetBrains Mono"/>
+                <a:sym typeface="JetBrains Mono"/>
+                <a:solidFill>
+                  <a:srgbClr val="c0392b"/>
+                </a:solidFill>
+              </a:rPr>
+              <a:t>let</a:t>
+            </a:r>
+            <a:r>
+              <a:rPr lang="ru-RU" altLang="en-US" sz="2300">
+                <a:latin typeface="JetBrains Mono"/>
+                <a:ea typeface="JetBrains Mono"/>
+                <a:cs typeface="JetBrains Mono"/>
+                <a:sym typeface="JetBrains Mono"/>
+                <a:solidFill>
+                  <a:srgbClr val="1a1a1a"/>
+                </a:solidFill>
+              </a:rPr>
+              <a:t> current_discount = </a:t>
+            </a:r>
+            <a:r>
+              <a:rPr lang="ru-RU" altLang="en-US" sz="2300">
+                <a:latin typeface="JetBrains Mono"/>
+                <a:ea typeface="JetBrains Mono"/>
+                <a:cs typeface="JetBrains Mono"/>
+                <a:sym typeface="JetBrains Mono"/>
+                <a:solidFill>
+                  <a:srgbClr val="c0392b"/>
+                </a:solidFill>
+              </a:rPr>
+              <a:t>ref</a:t>
+            </a:r>
+            <a:r>
+              <a:rPr lang="ru-RU" altLang="en-US" sz="2300">
+                <a:latin typeface="JetBrains Mono"/>
+                <a:ea typeface="JetBrains Mono"/>
+                <a:cs typeface="JetBrains Mono"/>
+                <a:sym typeface="JetBrains Mono"/>
+                <a:solidFill>
+                  <a:srgbClr val="1a1a1a"/>
+                </a:solidFill>
+              </a:rPr>
+              <a:t> </a:t>
+            </a:r>
+            <a:r>
+              <a:rPr lang="ru-RU" altLang="en-US" sz="2300">
+                <a:latin typeface="JetBrains Mono"/>
+                <a:ea typeface="JetBrains Mono"/>
+                <a:cs typeface="JetBrains Mono"/>
+                <a:sym typeface="JetBrains Mono"/>
+                <a:solidFill>
+                  <a:srgbClr val="7f8c8d"/>
+                </a:solidFill>
+              </a:rPr>
+              <a:t>0.1</a:t>
+            </a:r>
+          </a:p>
+          <a:p>
+            <a:pPr indent="0" lvl="0" marL="0" rtl="0" algn="l">
+              <a:spcBef>
+                <a:spcPts val="1000"/>
+              </a:spcBef>
+              <a:spcAft>
+                <a:spcPts val="0"/>
+              </a:spcAft>
+              <a:buNone/>
+            </a:pPr>
+            <a:endParaRPr>
+              <a:latin typeface="JetBrains Mono"/>
+              <a:ea typeface="JetBrains Mono"/>
+              <a:cs typeface="JetBrains Mono"/>
+              <a:sym typeface="JetBrains Mono"/>
+            </a:endParaRPr>
+            <a:r>
+              <a:rPr lang="ru-RU" altLang="en-US" sz="2300">
+                <a:latin typeface="JetBrains Mono"/>
+                <a:ea typeface="JetBrains Mono"/>
+                <a:cs typeface="JetBrains Mono"/>
+                <a:sym typeface="JetBrains Mono"/>
+                <a:solidFill>
+                  <a:srgbClr val="95a5a6"/>
+                </a:solidFill>
+              </a:rPr>
+              <a:t>(* нечистая: глобальное состояние *)</a:t>
+            </a:r>
+          </a:p>
+          <a:p>
+            <a:pPr indent="0" lvl="0" marL="0" rtl="0" algn="l">
+              <a:spcBef>
+                <a:spcPts val="1000"/>
+              </a:spcBef>
+              <a:spcAft>
+                <a:spcPts val="0"/>
+              </a:spcAft>
+              <a:buNone/>
+            </a:pPr>
+            <a:endParaRPr>
+              <a:latin typeface="JetBrains Mono"/>
+              <a:ea typeface="JetBrains Mono"/>
+              <a:cs typeface="JetBrains Mono"/>
+              <a:sym typeface="JetBrains Mono"/>
+            </a:endParaRPr>
+            <a:r>
+              <a:rPr lang="ru-RU" altLang="en-US" sz="2300">
+                <a:latin typeface="JetBrains Mono"/>
+                <a:ea typeface="JetBrains Mono"/>
+                <a:cs typeface="JetBrains Mono"/>
+                <a:sym typeface="JetBrains Mono"/>
+                <a:solidFill>
+                  <a:srgbClr val="c0392b"/>
+                </a:solidFill>
+              </a:rPr>
+              <a:t>let</a:t>
+            </a:r>
+            <a:r>
+              <a:rPr lang="ru-RU" altLang="en-US" sz="2300">
+                <a:latin typeface="JetBrains Mono"/>
+                <a:ea typeface="JetBrains Mono"/>
+                <a:cs typeface="JetBrains Mono"/>
+                <a:sym typeface="JetBrains Mono"/>
+                <a:solidFill>
+                  <a:srgbClr val="1a1a1a"/>
+                </a:solidFill>
+              </a:rPr>
+              <a:t> price_with_global_discount price =</a:t>
+            </a:r>
+          </a:p>
+          <a:p>
+            <a:pPr indent="0" lvl="0" marL="0" rtl="0" algn="l">
+              <a:spcBef>
+                <a:spcPts val="1000"/>
+              </a:spcBef>
+              <a:spcAft>
+                <a:spcPts val="0"/>
+              </a:spcAft>
+              <a:buNone/>
+            </a:pPr>
+            <a:endParaRPr>
+              <a:latin typeface="JetBrains Mono"/>
+              <a:ea typeface="JetBrains Mono"/>
+              <a:cs typeface="JetBrains Mono"/>
+              <a:sym typeface="JetBrains Mono"/>
+            </a:endParaRPr>
+            <a:r>
+              <a:rPr lang="ru-RU" altLang="en-US" sz="2300">
+                <a:latin typeface="JetBrains Mono"/>
+                <a:ea typeface="JetBrains Mono"/>
+                <a:cs typeface="JetBrains Mono"/>
+                <a:sym typeface="JetBrains Mono"/>
+                <a:solidFill>
+                  <a:srgbClr val="1a1a1a"/>
+                </a:solidFill>
+              </a:rPr>
+              <a:t>  price *. (</a:t>
+            </a:r>
+            <a:r>
+              <a:rPr lang="ru-RU" altLang="en-US" sz="2300">
+                <a:latin typeface="JetBrains Mono"/>
+                <a:ea typeface="JetBrains Mono"/>
+                <a:cs typeface="JetBrains Mono"/>
+                <a:sym typeface="JetBrains Mono"/>
+                <a:solidFill>
+                  <a:srgbClr val="7f8c8d"/>
+                </a:solidFill>
+              </a:rPr>
+              <a:t>1.0</a:t>
+            </a:r>
+            <a:r>
+              <a:rPr lang="ru-RU" altLang="en-US" sz="2300">
+                <a:latin typeface="JetBrains Mono"/>
+                <a:ea typeface="JetBrains Mono"/>
+                <a:cs typeface="JetBrains Mono"/>
+                <a:sym typeface="JetBrains Mono"/>
+                <a:solidFill>
+                  <a:srgbClr val="1a1a1a"/>
+                </a:solidFill>
+              </a:rPr>
+              <a:t> -. !current_discount)</a:t>
+            </a:r>
+          </a:p>
+          <a:p>
+            <a:pPr indent="0" lvl="0" marL="0" rtl="0" algn="l">
+              <a:spcBef>
+                <a:spcPts val="1000"/>
+              </a:spcBef>
+              <a:spcAft>
+                <a:spcPts val="0"/>
+              </a:spcAft>
+              <a:buNone/>
+            </a:pPr>
+            <a:endParaRPr>
+              <a:latin typeface="JetBrains Mono"/>
+              <a:ea typeface="JetBrains Mono"/>
+              <a:cs typeface="JetBrains Mono"/>
+              <a:sym typeface="JetBrains Mono"/>
+            </a:endParaRPr>
+            <a:r>
+              <a:rPr lang="ru-RU" altLang="en-US" sz="2300">
+                <a:latin typeface="JetBrains Mono"/>
+                <a:ea typeface="JetBrains Mono"/>
+                <a:cs typeface="JetBrains Mono"/>
+                <a:sym typeface="JetBrains Mono"/>
+                <a:solidFill>
+                  <a:srgbClr val="1a1a1a"/>
+                </a:solidFill>
+              </a:rPr>
+              <a:t/>
+            </a:r>
+          </a:p>
+          <a:p>
+            <a:pPr indent="0" lvl="0" marL="0" rtl="0" algn="l">
+              <a:spcBef>
+                <a:spcPts val="1000"/>
+              </a:spcBef>
+              <a:spcAft>
+                <a:spcPts val="0"/>
+              </a:spcAft>
+              <a:buNone/>
+            </a:pPr>
+            <a:endParaRPr>
+              <a:latin typeface="JetBrains Mono"/>
+              <a:ea typeface="JetBrains Mono"/>
+              <a:cs typeface="JetBrains Mono"/>
+              <a:sym typeface="JetBrains Mono"/>
+            </a:endParaRPr>
+            <a:r>
+              <a:rPr lang="ru-RU" altLang="en-US" sz="2300">
+                <a:latin typeface="JetBrains Mono"/>
+                <a:ea typeface="JetBrains Mono"/>
+                <a:cs typeface="JetBrains Mono"/>
+                <a:sym typeface="JetBrains Mono"/>
+                <a:solidFill>
+                  <a:srgbClr val="95a5a6"/>
+                </a:solidFill>
+              </a:rPr>
+              <a:t>(* чистая *)</a:t>
+            </a:r>
+          </a:p>
+          <a:p>
+            <a:pPr indent="0" lvl="0" marL="0" rtl="0" algn="l">
+              <a:spcBef>
+                <a:spcPts val="1000"/>
+              </a:spcBef>
+              <a:spcAft>
+                <a:spcPts val="0"/>
+              </a:spcAft>
+              <a:buNone/>
+            </a:pPr>
+            <a:endParaRPr>
+              <a:latin typeface="JetBrains Mono"/>
+              <a:ea typeface="JetBrains Mono"/>
+              <a:cs typeface="JetBrains Mono"/>
+              <a:sym typeface="JetBrains Mono"/>
+            </a:endParaRPr>
+            <a:r>
+              <a:rPr lang="ru-RU" altLang="en-US" sz="2300">
+                <a:latin typeface="JetBrains Mono"/>
+                <a:ea typeface="JetBrains Mono"/>
+                <a:cs typeface="JetBrains Mono"/>
+                <a:sym typeface="JetBrains Mono"/>
+                <a:solidFill>
+                  <a:srgbClr val="c0392b"/>
+                </a:solidFill>
+              </a:rPr>
+              <a:t>let</a:t>
+            </a:r>
+            <a:r>
+              <a:rPr lang="ru-RU" altLang="en-US" sz="2300">
+                <a:latin typeface="JetBrains Mono"/>
+                <a:ea typeface="JetBrains Mono"/>
+                <a:cs typeface="JetBrains Mono"/>
+                <a:sym typeface="JetBrains Mono"/>
+                <a:solidFill>
+                  <a:srgbClr val="1a1a1a"/>
+                </a:solidFill>
+              </a:rPr>
+              <a:t> apply_discount rate price =</a:t>
+            </a:r>
+          </a:p>
+          <a:p>
+            <a:pPr indent="0" lvl="0" marL="0" rtl="0" algn="l">
+              <a:spcBef>
+                <a:spcPts val="1000"/>
+              </a:spcBef>
+              <a:spcAft>
+                <a:spcPts val="0"/>
+              </a:spcAft>
+              <a:buNone/>
+            </a:pPr>
+            <a:endParaRPr>
+              <a:latin typeface="JetBrains Mono"/>
+              <a:ea typeface="JetBrains Mono"/>
+              <a:cs typeface="JetBrains Mono"/>
+              <a:sym typeface="JetBrains Mono"/>
+            </a:endParaRPr>
+            <a:r>
+              <a:rPr lang="ru-RU" altLang="en-US" sz="2300">
+                <a:latin typeface="JetBrains Mono"/>
+                <a:ea typeface="JetBrains Mono"/>
+                <a:cs typeface="JetBrains Mono"/>
+                <a:sym typeface="JetBrains Mono"/>
+                <a:solidFill>
+                  <a:srgbClr val="1a1a1a"/>
+                </a:solidFill>
+              </a:rPr>
+              <a:t>  price *. (</a:t>
+            </a:r>
+            <a:r>
+              <a:rPr lang="ru-RU" altLang="en-US" sz="2300">
+                <a:latin typeface="JetBrains Mono"/>
+                <a:ea typeface="JetBrains Mono"/>
+                <a:cs typeface="JetBrains Mono"/>
+                <a:sym typeface="JetBrains Mono"/>
+                <a:solidFill>
+                  <a:srgbClr val="7f8c8d"/>
+                </a:solidFill>
+              </a:rPr>
+              <a:t>1.0</a:t>
+            </a:r>
+            <a:r>
+              <a:rPr lang="ru-RU" altLang="en-US" sz="2300">
+                <a:latin typeface="JetBrains Mono"/>
+                <a:ea typeface="JetBrains Mono"/>
+                <a:cs typeface="JetBrains Mono"/>
+                <a:sym typeface="JetBrains Mono"/>
+                <a:solidFill>
+                  <a:srgbClr val="1a1a1a"/>
+                </a:solidFill>
+              </a:rPr>
+              <a:t> -. rate)</a:t>
+            </a:r>
+          </a:p>
+          <a:p>
+            <a:pPr indent="0" lvl="0" marL="0" rtl="0" algn="l">
+              <a:spcBef>
+                <a:spcPts val="1000"/>
+              </a:spcBef>
+              <a:spcAft>
+                <a:spcPts val="0"/>
+              </a:spcAft>
+              <a:buNone/>
+            </a:pPr>
+            <a:endParaRPr>
+              <a:latin typeface="JetBrains Mono"/>
+              <a:ea typeface="JetBrains Mono"/>
+              <a:cs typeface="JetBrains Mono"/>
+              <a:sym typeface="JetBrains Mono"/>
+            </a:endParaRPr>
+            <a:r>
+              <a:rPr lang="ru-RU" altLang="en-US" sz="2300">
+                <a:latin typeface="JetBrains Mono"/>
+                <a:ea typeface="JetBrains Mono"/>
+                <a:cs typeface="JetBrains Mono"/>
+                <a:sym typeface="JetBrains Mono"/>
+                <a:solidFill>
+                  <a:srgbClr val="1a1a1a"/>
+                </a:solidFill>
+              </a:rPr>
+              <a:t/>
+            </a:r>
+          </a:p>
+          <a:p>
+            <a:pPr indent="0" lvl="0" marL="0" rtl="0" algn="l">
+              <a:spcBef>
+                <a:spcPts val="1000"/>
+              </a:spcBef>
+              <a:spcAft>
+                <a:spcPts val="0"/>
+              </a:spcAft>
+              <a:buNone/>
+            </a:pPr>
+            <a:endParaRPr>
+              <a:latin typeface="JetBrains Mono"/>
+              <a:ea typeface="JetBrains Mono"/>
+              <a:cs typeface="JetBrains Mono"/>
+              <a:sym typeface="JetBrains Mono"/>
+            </a:endParaRPr>
+            <a:r>
+              <a:rPr lang="ru-RU" altLang="en-US" sz="2300">
+                <a:latin typeface="JetBrains Mono"/>
+                <a:ea typeface="JetBrains Mono"/>
+                <a:cs typeface="JetBrains Mono"/>
+                <a:sym typeface="JetBrains Mono"/>
+                <a:solidFill>
+                  <a:srgbClr val="c0392b"/>
+                </a:solidFill>
+              </a:rPr>
+              <a:t>let</a:t>
+            </a:r>
+            <a:r>
+              <a:rPr lang="ru-RU" altLang="en-US" sz="2300">
+                <a:latin typeface="JetBrains Mono"/>
+                <a:ea typeface="JetBrains Mono"/>
+                <a:cs typeface="JetBrains Mono"/>
+                <a:sym typeface="JetBrains Mono"/>
+                <a:solidFill>
+                  <a:srgbClr val="1a1a1a"/>
+                </a:solidFill>
+              </a:rPr>
+              <a:t> discounted = apply_discount </a:t>
+            </a:r>
+            <a:r>
+              <a:rPr lang="ru-RU" altLang="en-US" sz="2300">
+                <a:latin typeface="JetBrains Mono"/>
+                <a:ea typeface="JetBrains Mono"/>
+                <a:cs typeface="JetBrains Mono"/>
+                <a:sym typeface="JetBrains Mono"/>
+                <a:solidFill>
+                  <a:srgbClr val="7f8c8d"/>
+                </a:solidFill>
+              </a:rPr>
+              <a:t>0.1</a:t>
+            </a:r>
+            <a:r>
+              <a:rPr lang="ru-RU" altLang="en-US" sz="2300">
+                <a:latin typeface="JetBrains Mono"/>
+                <a:ea typeface="JetBrains Mono"/>
+                <a:cs typeface="JetBrains Mono"/>
+                <a:sym typeface="JetBrains Mono"/>
+                <a:solidFill>
+                  <a:srgbClr val="1a1a1a"/>
+                </a:solidFill>
+              </a:rPr>
+              <a:t> </a:t>
+            </a:r>
+            <a:r>
+              <a:rPr lang="ru-RU" altLang="en-US" sz="2300">
+                <a:latin typeface="JetBrains Mono"/>
+                <a:ea typeface="JetBrains Mono"/>
+                <a:cs typeface="JetBrains Mono"/>
+                <a:sym typeface="JetBrains Mono"/>
+                <a:solidFill>
+                  <a:srgbClr val="7f8c8d"/>
+                </a:solidFill>
+              </a:rPr>
+              <a:t>100.0</a:t>
+            </a:r>
+          </a:p>
+        </p:txBody>
+      </p:sp>
+    </p:spTree>
+  </p:cSld>
+  <p:clrMapOvr>
+    <a:masterClrMapping/>
+  </p:clrMapOvr>
+</p:sld>
+</file>
+
+<file path=ppt/slides/slide36.xml><?xml version="1.0" encoding="utf-8"?>
+<p:sld xmlns:a="http://schemas.openxmlformats.org/drawingml/2006/main" xmlns:p="http://schemas.openxmlformats.org/presentationml/2006/main" xmlns:r="http://schemas.openxmlformats.org/officeDocument/2006/relationships">
+  <p:cSld>
+    <p:spTree>
+      <p:nvGrpSpPr>
+        <p:cNvPr id="150" name="Shape 150"/>
+        <p:cNvGrpSpPr/>
+        <p:nvPr/>
+      </p:nvGrpSpPr>
+      <p:grpSpPr>
+        <a:xfrm>
+          <a:off x="0" y="0"/>
+          <a:ext cx="0" cy="0"/>
+          <a:chOff x="0" y="0"/>
+          <a:chExt cx="0" cy="0"/>
+        </a:xfrm>
+      </p:grpSpPr>
+      <p:sp>
+        <p:nvSpPr>
+          <p:cNvPr id="151" name="Google Shape;151;g3d09141108f_0_54"/>
+          <p:cNvSpPr txBox="1"/>
+          <p:nvPr>
+            <p:ph idx="12" type="sldNum"/>
+          </p:nvPr>
+        </p:nvSpPr>
+        <p:spPr>
+          <a:xfrm>
+            <a:off x="8610600" y="6356350"/>
+            <a:ext cx="2743200" cy="365100"/>
+          </a:xfrm>
+          <a:prstGeom prst="rect">
+            <a:avLst/>
+          </a:prstGeom>
+        </p:spPr>
+        <p:txBody>
+          <a:bodyPr anchorCtr="0" anchor="t" bIns="45700" lIns="91425" spcFirstLastPara="1" rIns="91425" wrap="square" tIns="45700">
+            <a:noAutofit/>
+          </a:bodyPr>
+          <a:lstStyle/>
+          <a:p>
+            <a:pPr indent="0" lvl="0" marL="0" rtl="0" algn="r">
+              <a:spcBef>
+                <a:spcPts val="0"/>
+              </a:spcBef>
+              <a:spcAft>
+                <a:spcPts val="0"/>
+              </a:spcAft>
+              <a:buNone/>
+            </a:pPr>
+            <a:fld id="{00000000-1234-1234-1234-123412341234}" type="slidenum">
+              <a:rPr lang="ru-RU"/>
+              <a:t>‹#›</a:t>
+            </a:fld>
+            <a:endParaRPr/>
+          </a:p>
+        </p:txBody>
+      </p:sp>
+      <p:sp>
+        <p:nvSpPr>
+          <p:cNvPr id="152" name="Google Shape;152;g3d09141108f_0_54"/>
+          <p:cNvSpPr txBox="1"/>
+          <p:nvPr>
+            <p:ph idx="1" type="body"/>
+          </p:nvPr>
+        </p:nvSpPr>
+        <p:spPr>
+          <a:xfrm>
+            <a:off x="838198" y="543878"/>
+            <a:ext cx="10942500" cy="1219200"/>
+          </a:xfrm>
+          <a:prstGeom prst="rect">
+            <a:avLst/>
+          </a:prstGeom>
+        </p:spPr>
+        <p:txBody>
+          <a:bodyPr anchorCtr="0" anchor="ctr" bIns="45700" lIns="91425" spcFirstLastPara="1" rIns="91425" wrap="square" tIns="45700">
+            <a:noAutofit/>
+          </a:bodyPr>
+          <a:lstStyle/>
+          <a:p>
+            <a:pPr indent="0" lvl="0" marL="0" rtl="0" algn="l">
+              <a:spcBef>
+                <a:spcPts val="1000"/>
+              </a:spcBef>
+              <a:spcAft>
+                <a:spcPts val="0"/>
+              </a:spcAft>
+              <a:buNone/>
+            </a:pPr>
+            <a:r>
+              <a:rPr lang="ru-RU"/>
+              <a:t>Ссылочная прозрачность: Scala</a:t>
+            </a:r>
+          </a:p>
+        </p:txBody>
+      </p:sp>
+      <p:sp>
+        <p:nvSpPr>
+          <p:cNvPr id="153" name="Google Shape;153;g3d09141108f_0_54"/>
+          <p:cNvSpPr txBox="1"/>
+          <p:nvPr>
+            <p:ph idx="2" type="body"/>
+          </p:nvPr>
+        </p:nvSpPr>
+        <p:spPr>
+          <a:xfrm>
+            <a:off x="1138200" y="1763063"/>
+            <a:ext cx="10642500" cy="3254400"/>
+          </a:xfrm>
+          <a:prstGeom prst="rect">
+            <a:avLst/>
+          </a:prstGeom>
+        </p:spPr>
+        <p:txBody>
+          <a:bodyPr anchorCtr="0" anchor="t" bIns="45700" lIns="91425" spcFirstLastPara="1" rIns="91425" wrap="square" tIns="45700">
+            <a:noAutofit/>
+          </a:bodyPr>
+          <a:lstStyle/>
+          <a:p>
+            <a:pPr indent="0" lvl="0" marL="0" rtl="0" algn="l">
+              <a:spcBef>
+                <a:spcPts val="1000"/>
+              </a:spcBef>
+              <a:spcAft>
+                <a:spcPts val="0"/>
+              </a:spcAft>
+              <a:buNone/>
+            </a:pPr>
+            <a:endParaRPr>
+              <a:latin typeface="JetBrains Mono"/>
+              <a:ea typeface="JetBrains Mono"/>
+              <a:cs typeface="JetBrains Mono"/>
+              <a:sym typeface="JetBrains Mono"/>
+            </a:endParaRPr>
+            <a:r>
+              <a:rPr lang="ru-RU" altLang="en-US" sz="2300">
+                <a:latin typeface="JetBrains Mono"/>
+                <a:ea typeface="JetBrains Mono"/>
+                <a:cs typeface="JetBrains Mono"/>
+                <a:sym typeface="JetBrains Mono"/>
+                <a:solidFill>
+                  <a:srgbClr val="95a5a6"/>
+                </a:solidFill>
+              </a:rPr>
+              <a:t>// чистая</a:t>
+            </a:r>
+          </a:p>
+          <a:p>
+            <a:pPr indent="0" lvl="0" marL="0" rtl="0" algn="l">
+              <a:spcBef>
+                <a:spcPts val="1000"/>
+              </a:spcBef>
+              <a:spcAft>
+                <a:spcPts val="0"/>
+              </a:spcAft>
+              <a:buNone/>
+            </a:pPr>
+            <a:endParaRPr>
+              <a:latin typeface="JetBrains Mono"/>
+              <a:ea typeface="JetBrains Mono"/>
+              <a:cs typeface="JetBrains Mono"/>
+              <a:sym typeface="JetBrains Mono"/>
+            </a:endParaRPr>
+            <a:r>
+              <a:rPr lang="ru-RU" altLang="en-US" sz="2300">
+                <a:latin typeface="JetBrains Mono"/>
+                <a:ea typeface="JetBrains Mono"/>
+                <a:cs typeface="JetBrains Mono"/>
+                <a:sym typeface="JetBrains Mono"/>
+                <a:solidFill>
+                  <a:srgbClr val="c0392b"/>
+                </a:solidFill>
+              </a:rPr>
+              <a:t>def</a:t>
+            </a:r>
+            <a:r>
+              <a:rPr lang="ru-RU" altLang="en-US" sz="2300">
+                <a:latin typeface="JetBrains Mono"/>
+                <a:ea typeface="JetBrains Mono"/>
+                <a:cs typeface="JetBrains Mono"/>
+                <a:sym typeface="JetBrains Mono"/>
+                <a:solidFill>
+                  <a:srgbClr val="1a1a1a"/>
+                </a:solidFill>
+              </a:rPr>
+              <a:t> applyDiscount(rate: </a:t>
+            </a:r>
+            <a:r>
+              <a:rPr lang="ru-RU" altLang="en-US" sz="2300">
+                <a:latin typeface="JetBrains Mono"/>
+                <a:ea typeface="JetBrains Mono"/>
+                <a:cs typeface="JetBrains Mono"/>
+                <a:sym typeface="JetBrains Mono"/>
+                <a:solidFill>
+                  <a:srgbClr val="2c6fa6"/>
+                </a:solidFill>
+              </a:rPr>
+              <a:t>Double</a:t>
+            </a:r>
+            <a:r>
+              <a:rPr lang="ru-RU" altLang="en-US" sz="2300">
+                <a:latin typeface="JetBrains Mono"/>
+                <a:ea typeface="JetBrains Mono"/>
+                <a:cs typeface="JetBrains Mono"/>
+                <a:sym typeface="JetBrains Mono"/>
+                <a:solidFill>
+                  <a:srgbClr val="1a1a1a"/>
+                </a:solidFill>
+              </a:rPr>
+              <a:t>, price: </a:t>
+            </a:r>
+            <a:r>
+              <a:rPr lang="ru-RU" altLang="en-US" sz="2300">
+                <a:latin typeface="JetBrains Mono"/>
+                <a:ea typeface="JetBrains Mono"/>
+                <a:cs typeface="JetBrains Mono"/>
+                <a:sym typeface="JetBrains Mono"/>
+                <a:solidFill>
+                  <a:srgbClr val="2c6fa6"/>
+                </a:solidFill>
+              </a:rPr>
+              <a:t>Double</a:t>
+            </a:r>
+            <a:r>
+              <a:rPr lang="ru-RU" altLang="en-US" sz="2300">
+                <a:latin typeface="JetBrains Mono"/>
+                <a:ea typeface="JetBrains Mono"/>
+                <a:cs typeface="JetBrains Mono"/>
+                <a:sym typeface="JetBrains Mono"/>
+                <a:solidFill>
+                  <a:srgbClr val="1a1a1a"/>
+                </a:solidFill>
+              </a:rPr>
+              <a:t>): </a:t>
+            </a:r>
+            <a:r>
+              <a:rPr lang="ru-RU" altLang="en-US" sz="2300">
+                <a:latin typeface="JetBrains Mono"/>
+                <a:ea typeface="JetBrains Mono"/>
+                <a:cs typeface="JetBrains Mono"/>
+                <a:sym typeface="JetBrains Mono"/>
+                <a:solidFill>
+                  <a:srgbClr val="2c6fa6"/>
+                </a:solidFill>
+              </a:rPr>
+              <a:t>Double</a:t>
+            </a:r>
+            <a:r>
+              <a:rPr lang="ru-RU" altLang="en-US" sz="2300">
+                <a:latin typeface="JetBrains Mono"/>
+                <a:ea typeface="JetBrains Mono"/>
+                <a:cs typeface="JetBrains Mono"/>
+                <a:sym typeface="JetBrains Mono"/>
+                <a:solidFill>
+                  <a:srgbClr val="1a1a1a"/>
+                </a:solidFill>
+              </a:rPr>
+              <a:t> =</a:t>
+            </a:r>
+          </a:p>
+          <a:p>
+            <a:pPr indent="0" lvl="0" marL="0" rtl="0" algn="l">
+              <a:spcBef>
+                <a:spcPts val="1000"/>
+              </a:spcBef>
+              <a:spcAft>
+                <a:spcPts val="0"/>
+              </a:spcAft>
+              <a:buNone/>
+            </a:pPr>
+            <a:endParaRPr>
+              <a:latin typeface="JetBrains Mono"/>
+              <a:ea typeface="JetBrains Mono"/>
+              <a:cs typeface="JetBrains Mono"/>
+              <a:sym typeface="JetBrains Mono"/>
+            </a:endParaRPr>
+            <a:r>
+              <a:rPr lang="ru-RU" altLang="en-US" sz="2300">
+                <a:latin typeface="JetBrains Mono"/>
+                <a:ea typeface="JetBrains Mono"/>
+                <a:cs typeface="JetBrains Mono"/>
+                <a:sym typeface="JetBrains Mono"/>
+                <a:solidFill>
+                  <a:srgbClr val="1a1a1a"/>
+                </a:solidFill>
+              </a:rPr>
+              <a:t>  price * (</a:t>
+            </a:r>
+            <a:r>
+              <a:rPr lang="ru-RU" altLang="en-US" sz="2300">
+                <a:latin typeface="JetBrains Mono"/>
+                <a:ea typeface="JetBrains Mono"/>
+                <a:cs typeface="JetBrains Mono"/>
+                <a:sym typeface="JetBrains Mono"/>
+                <a:solidFill>
+                  <a:srgbClr val="7f8c8d"/>
+                </a:solidFill>
+              </a:rPr>
+              <a:t>1.0</a:t>
+            </a:r>
+            <a:r>
+              <a:rPr lang="ru-RU" altLang="en-US" sz="2300">
+                <a:latin typeface="JetBrains Mono"/>
+                <a:ea typeface="JetBrains Mono"/>
+                <a:cs typeface="JetBrains Mono"/>
+                <a:sym typeface="JetBrains Mono"/>
+                <a:solidFill>
+                  <a:srgbClr val="1a1a1a"/>
+                </a:solidFill>
+              </a:rPr>
+              <a:t> - rate)</a:t>
+            </a:r>
+          </a:p>
+          <a:p>
+            <a:pPr indent="0" lvl="0" marL="0" rtl="0" algn="l">
+              <a:spcBef>
+                <a:spcPts val="1000"/>
+              </a:spcBef>
+              <a:spcAft>
+                <a:spcPts val="0"/>
+              </a:spcAft>
+              <a:buNone/>
+            </a:pPr>
+            <a:endParaRPr>
+              <a:latin typeface="JetBrains Mono"/>
+              <a:ea typeface="JetBrains Mono"/>
+              <a:cs typeface="JetBrains Mono"/>
+              <a:sym typeface="JetBrains Mono"/>
+            </a:endParaRPr>
+            <a:r>
+              <a:rPr lang="ru-RU" altLang="en-US" sz="2300">
+                <a:latin typeface="JetBrains Mono"/>
+                <a:ea typeface="JetBrains Mono"/>
+                <a:cs typeface="JetBrains Mono"/>
+                <a:sym typeface="JetBrains Mono"/>
+                <a:solidFill>
+                  <a:srgbClr val="1a1a1a"/>
+                </a:solidFill>
+              </a:rPr>
+              <a:t/>
+            </a:r>
+          </a:p>
+          <a:p>
+            <a:pPr indent="0" lvl="0" marL="0" rtl="0" algn="l">
+              <a:spcBef>
+                <a:spcPts val="1000"/>
+              </a:spcBef>
+              <a:spcAft>
+                <a:spcPts val="0"/>
+              </a:spcAft>
+              <a:buNone/>
+            </a:pPr>
+            <a:endParaRPr>
+              <a:latin typeface="JetBrains Mono"/>
+              <a:ea typeface="JetBrains Mono"/>
+              <a:cs typeface="JetBrains Mono"/>
+              <a:sym typeface="JetBrains Mono"/>
+            </a:endParaRPr>
+            <a:r>
+              <a:rPr lang="ru-RU" altLang="en-US" sz="2300">
+                <a:latin typeface="JetBrains Mono"/>
+                <a:ea typeface="JetBrains Mono"/>
+                <a:cs typeface="JetBrains Mono"/>
+                <a:sym typeface="JetBrains Mono"/>
+                <a:solidFill>
+                  <a:srgbClr val="95a5a6"/>
+                </a:solidFill>
+              </a:rPr>
+              <a:t>// эффекты — в типе</a:t>
+            </a:r>
+          </a:p>
+          <a:p>
+            <a:pPr indent="0" lvl="0" marL="0" rtl="0" algn="l">
+              <a:spcBef>
+                <a:spcPts val="1000"/>
+              </a:spcBef>
+              <a:spcAft>
+                <a:spcPts val="0"/>
+              </a:spcAft>
+              <a:buNone/>
+            </a:pPr>
+            <a:endParaRPr>
+              <a:latin typeface="JetBrains Mono"/>
+              <a:ea typeface="JetBrains Mono"/>
+              <a:cs typeface="JetBrains Mono"/>
+              <a:sym typeface="JetBrains Mono"/>
+            </a:endParaRPr>
+            <a:r>
+              <a:rPr lang="ru-RU" altLang="en-US" sz="2300">
+                <a:latin typeface="JetBrains Mono"/>
+                <a:ea typeface="JetBrains Mono"/>
+                <a:cs typeface="JetBrains Mono"/>
+                <a:sym typeface="JetBrains Mono"/>
+                <a:solidFill>
+                  <a:srgbClr val="c0392b"/>
+                </a:solidFill>
+              </a:rPr>
+              <a:t>def</a:t>
+            </a:r>
+            <a:r>
+              <a:rPr lang="ru-RU" altLang="en-US" sz="2300">
+                <a:latin typeface="JetBrains Mono"/>
+                <a:ea typeface="JetBrains Mono"/>
+                <a:cs typeface="JetBrains Mono"/>
+                <a:sym typeface="JetBrains Mono"/>
+                <a:solidFill>
+                  <a:srgbClr val="1a1a1a"/>
+                </a:solidFill>
+              </a:rPr>
+              <a:t> withLog(rate: </a:t>
+            </a:r>
+            <a:r>
+              <a:rPr lang="ru-RU" altLang="en-US" sz="2300">
+                <a:latin typeface="JetBrains Mono"/>
+                <a:ea typeface="JetBrains Mono"/>
+                <a:cs typeface="JetBrains Mono"/>
+                <a:sym typeface="JetBrains Mono"/>
+                <a:solidFill>
+                  <a:srgbClr val="2c6fa6"/>
+                </a:solidFill>
+              </a:rPr>
+              <a:t>Double</a:t>
+            </a:r>
+            <a:r>
+              <a:rPr lang="ru-RU" altLang="en-US" sz="2300">
+                <a:latin typeface="JetBrains Mono"/>
+                <a:ea typeface="JetBrains Mono"/>
+                <a:cs typeface="JetBrains Mono"/>
+                <a:sym typeface="JetBrains Mono"/>
+                <a:solidFill>
+                  <a:srgbClr val="1a1a1a"/>
+                </a:solidFill>
+              </a:rPr>
+              <a:t>, price: </a:t>
+            </a:r>
+            <a:r>
+              <a:rPr lang="ru-RU" altLang="en-US" sz="2300">
+                <a:latin typeface="JetBrains Mono"/>
+                <a:ea typeface="JetBrains Mono"/>
+                <a:cs typeface="JetBrains Mono"/>
+                <a:sym typeface="JetBrains Mono"/>
+                <a:solidFill>
+                  <a:srgbClr val="2c6fa6"/>
+                </a:solidFill>
+              </a:rPr>
+              <a:t>Double</a:t>
+            </a:r>
+            <a:r>
+              <a:rPr lang="ru-RU" altLang="en-US" sz="2300">
+                <a:latin typeface="JetBrains Mono"/>
+                <a:ea typeface="JetBrains Mono"/>
+                <a:cs typeface="JetBrains Mono"/>
+                <a:sym typeface="JetBrains Mono"/>
+                <a:solidFill>
+                  <a:srgbClr val="1a1a1a"/>
+                </a:solidFill>
+              </a:rPr>
+              <a:t>): </a:t>
+            </a:r>
+            <a:r>
+              <a:rPr lang="ru-RU" altLang="en-US" sz="2300">
+                <a:latin typeface="JetBrains Mono"/>
+                <a:ea typeface="JetBrains Mono"/>
+                <a:cs typeface="JetBrains Mono"/>
+                <a:sym typeface="JetBrains Mono"/>
+                <a:solidFill>
+                  <a:srgbClr val="2c6fa6"/>
+                </a:solidFill>
+              </a:rPr>
+              <a:t>IO</a:t>
+            </a:r>
+            <a:r>
+              <a:rPr lang="ru-RU" altLang="en-US" sz="2300">
+                <a:latin typeface="JetBrains Mono"/>
+                <a:ea typeface="JetBrains Mono"/>
+                <a:cs typeface="JetBrains Mono"/>
+                <a:sym typeface="JetBrains Mono"/>
+                <a:solidFill>
+                  <a:srgbClr val="1a1a1a"/>
+                </a:solidFill>
+              </a:rPr>
+              <a:t>[</a:t>
+            </a:r>
+            <a:r>
+              <a:rPr lang="ru-RU" altLang="en-US" sz="2300">
+                <a:latin typeface="JetBrains Mono"/>
+                <a:ea typeface="JetBrains Mono"/>
+                <a:cs typeface="JetBrains Mono"/>
+                <a:sym typeface="JetBrains Mono"/>
+                <a:solidFill>
+                  <a:srgbClr val="2c6fa6"/>
+                </a:solidFill>
+              </a:rPr>
+              <a:t>Double</a:t>
+            </a:r>
+            <a:r>
+              <a:rPr lang="ru-RU" altLang="en-US" sz="2300">
+                <a:latin typeface="JetBrains Mono"/>
+                <a:ea typeface="JetBrains Mono"/>
+                <a:cs typeface="JetBrains Mono"/>
+                <a:sym typeface="JetBrains Mono"/>
+                <a:solidFill>
+                  <a:srgbClr val="1a1a1a"/>
+                </a:solidFill>
+              </a:rPr>
+              <a:t>] =</a:t>
+            </a:r>
+          </a:p>
+          <a:p>
+            <a:pPr indent="0" lvl="0" marL="0" rtl="0" algn="l">
+              <a:spcBef>
+                <a:spcPts val="1000"/>
+              </a:spcBef>
+              <a:spcAft>
+                <a:spcPts val="0"/>
+              </a:spcAft>
+              <a:buNone/>
+            </a:pPr>
+            <a:endParaRPr>
+              <a:latin typeface="JetBrains Mono"/>
+              <a:ea typeface="JetBrains Mono"/>
+              <a:cs typeface="JetBrains Mono"/>
+              <a:sym typeface="JetBrains Mono"/>
+            </a:endParaRPr>
+            <a:r>
+              <a:rPr lang="ru-RU" altLang="en-US" sz="2300">
+                <a:latin typeface="JetBrains Mono"/>
+                <a:ea typeface="JetBrains Mono"/>
+                <a:cs typeface="JetBrains Mono"/>
+                <a:sym typeface="JetBrains Mono"/>
+                <a:solidFill>
+                  <a:srgbClr val="1a1a1a"/>
+                </a:solidFill>
+              </a:rPr>
+              <a:t>  </a:t>
+            </a:r>
+            <a:r>
+              <a:rPr lang="ru-RU" altLang="en-US" sz="2300">
+                <a:latin typeface="JetBrains Mono"/>
+                <a:ea typeface="JetBrains Mono"/>
+                <a:cs typeface="JetBrains Mono"/>
+                <a:sym typeface="JetBrains Mono"/>
+                <a:solidFill>
+                  <a:srgbClr val="2c6fa6"/>
+                </a:solidFill>
+              </a:rPr>
+              <a:t>IO</a:t>
+            </a:r>
+            <a:r>
+              <a:rPr lang="ru-RU" altLang="en-US" sz="2300">
+                <a:latin typeface="JetBrains Mono"/>
+                <a:ea typeface="JetBrains Mono"/>
+                <a:cs typeface="JetBrains Mono"/>
+                <a:sym typeface="JetBrains Mono"/>
+                <a:solidFill>
+                  <a:srgbClr val="1a1a1a"/>
+                </a:solidFill>
+              </a:rPr>
+              <a:t>.println("...") *&gt; </a:t>
+            </a:r>
+            <a:r>
+              <a:rPr lang="ru-RU" altLang="en-US" sz="2300">
+                <a:latin typeface="JetBrains Mono"/>
+                <a:ea typeface="JetBrains Mono"/>
+                <a:cs typeface="JetBrains Mono"/>
+                <a:sym typeface="JetBrains Mono"/>
+                <a:solidFill>
+                  <a:srgbClr val="2c6fa6"/>
+                </a:solidFill>
+              </a:rPr>
+              <a:t>IO</a:t>
+            </a:r>
+            <a:r>
+              <a:rPr lang="ru-RU" altLang="en-US" sz="2300">
+                <a:latin typeface="JetBrains Mono"/>
+                <a:ea typeface="JetBrains Mono"/>
+                <a:cs typeface="JetBrains Mono"/>
+                <a:sym typeface="JetBrains Mono"/>
+                <a:solidFill>
+                  <a:srgbClr val="1a1a1a"/>
+                </a:solidFill>
+              </a:rPr>
+              <a:t>.pure(applyDiscount(rate, price))</a:t>
+            </a:r>
+          </a:p>
+        </p:txBody>
+      </p:sp>
+    </p:spTree>
+  </p:cSld>
+  <p:clrMapOvr>
+    <a:masterClrMapping/>
+  </p:clrMapOvr>
+</p:sld>
+</file>
+
+<file path=ppt/slides/slide37.xml><?xml version="1.0" encoding="utf-8"?>
+<p:sld xmlns:a="http://schemas.openxmlformats.org/drawingml/2006/main" xmlns:p="http://schemas.openxmlformats.org/presentationml/2006/main" xmlns:r="http://schemas.openxmlformats.org/officeDocument/2006/relationships">
+  <p:cSld>
+    <p:spTree>
+      <p:nvGrpSpPr>
+        <p:cNvPr id="157" name="Shape 157"/>
+        <p:cNvGrpSpPr/>
+        <p:nvPr/>
+      </p:nvGrpSpPr>
+      <p:grpSpPr>
+        <a:xfrm>
+          <a:off x="0" y="0"/>
+          <a:ext cx="0" cy="0"/>
+          <a:chOff x="0" y="0"/>
+          <a:chExt cx="0" cy="0"/>
+        </a:xfrm>
+      </p:grpSpPr>
+      <p:sp>
+        <p:nvSpPr>
+          <p:cNvPr id="158" name="Google Shape;158;g3d09141108f_0_60"/>
+          <p:cNvSpPr txBox="1"/>
+          <p:nvPr>
+            <p:ph idx="12" type="sldNum"/>
+          </p:nvPr>
+        </p:nvSpPr>
+        <p:spPr>
+          <a:xfrm>
+            <a:off x="8610600" y="6356350"/>
+            <a:ext cx="2743200" cy="365100"/>
+          </a:xfrm>
+          <a:prstGeom prst="rect">
+            <a:avLst/>
+          </a:prstGeom>
+        </p:spPr>
+        <p:txBody>
+          <a:bodyPr anchorCtr="0" anchor="t" bIns="45700" lIns="91425" spcFirstLastPara="1" rIns="91425" wrap="square" tIns="45700">
+            <a:noAutofit/>
+          </a:bodyPr>
+          <a:lstStyle/>
+          <a:p>
+            <a:pPr indent="0" lvl="0" marL="0" rtl="0" algn="r">
+              <a:spcBef>
+                <a:spcPts val="0"/>
+              </a:spcBef>
+              <a:spcAft>
+                <a:spcPts val="0"/>
+              </a:spcAft>
+              <a:buNone/>
+            </a:pPr>
+            <a:fld id="{00000000-1234-1234-1234-123412341234}" type="slidenum">
+              <a:rPr lang="ru-RU"/>
+              <a:t>‹#›</a:t>
+            </a:fld>
+            <a:endParaRPr/>
+          </a:p>
+        </p:txBody>
+      </p:sp>
+      <p:sp>
+        <p:nvSpPr>
+          <p:cNvPr id="159" name="Google Shape;159;g3d09141108f_0_60"/>
+          <p:cNvSpPr txBox="1"/>
+          <p:nvPr>
+            <p:ph idx="1" type="body"/>
+          </p:nvPr>
+        </p:nvSpPr>
+        <p:spPr>
+          <a:xfrm>
+            <a:off x="838198" y="543878"/>
+            <a:ext cx="10942500" cy="1219200"/>
+          </a:xfrm>
+          <a:prstGeom prst="rect">
+            <a:avLst/>
+          </a:prstGeom>
+        </p:spPr>
+        <p:txBody>
+          <a:bodyPr anchorCtr="0" anchor="ctr" bIns="45700" lIns="91425" spcFirstLastPara="1" rIns="91425" wrap="square" tIns="45700">
+            <a:noAutofit/>
+          </a:bodyPr>
+          <a:lstStyle/>
+          <a:p>
+            <a:pPr indent="0" lvl="0" marL="0" rtl="0" algn="l">
+              <a:spcBef>
+                <a:spcPts val="1000"/>
+              </a:spcBef>
+              <a:spcAft>
+                <a:spcPts val="0"/>
+              </a:spcAft>
+              <a:buNone/>
+            </a:pPr>
+            <a:r>
+              <a:rPr lang="ru-RU"/>
+              <a:t>Ссылочная прозрачность: Rust</a:t>
+            </a:r>
+          </a:p>
+        </p:txBody>
+      </p:sp>
+      <p:sp>
+        <p:nvSpPr>
+          <p:cNvPr id="160" name="Google Shape;160;g3d09141108f_0_60"/>
+          <p:cNvSpPr txBox="1"/>
+          <p:nvPr>
+            <p:ph idx="2" type="body"/>
+          </p:nvPr>
+        </p:nvSpPr>
+        <p:spPr>
+          <a:xfrm>
+            <a:off x="1138200" y="1763063"/>
+            <a:ext cx="10642500" cy="3254400"/>
+          </a:xfrm>
+          <a:prstGeom prst="rect">
+            <a:avLst/>
+          </a:prstGeom>
+        </p:spPr>
+        <p:txBody>
+          <a:bodyPr anchorCtr="0" anchor="t" bIns="45700" lIns="91425" spcFirstLastPara="1" rIns="91425" wrap="square" tIns="45700">
+            <a:noAutofit/>
+          </a:bodyPr>
+          <a:lstStyle/>
+          <a:p>
+            <a:pPr indent="0" lvl="0" marL="0" rtl="0" algn="l">
+              <a:spcBef>
+                <a:spcPts val="1000"/>
+              </a:spcBef>
+              <a:spcAft>
+                <a:spcPts val="0"/>
+              </a:spcAft>
+              <a:buNone/>
+            </a:pPr>
+            <a:endParaRPr sz="2300">
+              <a:latin typeface="JetBrains Mono"/>
+              <a:ea typeface="JetBrains Mono"/>
+              <a:cs typeface="JetBrains Mono"/>
+              <a:sym typeface="JetBrains Mono"/>
+            </a:endParaRPr>
+            <a:r>
+              <a:rPr lang="ru-RU" altLang="en-US" sz="2300">
+                <a:latin typeface="JetBrains Mono"/>
+                <a:ea typeface="JetBrains Mono"/>
+                <a:cs typeface="JetBrains Mono"/>
+                <a:sym typeface="JetBrains Mono"/>
+                <a:solidFill>
+                  <a:srgbClr val="95a5a6"/>
+                </a:solidFill>
+              </a:rPr>
+              <a:t>// чистая</a:t>
+            </a:r>
+          </a:p>
+          <a:p>
+            <a:pPr indent="0" lvl="0" marL="0" rtl="0" algn="l">
+              <a:spcBef>
+                <a:spcPts val="1000"/>
+              </a:spcBef>
+              <a:spcAft>
+                <a:spcPts val="0"/>
+              </a:spcAft>
+              <a:buNone/>
+            </a:pPr>
+            <a:endParaRPr sz="2300">
+              <a:latin typeface="JetBrains Mono"/>
+              <a:ea typeface="JetBrains Mono"/>
+              <a:cs typeface="JetBrains Mono"/>
+              <a:sym typeface="JetBrains Mono"/>
+            </a:endParaRPr>
+            <a:r>
+              <a:rPr lang="ru-RU" altLang="en-US" sz="2300">
+                <a:latin typeface="JetBrains Mono"/>
+                <a:ea typeface="JetBrains Mono"/>
+                <a:cs typeface="JetBrains Mono"/>
+                <a:sym typeface="JetBrains Mono"/>
+                <a:solidFill>
+                  <a:srgbClr val="c0392b"/>
+                </a:solidFill>
+              </a:rPr>
+              <a:t>fn</a:t>
+            </a:r>
+            <a:r>
+              <a:rPr lang="ru-RU" altLang="en-US" sz="2300">
+                <a:latin typeface="JetBrains Mono"/>
+                <a:ea typeface="JetBrains Mono"/>
+                <a:cs typeface="JetBrains Mono"/>
+                <a:sym typeface="JetBrains Mono"/>
+                <a:solidFill>
+                  <a:srgbClr val="1a1a1a"/>
+                </a:solidFill>
+              </a:rPr>
+              <a:t> apply_discount(rate: </a:t>
+            </a:r>
+            <a:r>
+              <a:rPr lang="ru-RU" altLang="en-US" sz="2300">
+                <a:latin typeface="JetBrains Mono"/>
+                <a:ea typeface="JetBrains Mono"/>
+                <a:cs typeface="JetBrains Mono"/>
+                <a:sym typeface="JetBrains Mono"/>
+                <a:solidFill>
+                  <a:srgbClr val="2c6fa6"/>
+                </a:solidFill>
+              </a:rPr>
+              <a:t>f64</a:t>
+            </a:r>
+            <a:r>
+              <a:rPr lang="ru-RU" altLang="en-US" sz="2300">
+                <a:latin typeface="JetBrains Mono"/>
+                <a:ea typeface="JetBrains Mono"/>
+                <a:cs typeface="JetBrains Mono"/>
+                <a:sym typeface="JetBrains Mono"/>
+                <a:solidFill>
+                  <a:srgbClr val="1a1a1a"/>
+                </a:solidFill>
+              </a:rPr>
+              <a:t>, price: </a:t>
+            </a:r>
+            <a:r>
+              <a:rPr lang="ru-RU" altLang="en-US" sz="2300">
+                <a:latin typeface="JetBrains Mono"/>
+                <a:ea typeface="JetBrains Mono"/>
+                <a:cs typeface="JetBrains Mono"/>
+                <a:sym typeface="JetBrains Mono"/>
+                <a:solidFill>
+                  <a:srgbClr val="2c6fa6"/>
+                </a:solidFill>
+              </a:rPr>
+              <a:t>f64</a:t>
+            </a:r>
+            <a:r>
+              <a:rPr lang="ru-RU" altLang="en-US" sz="2300">
+                <a:latin typeface="JetBrains Mono"/>
+                <a:ea typeface="JetBrains Mono"/>
+                <a:cs typeface="JetBrains Mono"/>
+                <a:sym typeface="JetBrains Mono"/>
+                <a:solidFill>
+                  <a:srgbClr val="1a1a1a"/>
+                </a:solidFill>
+              </a:rPr>
+              <a:t>) -&gt; </a:t>
+            </a:r>
+            <a:r>
+              <a:rPr lang="ru-RU" altLang="en-US" sz="2300">
+                <a:latin typeface="JetBrains Mono"/>
+                <a:ea typeface="JetBrains Mono"/>
+                <a:cs typeface="JetBrains Mono"/>
+                <a:sym typeface="JetBrains Mono"/>
+                <a:solidFill>
+                  <a:srgbClr val="2c6fa6"/>
+                </a:solidFill>
+              </a:rPr>
+              <a:t>f64</a:t>
+            </a:r>
+            <a:r>
+              <a:rPr lang="ru-RU" altLang="en-US" sz="2300">
+                <a:latin typeface="JetBrains Mono"/>
+                <a:ea typeface="JetBrains Mono"/>
+                <a:cs typeface="JetBrains Mono"/>
+                <a:sym typeface="JetBrains Mono"/>
+                <a:solidFill>
+                  <a:srgbClr val="1a1a1a"/>
+                </a:solidFill>
+              </a:rPr>
+              <a:t> {</a:t>
+            </a:r>
+          </a:p>
+          <a:p>
+            <a:pPr indent="0" lvl="0" marL="0" rtl="0" algn="l">
+              <a:spcBef>
+                <a:spcPts val="1000"/>
+              </a:spcBef>
+              <a:spcAft>
+                <a:spcPts val="0"/>
+              </a:spcAft>
+              <a:buNone/>
+            </a:pPr>
+            <a:endParaRPr sz="2300">
+              <a:latin typeface="JetBrains Mono"/>
+              <a:ea typeface="JetBrains Mono"/>
+              <a:cs typeface="JetBrains Mono"/>
+              <a:sym typeface="JetBrains Mono"/>
+            </a:endParaRPr>
+            <a:r>
+              <a:rPr lang="ru-RU" altLang="en-US" sz="2300">
+                <a:latin typeface="JetBrains Mono"/>
+                <a:ea typeface="JetBrains Mono"/>
+                <a:cs typeface="JetBrains Mono"/>
+                <a:sym typeface="JetBrains Mono"/>
+                <a:solidFill>
+                  <a:srgbClr val="1a1a1a"/>
+                </a:solidFill>
+              </a:rPr>
+              <a:t>    price * (</a:t>
+            </a:r>
+            <a:r>
+              <a:rPr lang="ru-RU" altLang="en-US" sz="2300">
+                <a:latin typeface="JetBrains Mono"/>
+                <a:ea typeface="JetBrains Mono"/>
+                <a:cs typeface="JetBrains Mono"/>
+                <a:sym typeface="JetBrains Mono"/>
+                <a:solidFill>
+                  <a:srgbClr val="7f8c8d"/>
+                </a:solidFill>
+              </a:rPr>
+              <a:t>1.0</a:t>
+            </a:r>
+            <a:r>
+              <a:rPr lang="ru-RU" altLang="en-US" sz="2300">
+                <a:latin typeface="JetBrains Mono"/>
+                <a:ea typeface="JetBrains Mono"/>
+                <a:cs typeface="JetBrains Mono"/>
+                <a:sym typeface="JetBrains Mono"/>
+                <a:solidFill>
+                  <a:srgbClr val="1a1a1a"/>
+                </a:solidFill>
+              </a:rPr>
+              <a:t> - rate)</a:t>
+            </a:r>
+          </a:p>
+          <a:p>
+            <a:pPr indent="0" lvl="0" marL="0" rtl="0" algn="l">
+              <a:spcBef>
+                <a:spcPts val="1000"/>
+              </a:spcBef>
+              <a:spcAft>
+                <a:spcPts val="0"/>
+              </a:spcAft>
+              <a:buNone/>
+            </a:pPr>
+            <a:endParaRPr sz="2300">
+              <a:latin typeface="JetBrains Mono"/>
+              <a:ea typeface="JetBrains Mono"/>
+              <a:cs typeface="JetBrains Mono"/>
+              <a:sym typeface="JetBrains Mono"/>
+            </a:endParaRPr>
+            <a:r>
+              <a:rPr lang="ru-RU" altLang="en-US" sz="2300">
+                <a:latin typeface="JetBrains Mono"/>
+                <a:ea typeface="JetBrains Mono"/>
+                <a:cs typeface="JetBrains Mono"/>
+                <a:sym typeface="JetBrains Mono"/>
+                <a:solidFill>
+                  <a:srgbClr val="1a1a1a"/>
+                </a:solidFill>
+              </a:rPr>
+              <a:t>}</a:t>
+            </a:r>
+          </a:p>
+          <a:p>
+            <a:pPr indent="0" lvl="0" marL="0" rtl="0" algn="l">
+              <a:spcBef>
+                <a:spcPts val="1000"/>
+              </a:spcBef>
+              <a:spcAft>
+                <a:spcPts val="0"/>
+              </a:spcAft>
+              <a:buNone/>
+            </a:pPr>
+            <a:endParaRPr sz="2300">
+              <a:latin typeface="JetBrains Mono"/>
+              <a:ea typeface="JetBrains Mono"/>
+              <a:cs typeface="JetBrains Mono"/>
+              <a:sym typeface="JetBrains Mono"/>
+            </a:endParaRPr>
+            <a:r>
+              <a:rPr lang="ru-RU" altLang="en-US" sz="2300">
+                <a:latin typeface="JetBrains Mono"/>
+                <a:ea typeface="JetBrains Mono"/>
+                <a:cs typeface="JetBrains Mono"/>
+                <a:sym typeface="JetBrains Mono"/>
+                <a:solidFill>
+                  <a:srgbClr val="1a1a1a"/>
+                </a:solidFill>
+              </a:rPr>
+              <a:t/>
+            </a:r>
+          </a:p>
+          <a:p>
+            <a:pPr indent="0" lvl="0" marL="0" rtl="0" algn="l">
+              <a:spcBef>
+                <a:spcPts val="1000"/>
+              </a:spcBef>
+              <a:spcAft>
+                <a:spcPts val="0"/>
+              </a:spcAft>
+              <a:buNone/>
+            </a:pPr>
+            <a:endParaRPr sz="2300">
+              <a:latin typeface="JetBrains Mono"/>
+              <a:ea typeface="JetBrains Mono"/>
+              <a:cs typeface="JetBrains Mono"/>
+              <a:sym typeface="JetBrains Mono"/>
+            </a:endParaRPr>
+            <a:r>
+              <a:rPr lang="ru-RU" altLang="en-US" sz="2300">
+                <a:latin typeface="JetBrains Mono"/>
+                <a:ea typeface="JetBrains Mono"/>
+                <a:cs typeface="JetBrains Mono"/>
+                <a:sym typeface="JetBrains Mono"/>
+                <a:solidFill>
+                  <a:srgbClr val="95a5a6"/>
+                </a:solidFill>
+              </a:rPr>
+              <a:t>// нечистая: &amp;mut в сигнатуре</a:t>
+            </a:r>
+          </a:p>
+          <a:p>
+            <a:pPr indent="0" lvl="0" marL="0" rtl="0" algn="l">
+              <a:spcBef>
+                <a:spcPts val="1000"/>
+              </a:spcBef>
+              <a:spcAft>
+                <a:spcPts val="0"/>
+              </a:spcAft>
+              <a:buNone/>
+            </a:pPr>
+            <a:endParaRPr sz="2300">
+              <a:latin typeface="JetBrains Mono"/>
+              <a:ea typeface="JetBrains Mono"/>
+              <a:cs typeface="JetBrains Mono"/>
+              <a:sym typeface="JetBrains Mono"/>
+            </a:endParaRPr>
+            <a:r>
+              <a:rPr lang="ru-RU" altLang="en-US" sz="2300">
+                <a:latin typeface="JetBrains Mono"/>
+                <a:ea typeface="JetBrains Mono"/>
+                <a:cs typeface="JetBrains Mono"/>
+                <a:sym typeface="JetBrains Mono"/>
+                <a:solidFill>
+                  <a:srgbClr val="c0392b"/>
+                </a:solidFill>
+              </a:rPr>
+              <a:t>fn</a:t>
+            </a:r>
+            <a:r>
+              <a:rPr lang="ru-RU" altLang="en-US" sz="2300">
+                <a:latin typeface="JetBrains Mono"/>
+                <a:ea typeface="JetBrains Mono"/>
+                <a:cs typeface="JetBrains Mono"/>
+                <a:sym typeface="JetBrains Mono"/>
+                <a:solidFill>
+                  <a:srgbClr val="1a1a1a"/>
+                </a:solidFill>
+              </a:rPr>
+              <a:t> apply_discount_mut(rate: </a:t>
+            </a:r>
+            <a:r>
+              <a:rPr lang="ru-RU" altLang="en-US" sz="2300">
+                <a:latin typeface="JetBrains Mono"/>
+                <a:ea typeface="JetBrains Mono"/>
+                <a:cs typeface="JetBrains Mono"/>
+                <a:sym typeface="JetBrains Mono"/>
+                <a:solidFill>
+                  <a:srgbClr val="2c6fa6"/>
+                </a:solidFill>
+              </a:rPr>
+              <a:t>f64</a:t>
+            </a:r>
+            <a:r>
+              <a:rPr lang="ru-RU" altLang="en-US" sz="2300">
+                <a:latin typeface="JetBrains Mono"/>
+                <a:ea typeface="JetBrains Mono"/>
+                <a:cs typeface="JetBrains Mono"/>
+                <a:sym typeface="JetBrains Mono"/>
+                <a:solidFill>
+                  <a:srgbClr val="1a1a1a"/>
+                </a:solidFill>
+              </a:rPr>
+              <a:t>, price: &amp;</a:t>
+            </a:r>
+            <a:r>
+              <a:rPr lang="ru-RU" altLang="en-US" sz="2300">
+                <a:latin typeface="JetBrains Mono"/>
+                <a:ea typeface="JetBrains Mono"/>
+                <a:cs typeface="JetBrains Mono"/>
+                <a:sym typeface="JetBrains Mono"/>
+                <a:solidFill>
+                  <a:srgbClr val="c0392b"/>
+                </a:solidFill>
+              </a:rPr>
+              <a:t>mut</a:t>
+            </a:r>
+            <a:r>
+              <a:rPr lang="ru-RU" altLang="en-US" sz="2300">
+                <a:latin typeface="JetBrains Mono"/>
+                <a:ea typeface="JetBrains Mono"/>
+                <a:cs typeface="JetBrains Mono"/>
+                <a:sym typeface="JetBrains Mono"/>
+                <a:solidFill>
+                  <a:srgbClr val="1a1a1a"/>
+                </a:solidFill>
+              </a:rPr>
+              <a:t> </a:t>
+            </a:r>
+            <a:r>
+              <a:rPr lang="ru-RU" altLang="en-US" sz="2300">
+                <a:latin typeface="JetBrains Mono"/>
+                <a:ea typeface="JetBrains Mono"/>
+                <a:cs typeface="JetBrains Mono"/>
+                <a:sym typeface="JetBrains Mono"/>
+                <a:solidFill>
+                  <a:srgbClr val="2c6fa6"/>
+                </a:solidFill>
+              </a:rPr>
+              <a:t>f64</a:t>
+            </a:r>
+            <a:r>
+              <a:rPr lang="ru-RU" altLang="en-US" sz="2300">
+                <a:latin typeface="JetBrains Mono"/>
+                <a:ea typeface="JetBrains Mono"/>
+                <a:cs typeface="JetBrains Mono"/>
+                <a:sym typeface="JetBrains Mono"/>
+                <a:solidFill>
+                  <a:srgbClr val="1a1a1a"/>
+                </a:solidFill>
+              </a:rPr>
+              <a:t>) {</a:t>
+            </a:r>
+          </a:p>
+          <a:p>
+            <a:pPr indent="0" lvl="0" marL="0" rtl="0" algn="l">
+              <a:spcBef>
+                <a:spcPts val="1000"/>
+              </a:spcBef>
+              <a:spcAft>
+                <a:spcPts val="0"/>
+              </a:spcAft>
+              <a:buNone/>
+            </a:pPr>
+            <a:endParaRPr sz="2300">
+              <a:latin typeface="JetBrains Mono"/>
+              <a:ea typeface="JetBrains Mono"/>
+              <a:cs typeface="JetBrains Mono"/>
+              <a:sym typeface="JetBrains Mono"/>
+            </a:endParaRPr>
+            <a:r>
+              <a:rPr lang="ru-RU" altLang="en-US" sz="2300">
+                <a:latin typeface="JetBrains Mono"/>
+                <a:ea typeface="JetBrains Mono"/>
+                <a:cs typeface="JetBrains Mono"/>
+                <a:sym typeface="JetBrains Mono"/>
+                <a:solidFill>
+                  <a:srgbClr val="1a1a1a"/>
+                </a:solidFill>
+              </a:rPr>
+              <a:t>    *price *= </a:t>
+            </a:r>
+            <a:r>
+              <a:rPr lang="ru-RU" altLang="en-US" sz="2300">
+                <a:latin typeface="JetBrains Mono"/>
+                <a:ea typeface="JetBrains Mono"/>
+                <a:cs typeface="JetBrains Mono"/>
+                <a:sym typeface="JetBrains Mono"/>
+                <a:solidFill>
+                  <a:srgbClr val="7f8c8d"/>
+                </a:solidFill>
+              </a:rPr>
+              <a:t>1.0</a:t>
+            </a:r>
+            <a:r>
+              <a:rPr lang="ru-RU" altLang="en-US" sz="2300">
+                <a:latin typeface="JetBrains Mono"/>
+                <a:ea typeface="JetBrains Mono"/>
+                <a:cs typeface="JetBrains Mono"/>
+                <a:sym typeface="JetBrains Mono"/>
+                <a:solidFill>
+                  <a:srgbClr val="1a1a1a"/>
+                </a:solidFill>
+              </a:rPr>
+              <a:t> - rate;</a:t>
+            </a:r>
+          </a:p>
+          <a:p>
+            <a:pPr indent="0" lvl="0" marL="0" rtl="0" algn="l">
+              <a:spcBef>
+                <a:spcPts val="1000"/>
+              </a:spcBef>
+              <a:spcAft>
+                <a:spcPts val="0"/>
+              </a:spcAft>
+              <a:buNone/>
+            </a:pPr>
+            <a:endParaRPr sz="2300">
+              <a:latin typeface="JetBrains Mono"/>
+              <a:ea typeface="JetBrains Mono"/>
+              <a:cs typeface="JetBrains Mono"/>
+              <a:sym typeface="JetBrains Mono"/>
+            </a:endParaRPr>
+            <a:r>
+              <a:rPr lang="ru-RU" altLang="en-US" sz="2300">
+                <a:latin typeface="JetBrains Mono"/>
+                <a:ea typeface="JetBrains Mono"/>
+                <a:cs typeface="JetBrains Mono"/>
+                <a:sym typeface="JetBrains Mono"/>
+                <a:solidFill>
+                  <a:srgbClr val="1a1a1a"/>
+                </a:solidFill>
+              </a:rPr>
+              <a:t>}</a:t>
+            </a:r>
+          </a:p>
+        </p:txBody>
+      </p:sp>
+    </p:spTree>
+  </p:cSld>
+  <p:clrMapOvr>
+    <a:masterClrMapping/>
+  </p:clrMapOvr>
+</p:sld>
+</file>
+
+<file path=ppt/slides/slide38.xml><?xml version="1.0" encoding="utf-8"?>
+<p:sld xmlns:a="http://schemas.openxmlformats.org/drawingml/2006/main" xmlns:p="http://schemas.openxmlformats.org/presentationml/2006/main" xmlns:r="http://schemas.openxmlformats.org/officeDocument/2006/relationships">
+  <p:cSld>
+    <p:spTree>
+      <p:nvGrpSpPr>
+        <p:cNvPr id="157" name="Shape 157"/>
+        <p:cNvGrpSpPr/>
+        <p:nvPr/>
+      </p:nvGrpSpPr>
+      <p:grpSpPr>
+        <a:xfrm>
+          <a:off x="0" y="0"/>
+          <a:ext cx="0" cy="0"/>
+          <a:chOff x="0" y="0"/>
+          <a:chExt cx="0" cy="0"/>
+        </a:xfrm>
+      </p:grpSpPr>
+      <p:sp>
+        <p:nvSpPr>
+          <p:cNvPr id="158" name="Google Shape;158;g3d09141108f_0_60"/>
+          <p:cNvSpPr txBox="1"/>
+          <p:nvPr>
+            <p:ph idx="12" type="sldNum"/>
+          </p:nvPr>
+        </p:nvSpPr>
+        <p:spPr>
+          <a:xfrm>
+            <a:off x="8610600" y="6356350"/>
+            <a:ext cx="2743200" cy="365100"/>
+          </a:xfrm>
+          <a:prstGeom prst="rect">
+            <a:avLst/>
+          </a:prstGeom>
+        </p:spPr>
+        <p:txBody>
+          <a:bodyPr anchorCtr="0" anchor="t" bIns="45700" lIns="91425" spcFirstLastPara="1" rIns="91425" wrap="square" tIns="45700">
+            <a:noAutofit/>
+          </a:bodyPr>
+          <a:lstStyle/>
+          <a:p>
+            <a:pPr indent="0" lvl="0" marL="0" rtl="0" algn="r">
+              <a:spcBef>
+                <a:spcPts val="0"/>
+              </a:spcBef>
+              <a:spcAft>
+                <a:spcPts val="0"/>
+              </a:spcAft>
+              <a:buNone/>
+            </a:pPr>
+            <a:fld id="{00000000-1234-1234-1234-123412341234}" type="slidenum">
+              <a:rPr lang="ru-RU"/>
+              <a:t>‹#›</a:t>
+            </a:fld>
+            <a:endParaRPr/>
+          </a:p>
+        </p:txBody>
+      </p:sp>
+      <p:sp>
+        <p:nvSpPr>
+          <p:cNvPr id="159" name="Google Shape;159;g3d09141108f_0_60"/>
+          <p:cNvSpPr txBox="1"/>
+          <p:nvPr>
+            <p:ph idx="1" type="body"/>
+          </p:nvPr>
+        </p:nvSpPr>
+        <p:spPr>
+          <a:xfrm>
+            <a:off x="838198" y="543878"/>
+            <a:ext cx="10942500" cy="1219200"/>
+          </a:xfrm>
+          <a:prstGeom prst="rect">
+            <a:avLst/>
+          </a:prstGeom>
+        </p:spPr>
+        <p:txBody>
+          <a:bodyPr anchorCtr="0" anchor="ctr" bIns="45700" lIns="91425" spcFirstLastPara="1" rIns="91425" wrap="square" tIns="45700">
+            <a:noAutofit/>
+          </a:bodyPr>
+          <a:lstStyle/>
+          <a:p>
+            <a:pPr indent="0" lvl="0" marL="0" rtl="0" algn="l">
+              <a:spcBef>
+                <a:spcPts val="1000"/>
+              </a:spcBef>
+              <a:spcAft>
+                <a:spcPts val="0"/>
+              </a:spcAft>
+              <a:buNone/>
+            </a:pPr>
+            <a:r>
+              <a:rPr lang="ru-RU"/>
+              <a:t>Ссылочная прозрачность: Python</a:t>
+            </a:r>
+          </a:p>
+        </p:txBody>
+      </p:sp>
+      <p:sp>
+        <p:nvSpPr>
+          <p:cNvPr id="160" name="Google Shape;160;g3d09141108f_0_60"/>
+          <p:cNvSpPr txBox="1"/>
+          <p:nvPr>
+            <p:ph idx="2" type="body"/>
+          </p:nvPr>
+        </p:nvSpPr>
+        <p:spPr>
+          <a:xfrm>
+            <a:off x="1138200" y="1763063"/>
+            <a:ext cx="10642500" cy="3254400"/>
+          </a:xfrm>
+          <a:prstGeom prst="rect">
+            <a:avLst/>
+          </a:prstGeom>
+        </p:spPr>
+        <p:txBody>
+          <a:bodyPr anchorCtr="0" anchor="t" bIns="45700" lIns="91425" spcFirstLastPara="1" rIns="91425" wrap="square" tIns="45700">
+            <a:noAutofit/>
+          </a:bodyPr>
+          <a:lstStyle/>
+          <a:p>
+            <a:pPr indent="0" lvl="0" marL="0" rtl="0" algn="l">
+              <a:spcBef>
+                <a:spcPts val="1000"/>
+              </a:spcBef>
+              <a:spcAft>
+                <a:spcPts val="0"/>
+              </a:spcAft>
+              <a:buNone/>
+            </a:pPr>
+            <a:endParaRPr>
+              <a:latin typeface="JetBrains Mono"/>
+              <a:ea typeface="JetBrains Mono"/>
+              <a:cs typeface="JetBrains Mono"/>
+              <a:sym typeface="JetBrains Mono"/>
+            </a:endParaRPr>
+            <a:r>
+              <a:rPr lang="ru-RU" altLang="en-US" sz="2300">
+                <a:latin typeface="JetBrains Mono"/>
+                <a:ea typeface="JetBrains Mono"/>
+                <a:cs typeface="JetBrains Mono"/>
+                <a:sym typeface="JetBrains Mono"/>
+                <a:solidFill>
+                  <a:srgbClr val="1a1a1a"/>
+                </a:solidFill>
+              </a:rPr>
+              <a:t>current_discount = </a:t>
+            </a:r>
+            <a:r>
+              <a:rPr lang="ru-RU" altLang="en-US" sz="2300">
+                <a:latin typeface="JetBrains Mono"/>
+                <a:ea typeface="JetBrains Mono"/>
+                <a:cs typeface="JetBrains Mono"/>
+                <a:sym typeface="JetBrains Mono"/>
+                <a:solidFill>
+                  <a:srgbClr val="7f8c8d"/>
+                </a:solidFill>
+              </a:rPr>
+              <a:t>0.1</a:t>
+            </a:r>
+          </a:p>
+          <a:p>
+            <a:pPr indent="0" lvl="0" marL="0" rtl="0" algn="l">
+              <a:spcBef>
+                <a:spcPts val="1000"/>
+              </a:spcBef>
+              <a:spcAft>
+                <a:spcPts val="0"/>
+              </a:spcAft>
+              <a:buNone/>
+            </a:pPr>
+            <a:endParaRPr>
+              <a:latin typeface="JetBrains Mono"/>
+              <a:ea typeface="JetBrains Mono"/>
+              <a:cs typeface="JetBrains Mono"/>
+              <a:sym typeface="JetBrains Mono"/>
+            </a:endParaRPr>
+            <a:r>
+              <a:rPr lang="ru-RU" altLang="en-US" sz="2300">
+                <a:latin typeface="JetBrains Mono"/>
+                <a:ea typeface="JetBrains Mono"/>
+                <a:cs typeface="JetBrains Mono"/>
+                <a:sym typeface="JetBrains Mono"/>
+                <a:solidFill>
+                  <a:srgbClr val="1a1a1a"/>
+                </a:solidFill>
+              </a:rPr>
+              <a:t/>
+            </a:r>
+          </a:p>
+          <a:p>
+            <a:pPr indent="0" lvl="0" marL="0" rtl="0" algn="l">
+              <a:spcBef>
+                <a:spcPts val="1000"/>
+              </a:spcBef>
+              <a:spcAft>
+                <a:spcPts val="0"/>
+              </a:spcAft>
+              <a:buNone/>
+            </a:pPr>
+            <a:endParaRPr>
+              <a:latin typeface="JetBrains Mono"/>
+              <a:ea typeface="JetBrains Mono"/>
+              <a:cs typeface="JetBrains Mono"/>
+              <a:sym typeface="JetBrains Mono"/>
+            </a:endParaRPr>
+            <a:r>
+              <a:rPr lang="ru-RU" altLang="en-US" sz="2300">
+                <a:latin typeface="JetBrains Mono"/>
+                <a:ea typeface="JetBrains Mono"/>
+                <a:cs typeface="JetBrains Mono"/>
+                <a:sym typeface="JetBrains Mono"/>
+                <a:solidFill>
+                  <a:srgbClr val="95a5a6"/>
+                </a:solidFill>
+              </a:rPr>
+              <a:t># нечистая: зависит от глобального состояния</a:t>
+            </a:r>
+          </a:p>
+          <a:p>
+            <a:pPr indent="0" lvl="0" marL="0" rtl="0" algn="l">
+              <a:spcBef>
+                <a:spcPts val="1000"/>
+              </a:spcBef>
+              <a:spcAft>
+                <a:spcPts val="0"/>
+              </a:spcAft>
+              <a:buNone/>
+            </a:pPr>
+            <a:endParaRPr>
+              <a:latin typeface="JetBrains Mono"/>
+              <a:ea typeface="JetBrains Mono"/>
+              <a:cs typeface="JetBrains Mono"/>
+              <a:sym typeface="JetBrains Mono"/>
+            </a:endParaRPr>
+            <a:r>
+              <a:rPr lang="ru-RU" altLang="en-US" sz="2300">
+                <a:latin typeface="JetBrains Mono"/>
+                <a:ea typeface="JetBrains Mono"/>
+                <a:cs typeface="JetBrains Mono"/>
+                <a:sym typeface="JetBrains Mono"/>
+                <a:solidFill>
+                  <a:srgbClr val="c0392b"/>
+                </a:solidFill>
+              </a:rPr>
+              <a:t>def</a:t>
+            </a:r>
+            <a:r>
+              <a:rPr lang="ru-RU" altLang="en-US" sz="2300">
+                <a:latin typeface="JetBrains Mono"/>
+                <a:ea typeface="JetBrains Mono"/>
+                <a:cs typeface="JetBrains Mono"/>
+                <a:sym typeface="JetBrains Mono"/>
+                <a:solidFill>
+                  <a:srgbClr val="1a1a1a"/>
+                </a:solidFill>
+              </a:rPr>
+              <a:t> price_with_global_discount(price: </a:t>
+            </a:r>
+            <a:r>
+              <a:rPr lang="ru-RU" altLang="en-US" sz="2300">
+                <a:latin typeface="JetBrains Mono"/>
+                <a:ea typeface="JetBrains Mono"/>
+                <a:cs typeface="JetBrains Mono"/>
+                <a:sym typeface="JetBrains Mono"/>
+                <a:solidFill>
+                  <a:srgbClr val="2c6fa6"/>
+                </a:solidFill>
+              </a:rPr>
+              <a:t>float</a:t>
+            </a:r>
+            <a:r>
+              <a:rPr lang="ru-RU" altLang="en-US" sz="2300">
+                <a:latin typeface="JetBrains Mono"/>
+                <a:ea typeface="JetBrains Mono"/>
+                <a:cs typeface="JetBrains Mono"/>
+                <a:sym typeface="JetBrains Mono"/>
+                <a:solidFill>
+                  <a:srgbClr val="1a1a1a"/>
+                </a:solidFill>
+              </a:rPr>
+              <a:t>) -&gt; </a:t>
+            </a:r>
+            <a:r>
+              <a:rPr lang="ru-RU" altLang="en-US" sz="2300">
+                <a:latin typeface="JetBrains Mono"/>
+                <a:ea typeface="JetBrains Mono"/>
+                <a:cs typeface="JetBrains Mono"/>
+                <a:sym typeface="JetBrains Mono"/>
+                <a:solidFill>
+                  <a:srgbClr val="2c6fa6"/>
+                </a:solidFill>
+              </a:rPr>
+              <a:t>float</a:t>
+            </a:r>
+            <a:r>
+              <a:rPr lang="ru-RU" altLang="en-US" sz="2300">
+                <a:latin typeface="JetBrains Mono"/>
+                <a:ea typeface="JetBrains Mono"/>
+                <a:cs typeface="JetBrains Mono"/>
+                <a:sym typeface="JetBrains Mono"/>
+                <a:solidFill>
+                  <a:srgbClr val="1a1a1a"/>
+                </a:solidFill>
+              </a:rPr>
+              <a:t>:</a:t>
+            </a:r>
+          </a:p>
+          <a:p>
+            <a:pPr indent="0" lvl="0" marL="0" rtl="0" algn="l">
+              <a:spcBef>
+                <a:spcPts val="1000"/>
+              </a:spcBef>
+              <a:spcAft>
+                <a:spcPts val="0"/>
+              </a:spcAft>
+              <a:buNone/>
+            </a:pPr>
+            <a:endParaRPr>
+              <a:latin typeface="JetBrains Mono"/>
+              <a:ea typeface="JetBrains Mono"/>
+              <a:cs typeface="JetBrains Mono"/>
+              <a:sym typeface="JetBrains Mono"/>
+            </a:endParaRPr>
+            <a:r>
+              <a:rPr lang="ru-RU" altLang="en-US" sz="2300">
+                <a:latin typeface="JetBrains Mono"/>
+                <a:ea typeface="JetBrains Mono"/>
+                <a:cs typeface="JetBrains Mono"/>
+                <a:sym typeface="JetBrains Mono"/>
+                <a:solidFill>
+                  <a:srgbClr val="1a1a1a"/>
+                </a:solidFill>
+              </a:rPr>
+              <a:t>    </a:t>
+            </a:r>
+            <a:r>
+              <a:rPr lang="ru-RU" altLang="en-US" sz="2300">
+                <a:latin typeface="JetBrains Mono"/>
+                <a:ea typeface="JetBrains Mono"/>
+                <a:cs typeface="JetBrains Mono"/>
+                <a:sym typeface="JetBrains Mono"/>
+                <a:solidFill>
+                  <a:srgbClr val="c0392b"/>
+                </a:solidFill>
+              </a:rPr>
+              <a:t>return</a:t>
+            </a:r>
+            <a:r>
+              <a:rPr lang="ru-RU" altLang="en-US" sz="2300">
+                <a:latin typeface="JetBrains Mono"/>
+                <a:ea typeface="JetBrains Mono"/>
+                <a:cs typeface="JetBrains Mono"/>
+                <a:sym typeface="JetBrains Mono"/>
+                <a:solidFill>
+                  <a:srgbClr val="1a1a1a"/>
+                </a:solidFill>
+              </a:rPr>
+              <a:t> price * (</a:t>
+            </a:r>
+            <a:r>
+              <a:rPr lang="ru-RU" altLang="en-US" sz="2300">
+                <a:latin typeface="JetBrains Mono"/>
+                <a:ea typeface="JetBrains Mono"/>
+                <a:cs typeface="JetBrains Mono"/>
+                <a:sym typeface="JetBrains Mono"/>
+                <a:solidFill>
+                  <a:srgbClr val="7f8c8d"/>
+                </a:solidFill>
+              </a:rPr>
+              <a:t>1</a:t>
+            </a:r>
+            <a:r>
+              <a:rPr lang="ru-RU" altLang="en-US" sz="2300">
+                <a:latin typeface="JetBrains Mono"/>
+                <a:ea typeface="JetBrains Mono"/>
+                <a:cs typeface="JetBrains Mono"/>
+                <a:sym typeface="JetBrains Mono"/>
+                <a:solidFill>
+                  <a:srgbClr val="1a1a1a"/>
+                </a:solidFill>
+              </a:rPr>
+              <a:t> - current_discount)</a:t>
+            </a:r>
+          </a:p>
+          <a:p>
+            <a:pPr indent="0" lvl="0" marL="0" rtl="0" algn="l">
+              <a:spcBef>
+                <a:spcPts val="1000"/>
+              </a:spcBef>
+              <a:spcAft>
+                <a:spcPts val="0"/>
+              </a:spcAft>
+              <a:buNone/>
+            </a:pPr>
+            <a:endParaRPr>
+              <a:latin typeface="JetBrains Mono"/>
+              <a:ea typeface="JetBrains Mono"/>
+              <a:cs typeface="JetBrains Mono"/>
+              <a:sym typeface="JetBrains Mono"/>
+            </a:endParaRPr>
+            <a:r>
+              <a:rPr lang="ru-RU" altLang="en-US" sz="2300">
+                <a:latin typeface="JetBrains Mono"/>
+                <a:ea typeface="JetBrains Mono"/>
+                <a:cs typeface="JetBrains Mono"/>
+                <a:sym typeface="JetBrains Mono"/>
+                <a:solidFill>
+                  <a:srgbClr val="1a1a1a"/>
+                </a:solidFill>
+              </a:rPr>
+              <a:t/>
+            </a:r>
+          </a:p>
+          <a:p>
+            <a:pPr indent="0" lvl="0" marL="0" rtl="0" algn="l">
+              <a:spcBef>
+                <a:spcPts val="1000"/>
+              </a:spcBef>
+              <a:spcAft>
+                <a:spcPts val="0"/>
+              </a:spcAft>
+              <a:buNone/>
+            </a:pPr>
+            <a:endParaRPr>
+              <a:latin typeface="JetBrains Mono"/>
+              <a:ea typeface="JetBrains Mono"/>
+              <a:cs typeface="JetBrains Mono"/>
+              <a:sym typeface="JetBrains Mono"/>
+            </a:endParaRPr>
+            <a:r>
+              <a:rPr lang="ru-RU" altLang="en-US" sz="2300">
+                <a:latin typeface="JetBrains Mono"/>
+                <a:ea typeface="JetBrains Mono"/>
+                <a:cs typeface="JetBrains Mono"/>
+                <a:sym typeface="JetBrains Mono"/>
+                <a:solidFill>
+                  <a:srgbClr val="95a5a6"/>
+                </a:solidFill>
+              </a:rPr>
+              <a:t># чистая</a:t>
+            </a:r>
+          </a:p>
+          <a:p>
+            <a:pPr indent="0" lvl="0" marL="0" rtl="0" algn="l">
+              <a:spcBef>
+                <a:spcPts val="1000"/>
+              </a:spcBef>
+              <a:spcAft>
+                <a:spcPts val="0"/>
+              </a:spcAft>
+              <a:buNone/>
+            </a:pPr>
+            <a:endParaRPr>
+              <a:latin typeface="JetBrains Mono"/>
+              <a:ea typeface="JetBrains Mono"/>
+              <a:cs typeface="JetBrains Mono"/>
+              <a:sym typeface="JetBrains Mono"/>
+            </a:endParaRPr>
+            <a:r>
+              <a:rPr lang="ru-RU" altLang="en-US" sz="2300">
+                <a:latin typeface="JetBrains Mono"/>
+                <a:ea typeface="JetBrains Mono"/>
+                <a:cs typeface="JetBrains Mono"/>
+                <a:sym typeface="JetBrains Mono"/>
+                <a:solidFill>
+                  <a:srgbClr val="c0392b"/>
+                </a:solidFill>
+              </a:rPr>
+              <a:t>def</a:t>
+            </a:r>
+            <a:r>
+              <a:rPr lang="ru-RU" altLang="en-US" sz="2300">
+                <a:latin typeface="JetBrains Mono"/>
+                <a:ea typeface="JetBrains Mono"/>
+                <a:cs typeface="JetBrains Mono"/>
+                <a:sym typeface="JetBrains Mono"/>
+                <a:solidFill>
+                  <a:srgbClr val="1a1a1a"/>
+                </a:solidFill>
+              </a:rPr>
+              <a:t> apply_discount(rate: </a:t>
+            </a:r>
+            <a:r>
+              <a:rPr lang="ru-RU" altLang="en-US" sz="2300">
+                <a:latin typeface="JetBrains Mono"/>
+                <a:ea typeface="JetBrains Mono"/>
+                <a:cs typeface="JetBrains Mono"/>
+                <a:sym typeface="JetBrains Mono"/>
+                <a:solidFill>
+                  <a:srgbClr val="2c6fa6"/>
+                </a:solidFill>
+              </a:rPr>
+              <a:t>float</a:t>
+            </a:r>
+            <a:r>
+              <a:rPr lang="ru-RU" altLang="en-US" sz="2300">
+                <a:latin typeface="JetBrains Mono"/>
+                <a:ea typeface="JetBrains Mono"/>
+                <a:cs typeface="JetBrains Mono"/>
+                <a:sym typeface="JetBrains Mono"/>
+                <a:solidFill>
+                  <a:srgbClr val="1a1a1a"/>
+                </a:solidFill>
+              </a:rPr>
+              <a:t>, price: </a:t>
+            </a:r>
+            <a:r>
+              <a:rPr lang="ru-RU" altLang="en-US" sz="2300">
+                <a:latin typeface="JetBrains Mono"/>
+                <a:ea typeface="JetBrains Mono"/>
+                <a:cs typeface="JetBrains Mono"/>
+                <a:sym typeface="JetBrains Mono"/>
+                <a:solidFill>
+                  <a:srgbClr val="2c6fa6"/>
+                </a:solidFill>
+              </a:rPr>
+              <a:t>float</a:t>
+            </a:r>
+            <a:r>
+              <a:rPr lang="ru-RU" altLang="en-US" sz="2300">
+                <a:latin typeface="JetBrains Mono"/>
+                <a:ea typeface="JetBrains Mono"/>
+                <a:cs typeface="JetBrains Mono"/>
+                <a:sym typeface="JetBrains Mono"/>
+                <a:solidFill>
+                  <a:srgbClr val="1a1a1a"/>
+                </a:solidFill>
+              </a:rPr>
+              <a:t>) -&gt; </a:t>
+            </a:r>
+            <a:r>
+              <a:rPr lang="ru-RU" altLang="en-US" sz="2300">
+                <a:latin typeface="JetBrains Mono"/>
+                <a:ea typeface="JetBrains Mono"/>
+                <a:cs typeface="JetBrains Mono"/>
+                <a:sym typeface="JetBrains Mono"/>
+                <a:solidFill>
+                  <a:srgbClr val="2c6fa6"/>
+                </a:solidFill>
+              </a:rPr>
+              <a:t>float</a:t>
+            </a:r>
+            <a:r>
+              <a:rPr lang="ru-RU" altLang="en-US" sz="2300">
+                <a:latin typeface="JetBrains Mono"/>
+                <a:ea typeface="JetBrains Mono"/>
+                <a:cs typeface="JetBrains Mono"/>
+                <a:sym typeface="JetBrains Mono"/>
+                <a:solidFill>
+                  <a:srgbClr val="1a1a1a"/>
+                </a:solidFill>
+              </a:rPr>
+              <a:t>:</a:t>
+            </a:r>
+          </a:p>
+          <a:p>
+            <a:pPr indent="0" lvl="0" marL="0" rtl="0" algn="l">
+              <a:spcBef>
+                <a:spcPts val="1000"/>
+              </a:spcBef>
+              <a:spcAft>
+                <a:spcPts val="0"/>
+              </a:spcAft>
+              <a:buNone/>
+            </a:pPr>
+            <a:endParaRPr>
+              <a:latin typeface="JetBrains Mono"/>
+              <a:ea typeface="JetBrains Mono"/>
+              <a:cs typeface="JetBrains Mono"/>
+              <a:sym typeface="JetBrains Mono"/>
+            </a:endParaRPr>
+            <a:r>
+              <a:rPr lang="ru-RU" altLang="en-US" sz="2300">
+                <a:latin typeface="JetBrains Mono"/>
+                <a:ea typeface="JetBrains Mono"/>
+                <a:cs typeface="JetBrains Mono"/>
+                <a:sym typeface="JetBrains Mono"/>
+                <a:solidFill>
+                  <a:srgbClr val="1a1a1a"/>
+                </a:solidFill>
+              </a:rPr>
+              <a:t>    </a:t>
+            </a:r>
+            <a:r>
+              <a:rPr lang="ru-RU" altLang="en-US" sz="2300">
+                <a:latin typeface="JetBrains Mono"/>
+                <a:ea typeface="JetBrains Mono"/>
+                <a:cs typeface="JetBrains Mono"/>
+                <a:sym typeface="JetBrains Mono"/>
+                <a:solidFill>
+                  <a:srgbClr val="c0392b"/>
+                </a:solidFill>
+              </a:rPr>
+              <a:t>return</a:t>
+            </a:r>
+            <a:r>
+              <a:rPr lang="ru-RU" altLang="en-US" sz="2300">
+                <a:latin typeface="JetBrains Mono"/>
+                <a:ea typeface="JetBrains Mono"/>
+                <a:cs typeface="JetBrains Mono"/>
+                <a:sym typeface="JetBrains Mono"/>
+                <a:solidFill>
+                  <a:srgbClr val="1a1a1a"/>
+                </a:solidFill>
+              </a:rPr>
+              <a:t> price * (</a:t>
+            </a:r>
+            <a:r>
+              <a:rPr lang="ru-RU" altLang="en-US" sz="2300">
+                <a:latin typeface="JetBrains Mono"/>
+                <a:ea typeface="JetBrains Mono"/>
+                <a:cs typeface="JetBrains Mono"/>
+                <a:sym typeface="JetBrains Mono"/>
+                <a:solidFill>
+                  <a:srgbClr val="7f8c8d"/>
+                </a:solidFill>
+              </a:rPr>
+              <a:t>1</a:t>
+            </a:r>
+            <a:r>
+              <a:rPr lang="ru-RU" altLang="en-US" sz="2300">
+                <a:latin typeface="JetBrains Mono"/>
+                <a:ea typeface="JetBrains Mono"/>
+                <a:cs typeface="JetBrains Mono"/>
+                <a:sym typeface="JetBrains Mono"/>
+                <a:solidFill>
+                  <a:srgbClr val="1a1a1a"/>
+                </a:solidFill>
+              </a:rPr>
+              <a:t> - rate)</a:t>
+            </a:r>
+          </a:p>
+        </p:txBody>
+      </p:sp>
+    </p:spTree>
+  </p:cSld>
+  <p:clrMapOvr>
+    <a:masterClrMapping/>
+  </p:clrMapOvr>
+</p:sld>
+</file>
+
+<file path=ppt/slides/slide39.xml><?xml version="1.0" encoding="utf-8"?>
+<p:sld xmlns:a="http://schemas.openxmlformats.org/drawingml/2006/main" xmlns:p="http://schemas.openxmlformats.org/presentationml/2006/main" xmlns:r="http://schemas.openxmlformats.org/officeDocument/2006/relationships">
+  <p:cSld>
+    <p:spTree>
+      <p:nvGrpSpPr>
+        <p:cNvPr id="157" name="Shape 157"/>
+        <p:cNvGrpSpPr/>
+        <p:nvPr/>
+      </p:nvGrpSpPr>
+      <p:grpSpPr>
+        <a:xfrm>
+          <a:off x="0" y="0"/>
+          <a:ext cx="0" cy="0"/>
+          <a:chOff x="0" y="0"/>
+          <a:chExt cx="0" cy="0"/>
+        </a:xfrm>
+      </p:grpSpPr>
+      <p:sp>
+        <p:nvSpPr>
+          <p:cNvPr id="158" name="Google Shape;158;g3d09141108f_0_60"/>
+          <p:cNvSpPr txBox="1"/>
+          <p:nvPr>
+            <p:ph idx="12" type="sldNum"/>
+          </p:nvPr>
+        </p:nvSpPr>
+        <p:spPr>
+          <a:xfrm>
+            <a:off x="8610600" y="6356350"/>
+            <a:ext cx="2743200" cy="365100"/>
+          </a:xfrm>
+          <a:prstGeom prst="rect">
+            <a:avLst/>
+          </a:prstGeom>
+        </p:spPr>
+        <p:txBody>
+          <a:bodyPr anchorCtr="0" anchor="t" bIns="45700" lIns="91425" spcFirstLastPara="1" rIns="91425" wrap="square" tIns="45700">
+            <a:noAutofit/>
+          </a:bodyPr>
+          <a:lstStyle/>
+          <a:p>
+            <a:pPr indent="0" lvl="0" marL="0" rtl="0" algn="r">
+              <a:spcBef>
+                <a:spcPts val="0"/>
+              </a:spcBef>
+              <a:spcAft>
+                <a:spcPts val="0"/>
+              </a:spcAft>
+              <a:buNone/>
+            </a:pPr>
+            <a:fld id="{00000000-1234-1234-1234-123412341234}" type="slidenum">
+              <a:rPr lang="ru-RU"/>
+              <a:t>‹#›</a:t>
+            </a:fld>
+            <a:endParaRPr/>
+          </a:p>
+        </p:txBody>
+      </p:sp>
+      <p:sp>
+        <p:nvSpPr>
+          <p:cNvPr id="159" name="Google Shape;159;g3d09141108f_0_60"/>
+          <p:cNvSpPr txBox="1"/>
+          <p:nvPr>
+            <p:ph idx="1" type="body"/>
+          </p:nvPr>
+        </p:nvSpPr>
+        <p:spPr>
+          <a:xfrm>
+            <a:off x="838198" y="543878"/>
+            <a:ext cx="10942500" cy="1219200"/>
+          </a:xfrm>
+          <a:prstGeom prst="rect">
+            <a:avLst/>
+          </a:prstGeom>
+        </p:spPr>
+        <p:txBody>
+          <a:bodyPr anchorCtr="0" anchor="ctr" bIns="45700" lIns="91425" spcFirstLastPara="1" rIns="91425" wrap="square" tIns="45700">
+            <a:noAutofit/>
+          </a:bodyPr>
+          <a:lstStyle/>
+          <a:p>
+            <a:pPr indent="0" lvl="0" marL="0" rtl="0" algn="l">
+              <a:spcBef>
+                <a:spcPts val="1000"/>
+              </a:spcBef>
+              <a:spcAft>
+                <a:spcPts val="0"/>
+              </a:spcAft>
+              <a:buNone/>
+            </a:pPr>
+            <a:r>
+              <a:rPr lang="ru-RU"/>
+              <a:t>Ссылочная прозрачность: JS</a:t>
+            </a:r>
+          </a:p>
+        </p:txBody>
+      </p:sp>
+      <p:sp>
+        <p:nvSpPr>
+          <p:cNvPr id="160" name="Google Shape;160;g3d09141108f_0_60"/>
+          <p:cNvSpPr txBox="1"/>
+          <p:nvPr>
+            <p:ph idx="2" type="body"/>
+          </p:nvPr>
+        </p:nvSpPr>
+        <p:spPr>
+          <a:xfrm>
+            <a:off x="1138200" y="1763063"/>
+            <a:ext cx="10642500" cy="3254400"/>
+          </a:xfrm>
+          <a:prstGeom prst="rect">
+            <a:avLst/>
+          </a:prstGeom>
+        </p:spPr>
+        <p:txBody>
+          <a:bodyPr anchorCtr="0" anchor="t" bIns="45700" lIns="91425" spcFirstLastPara="1" rIns="91425" wrap="square" tIns="45700">
+            <a:noAutofit/>
+          </a:bodyPr>
+          <a:lstStyle/>
+          <a:p>
+            <a:pPr indent="0" lvl="0" marL="0" rtl="0" algn="l">
+              <a:spcBef>
+                <a:spcPts val="1000"/>
+              </a:spcBef>
+              <a:spcAft>
+                <a:spcPts val="0"/>
+              </a:spcAft>
+              <a:buNone/>
+            </a:pPr>
+            <a:endParaRPr sz="2000">
+              <a:latin typeface="JetBrains Mono"/>
+              <a:ea typeface="JetBrains Mono"/>
+              <a:cs typeface="JetBrains Mono"/>
+              <a:sym typeface="JetBrains Mono"/>
+            </a:endParaRPr>
+            <a:r>
+              <a:rPr lang="ru-RU" altLang="en-US" sz="2000">
+                <a:latin typeface="JetBrains Mono"/>
+                <a:ea typeface="JetBrains Mono"/>
+                <a:cs typeface="JetBrains Mono"/>
+                <a:sym typeface="JetBrains Mono"/>
+                <a:solidFill>
+                  <a:srgbClr val="95a5a6"/>
+                </a:solidFill>
+              </a:rPr>
+              <a:t>// нечистая: захватывает внешнее состояние</a:t>
+            </a:r>
+          </a:p>
+          <a:p>
+            <a:pPr indent="0" lvl="0" marL="0" rtl="0" algn="l">
+              <a:spcBef>
+                <a:spcPts val="1000"/>
+              </a:spcBef>
+              <a:spcAft>
+                <a:spcPts val="0"/>
+              </a:spcAft>
+              <a:buNone/>
+            </a:pPr>
+            <a:endParaRPr sz="2000">
+              <a:latin typeface="JetBrains Mono"/>
+              <a:ea typeface="JetBrains Mono"/>
+              <a:cs typeface="JetBrains Mono"/>
+              <a:sym typeface="JetBrains Mono"/>
+            </a:endParaRPr>
+            <a:r>
+              <a:rPr lang="ru-RU" altLang="en-US" sz="2000">
+                <a:latin typeface="JetBrains Mono"/>
+                <a:ea typeface="JetBrains Mono"/>
+                <a:cs typeface="JetBrains Mono"/>
+                <a:sym typeface="JetBrains Mono"/>
+                <a:solidFill>
+                  <a:srgbClr val="c0392b"/>
+                </a:solidFill>
+              </a:rPr>
+              <a:t>let</a:t>
+            </a:r>
+            <a:r>
+              <a:rPr lang="ru-RU" altLang="en-US" sz="2000">
+                <a:latin typeface="JetBrains Mono"/>
+                <a:ea typeface="JetBrains Mono"/>
+                <a:cs typeface="JetBrains Mono"/>
+                <a:sym typeface="JetBrains Mono"/>
+                <a:solidFill>
+                  <a:srgbClr val="1a1a1a"/>
+                </a:solidFill>
+              </a:rPr>
+              <a:t> taxRate = </a:t>
+            </a:r>
+            <a:r>
+              <a:rPr lang="ru-RU" altLang="en-US" sz="2000">
+                <a:latin typeface="JetBrains Mono"/>
+                <a:ea typeface="JetBrains Mono"/>
+                <a:cs typeface="JetBrains Mono"/>
+                <a:sym typeface="JetBrains Mono"/>
+                <a:solidFill>
+                  <a:srgbClr val="7f8c8d"/>
+                </a:solidFill>
+              </a:rPr>
+              <a:t>0.2</a:t>
+            </a:r>
+            <a:r>
+              <a:rPr lang="ru-RU" altLang="en-US" sz="2000">
+                <a:latin typeface="JetBrains Mono"/>
+                <a:ea typeface="JetBrains Mono"/>
+                <a:cs typeface="JetBrains Mono"/>
+                <a:sym typeface="JetBrains Mono"/>
+                <a:solidFill>
+                  <a:srgbClr val="1a1a1a"/>
+                </a:solidFill>
+              </a:rPr>
+              <a:t>;</a:t>
+            </a:r>
+          </a:p>
+          <a:p>
+            <a:pPr indent="0" lvl="0" marL="0" rtl="0" algn="l">
+              <a:spcBef>
+                <a:spcPts val="1000"/>
+              </a:spcBef>
+              <a:spcAft>
+                <a:spcPts val="0"/>
+              </a:spcAft>
+              <a:buNone/>
+            </a:pPr>
+            <a:endParaRPr sz="2000">
+              <a:latin typeface="JetBrains Mono"/>
+              <a:ea typeface="JetBrains Mono"/>
+              <a:cs typeface="JetBrains Mono"/>
+              <a:sym typeface="JetBrains Mono"/>
+            </a:endParaRPr>
+            <a:r>
+              <a:rPr lang="ru-RU" altLang="en-US" sz="2000">
+                <a:latin typeface="JetBrains Mono"/>
+                <a:ea typeface="JetBrains Mono"/>
+                <a:cs typeface="JetBrains Mono"/>
+                <a:sym typeface="JetBrains Mono"/>
+                <a:solidFill>
+                  <a:srgbClr val="c0392b"/>
+                </a:solidFill>
+              </a:rPr>
+              <a:t>const</a:t>
+            </a:r>
+            <a:r>
+              <a:rPr lang="ru-RU" altLang="en-US" sz="2000">
+                <a:latin typeface="JetBrains Mono"/>
+                <a:ea typeface="JetBrains Mono"/>
+                <a:cs typeface="JetBrains Mono"/>
+                <a:sym typeface="JetBrains Mono"/>
+                <a:solidFill>
+                  <a:srgbClr val="1a1a1a"/>
+                </a:solidFill>
+              </a:rPr>
+              <a:t> priceWithTax = (price) =&gt; price * (</a:t>
+            </a:r>
+            <a:r>
+              <a:rPr lang="ru-RU" altLang="en-US" sz="2000">
+                <a:latin typeface="JetBrains Mono"/>
+                <a:ea typeface="JetBrains Mono"/>
+                <a:cs typeface="JetBrains Mono"/>
+                <a:sym typeface="JetBrains Mono"/>
+                <a:solidFill>
+                  <a:srgbClr val="7f8c8d"/>
+                </a:solidFill>
+              </a:rPr>
+              <a:t>1</a:t>
+            </a:r>
+            <a:r>
+              <a:rPr lang="ru-RU" altLang="en-US" sz="2000">
+                <a:latin typeface="JetBrains Mono"/>
+                <a:ea typeface="JetBrains Mono"/>
+                <a:cs typeface="JetBrains Mono"/>
+                <a:sym typeface="JetBrains Mono"/>
+                <a:solidFill>
+                  <a:srgbClr val="1a1a1a"/>
+                </a:solidFill>
+              </a:rPr>
+              <a:t> + taxRate);</a:t>
+            </a:r>
+          </a:p>
+          <a:p>
+            <a:pPr indent="0" lvl="0" marL="0" rtl="0" algn="l">
+              <a:spcBef>
+                <a:spcPts val="1000"/>
+              </a:spcBef>
+              <a:spcAft>
+                <a:spcPts val="0"/>
+              </a:spcAft>
+              <a:buNone/>
+            </a:pPr>
+            <a:endParaRPr sz="2000">
+              <a:latin typeface="JetBrains Mono"/>
+              <a:ea typeface="JetBrains Mono"/>
+              <a:cs typeface="JetBrains Mono"/>
+              <a:sym typeface="JetBrains Mono"/>
+            </a:endParaRPr>
+            <a:r>
+              <a:rPr lang="ru-RU" altLang="en-US" sz="2000">
+                <a:latin typeface="JetBrains Mono"/>
+                <a:ea typeface="JetBrains Mono"/>
+                <a:cs typeface="JetBrains Mono"/>
+                <a:sym typeface="JetBrains Mono"/>
+                <a:solidFill>
+                  <a:srgbClr val="1a1a1a"/>
+                </a:solidFill>
+              </a:rPr>
+              <a:t/>
+            </a:r>
+          </a:p>
+          <a:p>
+            <a:pPr indent="0" lvl="0" marL="0" rtl="0" algn="l">
+              <a:spcBef>
+                <a:spcPts val="1000"/>
+              </a:spcBef>
+              <a:spcAft>
+                <a:spcPts val="0"/>
+              </a:spcAft>
+              <a:buNone/>
+            </a:pPr>
+            <a:endParaRPr sz="2000">
+              <a:latin typeface="JetBrains Mono"/>
+              <a:ea typeface="JetBrains Mono"/>
+              <a:cs typeface="JetBrains Mono"/>
+              <a:sym typeface="JetBrains Mono"/>
+            </a:endParaRPr>
+            <a:r>
+              <a:rPr lang="ru-RU" altLang="en-US" sz="2000">
+                <a:latin typeface="JetBrains Mono"/>
+                <a:ea typeface="JetBrains Mono"/>
+                <a:cs typeface="JetBrains Mono"/>
+                <a:sym typeface="JetBrains Mono"/>
+                <a:solidFill>
+                  <a:srgbClr val="95a5a6"/>
+                </a:solidFill>
+              </a:rPr>
+              <a:t>// чистая</a:t>
+            </a:r>
+          </a:p>
+          <a:p>
+            <a:pPr indent="0" lvl="0" marL="0" rtl="0" algn="l">
+              <a:spcBef>
+                <a:spcPts val="1000"/>
+              </a:spcBef>
+              <a:spcAft>
+                <a:spcPts val="0"/>
+              </a:spcAft>
+              <a:buNone/>
+            </a:pPr>
+            <a:endParaRPr sz="2000">
+              <a:latin typeface="JetBrains Mono"/>
+              <a:ea typeface="JetBrains Mono"/>
+              <a:cs typeface="JetBrains Mono"/>
+              <a:sym typeface="JetBrains Mono"/>
+            </a:endParaRPr>
+            <a:r>
+              <a:rPr lang="ru-RU" altLang="en-US" sz="2000">
+                <a:latin typeface="JetBrains Mono"/>
+                <a:ea typeface="JetBrains Mono"/>
+                <a:cs typeface="JetBrains Mono"/>
+                <a:sym typeface="JetBrains Mono"/>
+                <a:solidFill>
+                  <a:srgbClr val="c0392b"/>
+                </a:solidFill>
+              </a:rPr>
+              <a:t>const</a:t>
+            </a:r>
+            <a:r>
+              <a:rPr lang="ru-RU" altLang="en-US" sz="2000">
+                <a:latin typeface="JetBrains Mono"/>
+                <a:ea typeface="JetBrains Mono"/>
+                <a:cs typeface="JetBrains Mono"/>
+                <a:sym typeface="JetBrains Mono"/>
+                <a:solidFill>
+                  <a:srgbClr val="1a1a1a"/>
+                </a:solidFill>
+              </a:rPr>
+              <a:t> applyDiscount = (rate) =&gt; (price) =&gt; price * (</a:t>
+            </a:r>
+            <a:r>
+              <a:rPr lang="ru-RU" altLang="en-US" sz="2000">
+                <a:latin typeface="JetBrains Mono"/>
+                <a:ea typeface="JetBrains Mono"/>
+                <a:cs typeface="JetBrains Mono"/>
+                <a:sym typeface="JetBrains Mono"/>
+                <a:solidFill>
+                  <a:srgbClr val="7f8c8d"/>
+                </a:solidFill>
+              </a:rPr>
+              <a:t>1</a:t>
+            </a:r>
+            <a:r>
+              <a:rPr lang="ru-RU" altLang="en-US" sz="2000">
+                <a:latin typeface="JetBrains Mono"/>
+                <a:ea typeface="JetBrains Mono"/>
+                <a:cs typeface="JetBrains Mono"/>
+                <a:sym typeface="JetBrains Mono"/>
+                <a:solidFill>
+                  <a:srgbClr val="1a1a1a"/>
+                </a:solidFill>
+              </a:rPr>
+              <a:t> - rate);</a:t>
+            </a:r>
+          </a:p>
+        </p:txBody>
+      </p:sp>
     </p:spTree>
   </p:cSld>
   <p:clrMapOvr>
@@ -32102,6 +34999,399 @@
 </p:sld>
 </file>
 
+<file path=ppt/slides/slide40.xml><?xml version="1.0" encoding="utf-8"?>
+<p:sld xmlns:a="http://schemas.openxmlformats.org/drawingml/2006/main" xmlns:p="http://schemas.openxmlformats.org/presentationml/2006/main" xmlns:r="http://schemas.openxmlformats.org/officeDocument/2006/relationships">
+  <p:cSld>
+    <p:spTree>
+      <p:nvGrpSpPr>
+        <p:cNvPr id="178" name="Shape 178"/>
+        <p:cNvGrpSpPr/>
+        <p:nvPr/>
+      </p:nvGrpSpPr>
+      <p:grpSpPr>
+        <a:xfrm>
+          <a:off x="0" y="0"/>
+          <a:ext cx="0" cy="0"/>
+          <a:chOff x="0" y="0"/>
+          <a:chExt cx="0" cy="0"/>
+        </a:xfrm>
+      </p:grpSpPr>
+      <p:sp>
+        <p:nvSpPr>
+          <p:cNvPr id="179" name="Google Shape;179;p5"/>
+          <p:cNvSpPr txBox="1"/>
+          <p:nvPr/>
+        </p:nvSpPr>
+        <p:spPr>
+          <a:xfrm>
+            <a:off x="6096000" y="1594852"/>
+            <a:ext cx="5241925" cy="1063625"/>
+          </a:xfrm>
+          <a:prstGeom prst="rect">
+            <a:avLst/>
+          </a:prstGeom>
+          <a:noFill/>
+          <a:ln>
+            <a:noFill/>
+          </a:ln>
+        </p:spPr>
+        <p:txBody>
+          <a:bodyPr anchorCtr="0" anchor="t" bIns="45700" lIns="91425" spcFirstLastPara="1" rIns="91425" wrap="square" tIns="45700">
+            <a:noAutofit/>
+          </a:bodyPr>
+          <a:lstStyle/>
+          <a:p>
+            <a:pPr indent="0" lvl="0" marL="0" marR="0" rtl="0" algn="l">
+              <a:lnSpc>
+                <a:spcPct val="90000"/>
+              </a:lnSpc>
+              <a:spcBef>
+                <a:spcPts val="0"/>
+              </a:spcBef>
+              <a:spcAft>
+                <a:spcPts val="0"/>
+              </a:spcAft>
+              <a:buClr>
+                <a:schemeClr val="dk1"/>
+              </a:buClr>
+              <a:buSzPts val="4400"/>
+              <a:buFont typeface="Arial"/>
+              <a:buNone/>
+            </a:pPr>
+            <a:r>
+              <a:rPr b="1" i="1" lang="ru-RU" sz="4400">
+                <a:solidFill>
+                  <a:schemeClr val="dk1"/>
+                </a:solidFill>
+              </a:rPr>
+              <a:t>Павел Аргентов</a:t>
+            </a:r>
+            <a:endParaRPr b="0" i="0" sz="2800" u="none" cap="none" strike="noStrike">
+              <a:solidFill>
+                <a:schemeClr val="dk1"/>
+              </a:solidFill>
+              <a:latin typeface="Calibri"/>
+              <a:ea typeface="Calibri"/>
+              <a:cs typeface="Calibri"/>
+              <a:sym typeface="Calibri"/>
+            </a:endParaRPr>
+          </a:p>
+        </p:txBody>
+      </p:sp>
+      <p:sp>
+        <p:nvSpPr>
+          <p:cNvPr id="180" name="Google Shape;180;p5"/>
+          <p:cNvSpPr txBox="1"/>
+          <p:nvPr/>
+        </p:nvSpPr>
+        <p:spPr>
+          <a:xfrm>
+            <a:off x="6110607" y="3239501"/>
+            <a:ext cx="5241925" cy="2097882"/>
+          </a:xfrm>
+          <a:prstGeom prst="rect">
+            <a:avLst/>
+          </a:prstGeom>
+          <a:noFill/>
+          <a:ln>
+            <a:noFill/>
+          </a:ln>
+        </p:spPr>
+        <p:txBody>
+          <a:bodyPr anchorCtr="0" anchor="t" bIns="45700" lIns="91425" spcFirstLastPara="1" rIns="91425" wrap="square" tIns="45700">
+            <a:noAutofit/>
+          </a:bodyPr>
+          <a:lstStyle/>
+          <a:p>
+            <a:pPr indent="0" lvl="0" marL="0" marR="0" rtl="0" algn="l">
+              <a:lnSpc>
+                <a:spcPct val="90000"/>
+              </a:lnSpc>
+              <a:spcBef>
+                <a:spcPts val="1000"/>
+              </a:spcBef>
+              <a:spcAft>
+                <a:spcPts val="0"/>
+              </a:spcAft>
+              <a:buClr>
+                <a:schemeClr val="dk1"/>
+              </a:buClr>
+              <a:buSzPts val="2800"/>
+              <a:buFont typeface="Arial"/>
+              <a:buNone/>
+            </a:pPr>
+            <a:r>
+              <a:rPr b="0" i="1" lang="ru-RU" sz="2800" u="none" cap="none" strike="noStrike">
+                <a:solidFill>
+                  <a:schemeClr val="dk1"/>
+                </a:solidFill>
+                <a:latin typeface="Arial"/>
+                <a:ea typeface="Arial"/>
+                <a:cs typeface="Arial"/>
+                <a:sym typeface="Arial"/>
+              </a:rPr>
+              <a:t>Tg: @</a:t>
+            </a:r>
+            <a:r>
+              <a:rPr i="1" lang="ru-RU" sz="2800">
+                <a:solidFill>
+                  <a:schemeClr val="dk1"/>
+                </a:solidFill>
+              </a:rPr>
+              <a:t>argent_smith</a:t>
+            </a:r>
+            <a:endParaRPr b="0" i="0" sz="1400" u="none" cap="none" strike="noStrike">
+              <a:solidFill>
+                <a:srgbClr val="000000"/>
+              </a:solidFill>
+              <a:latin typeface="Arial"/>
+              <a:ea typeface="Arial"/>
+              <a:cs typeface="Arial"/>
+              <a:sym typeface="Arial"/>
+            </a:endParaRPr>
+          </a:p>
+          <a:p>
+            <a:pPr indent="0" lvl="0" marL="0" marR="0" rtl="0" algn="l">
+              <a:lnSpc>
+                <a:spcPct val="90000"/>
+              </a:lnSpc>
+              <a:spcBef>
+                <a:spcPts val="1000"/>
+              </a:spcBef>
+              <a:spcAft>
+                <a:spcPts val="0"/>
+              </a:spcAft>
+              <a:buClr>
+                <a:schemeClr val="dk1"/>
+              </a:buClr>
+              <a:buSzPts val="2800"/>
+              <a:buFont typeface="Arial"/>
+              <a:buNone/>
+            </a:pPr>
+            <a:r>
+              <a:t/>
+            </a:r>
+            <a:endParaRPr b="0" i="1" sz="2800" u="none" cap="none" strike="noStrike">
+              <a:solidFill>
+                <a:schemeClr val="dk1"/>
+              </a:solidFill>
+              <a:latin typeface="Arial"/>
+              <a:ea typeface="Arial"/>
+              <a:cs typeface="Arial"/>
+              <a:sym typeface="Arial"/>
+            </a:endParaRPr>
+          </a:p>
+          <a:p>
+            <a:pPr indent="0" lvl="0" marL="0" marR="0" rtl="0" algn="l">
+              <a:lnSpc>
+                <a:spcPct val="90000"/>
+              </a:lnSpc>
+              <a:spcBef>
+                <a:spcPts val="1000"/>
+              </a:spcBef>
+              <a:spcAft>
+                <a:spcPts val="0"/>
+              </a:spcAft>
+              <a:buClr>
+                <a:schemeClr val="dk1"/>
+              </a:buClr>
+              <a:buSzPts val="2800"/>
+              <a:buFont typeface="Arial"/>
+              <a:buNone/>
+            </a:pPr>
+            <a:r>
+              <a:t/>
+            </a:r>
+            <a:endParaRPr b="0" i="1" sz="2800" u="none" cap="none" strike="noStrike">
+              <a:solidFill>
+                <a:schemeClr val="dk1"/>
+              </a:solidFill>
+              <a:latin typeface="Arial"/>
+              <a:ea typeface="Arial"/>
+              <a:cs typeface="Arial"/>
+              <a:sym typeface="Arial"/>
+            </a:endParaRPr>
+          </a:p>
+        </p:txBody>
+      </p:sp>
+      <p:pic>
+        <p:nvPicPr>
+          <p:cNvPr id="181" name="Google Shape;181;p5"/>
+          <p:cNvPicPr preferRelativeResize="0"/>
+          <p:nvPr/>
+        </p:nvPicPr>
+        <p:blipFill rotWithShape="1">
+          <a:blip r:embed="rId3">
+            <a:alphaModFix/>
+          </a:blip>
+          <a:srcRect b="0" l="0" r="0" t="0"/>
+          <a:stretch/>
+        </p:blipFill>
+        <p:spPr>
+          <a:xfrm>
+            <a:off x="567954" y="810796"/>
+            <a:ext cx="4857410" cy="4857410"/>
+          </a:xfrm>
+          <a:prstGeom prst="rect">
+            <a:avLst/>
+          </a:prstGeom>
+          <a:noFill/>
+          <a:ln>
+            <a:noFill/>
+          </a:ln>
+        </p:spPr>
+      </p:pic>
+    </p:spTree>
+  </p:cSld>
+  <p:clrMapOvr>
+    <a:masterClrMapping/>
+  </p:clrMapOvr>
+</p:sld>
+</file>
+
+<file path=ppt/slides/slide41.xml><?xml version="1.0" encoding="utf-8"?>
+<p:sld xmlns:a="http://schemas.openxmlformats.org/drawingml/2006/main" xmlns:p="http://schemas.openxmlformats.org/presentationml/2006/main" xmlns:r="http://schemas.openxmlformats.org/officeDocument/2006/relationships">
+  <p:cSld>
+    <p:spTree>
+      <p:nvGrpSpPr>
+        <p:cNvPr id="136" name="Shape 136"/>
+        <p:cNvGrpSpPr/>
+        <p:nvPr/>
+      </p:nvGrpSpPr>
+      <p:grpSpPr>
+        <a:xfrm>
+          <a:off x="0" y="0"/>
+          <a:ext cx="0" cy="0"/>
+          <a:chOff x="0" y="0"/>
+          <a:chExt cx="0" cy="0"/>
+        </a:xfrm>
+      </p:grpSpPr>
+      <p:sp>
+        <p:nvSpPr>
+          <p:cNvPr id="137" name="Google Shape;137;g3d09141108f_0_73"/>
+          <p:cNvSpPr txBox="1"/>
+          <p:nvPr>
+            <p:ph idx="12" type="sldNum"/>
+          </p:nvPr>
+        </p:nvSpPr>
+        <p:spPr>
+          <a:xfrm>
+            <a:off x="8610600" y="6356350"/>
+            <a:ext cx="2743200" cy="365100"/>
+          </a:xfrm>
+          <a:prstGeom prst="rect">
+            <a:avLst/>
+          </a:prstGeom>
+        </p:spPr>
+        <p:txBody>
+          <a:bodyPr anchorCtr="0" anchor="t" bIns="45700" lIns="91425" spcFirstLastPara="1" rIns="91425" wrap="square" tIns="45700">
+            <a:noAutofit/>
+          </a:bodyPr>
+          <a:lstStyle/>
+          <a:p>
+            <a:pPr indent="0" lvl="0" marL="0" rtl="0" algn="r">
+              <a:spcBef>
+                <a:spcPts val="0"/>
+              </a:spcBef>
+              <a:spcAft>
+                <a:spcPts val="0"/>
+              </a:spcAft>
+              <a:buNone/>
+            </a:pPr>
+            <a:fld id="{00000000-1234-1234-1234-123412341234}" type="slidenum">
+              <a:rPr lang="ru-RU"/>
+              <a:t>‹#›</a:t>
+            </a:fld>
+            <a:endParaRPr/>
+          </a:p>
+        </p:txBody>
+      </p:sp>
+      <p:sp>
+        <p:nvSpPr>
+          <p:cNvPr id="138" name="Google Shape;138;g3d09141108f_0_73"/>
+          <p:cNvSpPr txBox="1"/>
+          <p:nvPr>
+            <p:ph idx="1" type="body"/>
+          </p:nvPr>
+        </p:nvSpPr>
+        <p:spPr>
+          <a:xfrm>
+            <a:off x="838198" y="543878"/>
+            <a:ext cx="10942500" cy="1219200"/>
+          </a:xfrm>
+          <a:prstGeom prst="rect">
+            <a:avLst/>
+          </a:prstGeom>
+        </p:spPr>
+        <p:txBody>
+          <a:bodyPr anchorCtr="0" anchor="ctr" bIns="45700" lIns="91425" spcFirstLastPara="1" rIns="91425" wrap="square" tIns="45700">
+            <a:noAutofit/>
+          </a:bodyPr>
+          <a:lstStyle/>
+          <a:p>
+            <a:pPr indent="0" lvl="0" marL="0" rtl="0" algn="l">
+              <a:spcBef>
+                <a:spcPts val="1000"/>
+              </a:spcBef>
+              <a:spcAft>
+                <a:spcPts val="0"/>
+              </a:spcAft>
+              <a:buNone/>
+            </a:pPr>
+            <a:r>
+              <a:rPr lang="ru-RU"/>
+              <a:t>Ссылочная прозрачность: задача</a:t>
+            </a:r>
+          </a:p>
+        </p:txBody>
+      </p:sp>
+      <p:sp>
+        <p:nvSpPr>
+          <p:cNvPr id="139" name="Google Shape;139;g3d09141108f_0_73"/>
+          <p:cNvSpPr txBox="1"/>
+          <p:nvPr>
+            <p:ph idx="2" type="body"/>
+          </p:nvPr>
+        </p:nvSpPr>
+        <p:spPr>
+          <a:xfrm>
+            <a:off x="838200" y="2170113"/>
+            <a:ext cx="10942500" cy="3254400"/>
+          </a:xfrm>
+          <a:prstGeom prst="rect">
+            <a:avLst/>
+          </a:prstGeom>
+        </p:spPr>
+        <p:txBody>
+          <a:bodyPr anchorCtr="0" anchor="t" bIns="45700" lIns="91425" spcFirstLastPara="1" rIns="91425" wrap="square" tIns="45700">
+            <a:noAutofit/>
+          </a:bodyPr>
+          <a:lstStyle/>
+          <a:p>
+            <a:pPr indent="0" lvl="0" marL="0" rtl="0" algn="l">
+              <a:spcBef>
+                <a:spcPts val="1000"/>
+              </a:spcBef>
+              <a:spcAft>
+                <a:spcPts val="0"/>
+              </a:spcAft>
+              <a:buNone/>
+            </a:pPr>
+            <a:r>
+              <a:rPr lang="ru-RU"/>
+              <a:t>Функция скидки — чистая и нечистая версии.</a:t>
+            </a:r>
+          </a:p>
+        </p:txBody>
+      </p:sp>
+    </p:spTree>
+  </p:cSld>
+  <p:clrMapOvr>
+    <a:masterClrMapping/>
+  </p:clrMapOvr>
+</p:sld>
+</file>
+
 <file path=ppt/slides/slide5.xml><?xml version="1.0" encoding="utf-8"?>
 <p:sld xmlns:a="http://schemas.openxmlformats.org/drawingml/2006/main" xmlns:r="http://schemas.openxmlformats.org/officeDocument/2006/relationships" xmlns:mc="http://schemas.openxmlformats.org/markup-compatibility/2006" xmlns:mv="urn:schemas-microsoft-com:mac:vml" xmlns:p="http://schemas.openxmlformats.org/presentationml/2006/main" xmlns:c="http://schemas.openxmlformats.org/drawingml/2006/chart" xmlns:dgm="http://schemas.openxmlformats.org/drawingml/2006/diagram" xmlns:o="urn:schemas-microsoft-com:office:office" xmlns:v="urn:schemas-microsoft-com:vml" xmlns:pvml="urn:schemas-microsoft-com:office:powerpoint" xmlns:com="http://schemas.openxmlformats.org/drawingml/2006/compatibility" xmlns:p14="http://schemas.microsoft.com/office/powerpoint/2010/main" xmlns:p15="http://schemas.microsoft.com/office/powerpoint/2012/main" xmlns:ahyp="http://schemas.microsoft.com/office/drawing/2018/hyperlinkcolor">
   <p:cSld>

--- a/FP_Talk_2026/nastachku/final_presentation.pptx
+++ b/FP_Talk_2026/nastachku/final_presentation.pptx
@@ -48,6 +48,16 @@
     <p:sldId id="300" r:id="rId59"/>
     <p:sldId id="301" r:id="rId60"/>
     <p:sldId id="302" r:id="rId61"/>
+    <p:sldId id="304" r:id="rId63"/>
+    <p:sldId id="305" r:id="rId64"/>
+    <p:sldId id="306" r:id="rId65"/>
+    <p:sldId id="307" r:id="rId66"/>
+    <p:sldId id="308" r:id="rId67"/>
+    <p:sldId id="309" r:id="rId68"/>
+    <p:sldId id="310" r:id="rId69"/>
+    <p:sldId id="311" r:id="rId70"/>
+    <p:sldId id="312" r:id="rId71"/>
+    <p:sldId id="313" r:id="rId72"/>
     <p:sldId id="295" r:id="rId54"/>
   </p:sldIdLst>
   <p:sldSz cy="6858000" cx="12192000"/>
@@ -31313,7 +31323,7 @@
   <p:cSld>
     <p:spTree>
       <p:nvGrpSpPr>
-        <p:cNvPr id="150" name="Shape 150"/>
+        <p:cNvPr id="136" name="Shape 136"/>
         <p:cNvGrpSpPr/>
         <p:nvPr/>
       </p:nvGrpSpPr>
@@ -31327,7 +31337,7 @@
       </p:grpSpPr>
       <p:sp>
         <p:nvSpPr>
-          <p:cNvPr id="151" name="Google Shape;151;g3d09141108f_0_54"/>
+          <p:cNvPr id="137" name="Google Shape;137;g3d09141108f_0_73"/>
           <p:cNvSpPr txBox="1"/>
           <p:nvPr>
             <p:ph idx="12" type="sldNum"/>
@@ -31367,7 +31377,7 @@
       </p:sp>
       <p:sp>
         <p:nvSpPr>
-          <p:cNvPr id="152" name="Google Shape;152;g3d09141108f_0_54"/>
+          <p:cNvPr id="138" name="Google Shape;138;g3d09141108f_0_73"/>
           <p:cNvSpPr txBox="1"/>
           <p:nvPr>
             <p:ph idx="1" type="body"/>
@@ -31399,14 +31409,14 @@
             </a:pPr>
             <a:r>
               <a:rPr lang="ru-RU"/>
-              <a:t>Ссылочная прозрачность: OCaml</a:t>
+              <a:t>Ссылочная прозрачность: задача</a:t>
             </a:r>
           </a:p>
         </p:txBody>
       </p:sp>
       <p:sp>
         <p:nvSpPr>
-          <p:cNvPr id="153" name="Google Shape;153;g3d09141108f_0_54"/>
+          <p:cNvPr id="139" name="Google Shape;139;g3d09141108f_0_73"/>
           <p:cNvSpPr txBox="1"/>
           <p:nvPr>
             <p:ph idx="2" type="body"/>
@@ -31414,8 +31424,8 @@
         </p:nvSpPr>
         <p:spPr>
           <a:xfrm>
-            <a:off x="1138200" y="1763063"/>
-            <a:ext cx="10642500" cy="3254400"/>
+            <a:off x="838200" y="2170113"/>
+            <a:ext cx="10942500" cy="3254400"/>
           </a:xfrm>
           <a:prstGeom prst="rect">
             <a:avLst/>
@@ -31436,452 +31446,9 @@
               </a:spcAft>
               <a:buNone/>
             </a:pPr>
-            <a:endParaRPr>
-              <a:latin typeface="JetBrains Mono"/>
-              <a:ea typeface="JetBrains Mono"/>
-              <a:cs typeface="JetBrains Mono"/>
-              <a:sym typeface="JetBrains Mono"/>
-            </a:endParaRPr>
-            <a:r>
-              <a:rPr lang="ru-RU" altLang="en-US" sz="2300">
-                <a:latin typeface="JetBrains Mono"/>
-                <a:ea typeface="JetBrains Mono"/>
-                <a:cs typeface="JetBrains Mono"/>
-                <a:sym typeface="JetBrains Mono"/>
-                <a:solidFill>
-                  <a:srgbClr val="c0392b"/>
-                </a:solidFill>
-              </a:rPr>
-              <a:t>let</a:t>
-            </a:r>
-            <a:r>
-              <a:rPr lang="ru-RU" altLang="en-US" sz="2300">
-                <a:latin typeface="JetBrains Mono"/>
-                <a:ea typeface="JetBrains Mono"/>
-                <a:cs typeface="JetBrains Mono"/>
-                <a:sym typeface="JetBrains Mono"/>
-                <a:solidFill>
-                  <a:srgbClr val="1a1a1a"/>
-                </a:solidFill>
-              </a:rPr>
-              <a:t> current_discount = </a:t>
-            </a:r>
-            <a:r>
-              <a:rPr lang="ru-RU" altLang="en-US" sz="2300">
-                <a:latin typeface="JetBrains Mono"/>
-                <a:ea typeface="JetBrains Mono"/>
-                <a:cs typeface="JetBrains Mono"/>
-                <a:sym typeface="JetBrains Mono"/>
-                <a:solidFill>
-                  <a:srgbClr val="c0392b"/>
-                </a:solidFill>
-              </a:rPr>
-              <a:t>ref</a:t>
-            </a:r>
-            <a:r>
-              <a:rPr lang="ru-RU" altLang="en-US" sz="2300">
-                <a:latin typeface="JetBrains Mono"/>
-                <a:ea typeface="JetBrains Mono"/>
-                <a:cs typeface="JetBrains Mono"/>
-                <a:sym typeface="JetBrains Mono"/>
-                <a:solidFill>
-                  <a:srgbClr val="1a1a1a"/>
-                </a:solidFill>
-              </a:rPr>
-              <a:t> </a:t>
-            </a:r>
-            <a:r>
-              <a:rPr lang="ru-RU" altLang="en-US" sz="2300">
-                <a:latin typeface="JetBrains Mono"/>
-                <a:ea typeface="JetBrains Mono"/>
-                <a:cs typeface="JetBrains Mono"/>
-                <a:sym typeface="JetBrains Mono"/>
-                <a:solidFill>
-                  <a:srgbClr val="7f8c8d"/>
-                </a:solidFill>
-              </a:rPr>
-              <a:t>0.1</a:t>
-            </a:r>
-          </a:p>
-          <a:p>
-            <a:pPr indent="0" lvl="0" marL="0" rtl="0" algn="l">
-              <a:spcBef>
-                <a:spcPts val="1000"/>
-              </a:spcBef>
-              <a:spcAft>
-                <a:spcPts val="0"/>
-              </a:spcAft>
-              <a:buNone/>
-            </a:pPr>
-            <a:endParaRPr>
-              <a:latin typeface="JetBrains Mono"/>
-              <a:ea typeface="JetBrains Mono"/>
-              <a:cs typeface="JetBrains Mono"/>
-              <a:sym typeface="JetBrains Mono"/>
-            </a:endParaRPr>
-            <a:r>
-              <a:rPr lang="ru-RU" altLang="en-US" sz="2300">
-                <a:latin typeface="JetBrains Mono"/>
-                <a:ea typeface="JetBrains Mono"/>
-                <a:cs typeface="JetBrains Mono"/>
-                <a:sym typeface="JetBrains Mono"/>
-                <a:solidFill>
-                  <a:srgbClr val="95a5a6"/>
-                </a:solidFill>
-              </a:rPr>
-              <a:t>(* нечистая: глобальное состояние *)</a:t>
-            </a:r>
-          </a:p>
-          <a:p>
-            <a:pPr indent="0" lvl="0" marL="0" rtl="0" algn="l">
-              <a:spcBef>
-                <a:spcPts val="1000"/>
-              </a:spcBef>
-              <a:spcAft>
-                <a:spcPts val="0"/>
-              </a:spcAft>
-              <a:buNone/>
-            </a:pPr>
-            <a:endParaRPr>
-              <a:latin typeface="JetBrains Mono"/>
-              <a:ea typeface="JetBrains Mono"/>
-              <a:cs typeface="JetBrains Mono"/>
-              <a:sym typeface="JetBrains Mono"/>
-            </a:endParaRPr>
-            <a:r>
-              <a:rPr lang="ru-RU" altLang="en-US" sz="2300">
-                <a:latin typeface="JetBrains Mono"/>
-                <a:ea typeface="JetBrains Mono"/>
-                <a:cs typeface="JetBrains Mono"/>
-                <a:sym typeface="JetBrains Mono"/>
-                <a:solidFill>
-                  <a:srgbClr val="c0392b"/>
-                </a:solidFill>
-              </a:rPr>
-              <a:t>let</a:t>
-            </a:r>
-            <a:r>
-              <a:rPr lang="ru-RU" altLang="en-US" sz="2300">
-                <a:latin typeface="JetBrains Mono"/>
-                <a:ea typeface="JetBrains Mono"/>
-                <a:cs typeface="JetBrains Mono"/>
-                <a:sym typeface="JetBrains Mono"/>
-                <a:solidFill>
-                  <a:srgbClr val="1a1a1a"/>
-                </a:solidFill>
-              </a:rPr>
-              <a:t> price_with_global_discount price =</a:t>
-            </a:r>
-          </a:p>
-          <a:p>
-            <a:pPr indent="0" lvl="0" marL="0" rtl="0" algn="l">
-              <a:spcBef>
-                <a:spcPts val="1000"/>
-              </a:spcBef>
-              <a:spcAft>
-                <a:spcPts val="0"/>
-              </a:spcAft>
-              <a:buNone/>
-            </a:pPr>
-            <a:endParaRPr>
-              <a:latin typeface="JetBrains Mono"/>
-              <a:ea typeface="JetBrains Mono"/>
-              <a:cs typeface="JetBrains Mono"/>
-              <a:sym typeface="JetBrains Mono"/>
-            </a:endParaRPr>
-            <a:r>
-              <a:rPr lang="ru-RU" altLang="en-US" sz="2300">
-                <a:latin typeface="JetBrains Mono"/>
-                <a:ea typeface="JetBrains Mono"/>
-                <a:cs typeface="JetBrains Mono"/>
-                <a:sym typeface="JetBrains Mono"/>
-                <a:solidFill>
-                  <a:srgbClr val="1a1a1a"/>
-                </a:solidFill>
-              </a:rPr>
-              <a:t>  price *. (</a:t>
-            </a:r>
-            <a:r>
-              <a:rPr lang="ru-RU" altLang="en-US" sz="2300">
-                <a:latin typeface="JetBrains Mono"/>
-                <a:ea typeface="JetBrains Mono"/>
-                <a:cs typeface="JetBrains Mono"/>
-                <a:sym typeface="JetBrains Mono"/>
-                <a:solidFill>
-                  <a:srgbClr val="7f8c8d"/>
-                </a:solidFill>
-              </a:rPr>
-              <a:t>1.0</a:t>
-            </a:r>
-            <a:r>
-              <a:rPr lang="ru-RU" altLang="en-US" sz="2300">
-                <a:latin typeface="JetBrains Mono"/>
-                <a:ea typeface="JetBrains Mono"/>
-                <a:cs typeface="JetBrains Mono"/>
-                <a:sym typeface="JetBrains Mono"/>
-                <a:solidFill>
-                  <a:srgbClr val="1a1a1a"/>
-                </a:solidFill>
-              </a:rPr>
-              <a:t> -. !current_discount)</a:t>
-            </a:r>
-          </a:p>
-          <a:p>
-            <a:pPr indent="0" lvl="0" marL="0" rtl="0" algn="l">
-              <a:spcBef>
-                <a:spcPts val="1000"/>
-              </a:spcBef>
-              <a:spcAft>
-                <a:spcPts val="0"/>
-              </a:spcAft>
-              <a:buNone/>
-            </a:pPr>
-            <a:endParaRPr>
-              <a:latin typeface="JetBrains Mono"/>
-              <a:ea typeface="JetBrains Mono"/>
-              <a:cs typeface="JetBrains Mono"/>
-              <a:sym typeface="JetBrains Mono"/>
-            </a:endParaRPr>
-            <a:r>
-              <a:rPr lang="ru-RU" altLang="en-US" sz="2300">
-                <a:latin typeface="JetBrains Mono"/>
-                <a:ea typeface="JetBrains Mono"/>
-                <a:cs typeface="JetBrains Mono"/>
-                <a:sym typeface="JetBrains Mono"/>
-                <a:solidFill>
-                  <a:srgbClr val="1a1a1a"/>
-                </a:solidFill>
-              </a:rPr>
-              <a:t/>
-            </a:r>
-          </a:p>
-          <a:p>
-            <a:pPr indent="0" lvl="0" marL="0" rtl="0" algn="l">
-              <a:spcBef>
-                <a:spcPts val="1000"/>
-              </a:spcBef>
-              <a:spcAft>
-                <a:spcPts val="0"/>
-              </a:spcAft>
-              <a:buNone/>
-            </a:pPr>
-            <a:endParaRPr>
-              <a:latin typeface="JetBrains Mono"/>
-              <a:ea typeface="JetBrains Mono"/>
-              <a:cs typeface="JetBrains Mono"/>
-              <a:sym typeface="JetBrains Mono"/>
-            </a:endParaRPr>
-            <a:r>
-              <a:rPr lang="ru-RU" altLang="en-US" sz="2300">
-                <a:latin typeface="JetBrains Mono"/>
-                <a:ea typeface="JetBrains Mono"/>
-                <a:cs typeface="JetBrains Mono"/>
-                <a:sym typeface="JetBrains Mono"/>
-                <a:solidFill>
-                  <a:srgbClr val="95a5a6"/>
-                </a:solidFill>
-              </a:rPr>
-              <a:t>(* чистая *)</a:t>
-            </a:r>
-          </a:p>
-          <a:p>
-            <a:pPr indent="0" lvl="0" marL="0" rtl="0" algn="l">
-              <a:spcBef>
-                <a:spcPts val="1000"/>
-              </a:spcBef>
-              <a:spcAft>
-                <a:spcPts val="0"/>
-              </a:spcAft>
-              <a:buNone/>
-            </a:pPr>
-            <a:endParaRPr>
-              <a:latin typeface="JetBrains Mono"/>
-              <a:ea typeface="JetBrains Mono"/>
-              <a:cs typeface="JetBrains Mono"/>
-              <a:sym typeface="JetBrains Mono"/>
-            </a:endParaRPr>
-            <a:r>
-              <a:rPr lang="ru-RU" altLang="en-US" sz="2300">
-                <a:latin typeface="JetBrains Mono"/>
-                <a:ea typeface="JetBrains Mono"/>
-                <a:cs typeface="JetBrains Mono"/>
-                <a:sym typeface="JetBrains Mono"/>
-                <a:solidFill>
-                  <a:srgbClr val="c0392b"/>
-                </a:solidFill>
-              </a:rPr>
-              <a:t>let</a:t>
-            </a:r>
-            <a:r>
-              <a:rPr lang="ru-RU" altLang="en-US" sz="2300">
-                <a:latin typeface="JetBrains Mono"/>
-                <a:ea typeface="JetBrains Mono"/>
-                <a:cs typeface="JetBrains Mono"/>
-                <a:sym typeface="JetBrains Mono"/>
-                <a:solidFill>
-                  <a:srgbClr val="1a1a1a"/>
-                </a:solidFill>
-              </a:rPr>
-              <a:t> apply_discount rate price =</a:t>
-            </a:r>
-          </a:p>
-          <a:p>
-            <a:pPr indent="0" lvl="0" marL="0" rtl="0" algn="l">
-              <a:spcBef>
-                <a:spcPts val="1000"/>
-              </a:spcBef>
-              <a:spcAft>
-                <a:spcPts val="0"/>
-              </a:spcAft>
-              <a:buNone/>
-            </a:pPr>
-            <a:endParaRPr>
-              <a:latin typeface="JetBrains Mono"/>
-              <a:ea typeface="JetBrains Mono"/>
-              <a:cs typeface="JetBrains Mono"/>
-              <a:sym typeface="JetBrains Mono"/>
-            </a:endParaRPr>
-            <a:r>
-              <a:rPr lang="ru-RU" altLang="en-US" sz="2300">
-                <a:latin typeface="JetBrains Mono"/>
-                <a:ea typeface="JetBrains Mono"/>
-                <a:cs typeface="JetBrains Mono"/>
-                <a:sym typeface="JetBrains Mono"/>
-                <a:solidFill>
-                  <a:srgbClr val="1a1a1a"/>
-                </a:solidFill>
-              </a:rPr>
-              <a:t>  price *. (</a:t>
-            </a:r>
-            <a:r>
-              <a:rPr lang="ru-RU" altLang="en-US" sz="2300">
-                <a:latin typeface="JetBrains Mono"/>
-                <a:ea typeface="JetBrains Mono"/>
-                <a:cs typeface="JetBrains Mono"/>
-                <a:sym typeface="JetBrains Mono"/>
-                <a:solidFill>
-                  <a:srgbClr val="7f8c8d"/>
-                </a:solidFill>
-              </a:rPr>
-              <a:t>1.0</a:t>
-            </a:r>
-            <a:r>
-              <a:rPr lang="ru-RU" altLang="en-US" sz="2300">
-                <a:latin typeface="JetBrains Mono"/>
-                <a:ea typeface="JetBrains Mono"/>
-                <a:cs typeface="JetBrains Mono"/>
-                <a:sym typeface="JetBrains Mono"/>
-                <a:solidFill>
-                  <a:srgbClr val="1a1a1a"/>
-                </a:solidFill>
-              </a:rPr>
-              <a:t> -. rate)</a:t>
-            </a:r>
-          </a:p>
-          <a:p>
-            <a:pPr indent="0" lvl="0" marL="0" rtl="0" algn="l">
-              <a:spcBef>
-                <a:spcPts val="1000"/>
-              </a:spcBef>
-              <a:spcAft>
-                <a:spcPts val="0"/>
-              </a:spcAft>
-              <a:buNone/>
-            </a:pPr>
-            <a:endParaRPr>
-              <a:latin typeface="JetBrains Mono"/>
-              <a:ea typeface="JetBrains Mono"/>
-              <a:cs typeface="JetBrains Mono"/>
-              <a:sym typeface="JetBrains Mono"/>
-            </a:endParaRPr>
-            <a:r>
-              <a:rPr lang="ru-RU" altLang="en-US" sz="2300">
-                <a:latin typeface="JetBrains Mono"/>
-                <a:ea typeface="JetBrains Mono"/>
-                <a:cs typeface="JetBrains Mono"/>
-                <a:sym typeface="JetBrains Mono"/>
-                <a:solidFill>
-                  <a:srgbClr val="1a1a1a"/>
-                </a:solidFill>
-              </a:rPr>
-              <a:t/>
-            </a:r>
-          </a:p>
-          <a:p>
-            <a:pPr indent="0" lvl="0" marL="0" rtl="0" algn="l">
-              <a:spcBef>
-                <a:spcPts val="1000"/>
-              </a:spcBef>
-              <a:spcAft>
-                <a:spcPts val="0"/>
-              </a:spcAft>
-              <a:buNone/>
-            </a:pPr>
-            <a:endParaRPr>
-              <a:latin typeface="JetBrains Mono"/>
-              <a:ea typeface="JetBrains Mono"/>
-              <a:cs typeface="JetBrains Mono"/>
-              <a:sym typeface="JetBrains Mono"/>
-            </a:endParaRPr>
-            <a:r>
-              <a:rPr lang="ru-RU" altLang="en-US" sz="2300">
-                <a:latin typeface="JetBrains Mono"/>
-                <a:ea typeface="JetBrains Mono"/>
-                <a:cs typeface="JetBrains Mono"/>
-                <a:sym typeface="JetBrains Mono"/>
-                <a:solidFill>
-                  <a:srgbClr val="c0392b"/>
-                </a:solidFill>
-              </a:rPr>
-              <a:t>let</a:t>
-            </a:r>
-            <a:r>
-              <a:rPr lang="ru-RU" altLang="en-US" sz="2300">
-                <a:latin typeface="JetBrains Mono"/>
-                <a:ea typeface="JetBrains Mono"/>
-                <a:cs typeface="JetBrains Mono"/>
-                <a:sym typeface="JetBrains Mono"/>
-                <a:solidFill>
-                  <a:srgbClr val="1a1a1a"/>
-                </a:solidFill>
-              </a:rPr>
-              <a:t> discounted = apply_discount </a:t>
-            </a:r>
-            <a:r>
-              <a:rPr lang="ru-RU" altLang="en-US" sz="2300">
-                <a:latin typeface="JetBrains Mono"/>
-                <a:ea typeface="JetBrains Mono"/>
-                <a:cs typeface="JetBrains Mono"/>
-                <a:sym typeface="JetBrains Mono"/>
-                <a:solidFill>
-                  <a:srgbClr val="7f8c8d"/>
-                </a:solidFill>
-              </a:rPr>
-              <a:t>0.1</a:t>
-            </a:r>
-            <a:r>
-              <a:rPr lang="ru-RU" altLang="en-US" sz="2300">
-                <a:latin typeface="JetBrains Mono"/>
-                <a:ea typeface="JetBrains Mono"/>
-                <a:cs typeface="JetBrains Mono"/>
-                <a:sym typeface="JetBrains Mono"/>
-                <a:solidFill>
-                  <a:srgbClr val="1a1a1a"/>
-                </a:solidFill>
-              </a:rPr>
-              <a:t> </a:t>
-            </a:r>
-            <a:r>
-              <a:rPr lang="ru-RU" altLang="en-US" sz="2300">
-                <a:latin typeface="JetBrains Mono"/>
-                <a:ea typeface="JetBrains Mono"/>
-                <a:cs typeface="JetBrains Mono"/>
-                <a:sym typeface="JetBrains Mono"/>
-                <a:solidFill>
-                  <a:srgbClr val="7f8c8d"/>
-                </a:solidFill>
-              </a:rPr>
-              <a:t>100.0</a:t>
+            <a:r>
+              <a:rPr lang="ru-RU"/>
+              <a:t>Функция скидки — чистая и нечистая версии.</a:t>
             </a:r>
           </a:p>
         </p:txBody>
@@ -31985,7 +31552,7 @@
             </a:pPr>
             <a:r>
               <a:rPr lang="ru-RU"/>
-              <a:t>Ссылочная прозрачность: Scala</a:t>
+              <a:t>Ссылочная прозрачность: OCaml</a:t>
             </a:r>
           </a:p>
         </p:txBody>
@@ -32035,10 +31602,58 @@
                 <a:cs typeface="JetBrains Mono"/>
                 <a:sym typeface="JetBrains Mono"/>
                 <a:solidFill>
-                  <a:srgbClr val="95a5a6"/>
-                </a:solidFill>
-              </a:rPr>
-              <a:t>// чистая</a:t>
+                  <a:srgbClr val="c0392b"/>
+                </a:solidFill>
+              </a:rPr>
+              <a:t>let</a:t>
+            </a:r>
+            <a:r>
+              <a:rPr lang="ru-RU" altLang="en-US" sz="2300">
+                <a:latin typeface="JetBrains Mono"/>
+                <a:ea typeface="JetBrains Mono"/>
+                <a:cs typeface="JetBrains Mono"/>
+                <a:sym typeface="JetBrains Mono"/>
+                <a:solidFill>
+                  <a:srgbClr val="1a1a1a"/>
+                </a:solidFill>
+              </a:rPr>
+              <a:t> current_discount = </a:t>
+            </a:r>
+            <a:r>
+              <a:rPr lang="ru-RU" altLang="en-US" sz="2300">
+                <a:latin typeface="JetBrains Mono"/>
+                <a:ea typeface="JetBrains Mono"/>
+                <a:cs typeface="JetBrains Mono"/>
+                <a:sym typeface="JetBrains Mono"/>
+                <a:solidFill>
+                  <a:srgbClr val="c0392b"/>
+                </a:solidFill>
+              </a:rPr>
+              <a:t>ref</a:t>
+            </a:r>
+            <a:r>
+              <a:rPr lang="ru-RU" altLang="en-US" sz="2300">
+                <a:latin typeface="JetBrains Mono"/>
+                <a:ea typeface="JetBrains Mono"/>
+                <a:cs typeface="JetBrains Mono"/>
+                <a:sym typeface="JetBrains Mono"/>
+                <a:solidFill>
+                  <a:srgbClr val="1a1a1a"/>
+                </a:solidFill>
+              </a:rPr>
+              <a:t> </a:t>
+            </a:r>
+            <a:r>
+              <a:rPr lang="ru-RU" altLang="en-US" sz="2300">
+                <a:latin typeface="JetBrains Mono"/>
+                <a:ea typeface="JetBrains Mono"/>
+                <a:cs typeface="JetBrains Mono"/>
+                <a:sym typeface="JetBrains Mono"/>
+                <a:solidFill>
+                  <a:srgbClr val="7f8c8d"/>
+                </a:solidFill>
+              </a:rPr>
+              <a:t>0.1</a:t>
             </a:r>
           </a:p>
           <a:p>
@@ -32064,94 +31679,10 @@
                 <a:cs typeface="JetBrains Mono"/>
                 <a:sym typeface="JetBrains Mono"/>
                 <a:solidFill>
-                  <a:srgbClr val="c0392b"/>
-                </a:solidFill>
-              </a:rPr>
-              <a:t>def</a:t>
-            </a:r>
-            <a:r>
-              <a:rPr lang="ru-RU" altLang="en-US" sz="2300">
-                <a:latin typeface="JetBrains Mono"/>
-                <a:ea typeface="JetBrains Mono"/>
-                <a:cs typeface="JetBrains Mono"/>
-                <a:sym typeface="JetBrains Mono"/>
-                <a:solidFill>
-                  <a:srgbClr val="1a1a1a"/>
-                </a:solidFill>
-              </a:rPr>
-              <a:t> applyDiscount(rate: </a:t>
-            </a:r>
-            <a:r>
-              <a:rPr lang="ru-RU" altLang="en-US" sz="2300">
-                <a:latin typeface="JetBrains Mono"/>
-                <a:ea typeface="JetBrains Mono"/>
-                <a:cs typeface="JetBrains Mono"/>
-                <a:sym typeface="JetBrains Mono"/>
-                <a:solidFill>
-                  <a:srgbClr val="2c6fa6"/>
-                </a:solidFill>
-              </a:rPr>
-              <a:t>Double</a:t>
-            </a:r>
-            <a:r>
-              <a:rPr lang="ru-RU" altLang="en-US" sz="2300">
-                <a:latin typeface="JetBrains Mono"/>
-                <a:ea typeface="JetBrains Mono"/>
-                <a:cs typeface="JetBrains Mono"/>
-                <a:sym typeface="JetBrains Mono"/>
-                <a:solidFill>
-                  <a:srgbClr val="1a1a1a"/>
-                </a:solidFill>
-              </a:rPr>
-              <a:t>, price: </a:t>
-            </a:r>
-            <a:r>
-              <a:rPr lang="ru-RU" altLang="en-US" sz="2300">
-                <a:latin typeface="JetBrains Mono"/>
-                <a:ea typeface="JetBrains Mono"/>
-                <a:cs typeface="JetBrains Mono"/>
-                <a:sym typeface="JetBrains Mono"/>
-                <a:solidFill>
-                  <a:srgbClr val="2c6fa6"/>
-                </a:solidFill>
-              </a:rPr>
-              <a:t>Double</a:t>
-            </a:r>
-            <a:r>
-              <a:rPr lang="ru-RU" altLang="en-US" sz="2300">
-                <a:latin typeface="JetBrains Mono"/>
-                <a:ea typeface="JetBrains Mono"/>
-                <a:cs typeface="JetBrains Mono"/>
-                <a:sym typeface="JetBrains Mono"/>
-                <a:solidFill>
-                  <a:srgbClr val="1a1a1a"/>
-                </a:solidFill>
-              </a:rPr>
-              <a:t>): </a:t>
-            </a:r>
-            <a:r>
-              <a:rPr lang="ru-RU" altLang="en-US" sz="2300">
-                <a:latin typeface="JetBrains Mono"/>
-                <a:ea typeface="JetBrains Mono"/>
-                <a:cs typeface="JetBrains Mono"/>
-                <a:sym typeface="JetBrains Mono"/>
-                <a:solidFill>
-                  <a:srgbClr val="2c6fa6"/>
-                </a:solidFill>
-              </a:rPr>
-              <a:t>Double</a:t>
-            </a:r>
-            <a:r>
-              <a:rPr lang="ru-RU" altLang="en-US" sz="2300">
-                <a:latin typeface="JetBrains Mono"/>
-                <a:ea typeface="JetBrains Mono"/>
-                <a:cs typeface="JetBrains Mono"/>
-                <a:sym typeface="JetBrains Mono"/>
-                <a:solidFill>
-                  <a:srgbClr val="1a1a1a"/>
-                </a:solidFill>
-              </a:rPr>
-              <a:t> =</a:t>
+                  <a:srgbClr val="95a5a6"/>
+                </a:solidFill>
+              </a:rPr>
+              <a:t>(* нечистая: глобальное состояние *)</a:t>
             </a:r>
           </a:p>
           <a:p>
@@ -32177,10 +31708,10 @@
                 <a:cs typeface="JetBrains Mono"/>
                 <a:sym typeface="JetBrains Mono"/>
                 <a:solidFill>
-                  <a:srgbClr val="1a1a1a"/>
-                </a:solidFill>
-              </a:rPr>
-              <a:t>  price * (</a:t>
+                  <a:srgbClr val="c0392b"/>
+                </a:solidFill>
+              </a:rPr>
+              <a:t>let</a:t>
             </a:r>
             <a:r>
               <a:rPr lang="ru-RU" altLang="en-US" sz="2300">
@@ -32189,22 +31720,10 @@
                 <a:cs typeface="JetBrains Mono"/>
                 <a:sym typeface="JetBrains Mono"/>
                 <a:solidFill>
-                  <a:srgbClr val="7f8c8d"/>
-                </a:solidFill>
-              </a:rPr>
-              <a:t>1.0</a:t>
-            </a:r>
-            <a:r>
-              <a:rPr lang="ru-RU" altLang="en-US" sz="2300">
-                <a:latin typeface="JetBrains Mono"/>
-                <a:ea typeface="JetBrains Mono"/>
-                <a:cs typeface="JetBrains Mono"/>
-                <a:sym typeface="JetBrains Mono"/>
-                <a:solidFill>
-                  <a:srgbClr val="1a1a1a"/>
-                </a:solidFill>
-              </a:rPr>
-              <a:t> - rate)</a:t>
+                  <a:srgbClr val="1a1a1a"/>
+                </a:solidFill>
+              </a:rPr>
+              <a:t> price_with_global_discount price =</a:t>
             </a:r>
           </a:p>
           <a:p>
@@ -32233,7 +31752,31 @@
                   <a:srgbClr val="1a1a1a"/>
                 </a:solidFill>
               </a:rPr>
-              <a:t/>
+              <a:t>  price *. (</a:t>
+            </a:r>
+            <a:r>
+              <a:rPr lang="ru-RU" altLang="en-US" sz="2300">
+                <a:latin typeface="JetBrains Mono"/>
+                <a:ea typeface="JetBrains Mono"/>
+                <a:cs typeface="JetBrains Mono"/>
+                <a:sym typeface="JetBrains Mono"/>
+                <a:solidFill>
+                  <a:srgbClr val="7f8c8d"/>
+                </a:solidFill>
+              </a:rPr>
+              <a:t>1.0</a:t>
+            </a:r>
+            <a:r>
+              <a:rPr lang="ru-RU" altLang="en-US" sz="2300">
+                <a:latin typeface="JetBrains Mono"/>
+                <a:ea typeface="JetBrains Mono"/>
+                <a:cs typeface="JetBrains Mono"/>
+                <a:sym typeface="JetBrains Mono"/>
+                <a:solidFill>
+                  <a:srgbClr val="1a1a1a"/>
+                </a:solidFill>
+              </a:rPr>
+              <a:t> -. !current_discount)</a:t>
             </a:r>
           </a:p>
           <a:p>
@@ -32259,10 +31802,10 @@
                 <a:cs typeface="JetBrains Mono"/>
                 <a:sym typeface="JetBrains Mono"/>
                 <a:solidFill>
-                  <a:srgbClr val="95a5a6"/>
-                </a:solidFill>
-              </a:rPr>
-              <a:t>// эффекты — в типе</a:t>
+                  <a:srgbClr val="1a1a1a"/>
+                </a:solidFill>
+              </a:rPr>
+              <a:t/>
             </a:r>
           </a:p>
           <a:p>
@@ -32288,118 +31831,10 @@
                 <a:cs typeface="JetBrains Mono"/>
                 <a:sym typeface="JetBrains Mono"/>
                 <a:solidFill>
-                  <a:srgbClr val="c0392b"/>
-                </a:solidFill>
-              </a:rPr>
-              <a:t>def</a:t>
-            </a:r>
-            <a:r>
-              <a:rPr lang="ru-RU" altLang="en-US" sz="2300">
-                <a:latin typeface="JetBrains Mono"/>
-                <a:ea typeface="JetBrains Mono"/>
-                <a:cs typeface="JetBrains Mono"/>
-                <a:sym typeface="JetBrains Mono"/>
-                <a:solidFill>
-                  <a:srgbClr val="1a1a1a"/>
-                </a:solidFill>
-              </a:rPr>
-              <a:t> withLog(rate: </a:t>
-            </a:r>
-            <a:r>
-              <a:rPr lang="ru-RU" altLang="en-US" sz="2300">
-                <a:latin typeface="JetBrains Mono"/>
-                <a:ea typeface="JetBrains Mono"/>
-                <a:cs typeface="JetBrains Mono"/>
-                <a:sym typeface="JetBrains Mono"/>
-                <a:solidFill>
-                  <a:srgbClr val="2c6fa6"/>
-                </a:solidFill>
-              </a:rPr>
-              <a:t>Double</a:t>
-            </a:r>
-            <a:r>
-              <a:rPr lang="ru-RU" altLang="en-US" sz="2300">
-                <a:latin typeface="JetBrains Mono"/>
-                <a:ea typeface="JetBrains Mono"/>
-                <a:cs typeface="JetBrains Mono"/>
-                <a:sym typeface="JetBrains Mono"/>
-                <a:solidFill>
-                  <a:srgbClr val="1a1a1a"/>
-                </a:solidFill>
-              </a:rPr>
-              <a:t>, price: </a:t>
-            </a:r>
-            <a:r>
-              <a:rPr lang="ru-RU" altLang="en-US" sz="2300">
-                <a:latin typeface="JetBrains Mono"/>
-                <a:ea typeface="JetBrains Mono"/>
-                <a:cs typeface="JetBrains Mono"/>
-                <a:sym typeface="JetBrains Mono"/>
-                <a:solidFill>
-                  <a:srgbClr val="2c6fa6"/>
-                </a:solidFill>
-              </a:rPr>
-              <a:t>Double</a:t>
-            </a:r>
-            <a:r>
-              <a:rPr lang="ru-RU" altLang="en-US" sz="2300">
-                <a:latin typeface="JetBrains Mono"/>
-                <a:ea typeface="JetBrains Mono"/>
-                <a:cs typeface="JetBrains Mono"/>
-                <a:sym typeface="JetBrains Mono"/>
-                <a:solidFill>
-                  <a:srgbClr val="1a1a1a"/>
-                </a:solidFill>
-              </a:rPr>
-              <a:t>): </a:t>
-            </a:r>
-            <a:r>
-              <a:rPr lang="ru-RU" altLang="en-US" sz="2300">
-                <a:latin typeface="JetBrains Mono"/>
-                <a:ea typeface="JetBrains Mono"/>
-                <a:cs typeface="JetBrains Mono"/>
-                <a:sym typeface="JetBrains Mono"/>
-                <a:solidFill>
-                  <a:srgbClr val="2c6fa6"/>
-                </a:solidFill>
-              </a:rPr>
-              <a:t>IO</a:t>
-            </a:r>
-            <a:r>
-              <a:rPr lang="ru-RU" altLang="en-US" sz="2300">
-                <a:latin typeface="JetBrains Mono"/>
-                <a:ea typeface="JetBrains Mono"/>
-                <a:cs typeface="JetBrains Mono"/>
-                <a:sym typeface="JetBrains Mono"/>
-                <a:solidFill>
-                  <a:srgbClr val="1a1a1a"/>
-                </a:solidFill>
-              </a:rPr>
-              <a:t>[</a:t>
-            </a:r>
-            <a:r>
-              <a:rPr lang="ru-RU" altLang="en-US" sz="2300">
-                <a:latin typeface="JetBrains Mono"/>
-                <a:ea typeface="JetBrains Mono"/>
-                <a:cs typeface="JetBrains Mono"/>
-                <a:sym typeface="JetBrains Mono"/>
-                <a:solidFill>
-                  <a:srgbClr val="2c6fa6"/>
-                </a:solidFill>
-              </a:rPr>
-              <a:t>Double</a:t>
-            </a:r>
-            <a:r>
-              <a:rPr lang="ru-RU" altLang="en-US" sz="2300">
-                <a:latin typeface="JetBrains Mono"/>
-                <a:ea typeface="JetBrains Mono"/>
-                <a:cs typeface="JetBrains Mono"/>
-                <a:sym typeface="JetBrains Mono"/>
-                <a:solidFill>
-                  <a:srgbClr val="1a1a1a"/>
-                </a:solidFill>
-              </a:rPr>
-              <a:t>] =</a:t>
+                  <a:srgbClr val="95a5a6"/>
+                </a:solidFill>
+              </a:rPr>
+              <a:t>(* чистая *)</a:t>
             </a:r>
           </a:p>
           <a:p>
@@ -32425,10 +31860,10 @@
                 <a:cs typeface="JetBrains Mono"/>
                 <a:sym typeface="JetBrains Mono"/>
                 <a:solidFill>
-                  <a:srgbClr val="1a1a1a"/>
-                </a:solidFill>
-              </a:rPr>
-              <a:t>  </a:t>
+                  <a:srgbClr val="c0392b"/>
+                </a:solidFill>
+              </a:rPr>
+              <a:t>let</a:t>
             </a:r>
             <a:r>
               <a:rPr lang="ru-RU" altLang="en-US" sz="2300">
@@ -32437,11 +31872,28 @@
                 <a:cs typeface="JetBrains Mono"/>
                 <a:sym typeface="JetBrains Mono"/>
                 <a:solidFill>
-                  <a:srgbClr val="2c6fa6"/>
-                </a:solidFill>
-              </a:rPr>
-              <a:t>IO</a:t>
-            </a:r>
+                  <a:srgbClr val="1a1a1a"/>
+                </a:solidFill>
+              </a:rPr>
+              <a:t> apply_discount rate price =</a:t>
+            </a:r>
+          </a:p>
+          <a:p>
+            <a:pPr indent="0" lvl="0" marL="0" rtl="0" algn="l">
+              <a:spcBef>
+                <a:spcPts val="1000"/>
+              </a:spcBef>
+              <a:spcAft>
+                <a:spcPts val="0"/>
+              </a:spcAft>
+              <a:buNone/>
+            </a:pPr>
+            <a:endParaRPr>
+              <a:latin typeface="JetBrains Mono"/>
+              <a:ea typeface="JetBrains Mono"/>
+              <a:cs typeface="JetBrains Mono"/>
+              <a:sym typeface="JetBrains Mono"/>
+            </a:endParaRPr>
             <a:r>
               <a:rPr lang="ru-RU" altLang="en-US" sz="2300">
                 <a:latin typeface="JetBrains Mono"/>
@@ -32452,7 +31904,7 @@
                   <a:srgbClr val="1a1a1a"/>
                 </a:solidFill>
               </a:rPr>
-              <a:t>.println("...") *&gt; </a:t>
+              <a:t>  price *. (</a:t>
             </a:r>
             <a:r>
               <a:rPr lang="ru-RU" altLang="en-US" sz="2300">
@@ -32461,10 +31913,10 @@
                 <a:cs typeface="JetBrains Mono"/>
                 <a:sym typeface="JetBrains Mono"/>
                 <a:solidFill>
-                  <a:srgbClr val="2c6fa6"/>
-                </a:solidFill>
-              </a:rPr>
-              <a:t>IO</a:t>
+                  <a:srgbClr val="7f8c8d"/>
+                </a:solidFill>
+              </a:rPr>
+              <a:t>1.0</a:t>
             </a:r>
             <a:r>
               <a:rPr lang="ru-RU" altLang="en-US" sz="2300">
@@ -32476,7 +31928,113 @@
                   <a:srgbClr val="1a1a1a"/>
                 </a:solidFill>
               </a:rPr>
-              <a:t>.pure(applyDiscount(rate, price))</a:t>
+              <a:t> -. rate)</a:t>
+            </a:r>
+          </a:p>
+          <a:p>
+            <a:pPr indent="0" lvl="0" marL="0" rtl="0" algn="l">
+              <a:spcBef>
+                <a:spcPts val="1000"/>
+              </a:spcBef>
+              <a:spcAft>
+                <a:spcPts val="0"/>
+              </a:spcAft>
+              <a:buNone/>
+            </a:pPr>
+            <a:endParaRPr>
+              <a:latin typeface="JetBrains Mono"/>
+              <a:ea typeface="JetBrains Mono"/>
+              <a:cs typeface="JetBrains Mono"/>
+              <a:sym typeface="JetBrains Mono"/>
+            </a:endParaRPr>
+            <a:r>
+              <a:rPr lang="ru-RU" altLang="en-US" sz="2300">
+                <a:latin typeface="JetBrains Mono"/>
+                <a:ea typeface="JetBrains Mono"/>
+                <a:cs typeface="JetBrains Mono"/>
+                <a:sym typeface="JetBrains Mono"/>
+                <a:solidFill>
+                  <a:srgbClr val="1a1a1a"/>
+                </a:solidFill>
+              </a:rPr>
+              <a:t/>
+            </a:r>
+          </a:p>
+          <a:p>
+            <a:pPr indent="0" lvl="0" marL="0" rtl="0" algn="l">
+              <a:spcBef>
+                <a:spcPts val="1000"/>
+              </a:spcBef>
+              <a:spcAft>
+                <a:spcPts val="0"/>
+              </a:spcAft>
+              <a:buNone/>
+            </a:pPr>
+            <a:endParaRPr>
+              <a:latin typeface="JetBrains Mono"/>
+              <a:ea typeface="JetBrains Mono"/>
+              <a:cs typeface="JetBrains Mono"/>
+              <a:sym typeface="JetBrains Mono"/>
+            </a:endParaRPr>
+            <a:r>
+              <a:rPr lang="ru-RU" altLang="en-US" sz="2300">
+                <a:latin typeface="JetBrains Mono"/>
+                <a:ea typeface="JetBrains Mono"/>
+                <a:cs typeface="JetBrains Mono"/>
+                <a:sym typeface="JetBrains Mono"/>
+                <a:solidFill>
+                  <a:srgbClr val="c0392b"/>
+                </a:solidFill>
+              </a:rPr>
+              <a:t>let</a:t>
+            </a:r>
+            <a:r>
+              <a:rPr lang="ru-RU" altLang="en-US" sz="2300">
+                <a:latin typeface="JetBrains Mono"/>
+                <a:ea typeface="JetBrains Mono"/>
+                <a:cs typeface="JetBrains Mono"/>
+                <a:sym typeface="JetBrains Mono"/>
+                <a:solidFill>
+                  <a:srgbClr val="1a1a1a"/>
+                </a:solidFill>
+              </a:rPr>
+              <a:t> discounted = apply_discount </a:t>
+            </a:r>
+            <a:r>
+              <a:rPr lang="ru-RU" altLang="en-US" sz="2300">
+                <a:latin typeface="JetBrains Mono"/>
+                <a:ea typeface="JetBrains Mono"/>
+                <a:cs typeface="JetBrains Mono"/>
+                <a:sym typeface="JetBrains Mono"/>
+                <a:solidFill>
+                  <a:srgbClr val="7f8c8d"/>
+                </a:solidFill>
+              </a:rPr>
+              <a:t>0.1</a:t>
+            </a:r>
+            <a:r>
+              <a:rPr lang="ru-RU" altLang="en-US" sz="2300">
+                <a:latin typeface="JetBrains Mono"/>
+                <a:ea typeface="JetBrains Mono"/>
+                <a:cs typeface="JetBrains Mono"/>
+                <a:sym typeface="JetBrains Mono"/>
+                <a:solidFill>
+                  <a:srgbClr val="1a1a1a"/>
+                </a:solidFill>
+              </a:rPr>
+              <a:t> </a:t>
+            </a:r>
+            <a:r>
+              <a:rPr lang="ru-RU" altLang="en-US" sz="2300">
+                <a:latin typeface="JetBrains Mono"/>
+                <a:ea typeface="JetBrains Mono"/>
+                <a:cs typeface="JetBrains Mono"/>
+                <a:sym typeface="JetBrains Mono"/>
+                <a:solidFill>
+                  <a:srgbClr val="7f8c8d"/>
+                </a:solidFill>
+              </a:rPr>
+              <a:t>100.0</a:t>
             </a:r>
           </a:p>
         </p:txBody>
@@ -32494,7 +32052,7 @@
   <p:cSld>
     <p:spTree>
       <p:nvGrpSpPr>
-        <p:cNvPr id="157" name="Shape 157"/>
+        <p:cNvPr id="150" name="Shape 150"/>
         <p:cNvGrpSpPr/>
         <p:nvPr/>
       </p:nvGrpSpPr>
@@ -32508,7 +32066,7 @@
       </p:grpSpPr>
       <p:sp>
         <p:nvSpPr>
-          <p:cNvPr id="158" name="Google Shape;158;g3d09141108f_0_60"/>
+          <p:cNvPr id="151" name="Google Shape;151;g3d09141108f_0_54"/>
           <p:cNvSpPr txBox="1"/>
           <p:nvPr>
             <p:ph idx="12" type="sldNum"/>
@@ -32548,7 +32106,7 @@
       </p:sp>
       <p:sp>
         <p:nvSpPr>
-          <p:cNvPr id="159" name="Google Shape;159;g3d09141108f_0_60"/>
+          <p:cNvPr id="152" name="Google Shape;152;g3d09141108f_0_54"/>
           <p:cNvSpPr txBox="1"/>
           <p:nvPr>
             <p:ph idx="1" type="body"/>
@@ -32580,14 +32138,14 @@
             </a:pPr>
             <a:r>
               <a:rPr lang="ru-RU"/>
-              <a:t>Ссылочная прозрачность: Rust</a:t>
+              <a:t>Ссылочная прозрачность: Scala</a:t>
             </a:r>
           </a:p>
         </p:txBody>
       </p:sp>
       <p:sp>
         <p:nvSpPr>
-          <p:cNvPr id="160" name="Google Shape;160;g3d09141108f_0_60"/>
+          <p:cNvPr id="153" name="Google Shape;153;g3d09141108f_0_54"/>
           <p:cNvSpPr txBox="1"/>
           <p:nvPr>
             <p:ph idx="2" type="body"/>
@@ -32617,7 +32175,7 @@
               </a:spcAft>
               <a:buNone/>
             </a:pPr>
-            <a:endParaRPr sz="2300">
+            <a:endParaRPr>
               <a:latin typeface="JetBrains Mono"/>
               <a:ea typeface="JetBrains Mono"/>
               <a:cs typeface="JetBrains Mono"/>
@@ -32646,7 +32204,7 @@
               </a:spcAft>
               <a:buNone/>
             </a:pPr>
-            <a:endParaRPr sz="2300">
+            <a:endParaRPr>
               <a:latin typeface="JetBrains Mono"/>
               <a:ea typeface="JetBrains Mono"/>
               <a:cs typeface="JetBrains Mono"/>
@@ -32662,7 +32220,7 @@
                   <a:srgbClr val="c0392b"/>
                 </a:solidFill>
               </a:rPr>
-              <a:t>fn</a:t>
+              <a:t>def</a:t>
             </a:r>
             <a:r>
               <a:rPr lang="ru-RU" altLang="en-US" sz="2300">
@@ -32674,7 +32232,7 @@
                   <a:srgbClr val="1a1a1a"/>
                 </a:solidFill>
               </a:rPr>
-              <a:t> apply_discount(rate: </a:t>
+              <a:t> applyDiscount(rate: </a:t>
             </a:r>
             <a:r>
               <a:rPr lang="ru-RU" altLang="en-US" sz="2300">
@@ -32686,7 +32244,7 @@
                   <a:srgbClr val="2c6fa6"/>
                 </a:solidFill>
               </a:rPr>
-              <a:t>f64</a:t>
+              <a:t>Double</a:t>
             </a:r>
             <a:r>
               <a:rPr lang="ru-RU" altLang="en-US" sz="2300">
@@ -32710,7 +32268,7 @@
                   <a:srgbClr val="2c6fa6"/>
                 </a:solidFill>
               </a:rPr>
-              <a:t>f64</a:t>
+              <a:t>Double</a:t>
             </a:r>
             <a:r>
               <a:rPr lang="ru-RU" altLang="en-US" sz="2300">
@@ -32722,7 +32280,7 @@
                   <a:srgbClr val="1a1a1a"/>
                 </a:solidFill>
               </a:rPr>
-              <a:t>) -&gt; </a:t>
+              <a:t>): </a:t>
             </a:r>
             <a:r>
               <a:rPr lang="ru-RU" altLang="en-US" sz="2300">
@@ -32734,7 +32292,7 @@
                   <a:srgbClr val="2c6fa6"/>
                 </a:solidFill>
               </a:rPr>
-              <a:t>f64</a:t>
+              <a:t>Double</a:t>
             </a:r>
             <a:r>
               <a:rPr lang="ru-RU" altLang="en-US" sz="2300">
@@ -32746,7 +32304,7 @@
                   <a:srgbClr val="1a1a1a"/>
                 </a:solidFill>
               </a:rPr>
-              <a:t> {</a:t>
+              <a:t> =</a:t>
             </a:r>
           </a:p>
           <a:p>
@@ -32759,7 +32317,7 @@
               </a:spcAft>
               <a:buNone/>
             </a:pPr>
-            <a:endParaRPr sz="2300">
+            <a:endParaRPr>
               <a:latin typeface="JetBrains Mono"/>
               <a:ea typeface="JetBrains Mono"/>
               <a:cs typeface="JetBrains Mono"/>
@@ -32775,7 +32333,7 @@
                   <a:srgbClr val="1a1a1a"/>
                 </a:solidFill>
               </a:rPr>
-              <a:t>    price * (</a:t>
+              <a:t>  price * (</a:t>
             </a:r>
             <a:r>
               <a:rPr lang="ru-RU" altLang="en-US" sz="2300">
@@ -32812,7 +32370,7 @@
               </a:spcAft>
               <a:buNone/>
             </a:pPr>
-            <a:endParaRPr sz="2300">
+            <a:endParaRPr>
               <a:latin typeface="JetBrains Mono"/>
               <a:ea typeface="JetBrains Mono"/>
               <a:cs typeface="JetBrains Mono"/>
@@ -32828,7 +32386,7 @@
                   <a:srgbClr val="1a1a1a"/>
                 </a:solidFill>
               </a:rPr>
-              <a:t>}</a:t>
+              <a:t/>
             </a:r>
           </a:p>
           <a:p>
@@ -32841,7 +32399,7 @@
               </a:spcAft>
               <a:buNone/>
             </a:pPr>
-            <a:endParaRPr sz="2300">
+            <a:endParaRPr>
               <a:latin typeface="JetBrains Mono"/>
               <a:ea typeface="JetBrains Mono"/>
               <a:cs typeface="JetBrains Mono"/>
@@ -32854,10 +32412,10 @@
                 <a:cs typeface="JetBrains Mono"/>
                 <a:sym typeface="JetBrains Mono"/>
                 <a:solidFill>
-                  <a:srgbClr val="1a1a1a"/>
-                </a:solidFill>
-              </a:rPr>
-              <a:t/>
+                  <a:srgbClr val="95a5a6"/>
+                </a:solidFill>
+              </a:rPr>
+              <a:t>// эффекты — в типе</a:t>
             </a:r>
           </a:p>
           <a:p>
@@ -32870,7 +32428,7 @@
               </a:spcAft>
               <a:buNone/>
             </a:pPr>
-            <a:endParaRPr sz="2300">
+            <a:endParaRPr>
               <a:latin typeface="JetBrains Mono"/>
               <a:ea typeface="JetBrains Mono"/>
               <a:cs typeface="JetBrains Mono"/>
@@ -32883,10 +32441,118 @@
                 <a:cs typeface="JetBrains Mono"/>
                 <a:sym typeface="JetBrains Mono"/>
                 <a:solidFill>
-                  <a:srgbClr val="95a5a6"/>
-                </a:solidFill>
-              </a:rPr>
-              <a:t>// нечистая: &amp;mut в сигнатуре</a:t>
+                  <a:srgbClr val="c0392b"/>
+                </a:solidFill>
+              </a:rPr>
+              <a:t>def</a:t>
+            </a:r>
+            <a:r>
+              <a:rPr lang="ru-RU" altLang="en-US" sz="2300">
+                <a:latin typeface="JetBrains Mono"/>
+                <a:ea typeface="JetBrains Mono"/>
+                <a:cs typeface="JetBrains Mono"/>
+                <a:sym typeface="JetBrains Mono"/>
+                <a:solidFill>
+                  <a:srgbClr val="1a1a1a"/>
+                </a:solidFill>
+              </a:rPr>
+              <a:t> withLog(rate: </a:t>
+            </a:r>
+            <a:r>
+              <a:rPr lang="ru-RU" altLang="en-US" sz="2300">
+                <a:latin typeface="JetBrains Mono"/>
+                <a:ea typeface="JetBrains Mono"/>
+                <a:cs typeface="JetBrains Mono"/>
+                <a:sym typeface="JetBrains Mono"/>
+                <a:solidFill>
+                  <a:srgbClr val="2c6fa6"/>
+                </a:solidFill>
+              </a:rPr>
+              <a:t>Double</a:t>
+            </a:r>
+            <a:r>
+              <a:rPr lang="ru-RU" altLang="en-US" sz="2300">
+                <a:latin typeface="JetBrains Mono"/>
+                <a:ea typeface="JetBrains Mono"/>
+                <a:cs typeface="JetBrains Mono"/>
+                <a:sym typeface="JetBrains Mono"/>
+                <a:solidFill>
+                  <a:srgbClr val="1a1a1a"/>
+                </a:solidFill>
+              </a:rPr>
+              <a:t>, price: </a:t>
+            </a:r>
+            <a:r>
+              <a:rPr lang="ru-RU" altLang="en-US" sz="2300">
+                <a:latin typeface="JetBrains Mono"/>
+                <a:ea typeface="JetBrains Mono"/>
+                <a:cs typeface="JetBrains Mono"/>
+                <a:sym typeface="JetBrains Mono"/>
+                <a:solidFill>
+                  <a:srgbClr val="2c6fa6"/>
+                </a:solidFill>
+              </a:rPr>
+              <a:t>Double</a:t>
+            </a:r>
+            <a:r>
+              <a:rPr lang="ru-RU" altLang="en-US" sz="2300">
+                <a:latin typeface="JetBrains Mono"/>
+                <a:ea typeface="JetBrains Mono"/>
+                <a:cs typeface="JetBrains Mono"/>
+                <a:sym typeface="JetBrains Mono"/>
+                <a:solidFill>
+                  <a:srgbClr val="1a1a1a"/>
+                </a:solidFill>
+              </a:rPr>
+              <a:t>): </a:t>
+            </a:r>
+            <a:r>
+              <a:rPr lang="ru-RU" altLang="en-US" sz="2300">
+                <a:latin typeface="JetBrains Mono"/>
+                <a:ea typeface="JetBrains Mono"/>
+                <a:cs typeface="JetBrains Mono"/>
+                <a:sym typeface="JetBrains Mono"/>
+                <a:solidFill>
+                  <a:srgbClr val="2c6fa6"/>
+                </a:solidFill>
+              </a:rPr>
+              <a:t>IO</a:t>
+            </a:r>
+            <a:r>
+              <a:rPr lang="ru-RU" altLang="en-US" sz="2300">
+                <a:latin typeface="JetBrains Mono"/>
+                <a:ea typeface="JetBrains Mono"/>
+                <a:cs typeface="JetBrains Mono"/>
+                <a:sym typeface="JetBrains Mono"/>
+                <a:solidFill>
+                  <a:srgbClr val="1a1a1a"/>
+                </a:solidFill>
+              </a:rPr>
+              <a:t>[</a:t>
+            </a:r>
+            <a:r>
+              <a:rPr lang="ru-RU" altLang="en-US" sz="2300">
+                <a:latin typeface="JetBrains Mono"/>
+                <a:ea typeface="JetBrains Mono"/>
+                <a:cs typeface="JetBrains Mono"/>
+                <a:sym typeface="JetBrains Mono"/>
+                <a:solidFill>
+                  <a:srgbClr val="2c6fa6"/>
+                </a:solidFill>
+              </a:rPr>
+              <a:t>Double</a:t>
+            </a:r>
+            <a:r>
+              <a:rPr lang="ru-RU" altLang="en-US" sz="2300">
+                <a:latin typeface="JetBrains Mono"/>
+                <a:ea typeface="JetBrains Mono"/>
+                <a:cs typeface="JetBrains Mono"/>
+                <a:sym typeface="JetBrains Mono"/>
+                <a:solidFill>
+                  <a:srgbClr val="1a1a1a"/>
+                </a:solidFill>
+              </a:rPr>
+              <a:t>] =</a:t>
             </a:r>
           </a:p>
           <a:p>
@@ -32899,7 +32565,7 @@
               </a:spcAft>
               <a:buNone/>
             </a:pPr>
-            <a:endParaRPr sz="2300">
+            <a:endParaRPr>
               <a:latin typeface="JetBrains Mono"/>
               <a:ea typeface="JetBrains Mono"/>
               <a:cs typeface="JetBrains Mono"/>
@@ -32912,10 +32578,10 @@
                 <a:cs typeface="JetBrains Mono"/>
                 <a:sym typeface="JetBrains Mono"/>
                 <a:solidFill>
-                  <a:srgbClr val="c0392b"/>
-                </a:solidFill>
-              </a:rPr>
-              <a:t>fn</a:t>
+                  <a:srgbClr val="1a1a1a"/>
+                </a:solidFill>
+              </a:rPr>
+              <a:t>  </a:t>
             </a:r>
             <a:r>
               <a:rPr lang="ru-RU" altLang="en-US" sz="2300">
@@ -32924,10 +32590,10 @@
                 <a:cs typeface="JetBrains Mono"/>
                 <a:sym typeface="JetBrains Mono"/>
                 <a:solidFill>
-                  <a:srgbClr val="1a1a1a"/>
-                </a:solidFill>
-              </a:rPr>
-              <a:t> apply_discount_mut(rate: </a:t>
+                  <a:srgbClr val="2c6fa6"/>
+                </a:solidFill>
+              </a:rPr>
+              <a:t>IO</a:t>
             </a:r>
             <a:r>
               <a:rPr lang="ru-RU" altLang="en-US" sz="2300">
@@ -32936,10 +32602,22 @@
                 <a:cs typeface="JetBrains Mono"/>
                 <a:sym typeface="JetBrains Mono"/>
                 <a:solidFill>
+                  <a:srgbClr val="1a1a1a"/>
+                </a:solidFill>
+              </a:rPr>
+              <a:t>.println("...") *&gt; </a:t>
+            </a:r>
+            <a:r>
+              <a:rPr lang="ru-RU" altLang="en-US" sz="2300">
+                <a:latin typeface="JetBrains Mono"/>
+                <a:ea typeface="JetBrains Mono"/>
+                <a:cs typeface="JetBrains Mono"/>
+                <a:sym typeface="JetBrains Mono"/>
+                <a:solidFill>
                   <a:srgbClr val="2c6fa6"/>
                 </a:solidFill>
               </a:rPr>
-              <a:t>f64</a:t>
+              <a:t>IO</a:t>
             </a:r>
             <a:r>
               <a:rPr lang="ru-RU" altLang="en-US" sz="2300">
@@ -32951,137 +32629,7 @@
                   <a:srgbClr val="1a1a1a"/>
                 </a:solidFill>
               </a:rPr>
-              <a:t>, price: &amp;</a:t>
-            </a:r>
-            <a:r>
-              <a:rPr lang="ru-RU" altLang="en-US" sz="2300">
-                <a:latin typeface="JetBrains Mono"/>
-                <a:ea typeface="JetBrains Mono"/>
-                <a:cs typeface="JetBrains Mono"/>
-                <a:sym typeface="JetBrains Mono"/>
-                <a:solidFill>
-                  <a:srgbClr val="c0392b"/>
-                </a:solidFill>
-              </a:rPr>
-              <a:t>mut</a:t>
-            </a:r>
-            <a:r>
-              <a:rPr lang="ru-RU" altLang="en-US" sz="2300">
-                <a:latin typeface="JetBrains Mono"/>
-                <a:ea typeface="JetBrains Mono"/>
-                <a:cs typeface="JetBrains Mono"/>
-                <a:sym typeface="JetBrains Mono"/>
-                <a:solidFill>
-                  <a:srgbClr val="1a1a1a"/>
-                </a:solidFill>
-              </a:rPr>
-              <a:t> </a:t>
-            </a:r>
-            <a:r>
-              <a:rPr lang="ru-RU" altLang="en-US" sz="2300">
-                <a:latin typeface="JetBrains Mono"/>
-                <a:ea typeface="JetBrains Mono"/>
-                <a:cs typeface="JetBrains Mono"/>
-                <a:sym typeface="JetBrains Mono"/>
-                <a:solidFill>
-                  <a:srgbClr val="2c6fa6"/>
-                </a:solidFill>
-              </a:rPr>
-              <a:t>f64</a:t>
-            </a:r>
-            <a:r>
-              <a:rPr lang="ru-RU" altLang="en-US" sz="2300">
-                <a:latin typeface="JetBrains Mono"/>
-                <a:ea typeface="JetBrains Mono"/>
-                <a:cs typeface="JetBrains Mono"/>
-                <a:sym typeface="JetBrains Mono"/>
-                <a:solidFill>
-                  <a:srgbClr val="1a1a1a"/>
-                </a:solidFill>
-              </a:rPr>
-              <a:t>) {</a:t>
-            </a:r>
-          </a:p>
-          <a:p>
-            <a:pPr indent="0" lvl="0" marL="0" rtl="0" algn="l">
-              <a:spcBef>
-                <a:spcPts val="1000"/>
-              </a:spcBef>
-              <a:spcAft>
-                <a:spcPts val="0"/>
-              </a:spcAft>
-              <a:buNone/>
-            </a:pPr>
-            <a:endParaRPr sz="2300">
-              <a:latin typeface="JetBrains Mono"/>
-              <a:ea typeface="JetBrains Mono"/>
-              <a:cs typeface="JetBrains Mono"/>
-              <a:sym typeface="JetBrains Mono"/>
-            </a:endParaRPr>
-            <a:r>
-              <a:rPr lang="ru-RU" altLang="en-US" sz="2300">
-                <a:latin typeface="JetBrains Mono"/>
-                <a:ea typeface="JetBrains Mono"/>
-                <a:cs typeface="JetBrains Mono"/>
-                <a:sym typeface="JetBrains Mono"/>
-                <a:solidFill>
-                  <a:srgbClr val="1a1a1a"/>
-                </a:solidFill>
-              </a:rPr>
-              <a:t>    *price *= </a:t>
-            </a:r>
-            <a:r>
-              <a:rPr lang="ru-RU" altLang="en-US" sz="2300">
-                <a:latin typeface="JetBrains Mono"/>
-                <a:ea typeface="JetBrains Mono"/>
-                <a:cs typeface="JetBrains Mono"/>
-                <a:sym typeface="JetBrains Mono"/>
-                <a:solidFill>
-                  <a:srgbClr val="7f8c8d"/>
-                </a:solidFill>
-              </a:rPr>
-              <a:t>1.0</a:t>
-            </a:r>
-            <a:r>
-              <a:rPr lang="ru-RU" altLang="en-US" sz="2300">
-                <a:latin typeface="JetBrains Mono"/>
-                <a:ea typeface="JetBrains Mono"/>
-                <a:cs typeface="JetBrains Mono"/>
-                <a:sym typeface="JetBrains Mono"/>
-                <a:solidFill>
-                  <a:srgbClr val="1a1a1a"/>
-                </a:solidFill>
-              </a:rPr>
-              <a:t> - rate;</a:t>
-            </a:r>
-          </a:p>
-          <a:p>
-            <a:pPr indent="0" lvl="0" marL="0" rtl="0" algn="l">
-              <a:spcBef>
-                <a:spcPts val="1000"/>
-              </a:spcBef>
-              <a:spcAft>
-                <a:spcPts val="0"/>
-              </a:spcAft>
-              <a:buNone/>
-            </a:pPr>
-            <a:endParaRPr sz="2300">
-              <a:latin typeface="JetBrains Mono"/>
-              <a:ea typeface="JetBrains Mono"/>
-              <a:cs typeface="JetBrains Mono"/>
-              <a:sym typeface="JetBrains Mono"/>
-            </a:endParaRPr>
-            <a:r>
-              <a:rPr lang="ru-RU" altLang="en-US" sz="2300">
-                <a:latin typeface="JetBrains Mono"/>
-                <a:ea typeface="JetBrains Mono"/>
-                <a:cs typeface="JetBrains Mono"/>
-                <a:sym typeface="JetBrains Mono"/>
-                <a:solidFill>
-                  <a:srgbClr val="1a1a1a"/>
-                </a:solidFill>
-              </a:rPr>
-              <a:t>}</a:t>
+              <a:t>.pure(applyDiscount(rate, price))</a:t>
             </a:r>
           </a:p>
         </p:txBody>
@@ -33185,7 +32733,7 @@
             </a:pPr>
             <a:r>
               <a:rPr lang="ru-RU"/>
-              <a:t>Ссылочная прозрачность: Python</a:t>
+              <a:t>Ссылочная прозрачность: Rust</a:t>
             </a:r>
           </a:p>
         </p:txBody>
@@ -33222,7 +32770,7 @@
               </a:spcAft>
               <a:buNone/>
             </a:pPr>
-            <a:endParaRPr>
+            <a:endParaRPr sz="2300">
               <a:latin typeface="JetBrains Mono"/>
               <a:ea typeface="JetBrains Mono"/>
               <a:cs typeface="JetBrains Mono"/>
@@ -33235,22 +32783,10 @@
                 <a:cs typeface="JetBrains Mono"/>
                 <a:sym typeface="JetBrains Mono"/>
                 <a:solidFill>
-                  <a:srgbClr val="1a1a1a"/>
-                </a:solidFill>
-              </a:rPr>
-              <a:t>current_discount = </a:t>
-            </a:r>
-            <a:r>
-              <a:rPr lang="ru-RU" altLang="en-US" sz="2300">
-                <a:latin typeface="JetBrains Mono"/>
-                <a:ea typeface="JetBrains Mono"/>
-                <a:cs typeface="JetBrains Mono"/>
-                <a:sym typeface="JetBrains Mono"/>
-                <a:solidFill>
-                  <a:srgbClr val="7f8c8d"/>
-                </a:solidFill>
-              </a:rPr>
-              <a:t>0.1</a:t>
+                  <a:srgbClr val="95a5a6"/>
+                </a:solidFill>
+              </a:rPr>
+              <a:t>// чистая</a:t>
             </a:r>
           </a:p>
           <a:p>
@@ -33263,7 +32799,7 @@
               </a:spcAft>
               <a:buNone/>
             </a:pPr>
-            <a:endParaRPr>
+            <a:endParaRPr sz="2300">
               <a:latin typeface="JetBrains Mono"/>
               <a:ea typeface="JetBrains Mono"/>
               <a:cs typeface="JetBrains Mono"/>
@@ -33276,10 +32812,94 @@
                 <a:cs typeface="JetBrains Mono"/>
                 <a:sym typeface="JetBrains Mono"/>
                 <a:solidFill>
-                  <a:srgbClr val="1a1a1a"/>
-                </a:solidFill>
-              </a:rPr>
-              <a:t/>
+                  <a:srgbClr val="c0392b"/>
+                </a:solidFill>
+              </a:rPr>
+              <a:t>fn</a:t>
+            </a:r>
+            <a:r>
+              <a:rPr lang="ru-RU" altLang="en-US" sz="2300">
+                <a:latin typeface="JetBrains Mono"/>
+                <a:ea typeface="JetBrains Mono"/>
+                <a:cs typeface="JetBrains Mono"/>
+                <a:sym typeface="JetBrains Mono"/>
+                <a:solidFill>
+                  <a:srgbClr val="1a1a1a"/>
+                </a:solidFill>
+              </a:rPr>
+              <a:t> apply_discount(rate: </a:t>
+            </a:r>
+            <a:r>
+              <a:rPr lang="ru-RU" altLang="en-US" sz="2300">
+                <a:latin typeface="JetBrains Mono"/>
+                <a:ea typeface="JetBrains Mono"/>
+                <a:cs typeface="JetBrains Mono"/>
+                <a:sym typeface="JetBrains Mono"/>
+                <a:solidFill>
+                  <a:srgbClr val="2c6fa6"/>
+                </a:solidFill>
+              </a:rPr>
+              <a:t>f64</a:t>
+            </a:r>
+            <a:r>
+              <a:rPr lang="ru-RU" altLang="en-US" sz="2300">
+                <a:latin typeface="JetBrains Mono"/>
+                <a:ea typeface="JetBrains Mono"/>
+                <a:cs typeface="JetBrains Mono"/>
+                <a:sym typeface="JetBrains Mono"/>
+                <a:solidFill>
+                  <a:srgbClr val="1a1a1a"/>
+                </a:solidFill>
+              </a:rPr>
+              <a:t>, price: </a:t>
+            </a:r>
+            <a:r>
+              <a:rPr lang="ru-RU" altLang="en-US" sz="2300">
+                <a:latin typeface="JetBrains Mono"/>
+                <a:ea typeface="JetBrains Mono"/>
+                <a:cs typeface="JetBrains Mono"/>
+                <a:sym typeface="JetBrains Mono"/>
+                <a:solidFill>
+                  <a:srgbClr val="2c6fa6"/>
+                </a:solidFill>
+              </a:rPr>
+              <a:t>f64</a:t>
+            </a:r>
+            <a:r>
+              <a:rPr lang="ru-RU" altLang="en-US" sz="2300">
+                <a:latin typeface="JetBrains Mono"/>
+                <a:ea typeface="JetBrains Mono"/>
+                <a:cs typeface="JetBrains Mono"/>
+                <a:sym typeface="JetBrains Mono"/>
+                <a:solidFill>
+                  <a:srgbClr val="1a1a1a"/>
+                </a:solidFill>
+              </a:rPr>
+              <a:t>) -&gt; </a:t>
+            </a:r>
+            <a:r>
+              <a:rPr lang="ru-RU" altLang="en-US" sz="2300">
+                <a:latin typeface="JetBrains Mono"/>
+                <a:ea typeface="JetBrains Mono"/>
+                <a:cs typeface="JetBrains Mono"/>
+                <a:sym typeface="JetBrains Mono"/>
+                <a:solidFill>
+                  <a:srgbClr val="2c6fa6"/>
+                </a:solidFill>
+              </a:rPr>
+              <a:t>f64</a:t>
+            </a:r>
+            <a:r>
+              <a:rPr lang="ru-RU" altLang="en-US" sz="2300">
+                <a:latin typeface="JetBrains Mono"/>
+                <a:ea typeface="JetBrains Mono"/>
+                <a:cs typeface="JetBrains Mono"/>
+                <a:sym typeface="JetBrains Mono"/>
+                <a:solidFill>
+                  <a:srgbClr val="1a1a1a"/>
+                </a:solidFill>
+              </a:rPr>
+              <a:t> {</a:t>
             </a:r>
           </a:p>
           <a:p>
@@ -33292,7 +32912,7 @@
               </a:spcAft>
               <a:buNone/>
             </a:pPr>
-            <a:endParaRPr>
+            <a:endParaRPr sz="2300">
               <a:latin typeface="JetBrains Mono"/>
               <a:ea typeface="JetBrains Mono"/>
               <a:cs typeface="JetBrains Mono"/>
@@ -33305,10 +32925,34 @@
                 <a:cs typeface="JetBrains Mono"/>
                 <a:sym typeface="JetBrains Mono"/>
                 <a:solidFill>
-                  <a:srgbClr val="95a5a6"/>
-                </a:solidFill>
-              </a:rPr>
-              <a:t># нечистая: зависит от глобального состояния</a:t>
+                  <a:srgbClr val="1a1a1a"/>
+                </a:solidFill>
+              </a:rPr>
+              <a:t>    price * (</a:t>
+            </a:r>
+            <a:r>
+              <a:rPr lang="ru-RU" altLang="en-US" sz="2300">
+                <a:latin typeface="JetBrains Mono"/>
+                <a:ea typeface="JetBrains Mono"/>
+                <a:cs typeface="JetBrains Mono"/>
+                <a:sym typeface="JetBrains Mono"/>
+                <a:solidFill>
+                  <a:srgbClr val="7f8c8d"/>
+                </a:solidFill>
+              </a:rPr>
+              <a:t>1.0</a:t>
+            </a:r>
+            <a:r>
+              <a:rPr lang="ru-RU" altLang="en-US" sz="2300">
+                <a:latin typeface="JetBrains Mono"/>
+                <a:ea typeface="JetBrains Mono"/>
+                <a:cs typeface="JetBrains Mono"/>
+                <a:sym typeface="JetBrains Mono"/>
+                <a:solidFill>
+                  <a:srgbClr val="1a1a1a"/>
+                </a:solidFill>
+              </a:rPr>
+              <a:t> - rate)</a:t>
             </a:r>
           </a:p>
           <a:p>
@@ -33321,7 +32965,7 @@
               </a:spcAft>
               <a:buNone/>
             </a:pPr>
-            <a:endParaRPr>
+            <a:endParaRPr sz="2300">
               <a:latin typeface="JetBrains Mono"/>
               <a:ea typeface="JetBrains Mono"/>
               <a:cs typeface="JetBrains Mono"/>
@@ -33334,70 +32978,10 @@
                 <a:cs typeface="JetBrains Mono"/>
                 <a:sym typeface="JetBrains Mono"/>
                 <a:solidFill>
-                  <a:srgbClr val="c0392b"/>
-                </a:solidFill>
-              </a:rPr>
-              <a:t>def</a:t>
-            </a:r>
-            <a:r>
-              <a:rPr lang="ru-RU" altLang="en-US" sz="2300">
-                <a:latin typeface="JetBrains Mono"/>
-                <a:ea typeface="JetBrains Mono"/>
-                <a:cs typeface="JetBrains Mono"/>
-                <a:sym typeface="JetBrains Mono"/>
-                <a:solidFill>
-                  <a:srgbClr val="1a1a1a"/>
-                </a:solidFill>
-              </a:rPr>
-              <a:t> price_with_global_discount(price: </a:t>
-            </a:r>
-            <a:r>
-              <a:rPr lang="ru-RU" altLang="en-US" sz="2300">
-                <a:latin typeface="JetBrains Mono"/>
-                <a:ea typeface="JetBrains Mono"/>
-                <a:cs typeface="JetBrains Mono"/>
-                <a:sym typeface="JetBrains Mono"/>
-                <a:solidFill>
-                  <a:srgbClr val="2c6fa6"/>
-                </a:solidFill>
-              </a:rPr>
-              <a:t>float</a:t>
-            </a:r>
-            <a:r>
-              <a:rPr lang="ru-RU" altLang="en-US" sz="2300">
-                <a:latin typeface="JetBrains Mono"/>
-                <a:ea typeface="JetBrains Mono"/>
-                <a:cs typeface="JetBrains Mono"/>
-                <a:sym typeface="JetBrains Mono"/>
-                <a:solidFill>
-                  <a:srgbClr val="1a1a1a"/>
-                </a:solidFill>
-              </a:rPr>
-              <a:t>) -&gt; </a:t>
-            </a:r>
-            <a:r>
-              <a:rPr lang="ru-RU" altLang="en-US" sz="2300">
-                <a:latin typeface="JetBrains Mono"/>
-                <a:ea typeface="JetBrains Mono"/>
-                <a:cs typeface="JetBrains Mono"/>
-                <a:sym typeface="JetBrains Mono"/>
-                <a:solidFill>
-                  <a:srgbClr val="2c6fa6"/>
-                </a:solidFill>
-              </a:rPr>
-              <a:t>float</a:t>
-            </a:r>
-            <a:r>
-              <a:rPr lang="ru-RU" altLang="en-US" sz="2300">
-                <a:latin typeface="JetBrains Mono"/>
-                <a:ea typeface="JetBrains Mono"/>
-                <a:cs typeface="JetBrains Mono"/>
-                <a:sym typeface="JetBrains Mono"/>
-                <a:solidFill>
-                  <a:srgbClr val="1a1a1a"/>
-                </a:solidFill>
-              </a:rPr>
-              <a:t>:</a:t>
+                  <a:srgbClr val="1a1a1a"/>
+                </a:solidFill>
+              </a:rPr>
+              <a:t>}</a:t>
             </a:r>
           </a:p>
           <a:p>
@@ -33410,7 +32994,7 @@
               </a:spcAft>
               <a:buNone/>
             </a:pPr>
-            <a:endParaRPr>
+            <a:endParaRPr sz="2300">
               <a:latin typeface="JetBrains Mono"/>
               <a:ea typeface="JetBrains Mono"/>
               <a:cs typeface="JetBrains Mono"/>
@@ -33426,55 +33010,7 @@
                   <a:srgbClr val="1a1a1a"/>
                 </a:solidFill>
               </a:rPr>
-              <a:t>    </a:t>
-            </a:r>
-            <a:r>
-              <a:rPr lang="ru-RU" altLang="en-US" sz="2300">
-                <a:latin typeface="JetBrains Mono"/>
-                <a:ea typeface="JetBrains Mono"/>
-                <a:cs typeface="JetBrains Mono"/>
-                <a:sym typeface="JetBrains Mono"/>
-                <a:solidFill>
-                  <a:srgbClr val="c0392b"/>
-                </a:solidFill>
-              </a:rPr>
-              <a:t>return</a:t>
-            </a:r>
-            <a:r>
-              <a:rPr lang="ru-RU" altLang="en-US" sz="2300">
-                <a:latin typeface="JetBrains Mono"/>
-                <a:ea typeface="JetBrains Mono"/>
-                <a:cs typeface="JetBrains Mono"/>
-                <a:sym typeface="JetBrains Mono"/>
-                <a:solidFill>
-                  <a:srgbClr val="1a1a1a"/>
-                </a:solidFill>
-              </a:rPr>
-              <a:t> price * (</a:t>
-            </a:r>
-            <a:r>
-              <a:rPr lang="ru-RU" altLang="en-US" sz="2300">
-                <a:latin typeface="JetBrains Mono"/>
-                <a:ea typeface="JetBrains Mono"/>
-                <a:cs typeface="JetBrains Mono"/>
-                <a:sym typeface="JetBrains Mono"/>
-                <a:solidFill>
-                  <a:srgbClr val="7f8c8d"/>
-                </a:solidFill>
-              </a:rPr>
-              <a:t>1</a:t>
-            </a:r>
-            <a:r>
-              <a:rPr lang="ru-RU" altLang="en-US" sz="2300">
-                <a:latin typeface="JetBrains Mono"/>
-                <a:ea typeface="JetBrains Mono"/>
-                <a:cs typeface="JetBrains Mono"/>
-                <a:sym typeface="JetBrains Mono"/>
-                <a:solidFill>
-                  <a:srgbClr val="1a1a1a"/>
-                </a:solidFill>
-              </a:rPr>
-              <a:t> - current_discount)</a:t>
+              <a:t/>
             </a:r>
           </a:p>
           <a:p>
@@ -33487,7 +33023,7 @@
               </a:spcAft>
               <a:buNone/>
             </a:pPr>
-            <a:endParaRPr>
+            <a:endParaRPr sz="2300">
               <a:latin typeface="JetBrains Mono"/>
               <a:ea typeface="JetBrains Mono"/>
               <a:cs typeface="JetBrains Mono"/>
@@ -33500,10 +33036,10 @@
                 <a:cs typeface="JetBrains Mono"/>
                 <a:sym typeface="JetBrains Mono"/>
                 <a:solidFill>
-                  <a:srgbClr val="1a1a1a"/>
-                </a:solidFill>
-              </a:rPr>
-              <a:t/>
+                  <a:srgbClr val="95a5a6"/>
+                </a:solidFill>
+              </a:rPr>
+              <a:t>// нечистая: &amp;mut в сигнатуре</a:t>
             </a:r>
           </a:p>
           <a:p>
@@ -33516,7 +33052,7 @@
               </a:spcAft>
               <a:buNone/>
             </a:pPr>
-            <a:endParaRPr>
+            <a:endParaRPr sz="2300">
               <a:latin typeface="JetBrains Mono"/>
               <a:ea typeface="JetBrains Mono"/>
               <a:cs typeface="JetBrains Mono"/>
@@ -33529,10 +33065,94 @@
                 <a:cs typeface="JetBrains Mono"/>
                 <a:sym typeface="JetBrains Mono"/>
                 <a:solidFill>
-                  <a:srgbClr val="95a5a6"/>
-                </a:solidFill>
-              </a:rPr>
-              <a:t># чистая</a:t>
+                  <a:srgbClr val="c0392b"/>
+                </a:solidFill>
+              </a:rPr>
+              <a:t>fn</a:t>
+            </a:r>
+            <a:r>
+              <a:rPr lang="ru-RU" altLang="en-US" sz="2300">
+                <a:latin typeface="JetBrains Mono"/>
+                <a:ea typeface="JetBrains Mono"/>
+                <a:cs typeface="JetBrains Mono"/>
+                <a:sym typeface="JetBrains Mono"/>
+                <a:solidFill>
+                  <a:srgbClr val="1a1a1a"/>
+                </a:solidFill>
+              </a:rPr>
+              <a:t> apply_discount_mut(rate: </a:t>
+            </a:r>
+            <a:r>
+              <a:rPr lang="ru-RU" altLang="en-US" sz="2300">
+                <a:latin typeface="JetBrains Mono"/>
+                <a:ea typeface="JetBrains Mono"/>
+                <a:cs typeface="JetBrains Mono"/>
+                <a:sym typeface="JetBrains Mono"/>
+                <a:solidFill>
+                  <a:srgbClr val="2c6fa6"/>
+                </a:solidFill>
+              </a:rPr>
+              <a:t>f64</a:t>
+            </a:r>
+            <a:r>
+              <a:rPr lang="ru-RU" altLang="en-US" sz="2300">
+                <a:latin typeface="JetBrains Mono"/>
+                <a:ea typeface="JetBrains Mono"/>
+                <a:cs typeface="JetBrains Mono"/>
+                <a:sym typeface="JetBrains Mono"/>
+                <a:solidFill>
+                  <a:srgbClr val="1a1a1a"/>
+                </a:solidFill>
+              </a:rPr>
+              <a:t>, price: &amp;</a:t>
+            </a:r>
+            <a:r>
+              <a:rPr lang="ru-RU" altLang="en-US" sz="2300">
+                <a:latin typeface="JetBrains Mono"/>
+                <a:ea typeface="JetBrains Mono"/>
+                <a:cs typeface="JetBrains Mono"/>
+                <a:sym typeface="JetBrains Mono"/>
+                <a:solidFill>
+                  <a:srgbClr val="c0392b"/>
+                </a:solidFill>
+              </a:rPr>
+              <a:t>mut</a:t>
+            </a:r>
+            <a:r>
+              <a:rPr lang="ru-RU" altLang="en-US" sz="2300">
+                <a:latin typeface="JetBrains Mono"/>
+                <a:ea typeface="JetBrains Mono"/>
+                <a:cs typeface="JetBrains Mono"/>
+                <a:sym typeface="JetBrains Mono"/>
+                <a:solidFill>
+                  <a:srgbClr val="1a1a1a"/>
+                </a:solidFill>
+              </a:rPr>
+              <a:t> </a:t>
+            </a:r>
+            <a:r>
+              <a:rPr lang="ru-RU" altLang="en-US" sz="2300">
+                <a:latin typeface="JetBrains Mono"/>
+                <a:ea typeface="JetBrains Mono"/>
+                <a:cs typeface="JetBrains Mono"/>
+                <a:sym typeface="JetBrains Mono"/>
+                <a:solidFill>
+                  <a:srgbClr val="2c6fa6"/>
+                </a:solidFill>
+              </a:rPr>
+              <a:t>f64</a:t>
+            </a:r>
+            <a:r>
+              <a:rPr lang="ru-RU" altLang="en-US" sz="2300">
+                <a:latin typeface="JetBrains Mono"/>
+                <a:ea typeface="JetBrains Mono"/>
+                <a:cs typeface="JetBrains Mono"/>
+                <a:sym typeface="JetBrains Mono"/>
+                <a:solidFill>
+                  <a:srgbClr val="1a1a1a"/>
+                </a:solidFill>
+              </a:rPr>
+              <a:t>) {</a:t>
             </a:r>
           </a:p>
           <a:p>
@@ -33545,7 +33165,7 @@
               </a:spcAft>
               <a:buNone/>
             </a:pPr>
-            <a:endParaRPr>
+            <a:endParaRPr sz="2300">
               <a:latin typeface="JetBrains Mono"/>
               <a:ea typeface="JetBrains Mono"/>
               <a:cs typeface="JetBrains Mono"/>
@@ -33558,10 +33178,10 @@
                 <a:cs typeface="JetBrains Mono"/>
                 <a:sym typeface="JetBrains Mono"/>
                 <a:solidFill>
-                  <a:srgbClr val="c0392b"/>
-                </a:solidFill>
-              </a:rPr>
-              <a:t>def</a:t>
+                  <a:srgbClr val="1a1a1a"/>
+                </a:solidFill>
+              </a:rPr>
+              <a:t>    *price *= </a:t>
             </a:r>
             <a:r>
               <a:rPr lang="ru-RU" altLang="en-US" sz="2300">
@@ -33570,10 +33190,10 @@
                 <a:cs typeface="JetBrains Mono"/>
                 <a:sym typeface="JetBrains Mono"/>
                 <a:solidFill>
-                  <a:srgbClr val="1a1a1a"/>
-                </a:solidFill>
-              </a:rPr>
-              <a:t> apply_discount(rate: </a:t>
+                  <a:srgbClr val="7f8c8d"/>
+                </a:solidFill>
+              </a:rPr>
+              <a:t>1.0</a:t>
             </a:r>
             <a:r>
               <a:rPr lang="ru-RU" altLang="en-US" sz="2300">
@@ -33582,70 +33202,10 @@
                 <a:cs typeface="JetBrains Mono"/>
                 <a:sym typeface="JetBrains Mono"/>
                 <a:solidFill>
-                  <a:srgbClr val="2c6fa6"/>
-                </a:solidFill>
-              </a:rPr>
-              <a:t>float</a:t>
-            </a:r>
-            <a:r>
-              <a:rPr lang="ru-RU" altLang="en-US" sz="2300">
-                <a:latin typeface="JetBrains Mono"/>
-                <a:ea typeface="JetBrains Mono"/>
-                <a:cs typeface="JetBrains Mono"/>
-                <a:sym typeface="JetBrains Mono"/>
-                <a:solidFill>
-                  <a:srgbClr val="1a1a1a"/>
-                </a:solidFill>
-              </a:rPr>
-              <a:t>, price: </a:t>
-            </a:r>
-            <a:r>
-              <a:rPr lang="ru-RU" altLang="en-US" sz="2300">
-                <a:latin typeface="JetBrains Mono"/>
-                <a:ea typeface="JetBrains Mono"/>
-                <a:cs typeface="JetBrains Mono"/>
-                <a:sym typeface="JetBrains Mono"/>
-                <a:solidFill>
-                  <a:srgbClr val="2c6fa6"/>
-                </a:solidFill>
-              </a:rPr>
-              <a:t>float</a:t>
-            </a:r>
-            <a:r>
-              <a:rPr lang="ru-RU" altLang="en-US" sz="2300">
-                <a:latin typeface="JetBrains Mono"/>
-                <a:ea typeface="JetBrains Mono"/>
-                <a:cs typeface="JetBrains Mono"/>
-                <a:sym typeface="JetBrains Mono"/>
-                <a:solidFill>
-                  <a:srgbClr val="1a1a1a"/>
-                </a:solidFill>
-              </a:rPr>
-              <a:t>) -&gt; </a:t>
-            </a:r>
-            <a:r>
-              <a:rPr lang="ru-RU" altLang="en-US" sz="2300">
-                <a:latin typeface="JetBrains Mono"/>
-                <a:ea typeface="JetBrains Mono"/>
-                <a:cs typeface="JetBrains Mono"/>
-                <a:sym typeface="JetBrains Mono"/>
-                <a:solidFill>
-                  <a:srgbClr val="2c6fa6"/>
-                </a:solidFill>
-              </a:rPr>
-              <a:t>float</a:t>
-            </a:r>
-            <a:r>
-              <a:rPr lang="ru-RU" altLang="en-US" sz="2300">
-                <a:latin typeface="JetBrains Mono"/>
-                <a:ea typeface="JetBrains Mono"/>
-                <a:cs typeface="JetBrains Mono"/>
-                <a:sym typeface="JetBrains Mono"/>
-                <a:solidFill>
-                  <a:srgbClr val="1a1a1a"/>
-                </a:solidFill>
-              </a:rPr>
-              <a:t>:</a:t>
+                  <a:srgbClr val="1a1a1a"/>
+                </a:solidFill>
+              </a:rPr>
+              <a:t> - rate;</a:t>
             </a:r>
           </a:p>
           <a:p>
@@ -33658,7 +33218,7 @@
               </a:spcAft>
               <a:buNone/>
             </a:pPr>
-            <a:endParaRPr>
+            <a:endParaRPr sz="2300">
               <a:latin typeface="JetBrains Mono"/>
               <a:ea typeface="JetBrains Mono"/>
               <a:cs typeface="JetBrains Mono"/>
@@ -33674,55 +33234,7 @@
                   <a:srgbClr val="1a1a1a"/>
                 </a:solidFill>
               </a:rPr>
-              <a:t>    </a:t>
-            </a:r>
-            <a:r>
-              <a:rPr lang="ru-RU" altLang="en-US" sz="2300">
-                <a:latin typeface="JetBrains Mono"/>
-                <a:ea typeface="JetBrains Mono"/>
-                <a:cs typeface="JetBrains Mono"/>
-                <a:sym typeface="JetBrains Mono"/>
-                <a:solidFill>
-                  <a:srgbClr val="c0392b"/>
-                </a:solidFill>
-              </a:rPr>
-              <a:t>return</a:t>
-            </a:r>
-            <a:r>
-              <a:rPr lang="ru-RU" altLang="en-US" sz="2300">
-                <a:latin typeface="JetBrains Mono"/>
-                <a:ea typeface="JetBrains Mono"/>
-                <a:cs typeface="JetBrains Mono"/>
-                <a:sym typeface="JetBrains Mono"/>
-                <a:solidFill>
-                  <a:srgbClr val="1a1a1a"/>
-                </a:solidFill>
-              </a:rPr>
-              <a:t> price * (</a:t>
-            </a:r>
-            <a:r>
-              <a:rPr lang="ru-RU" altLang="en-US" sz="2300">
-                <a:latin typeface="JetBrains Mono"/>
-                <a:ea typeface="JetBrains Mono"/>
-                <a:cs typeface="JetBrains Mono"/>
-                <a:sym typeface="JetBrains Mono"/>
-                <a:solidFill>
-                  <a:srgbClr val="7f8c8d"/>
-                </a:solidFill>
-              </a:rPr>
-              <a:t>1</a:t>
-            </a:r>
-            <a:r>
-              <a:rPr lang="ru-RU" altLang="en-US" sz="2300">
-                <a:latin typeface="JetBrains Mono"/>
-                <a:ea typeface="JetBrains Mono"/>
-                <a:cs typeface="JetBrains Mono"/>
-                <a:sym typeface="JetBrains Mono"/>
-                <a:solidFill>
-                  <a:srgbClr val="1a1a1a"/>
-                </a:solidFill>
-              </a:rPr>
-              <a:t> - rate)</a:t>
+              <a:t>}</a:t>
             </a:r>
           </a:p>
         </p:txBody>
@@ -33826,7 +33338,7 @@
             </a:pPr>
             <a:r>
               <a:rPr lang="ru-RU"/>
-              <a:t>Ссылочная прозрачность: JS</a:t>
+              <a:t>Ссылочная прозрачность: Python</a:t>
             </a:r>
           </a:p>
         </p:txBody>
@@ -33863,23 +33375,35 @@
               </a:spcAft>
               <a:buNone/>
             </a:pPr>
-            <a:endParaRPr sz="2000">
+            <a:endParaRPr>
               <a:latin typeface="JetBrains Mono"/>
               <a:ea typeface="JetBrains Mono"/>
               <a:cs typeface="JetBrains Mono"/>
               <a:sym typeface="JetBrains Mono"/>
             </a:endParaRPr>
             <a:r>
-              <a:rPr lang="ru-RU" altLang="en-US" sz="2000">
-                <a:latin typeface="JetBrains Mono"/>
-                <a:ea typeface="JetBrains Mono"/>
-                <a:cs typeface="JetBrains Mono"/>
-                <a:sym typeface="JetBrains Mono"/>
-                <a:solidFill>
-                  <a:srgbClr val="95a5a6"/>
-                </a:solidFill>
-              </a:rPr>
-              <a:t>// нечистая: захватывает внешнее состояние</a:t>
+              <a:rPr lang="ru-RU" altLang="en-US" sz="2300">
+                <a:latin typeface="JetBrains Mono"/>
+                <a:ea typeface="JetBrains Mono"/>
+                <a:cs typeface="JetBrains Mono"/>
+                <a:sym typeface="JetBrains Mono"/>
+                <a:solidFill>
+                  <a:srgbClr val="1a1a1a"/>
+                </a:solidFill>
+              </a:rPr>
+              <a:t>current_discount = </a:t>
+            </a:r>
+            <a:r>
+              <a:rPr lang="ru-RU" altLang="en-US" sz="2300">
+                <a:latin typeface="JetBrains Mono"/>
+                <a:ea typeface="JetBrains Mono"/>
+                <a:cs typeface="JetBrains Mono"/>
+                <a:sym typeface="JetBrains Mono"/>
+                <a:solidFill>
+                  <a:srgbClr val="7f8c8d"/>
+                </a:solidFill>
+              </a:rPr>
+              <a:t>0.1</a:t>
             </a:r>
           </a:p>
           <a:p>
@@ -33892,59 +33416,23 @@
               </a:spcAft>
               <a:buNone/>
             </a:pPr>
-            <a:endParaRPr sz="2000">
+            <a:endParaRPr>
               <a:latin typeface="JetBrains Mono"/>
               <a:ea typeface="JetBrains Mono"/>
               <a:cs typeface="JetBrains Mono"/>
               <a:sym typeface="JetBrains Mono"/>
             </a:endParaRPr>
             <a:r>
-              <a:rPr lang="ru-RU" altLang="en-US" sz="2000">
-                <a:latin typeface="JetBrains Mono"/>
-                <a:ea typeface="JetBrains Mono"/>
-                <a:cs typeface="JetBrains Mono"/>
-                <a:sym typeface="JetBrains Mono"/>
-                <a:solidFill>
-                  <a:srgbClr val="c0392b"/>
-                </a:solidFill>
-              </a:rPr>
-              <a:t>let</a:t>
-            </a:r>
-            <a:r>
-              <a:rPr lang="ru-RU" altLang="en-US" sz="2000">
-                <a:latin typeface="JetBrains Mono"/>
-                <a:ea typeface="JetBrains Mono"/>
-                <a:cs typeface="JetBrains Mono"/>
-                <a:sym typeface="JetBrains Mono"/>
-                <a:solidFill>
-                  <a:srgbClr val="1a1a1a"/>
-                </a:solidFill>
-              </a:rPr>
-              <a:t> taxRate = </a:t>
-            </a:r>
-            <a:r>
-              <a:rPr lang="ru-RU" altLang="en-US" sz="2000">
-                <a:latin typeface="JetBrains Mono"/>
-                <a:ea typeface="JetBrains Mono"/>
-                <a:cs typeface="JetBrains Mono"/>
-                <a:sym typeface="JetBrains Mono"/>
-                <a:solidFill>
-                  <a:srgbClr val="7f8c8d"/>
-                </a:solidFill>
-              </a:rPr>
-              <a:t>0.2</a:t>
-            </a:r>
-            <a:r>
-              <a:rPr lang="ru-RU" altLang="en-US" sz="2000">
-                <a:latin typeface="JetBrains Mono"/>
-                <a:ea typeface="JetBrains Mono"/>
-                <a:cs typeface="JetBrains Mono"/>
-                <a:sym typeface="JetBrains Mono"/>
-                <a:solidFill>
-                  <a:srgbClr val="1a1a1a"/>
-                </a:solidFill>
-              </a:rPr>
-              <a:t>;</a:t>
+              <a:rPr lang="ru-RU" altLang="en-US" sz="2300">
+                <a:latin typeface="JetBrains Mono"/>
+                <a:ea typeface="JetBrains Mono"/>
+                <a:cs typeface="JetBrains Mono"/>
+                <a:sym typeface="JetBrains Mono"/>
+                <a:solidFill>
+                  <a:srgbClr val="1a1a1a"/>
+                </a:solidFill>
+              </a:rPr>
+              <a:t/>
             </a:r>
           </a:p>
           <a:p>
@@ -33957,59 +33445,23 @@
               </a:spcAft>
               <a:buNone/>
             </a:pPr>
-            <a:endParaRPr sz="2000">
+            <a:endParaRPr>
               <a:latin typeface="JetBrains Mono"/>
               <a:ea typeface="JetBrains Mono"/>
               <a:cs typeface="JetBrains Mono"/>
               <a:sym typeface="JetBrains Mono"/>
             </a:endParaRPr>
             <a:r>
-              <a:rPr lang="ru-RU" altLang="en-US" sz="2000">
-                <a:latin typeface="JetBrains Mono"/>
-                <a:ea typeface="JetBrains Mono"/>
-                <a:cs typeface="JetBrains Mono"/>
-                <a:sym typeface="JetBrains Mono"/>
-                <a:solidFill>
-                  <a:srgbClr val="c0392b"/>
-                </a:solidFill>
-              </a:rPr>
-              <a:t>const</a:t>
-            </a:r>
-            <a:r>
-              <a:rPr lang="ru-RU" altLang="en-US" sz="2000">
-                <a:latin typeface="JetBrains Mono"/>
-                <a:ea typeface="JetBrains Mono"/>
-                <a:cs typeface="JetBrains Mono"/>
-                <a:sym typeface="JetBrains Mono"/>
-                <a:solidFill>
-                  <a:srgbClr val="1a1a1a"/>
-                </a:solidFill>
-              </a:rPr>
-              <a:t> priceWithTax = (price) =&gt; price * (</a:t>
-            </a:r>
-            <a:r>
-              <a:rPr lang="ru-RU" altLang="en-US" sz="2000">
-                <a:latin typeface="JetBrains Mono"/>
-                <a:ea typeface="JetBrains Mono"/>
-                <a:cs typeface="JetBrains Mono"/>
-                <a:sym typeface="JetBrains Mono"/>
-                <a:solidFill>
-                  <a:srgbClr val="7f8c8d"/>
-                </a:solidFill>
-              </a:rPr>
-              <a:t>1</a:t>
-            </a:r>
-            <a:r>
-              <a:rPr lang="ru-RU" altLang="en-US" sz="2000">
-                <a:latin typeface="JetBrains Mono"/>
-                <a:ea typeface="JetBrains Mono"/>
-                <a:cs typeface="JetBrains Mono"/>
-                <a:sym typeface="JetBrains Mono"/>
-                <a:solidFill>
-                  <a:srgbClr val="1a1a1a"/>
-                </a:solidFill>
-              </a:rPr>
-              <a:t> + taxRate);</a:t>
+              <a:rPr lang="ru-RU" altLang="en-US" sz="2300">
+                <a:latin typeface="JetBrains Mono"/>
+                <a:ea typeface="JetBrains Mono"/>
+                <a:cs typeface="JetBrains Mono"/>
+                <a:sym typeface="JetBrains Mono"/>
+                <a:solidFill>
+                  <a:srgbClr val="95a5a6"/>
+                </a:solidFill>
+              </a:rPr>
+              <a:t># нечистая: зависит от глобального состояния</a:t>
             </a:r>
           </a:p>
           <a:p>
@@ -34022,23 +33474,83 @@
               </a:spcAft>
               <a:buNone/>
             </a:pPr>
-            <a:endParaRPr sz="2000">
+            <a:endParaRPr>
               <a:latin typeface="JetBrains Mono"/>
               <a:ea typeface="JetBrains Mono"/>
               <a:cs typeface="JetBrains Mono"/>
               <a:sym typeface="JetBrains Mono"/>
             </a:endParaRPr>
             <a:r>
-              <a:rPr lang="ru-RU" altLang="en-US" sz="2000">
-                <a:latin typeface="JetBrains Mono"/>
-                <a:ea typeface="JetBrains Mono"/>
-                <a:cs typeface="JetBrains Mono"/>
-                <a:sym typeface="JetBrains Mono"/>
-                <a:solidFill>
-                  <a:srgbClr val="1a1a1a"/>
-                </a:solidFill>
-              </a:rPr>
-              <a:t/>
+              <a:rPr lang="ru-RU" altLang="en-US" sz="2300">
+                <a:latin typeface="JetBrains Mono"/>
+                <a:ea typeface="JetBrains Mono"/>
+                <a:cs typeface="JetBrains Mono"/>
+                <a:sym typeface="JetBrains Mono"/>
+                <a:solidFill>
+                  <a:srgbClr val="c0392b"/>
+                </a:solidFill>
+              </a:rPr>
+              <a:t>def</a:t>
+            </a:r>
+            <a:r>
+              <a:rPr lang="ru-RU" altLang="en-US" sz="2300">
+                <a:latin typeface="JetBrains Mono"/>
+                <a:ea typeface="JetBrains Mono"/>
+                <a:cs typeface="JetBrains Mono"/>
+                <a:sym typeface="JetBrains Mono"/>
+                <a:solidFill>
+                  <a:srgbClr val="1a1a1a"/>
+                </a:solidFill>
+              </a:rPr>
+              <a:t> price_with_global_discount(price: </a:t>
+            </a:r>
+            <a:r>
+              <a:rPr lang="ru-RU" altLang="en-US" sz="2300">
+                <a:latin typeface="JetBrains Mono"/>
+                <a:ea typeface="JetBrains Mono"/>
+                <a:cs typeface="JetBrains Mono"/>
+                <a:sym typeface="JetBrains Mono"/>
+                <a:solidFill>
+                  <a:srgbClr val="2c6fa6"/>
+                </a:solidFill>
+              </a:rPr>
+              <a:t>float</a:t>
+            </a:r>
+            <a:r>
+              <a:rPr lang="ru-RU" altLang="en-US" sz="2300">
+                <a:latin typeface="JetBrains Mono"/>
+                <a:ea typeface="JetBrains Mono"/>
+                <a:cs typeface="JetBrains Mono"/>
+                <a:sym typeface="JetBrains Mono"/>
+                <a:solidFill>
+                  <a:srgbClr val="1a1a1a"/>
+                </a:solidFill>
+              </a:rPr>
+              <a:t>) -&gt; </a:t>
+            </a:r>
+            <a:r>
+              <a:rPr lang="ru-RU" altLang="en-US" sz="2300">
+                <a:latin typeface="JetBrains Mono"/>
+                <a:ea typeface="JetBrains Mono"/>
+                <a:cs typeface="JetBrains Mono"/>
+                <a:sym typeface="JetBrains Mono"/>
+                <a:solidFill>
+                  <a:srgbClr val="2c6fa6"/>
+                </a:solidFill>
+              </a:rPr>
+              <a:t>float</a:t>
+            </a:r>
+            <a:r>
+              <a:rPr lang="ru-RU" altLang="en-US" sz="2300">
+                <a:latin typeface="JetBrains Mono"/>
+                <a:ea typeface="JetBrains Mono"/>
+                <a:cs typeface="JetBrains Mono"/>
+                <a:sym typeface="JetBrains Mono"/>
+                <a:solidFill>
+                  <a:srgbClr val="1a1a1a"/>
+                </a:solidFill>
+              </a:rPr>
+              <a:t>:</a:t>
             </a:r>
           </a:p>
           <a:p>
@@ -34051,23 +33563,71 @@
               </a:spcAft>
               <a:buNone/>
             </a:pPr>
-            <a:endParaRPr sz="2000">
+            <a:endParaRPr>
               <a:latin typeface="JetBrains Mono"/>
               <a:ea typeface="JetBrains Mono"/>
               <a:cs typeface="JetBrains Mono"/>
               <a:sym typeface="JetBrains Mono"/>
             </a:endParaRPr>
             <a:r>
-              <a:rPr lang="ru-RU" altLang="en-US" sz="2000">
-                <a:latin typeface="JetBrains Mono"/>
-                <a:ea typeface="JetBrains Mono"/>
-                <a:cs typeface="JetBrains Mono"/>
-                <a:sym typeface="JetBrains Mono"/>
-                <a:solidFill>
-                  <a:srgbClr val="95a5a6"/>
-                </a:solidFill>
-              </a:rPr>
-              <a:t>// чистая</a:t>
+              <a:rPr lang="ru-RU" altLang="en-US" sz="2300">
+                <a:latin typeface="JetBrains Mono"/>
+                <a:ea typeface="JetBrains Mono"/>
+                <a:cs typeface="JetBrains Mono"/>
+                <a:sym typeface="JetBrains Mono"/>
+                <a:solidFill>
+                  <a:srgbClr val="1a1a1a"/>
+                </a:solidFill>
+              </a:rPr>
+              <a:t>    </a:t>
+            </a:r>
+            <a:r>
+              <a:rPr lang="ru-RU" altLang="en-US" sz="2300">
+                <a:latin typeface="JetBrains Mono"/>
+                <a:ea typeface="JetBrains Mono"/>
+                <a:cs typeface="JetBrains Mono"/>
+                <a:sym typeface="JetBrains Mono"/>
+                <a:solidFill>
+                  <a:srgbClr val="c0392b"/>
+                </a:solidFill>
+              </a:rPr>
+              <a:t>return</a:t>
+            </a:r>
+            <a:r>
+              <a:rPr lang="ru-RU" altLang="en-US" sz="2300">
+                <a:latin typeface="JetBrains Mono"/>
+                <a:ea typeface="JetBrains Mono"/>
+                <a:cs typeface="JetBrains Mono"/>
+                <a:sym typeface="JetBrains Mono"/>
+                <a:solidFill>
+                  <a:srgbClr val="1a1a1a"/>
+                </a:solidFill>
+              </a:rPr>
+              <a:t> price * (</a:t>
+            </a:r>
+            <a:r>
+              <a:rPr lang="ru-RU" altLang="en-US" sz="2300">
+                <a:latin typeface="JetBrains Mono"/>
+                <a:ea typeface="JetBrains Mono"/>
+                <a:cs typeface="JetBrains Mono"/>
+                <a:sym typeface="JetBrains Mono"/>
+                <a:solidFill>
+                  <a:srgbClr val="7f8c8d"/>
+                </a:solidFill>
+              </a:rPr>
+              <a:t>1</a:t>
+            </a:r>
+            <a:r>
+              <a:rPr lang="ru-RU" altLang="en-US" sz="2300">
+                <a:latin typeface="JetBrains Mono"/>
+                <a:ea typeface="JetBrains Mono"/>
+                <a:cs typeface="JetBrains Mono"/>
+                <a:sym typeface="JetBrains Mono"/>
+                <a:solidFill>
+                  <a:srgbClr val="1a1a1a"/>
+                </a:solidFill>
+              </a:rPr>
+              <a:t> - current_discount)</a:t>
             </a:r>
           </a:p>
           <a:p>
@@ -34080,14 +33640,72 @@
               </a:spcAft>
               <a:buNone/>
             </a:pPr>
-            <a:endParaRPr sz="2000">
+            <a:endParaRPr>
               <a:latin typeface="JetBrains Mono"/>
               <a:ea typeface="JetBrains Mono"/>
               <a:cs typeface="JetBrains Mono"/>
               <a:sym typeface="JetBrains Mono"/>
             </a:endParaRPr>
             <a:r>
-              <a:rPr lang="ru-RU" altLang="en-US" sz="2000">
+              <a:rPr lang="ru-RU" altLang="en-US" sz="2300">
+                <a:latin typeface="JetBrains Mono"/>
+                <a:ea typeface="JetBrains Mono"/>
+                <a:cs typeface="JetBrains Mono"/>
+                <a:sym typeface="JetBrains Mono"/>
+                <a:solidFill>
+                  <a:srgbClr val="1a1a1a"/>
+                </a:solidFill>
+              </a:rPr>
+              <a:t/>
+            </a:r>
+          </a:p>
+          <a:p>
+            <a:pPr indent="0" lvl="0" marL="0" rtl="0" algn="l">
+              <a:spcBef>
+                <a:spcPts val="1000"/>
+              </a:spcBef>
+              <a:spcAft>
+                <a:spcPts val="0"/>
+              </a:spcAft>
+              <a:buNone/>
+            </a:pPr>
+            <a:endParaRPr>
+              <a:latin typeface="JetBrains Mono"/>
+              <a:ea typeface="JetBrains Mono"/>
+              <a:cs typeface="JetBrains Mono"/>
+              <a:sym typeface="JetBrains Mono"/>
+            </a:endParaRPr>
+            <a:r>
+              <a:rPr lang="ru-RU" altLang="en-US" sz="2300">
+                <a:latin typeface="JetBrains Mono"/>
+                <a:ea typeface="JetBrains Mono"/>
+                <a:cs typeface="JetBrains Mono"/>
+                <a:sym typeface="JetBrains Mono"/>
+                <a:solidFill>
+                  <a:srgbClr val="95a5a6"/>
+                </a:solidFill>
+              </a:rPr>
+              <a:t># чистая</a:t>
+            </a:r>
+          </a:p>
+          <a:p>
+            <a:pPr indent="0" lvl="0" marL="0" rtl="0" algn="l">
+              <a:spcBef>
+                <a:spcPts val="1000"/>
+              </a:spcBef>
+              <a:spcAft>
+                <a:spcPts val="0"/>
+              </a:spcAft>
+              <a:buNone/>
+            </a:pPr>
+            <a:endParaRPr>
+              <a:latin typeface="JetBrains Mono"/>
+              <a:ea typeface="JetBrains Mono"/>
+              <a:cs typeface="JetBrains Mono"/>
+              <a:sym typeface="JetBrains Mono"/>
+            </a:endParaRPr>
+            <a:r>
+              <a:rPr lang="ru-RU" altLang="en-US" sz="2300">
                 <a:latin typeface="JetBrains Mono"/>
                 <a:ea typeface="JetBrains Mono"/>
                 <a:cs typeface="JetBrains Mono"/>
@@ -34096,22 +33714,147 @@
                   <a:srgbClr val="c0392b"/>
                 </a:solidFill>
               </a:rPr>
-              <a:t>const</a:t>
-            </a:r>
-            <a:r>
-              <a:rPr lang="ru-RU" altLang="en-US" sz="2000">
-                <a:latin typeface="JetBrains Mono"/>
-                <a:ea typeface="JetBrains Mono"/>
-                <a:cs typeface="JetBrains Mono"/>
-                <a:sym typeface="JetBrains Mono"/>
-                <a:solidFill>
-                  <a:srgbClr val="1a1a1a"/>
-                </a:solidFill>
-              </a:rPr>
-              <a:t> applyDiscount = (rate) =&gt; (price) =&gt; price * (</a:t>
-            </a:r>
-            <a:r>
-              <a:rPr lang="ru-RU" altLang="en-US" sz="2000">
+              <a:t>def</a:t>
+            </a:r>
+            <a:r>
+              <a:rPr lang="ru-RU" altLang="en-US" sz="2300">
+                <a:latin typeface="JetBrains Mono"/>
+                <a:ea typeface="JetBrains Mono"/>
+                <a:cs typeface="JetBrains Mono"/>
+                <a:sym typeface="JetBrains Mono"/>
+                <a:solidFill>
+                  <a:srgbClr val="1a1a1a"/>
+                </a:solidFill>
+              </a:rPr>
+              <a:t> apply_discount(rate: </a:t>
+            </a:r>
+            <a:r>
+              <a:rPr lang="ru-RU" altLang="en-US" sz="2300">
+                <a:latin typeface="JetBrains Mono"/>
+                <a:ea typeface="JetBrains Mono"/>
+                <a:cs typeface="JetBrains Mono"/>
+                <a:sym typeface="JetBrains Mono"/>
+                <a:solidFill>
+                  <a:srgbClr val="2c6fa6"/>
+                </a:solidFill>
+              </a:rPr>
+              <a:t>float</a:t>
+            </a:r>
+            <a:r>
+              <a:rPr lang="ru-RU" altLang="en-US" sz="2300">
+                <a:latin typeface="JetBrains Mono"/>
+                <a:ea typeface="JetBrains Mono"/>
+                <a:cs typeface="JetBrains Mono"/>
+                <a:sym typeface="JetBrains Mono"/>
+                <a:solidFill>
+                  <a:srgbClr val="1a1a1a"/>
+                </a:solidFill>
+              </a:rPr>
+              <a:t>, price: </a:t>
+            </a:r>
+            <a:r>
+              <a:rPr lang="ru-RU" altLang="en-US" sz="2300">
+                <a:latin typeface="JetBrains Mono"/>
+                <a:ea typeface="JetBrains Mono"/>
+                <a:cs typeface="JetBrains Mono"/>
+                <a:sym typeface="JetBrains Mono"/>
+                <a:solidFill>
+                  <a:srgbClr val="2c6fa6"/>
+                </a:solidFill>
+              </a:rPr>
+              <a:t>float</a:t>
+            </a:r>
+            <a:r>
+              <a:rPr lang="ru-RU" altLang="en-US" sz="2300">
+                <a:latin typeface="JetBrains Mono"/>
+                <a:ea typeface="JetBrains Mono"/>
+                <a:cs typeface="JetBrains Mono"/>
+                <a:sym typeface="JetBrains Mono"/>
+                <a:solidFill>
+                  <a:srgbClr val="1a1a1a"/>
+                </a:solidFill>
+              </a:rPr>
+              <a:t>) -&gt; </a:t>
+            </a:r>
+            <a:r>
+              <a:rPr lang="ru-RU" altLang="en-US" sz="2300">
+                <a:latin typeface="JetBrains Mono"/>
+                <a:ea typeface="JetBrains Mono"/>
+                <a:cs typeface="JetBrains Mono"/>
+                <a:sym typeface="JetBrains Mono"/>
+                <a:solidFill>
+                  <a:srgbClr val="2c6fa6"/>
+                </a:solidFill>
+              </a:rPr>
+              <a:t>float</a:t>
+            </a:r>
+            <a:r>
+              <a:rPr lang="ru-RU" altLang="en-US" sz="2300">
+                <a:latin typeface="JetBrains Mono"/>
+                <a:ea typeface="JetBrains Mono"/>
+                <a:cs typeface="JetBrains Mono"/>
+                <a:sym typeface="JetBrains Mono"/>
+                <a:solidFill>
+                  <a:srgbClr val="1a1a1a"/>
+                </a:solidFill>
+              </a:rPr>
+              <a:t>:</a:t>
+            </a:r>
+          </a:p>
+          <a:p>
+            <a:pPr indent="0" lvl="0" marL="0" rtl="0" algn="l">
+              <a:spcBef>
+                <a:spcPts val="1000"/>
+              </a:spcBef>
+              <a:spcAft>
+                <a:spcPts val="0"/>
+              </a:spcAft>
+              <a:buNone/>
+            </a:pPr>
+            <a:endParaRPr>
+              <a:latin typeface="JetBrains Mono"/>
+              <a:ea typeface="JetBrains Mono"/>
+              <a:cs typeface="JetBrains Mono"/>
+              <a:sym typeface="JetBrains Mono"/>
+            </a:endParaRPr>
+            <a:r>
+              <a:rPr lang="ru-RU" altLang="en-US" sz="2300">
+                <a:latin typeface="JetBrains Mono"/>
+                <a:ea typeface="JetBrains Mono"/>
+                <a:cs typeface="JetBrains Mono"/>
+                <a:sym typeface="JetBrains Mono"/>
+                <a:solidFill>
+                  <a:srgbClr val="1a1a1a"/>
+                </a:solidFill>
+              </a:rPr>
+              <a:t>    </a:t>
+            </a:r>
+            <a:r>
+              <a:rPr lang="ru-RU" altLang="en-US" sz="2300">
+                <a:latin typeface="JetBrains Mono"/>
+                <a:ea typeface="JetBrains Mono"/>
+                <a:cs typeface="JetBrains Mono"/>
+                <a:sym typeface="JetBrains Mono"/>
+                <a:solidFill>
+                  <a:srgbClr val="c0392b"/>
+                </a:solidFill>
+              </a:rPr>
+              <a:t>return</a:t>
+            </a:r>
+            <a:r>
+              <a:rPr lang="ru-RU" altLang="en-US" sz="2300">
+                <a:latin typeface="JetBrains Mono"/>
+                <a:ea typeface="JetBrains Mono"/>
+                <a:cs typeface="JetBrains Mono"/>
+                <a:sym typeface="JetBrains Mono"/>
+                <a:solidFill>
+                  <a:srgbClr val="1a1a1a"/>
+                </a:solidFill>
+              </a:rPr>
+              <a:t> price * (</a:t>
+            </a:r>
+            <a:r>
+              <a:rPr lang="ru-RU" altLang="en-US" sz="2300">
                 <a:latin typeface="JetBrains Mono"/>
                 <a:ea typeface="JetBrains Mono"/>
                 <a:cs typeface="JetBrains Mono"/>
@@ -34123,16 +33866,16 @@
               <a:t>1</a:t>
             </a:r>
             <a:r>
-              <a:rPr lang="ru-RU" altLang="en-US" sz="2000">
-                <a:latin typeface="JetBrains Mono"/>
-                <a:ea typeface="JetBrains Mono"/>
-                <a:cs typeface="JetBrains Mono"/>
-                <a:sym typeface="JetBrains Mono"/>
-                <a:solidFill>
-                  <a:srgbClr val="1a1a1a"/>
-                </a:solidFill>
-              </a:rPr>
-              <a:t> - rate);</a:t>
+              <a:rPr lang="ru-RU" altLang="en-US" sz="2300">
+                <a:latin typeface="JetBrains Mono"/>
+                <a:ea typeface="JetBrains Mono"/>
+                <a:cs typeface="JetBrains Mono"/>
+                <a:sym typeface="JetBrains Mono"/>
+                <a:solidFill>
+                  <a:srgbClr val="1a1a1a"/>
+                </a:solidFill>
+              </a:rPr>
+              <a:t> - rate)</a:t>
             </a:r>
           </a:p>
         </p:txBody>
@@ -35004,7 +34747,7 @@
   <p:cSld>
     <p:spTree>
       <p:nvGrpSpPr>
-        <p:cNvPr id="178" name="Shape 178"/>
+        <p:cNvPr id="157" name="Shape 157"/>
         <p:cNvGrpSpPr/>
         <p:nvPr/>
       </p:nvGrpSpPr>
@@ -35018,22 +34761,20 @@
       </p:grpSpPr>
       <p:sp>
         <p:nvSpPr>
-          <p:cNvPr id="179" name="Google Shape;179;p5"/>
+          <p:cNvPr id="158" name="Google Shape;158;g3d09141108f_0_60"/>
           <p:cNvSpPr txBox="1"/>
-          <p:nvPr/>
+          <p:nvPr>
+            <p:ph idx="12" type="sldNum"/>
+          </p:nvPr>
         </p:nvSpPr>
         <p:spPr>
           <a:xfrm>
-            <a:off x="6096000" y="1594852"/>
-            <a:ext cx="5241925" cy="1063625"/>
+            <a:off x="8610600" y="6356350"/>
+            <a:ext cx="2743200" cy="365100"/>
           </a:xfrm>
           <a:prstGeom prst="rect">
             <a:avLst/>
           </a:prstGeom>
-          <a:noFill/>
-          <a:ln>
-            <a:noFill/>
-          </a:ln>
         </p:spPr>
         <p:txBody>
           <a:bodyPr anchorCtr="0" anchor="t" bIns="45700" lIns="91425" spcFirstLastPara="1" rIns="91425" wrap="square" tIns="45700">
@@ -35041,61 +34782,78 @@
           </a:bodyPr>
           <a:lstStyle/>
           <a:p>
-            <a:pPr indent="0" lvl="0" marL="0" marR="0" rtl="0" algn="l">
-              <a:lnSpc>
-                <a:spcPct val="90000"/>
-              </a:lnSpc>
-              <a:spcBef>
-                <a:spcPts val="0"/>
-              </a:spcBef>
-              <a:spcAft>
-                <a:spcPts val="0"/>
-              </a:spcAft>
-              <a:buClr>
-                <a:schemeClr val="dk1"/>
-              </a:buClr>
-              <a:buSzPts val="4400"/>
-              <a:buFont typeface="Arial"/>
+            <a:pPr indent="0" lvl="0" marL="0" rtl="0" algn="r">
+              <a:spcBef>
+                <a:spcPts val="0"/>
+              </a:spcBef>
+              <a:spcAft>
+                <a:spcPts val="0"/>
+              </a:spcAft>
               <a:buNone/>
             </a:pPr>
-            <a:r>
-              <a:rPr b="1" i="1" lang="ru-RU" sz="4400">
-                <a:solidFill>
-                  <a:schemeClr val="dk1"/>
-                </a:solidFill>
-              </a:rPr>
-              <a:t>Павел Аргентов</a:t>
-            </a:r>
-            <a:endParaRPr b="0" i="0" sz="2800" u="none" cap="none" strike="noStrike">
-              <a:solidFill>
-                <a:schemeClr val="dk1"/>
-              </a:solidFill>
-              <a:latin typeface="Calibri"/>
-              <a:ea typeface="Calibri"/>
-              <a:cs typeface="Calibri"/>
-              <a:sym typeface="Calibri"/>
-            </a:endParaRPr>
+            <a:fld id="{00000000-1234-1234-1234-123412341234}" type="slidenum">
+              <a:rPr lang="ru-RU"/>
+              <a:t>‹#›</a:t>
+            </a:fld>
+            <a:endParaRPr/>
           </a:p>
         </p:txBody>
       </p:sp>
       <p:sp>
         <p:nvSpPr>
-          <p:cNvPr id="180" name="Google Shape;180;p5"/>
+          <p:cNvPr id="159" name="Google Shape;159;g3d09141108f_0_60"/>
           <p:cNvSpPr txBox="1"/>
-          <p:nvPr/>
+          <p:nvPr>
+            <p:ph idx="1" type="body"/>
+          </p:nvPr>
         </p:nvSpPr>
         <p:spPr>
           <a:xfrm>
-            <a:off x="6110607" y="3239501"/>
-            <a:ext cx="5241925" cy="2097882"/>
+            <a:off x="838198" y="543878"/>
+            <a:ext cx="10942500" cy="1219200"/>
           </a:xfrm>
           <a:prstGeom prst="rect">
             <a:avLst/>
           </a:prstGeom>
-          <a:noFill/>
-          <a:ln>
-            <a:noFill/>
-          </a:ln>
+        </p:spPr>
+        <p:txBody>
+          <a:bodyPr anchorCtr="0" anchor="ctr" bIns="45700" lIns="91425" spcFirstLastPara="1" rIns="91425" wrap="square" tIns="45700">
+            <a:noAutofit/>
+          </a:bodyPr>
+          <a:lstStyle/>
+          <a:p>
+            <a:pPr indent="0" lvl="0" marL="0" rtl="0" algn="l">
+              <a:spcBef>
+                <a:spcPts val="1000"/>
+              </a:spcBef>
+              <a:spcAft>
+                <a:spcPts val="0"/>
+              </a:spcAft>
+              <a:buNone/>
+            </a:pPr>
+            <a:r>
+              <a:rPr lang="ru-RU"/>
+              <a:t>Ссылочная прозрачность: JS</a:t>
+            </a:r>
+          </a:p>
+        </p:txBody>
+      </p:sp>
+      <p:sp>
+        <p:nvSpPr>
+          <p:cNvPr id="160" name="Google Shape;160;g3d09141108f_0_60"/>
+          <p:cNvSpPr txBox="1"/>
+          <p:nvPr>
+            <p:ph idx="2" type="body"/>
+          </p:nvPr>
+        </p:nvSpPr>
+        <p:spPr>
+          <a:xfrm>
+            <a:off x="1138200" y="1763063"/>
+            <a:ext cx="10642500" cy="3254400"/>
+          </a:xfrm>
+          <a:prstGeom prst="rect">
+            <a:avLst/>
+          </a:prstGeom>
         </p:spPr>
         <p:txBody>
           <a:bodyPr anchorCtr="0" anchor="t" bIns="45700" lIns="91425" spcFirstLastPara="1" rIns="91425" wrap="square" tIns="45700">
@@ -35103,144 +34861,289 @@
           </a:bodyPr>
           <a:lstStyle/>
           <a:p>
-            <a:pPr indent="0" lvl="0" marL="0" marR="0" rtl="0" algn="l">
-              <a:lnSpc>
-                <a:spcPct val="90000"/>
-              </a:lnSpc>
+            <a:pPr indent="0" lvl="0" marL="0" rtl="0" algn="l">
               <a:spcBef>
                 <a:spcPts val="1000"/>
               </a:spcBef>
               <a:spcAft>
                 <a:spcPts val="0"/>
               </a:spcAft>
-              <a:buClr>
-                <a:schemeClr val="dk1"/>
-              </a:buClr>
-              <a:buSzPts val="2800"/>
-              <a:buFont typeface="Arial"/>
               <a:buNone/>
             </a:pPr>
-            <a:r>
-              <a:rPr b="0" i="1" lang="ru-RU" sz="2800" u="none" cap="none" strike="noStrike">
-                <a:solidFill>
-                  <a:schemeClr val="dk1"/>
-                </a:solidFill>
-                <a:latin typeface="Arial"/>
-                <a:ea typeface="Arial"/>
-                <a:cs typeface="Arial"/>
-                <a:sym typeface="Arial"/>
-              </a:rPr>
-              <a:t>Tg: @</a:t>
-            </a:r>
-            <a:r>
-              <a:rPr i="1" lang="ru-RU" sz="2800">
-                <a:solidFill>
-                  <a:schemeClr val="dk1"/>
-                </a:solidFill>
-              </a:rPr>
-              <a:t>argent_smith</a:t>
-            </a:r>
-            <a:endParaRPr b="0" i="0" sz="1400" u="none" cap="none" strike="noStrike">
-              <a:solidFill>
-                <a:srgbClr val="000000"/>
-              </a:solidFill>
-              <a:latin typeface="Arial"/>
-              <a:ea typeface="Arial"/>
-              <a:cs typeface="Arial"/>
-              <a:sym typeface="Arial"/>
+            <a:endParaRPr sz="2000">
+              <a:latin typeface="JetBrains Mono"/>
+              <a:ea typeface="JetBrains Mono"/>
+              <a:cs typeface="JetBrains Mono"/>
+              <a:sym typeface="JetBrains Mono"/>
             </a:endParaRPr>
+            <a:r>
+              <a:rPr lang="ru-RU" altLang="en-US" sz="2000">
+                <a:latin typeface="JetBrains Mono"/>
+                <a:ea typeface="JetBrains Mono"/>
+                <a:cs typeface="JetBrains Mono"/>
+                <a:sym typeface="JetBrains Mono"/>
+                <a:solidFill>
+                  <a:srgbClr val="95a5a6"/>
+                </a:solidFill>
+              </a:rPr>
+              <a:t>// нечистая: захватывает внешнее состояние</a:t>
+            </a:r>
           </a:p>
           <a:p>
-            <a:pPr indent="0" lvl="0" marL="0" marR="0" rtl="0" algn="l">
-              <a:lnSpc>
-                <a:spcPct val="90000"/>
-              </a:lnSpc>
+            <a:pPr indent="0" lvl="0" marL="0" rtl="0" algn="l">
               <a:spcBef>
                 <a:spcPts val="1000"/>
               </a:spcBef>
               <a:spcAft>
                 <a:spcPts val="0"/>
               </a:spcAft>
-              <a:buClr>
-                <a:schemeClr val="dk1"/>
-              </a:buClr>
-              <a:buSzPts val="2800"/>
-              <a:buFont typeface="Arial"/>
               <a:buNone/>
             </a:pPr>
-            <a:r>
-              <a:t/>
-            </a:r>
-            <a:endParaRPr b="0" i="1" sz="2800" u="none" cap="none" strike="noStrike">
-              <a:solidFill>
-                <a:schemeClr val="dk1"/>
-              </a:solidFill>
-              <a:latin typeface="Arial"/>
-              <a:ea typeface="Arial"/>
-              <a:cs typeface="Arial"/>
-              <a:sym typeface="Arial"/>
+            <a:endParaRPr sz="2000">
+              <a:latin typeface="JetBrains Mono"/>
+              <a:ea typeface="JetBrains Mono"/>
+              <a:cs typeface="JetBrains Mono"/>
+              <a:sym typeface="JetBrains Mono"/>
             </a:endParaRPr>
+            <a:r>
+              <a:rPr lang="ru-RU" altLang="en-US" sz="2000">
+                <a:latin typeface="JetBrains Mono"/>
+                <a:ea typeface="JetBrains Mono"/>
+                <a:cs typeface="JetBrains Mono"/>
+                <a:sym typeface="JetBrains Mono"/>
+                <a:solidFill>
+                  <a:srgbClr val="c0392b"/>
+                </a:solidFill>
+              </a:rPr>
+              <a:t>let</a:t>
+            </a:r>
+            <a:r>
+              <a:rPr lang="ru-RU" altLang="en-US" sz="2000">
+                <a:latin typeface="JetBrains Mono"/>
+                <a:ea typeface="JetBrains Mono"/>
+                <a:cs typeface="JetBrains Mono"/>
+                <a:sym typeface="JetBrains Mono"/>
+                <a:solidFill>
+                  <a:srgbClr val="1a1a1a"/>
+                </a:solidFill>
+              </a:rPr>
+              <a:t> taxRate = </a:t>
+            </a:r>
+            <a:r>
+              <a:rPr lang="ru-RU" altLang="en-US" sz="2000">
+                <a:latin typeface="JetBrains Mono"/>
+                <a:ea typeface="JetBrains Mono"/>
+                <a:cs typeface="JetBrains Mono"/>
+                <a:sym typeface="JetBrains Mono"/>
+                <a:solidFill>
+                  <a:srgbClr val="7f8c8d"/>
+                </a:solidFill>
+              </a:rPr>
+              <a:t>0.2</a:t>
+            </a:r>
+            <a:r>
+              <a:rPr lang="ru-RU" altLang="en-US" sz="2000">
+                <a:latin typeface="JetBrains Mono"/>
+                <a:ea typeface="JetBrains Mono"/>
+                <a:cs typeface="JetBrains Mono"/>
+                <a:sym typeface="JetBrains Mono"/>
+                <a:solidFill>
+                  <a:srgbClr val="1a1a1a"/>
+                </a:solidFill>
+              </a:rPr>
+              <a:t>;</a:t>
+            </a:r>
           </a:p>
           <a:p>
-            <a:pPr indent="0" lvl="0" marL="0" marR="0" rtl="0" algn="l">
-              <a:lnSpc>
-                <a:spcPct val="90000"/>
-              </a:lnSpc>
+            <a:pPr indent="0" lvl="0" marL="0" rtl="0" algn="l">
               <a:spcBef>
                 <a:spcPts val="1000"/>
               </a:spcBef>
               <a:spcAft>
                 <a:spcPts val="0"/>
               </a:spcAft>
-              <a:buClr>
-                <a:schemeClr val="dk1"/>
-              </a:buClr>
-              <a:buSzPts val="2800"/>
-              <a:buFont typeface="Arial"/>
               <a:buNone/>
             </a:pPr>
-            <a:r>
+            <a:endParaRPr sz="2000">
+              <a:latin typeface="JetBrains Mono"/>
+              <a:ea typeface="JetBrains Mono"/>
+              <a:cs typeface="JetBrains Mono"/>
+              <a:sym typeface="JetBrains Mono"/>
+            </a:endParaRPr>
+            <a:r>
+              <a:rPr lang="ru-RU" altLang="en-US" sz="2000">
+                <a:latin typeface="JetBrains Mono"/>
+                <a:ea typeface="JetBrains Mono"/>
+                <a:cs typeface="JetBrains Mono"/>
+                <a:sym typeface="JetBrains Mono"/>
+                <a:solidFill>
+                  <a:srgbClr val="c0392b"/>
+                </a:solidFill>
+              </a:rPr>
+              <a:t>const</a:t>
+            </a:r>
+            <a:r>
+              <a:rPr lang="ru-RU" altLang="en-US" sz="2000">
+                <a:latin typeface="JetBrains Mono"/>
+                <a:ea typeface="JetBrains Mono"/>
+                <a:cs typeface="JetBrains Mono"/>
+                <a:sym typeface="JetBrains Mono"/>
+                <a:solidFill>
+                  <a:srgbClr val="1a1a1a"/>
+                </a:solidFill>
+              </a:rPr>
+              <a:t> priceWithTax = (price) =&gt; price * (</a:t>
+            </a:r>
+            <a:r>
+              <a:rPr lang="ru-RU" altLang="en-US" sz="2000">
+                <a:latin typeface="JetBrains Mono"/>
+                <a:ea typeface="JetBrains Mono"/>
+                <a:cs typeface="JetBrains Mono"/>
+                <a:sym typeface="JetBrains Mono"/>
+                <a:solidFill>
+                  <a:srgbClr val="7f8c8d"/>
+                </a:solidFill>
+              </a:rPr>
+              <a:t>1</a:t>
+            </a:r>
+            <a:r>
+              <a:rPr lang="ru-RU" altLang="en-US" sz="2000">
+                <a:latin typeface="JetBrains Mono"/>
+                <a:ea typeface="JetBrains Mono"/>
+                <a:cs typeface="JetBrains Mono"/>
+                <a:sym typeface="JetBrains Mono"/>
+                <a:solidFill>
+                  <a:srgbClr val="1a1a1a"/>
+                </a:solidFill>
+              </a:rPr>
+              <a:t> + taxRate);</a:t>
+            </a:r>
+          </a:p>
+          <a:p>
+            <a:pPr indent="0" lvl="0" marL="0" rtl="0" algn="l">
+              <a:spcBef>
+                <a:spcPts val="1000"/>
+              </a:spcBef>
+              <a:spcAft>
+                <a:spcPts val="0"/>
+              </a:spcAft>
+              <a:buNone/>
+            </a:pPr>
+            <a:endParaRPr sz="2000">
+              <a:latin typeface="JetBrains Mono"/>
+              <a:ea typeface="JetBrains Mono"/>
+              <a:cs typeface="JetBrains Mono"/>
+              <a:sym typeface="JetBrains Mono"/>
+            </a:endParaRPr>
+            <a:r>
+              <a:rPr lang="ru-RU" altLang="en-US" sz="2000">
+                <a:latin typeface="JetBrains Mono"/>
+                <a:ea typeface="JetBrains Mono"/>
+                <a:cs typeface="JetBrains Mono"/>
+                <a:sym typeface="JetBrains Mono"/>
+                <a:solidFill>
+                  <a:srgbClr val="1a1a1a"/>
+                </a:solidFill>
+              </a:rPr>
               <a:t/>
             </a:r>
-            <a:endParaRPr b="0" i="1" sz="2800" u="none" cap="none" strike="noStrike">
-              <a:solidFill>
-                <a:schemeClr val="dk1"/>
-              </a:solidFill>
-              <a:latin typeface="Arial"/>
-              <a:ea typeface="Arial"/>
-              <a:cs typeface="Arial"/>
-              <a:sym typeface="Arial"/>
+          </a:p>
+          <a:p>
+            <a:pPr indent="0" lvl="0" marL="0" rtl="0" algn="l">
+              <a:spcBef>
+                <a:spcPts val="1000"/>
+              </a:spcBef>
+              <a:spcAft>
+                <a:spcPts val="0"/>
+              </a:spcAft>
+              <a:buNone/>
+            </a:pPr>
+            <a:endParaRPr sz="2000">
+              <a:latin typeface="JetBrains Mono"/>
+              <a:ea typeface="JetBrains Mono"/>
+              <a:cs typeface="JetBrains Mono"/>
+              <a:sym typeface="JetBrains Mono"/>
             </a:endParaRPr>
+            <a:r>
+              <a:rPr lang="ru-RU" altLang="en-US" sz="2000">
+                <a:latin typeface="JetBrains Mono"/>
+                <a:ea typeface="JetBrains Mono"/>
+                <a:cs typeface="JetBrains Mono"/>
+                <a:sym typeface="JetBrains Mono"/>
+                <a:solidFill>
+                  <a:srgbClr val="95a5a6"/>
+                </a:solidFill>
+              </a:rPr>
+              <a:t>// чистая</a:t>
+            </a:r>
+          </a:p>
+          <a:p>
+            <a:pPr indent="0" lvl="0" marL="0" rtl="0" algn="l">
+              <a:spcBef>
+                <a:spcPts val="1000"/>
+              </a:spcBef>
+              <a:spcAft>
+                <a:spcPts val="0"/>
+              </a:spcAft>
+              <a:buNone/>
+            </a:pPr>
+            <a:endParaRPr sz="2000">
+              <a:latin typeface="JetBrains Mono"/>
+              <a:ea typeface="JetBrains Mono"/>
+              <a:cs typeface="JetBrains Mono"/>
+              <a:sym typeface="JetBrains Mono"/>
+            </a:endParaRPr>
+            <a:r>
+              <a:rPr lang="ru-RU" altLang="en-US" sz="2000">
+                <a:latin typeface="JetBrains Mono"/>
+                <a:ea typeface="JetBrains Mono"/>
+                <a:cs typeface="JetBrains Mono"/>
+                <a:sym typeface="JetBrains Mono"/>
+                <a:solidFill>
+                  <a:srgbClr val="c0392b"/>
+                </a:solidFill>
+              </a:rPr>
+              <a:t>const</a:t>
+            </a:r>
+            <a:r>
+              <a:rPr lang="ru-RU" altLang="en-US" sz="2000">
+                <a:latin typeface="JetBrains Mono"/>
+                <a:ea typeface="JetBrains Mono"/>
+                <a:cs typeface="JetBrains Mono"/>
+                <a:sym typeface="JetBrains Mono"/>
+                <a:solidFill>
+                  <a:srgbClr val="1a1a1a"/>
+                </a:solidFill>
+              </a:rPr>
+              <a:t> applyDiscount = (rate) =&gt; (price) =&gt; price * (</a:t>
+            </a:r>
+            <a:r>
+              <a:rPr lang="ru-RU" altLang="en-US" sz="2000">
+                <a:latin typeface="JetBrains Mono"/>
+                <a:ea typeface="JetBrains Mono"/>
+                <a:cs typeface="JetBrains Mono"/>
+                <a:sym typeface="JetBrains Mono"/>
+                <a:solidFill>
+                  <a:srgbClr val="7f8c8d"/>
+                </a:solidFill>
+              </a:rPr>
+              <a:t>1</a:t>
+            </a:r>
+            <a:r>
+              <a:rPr lang="ru-RU" altLang="en-US" sz="2000">
+                <a:latin typeface="JetBrains Mono"/>
+                <a:ea typeface="JetBrains Mono"/>
+                <a:cs typeface="JetBrains Mono"/>
+                <a:sym typeface="JetBrains Mono"/>
+                <a:solidFill>
+                  <a:srgbClr val="1a1a1a"/>
+                </a:solidFill>
+              </a:rPr>
+              <a:t> - rate);</a:t>
+            </a:r>
           </a:p>
         </p:txBody>
       </p:sp>
-      <p:pic>
-        <p:nvPicPr>
-          <p:cNvPr id="181" name="Google Shape;181;p5"/>
-          <p:cNvPicPr preferRelativeResize="0"/>
-          <p:nvPr/>
-        </p:nvPicPr>
-        <p:blipFill rotWithShape="1">
-          <a:blip r:embed="rId3">
-            <a:alphaModFix/>
-          </a:blip>
-          <a:srcRect b="0" l="0" r="0" t="0"/>
-          <a:stretch/>
-        </p:blipFill>
-        <p:spPr>
-          <a:xfrm>
-            <a:off x="567954" y="810796"/>
-            <a:ext cx="4857410" cy="4857410"/>
-          </a:xfrm>
-          <a:prstGeom prst="rect">
-            <a:avLst/>
-          </a:prstGeom>
-          <a:noFill/>
-          <a:ln>
-            <a:noFill/>
-          </a:ln>
-        </p:spPr>
-      </p:pic>
     </p:spTree>
   </p:cSld>
   <p:clrMapOvr>
@@ -35250,6 +35153,320 @@
 </file>
 
 <file path=ppt/slides/slide41.xml><?xml version="1.0" encoding="utf-8"?>
+<p:sld xmlns:a="http://schemas.openxmlformats.org/drawingml/2006/main" xmlns:p="http://schemas.openxmlformats.org/presentationml/2006/main" xmlns:r="http://schemas.openxmlformats.org/officeDocument/2006/relationships">
+  <p:cSld>
+    <p:spTree>
+      <p:nvGrpSpPr>
+        <p:cNvPr id="116" name="Shape 116"/>
+        <p:cNvGrpSpPr/>
+        <p:nvPr/>
+      </p:nvGrpSpPr>
+      <p:grpSpPr>
+        <a:xfrm>
+          <a:off x="0" y="0"/>
+          <a:ext cx="0" cy="0"/>
+          <a:chOff x="0" y="0"/>
+          <a:chExt cx="0" cy="0"/>
+        </a:xfrm>
+      </p:grpSpPr>
+      <p:sp>
+        <p:nvSpPr>
+          <p:cNvPr id="117" name="Google Shape;117;g3d09141108f_0_27"/>
+          <p:cNvSpPr txBox="1"/>
+          <p:nvPr>
+            <p:ph type="title"/>
+          </p:nvPr>
+        </p:nvSpPr>
+        <p:spPr>
+          <a:xfrm>
+            <a:off x="838200" y="2766218"/>
+            <a:ext cx="10515600" cy="1325700"/>
+          </a:xfrm>
+          <a:prstGeom prst="rect">
+            <a:avLst/>
+          </a:prstGeom>
+        </p:spPr>
+        <p:txBody>
+          <a:bodyPr anchorCtr="0" anchor="ctr" bIns="45700" lIns="91425" spcFirstLastPara="1" rIns="91425" wrap="square" tIns="45700">
+            <a:noAutofit/>
+          </a:bodyPr>
+          <a:lstStyle/>
+          <a:p>
+            <a:pPr indent="0" lvl="0" marL="0" rtl="0" algn="l">
+              <a:spcBef>
+                <a:spcPts val="1000"/>
+              </a:spcBef>
+              <a:spcAft>
+                <a:spcPts val="0"/>
+              </a:spcAft>
+              <a:buNone/>
+            </a:pPr>
+            <a:r>
+              <a:rPr lang="ru-RU"/>
+              <a:t>Иммутабельность</a:t>
+            </a:r>
+          </a:p>
+        </p:txBody>
+      </p:sp>
+      <p:sp>
+        <p:nvSpPr>
+          <p:cNvPr id="118" name="Google Shape;118;g3d09141108f_0_27"/>
+          <p:cNvSpPr txBox="1"/>
+          <p:nvPr>
+            <p:ph idx="12" type="sldNum"/>
+          </p:nvPr>
+        </p:nvSpPr>
+        <p:spPr>
+          <a:xfrm>
+            <a:off x="8610600" y="6356350"/>
+            <a:ext cx="2743200" cy="365100"/>
+          </a:xfrm>
+          <a:prstGeom prst="rect">
+            <a:avLst/>
+          </a:prstGeom>
+        </p:spPr>
+        <p:txBody>
+          <a:bodyPr anchorCtr="0" anchor="t" bIns="45700" lIns="91425" spcFirstLastPara="1" rIns="91425" wrap="square" tIns="45700">
+            <a:noAutofit/>
+          </a:bodyPr>
+          <a:lstStyle/>
+          <a:p>
+            <a:pPr indent="0" lvl="0" marL="0" rtl="0" algn="r">
+              <a:spcBef>
+                <a:spcPts val="0"/>
+              </a:spcBef>
+              <a:spcAft>
+                <a:spcPts val="0"/>
+              </a:spcAft>
+              <a:buClr>
+                <a:srgbClr val="000000"/>
+              </a:buClr>
+              <a:buSzPts val="1800"/>
+              <a:buFont typeface="Arial"/>
+              <a:buNone/>
+            </a:pPr>
+            <a:fld id="{00000000-1234-1234-1234-123412341234}" type="slidenum">
+              <a:rPr lang="ru-RU"/>
+              <a:t>‹#›</a:t>
+            </a:fld>
+            <a:endParaRPr/>
+          </a:p>
+        </p:txBody>
+      </p:sp>
+    </p:spTree>
+  </p:cSld>
+  <p:clrMapOvr>
+    <a:masterClrMapping/>
+  </p:clrMapOvr>
+</p:sld>
+</file>
+
+<file path=ppt/slides/slide42.xml><?xml version="1.0" encoding="utf-8"?>
+<p:sld xmlns:a="http://schemas.openxmlformats.org/drawingml/2006/main" xmlns:p="http://schemas.openxmlformats.org/presentationml/2006/main" xmlns:r="http://schemas.openxmlformats.org/officeDocument/2006/relationships">
+  <p:cSld>
+    <p:spTree>
+      <p:nvGrpSpPr>
+        <p:cNvPr id="122" name="Shape 122"/>
+        <p:cNvGrpSpPr/>
+        <p:nvPr/>
+      </p:nvGrpSpPr>
+      <p:grpSpPr>
+        <a:xfrm>
+          <a:off x="0" y="0"/>
+          <a:ext cx="0" cy="0"/>
+          <a:chOff x="0" y="0"/>
+          <a:chExt cx="0" cy="0"/>
+        </a:xfrm>
+      </p:grpSpPr>
+      <p:sp>
+        <p:nvSpPr>
+          <p:cNvPr id="123" name="Google Shape;123;g3d09141108f_0_33"/>
+          <p:cNvSpPr txBox="1"/>
+          <p:nvPr>
+            <p:ph idx="12" type="sldNum"/>
+          </p:nvPr>
+        </p:nvSpPr>
+        <p:spPr>
+          <a:xfrm>
+            <a:off x="8610600" y="6356350"/>
+            <a:ext cx="2743200" cy="365100"/>
+          </a:xfrm>
+          <a:prstGeom prst="rect">
+            <a:avLst/>
+          </a:prstGeom>
+        </p:spPr>
+        <p:txBody>
+          <a:bodyPr anchorCtr="0" anchor="t" bIns="45700" lIns="91425" spcFirstLastPara="1" rIns="91425" wrap="square" tIns="45700">
+            <a:noAutofit/>
+          </a:bodyPr>
+          <a:lstStyle/>
+          <a:p>
+            <a:pPr indent="0" lvl="0" marL="0" rtl="0" algn="r">
+              <a:spcBef>
+                <a:spcPts val="0"/>
+              </a:spcBef>
+              <a:spcAft>
+                <a:spcPts val="0"/>
+              </a:spcAft>
+              <a:buClr>
+                <a:srgbClr val="000000"/>
+              </a:buClr>
+              <a:buSzPts val="1800"/>
+              <a:buFont typeface="Arial"/>
+              <a:buNone/>
+            </a:pPr>
+            <a:fld id="{00000000-1234-1234-1234-123412341234}" type="slidenum">
+              <a:rPr lang="ru-RU"/>
+              <a:t>‹#›</a:t>
+            </a:fld>
+            <a:endParaRPr/>
+          </a:p>
+        </p:txBody>
+      </p:sp>
+      <p:sp>
+        <p:nvSpPr>
+          <p:cNvPr id="124" name="Google Shape;124;g3d09141108f_0_33"/>
+          <p:cNvSpPr txBox="1"/>
+          <p:nvPr>
+            <p:ph idx="1" type="body"/>
+          </p:nvPr>
+        </p:nvSpPr>
+        <p:spPr>
+          <a:xfrm>
+            <a:off x="838198" y="543878"/>
+            <a:ext cx="10942500" cy="1219200"/>
+          </a:xfrm>
+          <a:prstGeom prst="rect">
+            <a:avLst/>
+          </a:prstGeom>
+        </p:spPr>
+        <p:txBody>
+          <a:bodyPr anchorCtr="0" anchor="ctr" bIns="45700" lIns="91425" spcFirstLastPara="1" rIns="91425" wrap="square" tIns="45700">
+            <a:noAutofit/>
+          </a:bodyPr>
+          <a:lstStyle/>
+          <a:p>
+            <a:pPr indent="0" lvl="0" marL="0" rtl="0" algn="l">
+              <a:spcBef>
+                <a:spcPts val="1000"/>
+              </a:spcBef>
+              <a:spcAft>
+                <a:spcPts val="0"/>
+              </a:spcAft>
+              <a:buNone/>
+            </a:pPr>
+            <a:r>
+              <a:rPr lang="ru-RU"/>
+              <a:t>Иммутабельность</a:t>
+            </a:r>
+          </a:p>
+        </p:txBody>
+      </p:sp>
+      <p:sp>
+        <p:nvSpPr>
+          <p:cNvPr id="125" name="Google Shape;125;g3d09141108f_0_33"/>
+          <p:cNvSpPr txBox="1"/>
+          <p:nvPr>
+            <p:ph idx="2" type="body"/>
+          </p:nvPr>
+        </p:nvSpPr>
+        <p:spPr>
+          <a:xfrm>
+            <a:off x="838200" y="2170113"/>
+            <a:ext cx="10942500" cy="3254400"/>
+          </a:xfrm>
+          <a:prstGeom prst="rect">
+            <a:avLst/>
+          </a:prstGeom>
+        </p:spPr>
+        <p:txBody>
+          <a:bodyPr anchorCtr="0" anchor="t" bIns="45700" lIns="91425" spcFirstLastPara="1" rIns="91425" wrap="square" tIns="45700">
+            <a:noAutofit/>
+          </a:bodyPr>
+          <a:lstStyle/>
+          <a:p>
+            <a:pPr indent="-406400" lvl="0" marL="457200" rtl="0" algn="l">
+              <a:spcBef>
+                <a:spcPts val="1000"/>
+              </a:spcBef>
+              <a:spcAft>
+                <a:spcPts val="0"/>
+              </a:spcAft>
+              <a:buSzPts val="2800"/>
+            </a:pPr>
+            <a:endParaRPr/>
+            <a:r>
+              <a:rPr lang="ru-RU"/>
+              <a:t>const / val — запрет перезаписи переменной. Иммутабельность — </a:t>
+            </a:r>
+            <a:r>
+              <a:rPr lang="ru-RU" b="1"/>
+              <a:t>запрет мутации самого значения.</a:t>
+            </a:r>
+          </a:p>
+          <a:p>
+            <a:pPr indent="-406400" lvl="0" marL="457200" rtl="0" algn="l">
+              <a:spcBef>
+                <a:spcPts val="1000"/>
+              </a:spcBef>
+              <a:spcAft>
+                <a:spcPts val="0"/>
+              </a:spcAft>
+              <a:buSzPts val="2800"/>
+            </a:pPr>
+            <a:endParaRPr/>
+            <a:r>
+              <a:rPr lang="ru-RU"/>
+              <a:t>Гарантия: </a:t>
+            </a:r>
+            <a:r>
+              <a:rPr lang="ru-RU" b="1"/>
+              <a:t>компилятором (OCaml let, Rust let) / соглашением (Scala val) / опционально (Python frozen=True, JS Object.freeze).</a:t>
+            </a:r>
+          </a:p>
+          <a:p>
+            <a:pPr indent="-406400" lvl="0" marL="457200" rtl="0" algn="l">
+              <a:spcBef>
+                <a:spcPts val="1000"/>
+              </a:spcBef>
+              <a:spcAft>
+                <a:spcPts val="0"/>
+              </a:spcAft>
+              <a:buSzPts val="2800"/>
+            </a:pPr>
+            <a:endParaRPr/>
+            <a:r>
+              <a:rPr lang="ru-RU"/>
+              <a:t>Persistent data structures: </a:t>
+            </a:r>
+            <a:r>
+              <a:rPr lang="ru-RU" b="1"/>
+              <a:t>structural sharing</a:t>
+            </a:r>
+            <a:r>
+              <a:rPr lang="ru-RU"/>
+              <a:t>. Обновление поля — </a:t>
+            </a:r>
+            <a:r>
+              <a:rPr lang="ru-RU" b="1"/>
+              <a:t>O(log n), не O(n)</a:t>
+            </a:r>
+            <a:r>
+              <a:rPr lang="ru-RU"/>
+              <a:t>.</a:t>
+            </a:r>
+          </a:p>
+        </p:txBody>
+      </p:sp>
+    </p:spTree>
+  </p:cSld>
+  <p:clrMapOvr>
+    <a:masterClrMapping/>
+  </p:clrMapOvr>
+</p:sld>
+</file>
+
+<file path=ppt/slides/slide43.xml><?xml version="1.0" encoding="utf-8"?>
 <p:sld xmlns:a="http://schemas.openxmlformats.org/drawingml/2006/main" xmlns:p="http://schemas.openxmlformats.org/presentationml/2006/main" xmlns:r="http://schemas.openxmlformats.org/officeDocument/2006/relationships">
   <p:cSld>
     <p:spTree>
@@ -35340,7 +35557,7 @@
             </a:pPr>
             <a:r>
               <a:rPr lang="ru-RU"/>
-              <a:t>Ссылочная прозрачность: задача</a:t>
+              <a:t>Иммутабельность</a:t>
             </a:r>
           </a:p>
         </p:txBody>
@@ -35379,7 +35596,3745 @@
             </a:pPr>
             <a:r>
               <a:rPr lang="ru-RU"/>
-              <a:t>Функция скидки — чистая и нечистая версии.</a:t>
+              <a:t>Обновить одно поле записи без изменения оригинала.</a:t>
+            </a:r>
+          </a:p>
+        </p:txBody>
+      </p:sp>
+    </p:spTree>
+  </p:cSld>
+  <p:clrMapOvr>
+    <a:masterClrMapping/>
+  </p:clrMapOvr>
+</p:sld>
+</file>
+
+<file path=ppt/slides/slide44.xml><?xml version="1.0" encoding="utf-8"?>
+<p:sld xmlns:a="http://schemas.openxmlformats.org/drawingml/2006/main" xmlns:p="http://schemas.openxmlformats.org/presentationml/2006/main" xmlns:r="http://schemas.openxmlformats.org/officeDocument/2006/relationships">
+  <p:cSld>
+    <p:spTree>
+      <p:nvGrpSpPr>
+        <p:cNvPr id="150" name="Shape 150"/>
+        <p:cNvGrpSpPr/>
+        <p:nvPr/>
+      </p:nvGrpSpPr>
+      <p:grpSpPr>
+        <a:xfrm>
+          <a:off x="0" y="0"/>
+          <a:ext cx="0" cy="0"/>
+          <a:chOff x="0" y="0"/>
+          <a:chExt cx="0" cy="0"/>
+        </a:xfrm>
+      </p:grpSpPr>
+      <p:sp>
+        <p:nvSpPr>
+          <p:cNvPr id="151" name="Google Shape;151;g3d09141108f_0_54"/>
+          <p:cNvSpPr txBox="1"/>
+          <p:nvPr>
+            <p:ph idx="12" type="sldNum"/>
+          </p:nvPr>
+        </p:nvSpPr>
+        <p:spPr>
+          <a:xfrm>
+            <a:off x="8610600" y="6356350"/>
+            <a:ext cx="2743200" cy="365100"/>
+          </a:xfrm>
+          <a:prstGeom prst="rect">
+            <a:avLst/>
+          </a:prstGeom>
+        </p:spPr>
+        <p:txBody>
+          <a:bodyPr anchorCtr="0" anchor="t" bIns="45700" lIns="91425" spcFirstLastPara="1" rIns="91425" wrap="square" tIns="45700">
+            <a:noAutofit/>
+          </a:bodyPr>
+          <a:lstStyle/>
+          <a:p>
+            <a:pPr indent="0" lvl="0" marL="0" rtl="0" algn="r">
+              <a:spcBef>
+                <a:spcPts val="0"/>
+              </a:spcBef>
+              <a:spcAft>
+                <a:spcPts val="0"/>
+              </a:spcAft>
+              <a:buNone/>
+            </a:pPr>
+            <a:fld id="{00000000-1234-1234-1234-123412341234}" type="slidenum">
+              <a:rPr lang="ru-RU"/>
+              <a:t>‹#›</a:t>
+            </a:fld>
+            <a:endParaRPr/>
+          </a:p>
+        </p:txBody>
+      </p:sp>
+      <p:sp>
+        <p:nvSpPr>
+          <p:cNvPr id="152" name="Google Shape;152;g3d09141108f_0_54"/>
+          <p:cNvSpPr txBox="1"/>
+          <p:nvPr>
+            <p:ph idx="1" type="body"/>
+          </p:nvPr>
+        </p:nvSpPr>
+        <p:spPr>
+          <a:xfrm>
+            <a:off x="838198" y="543878"/>
+            <a:ext cx="10942500" cy="1219200"/>
+          </a:xfrm>
+          <a:prstGeom prst="rect">
+            <a:avLst/>
+          </a:prstGeom>
+        </p:spPr>
+        <p:txBody>
+          <a:bodyPr anchorCtr="0" anchor="ctr" bIns="45700" lIns="91425" spcFirstLastPara="1" rIns="91425" wrap="square" tIns="45700">
+            <a:noAutofit/>
+          </a:bodyPr>
+          <a:lstStyle/>
+          <a:p>
+            <a:pPr indent="0" lvl="0" marL="0" rtl="0" algn="l">
+              <a:spcBef>
+                <a:spcPts val="1000"/>
+              </a:spcBef>
+              <a:spcAft>
+                <a:spcPts val="0"/>
+              </a:spcAft>
+              <a:buNone/>
+            </a:pPr>
+            <a:r>
+              <a:rPr lang="ru-RU"/>
+              <a:t>Иммутабельность: OCaml</a:t>
+            </a:r>
+          </a:p>
+        </p:txBody>
+      </p:sp>
+      <p:sp>
+        <p:nvSpPr>
+          <p:cNvPr id="153" name="Google Shape;153;g3d09141108f_0_54"/>
+          <p:cNvSpPr txBox="1"/>
+          <p:nvPr>
+            <p:ph idx="2" type="body"/>
+          </p:nvPr>
+        </p:nvSpPr>
+        <p:spPr>
+          <a:xfrm>
+            <a:off x="1138200" y="1763063"/>
+            <a:ext cx="10642500" cy="3254400"/>
+          </a:xfrm>
+          <a:prstGeom prst="rect">
+            <a:avLst/>
+          </a:prstGeom>
+        </p:spPr>
+        <p:txBody>
+          <a:bodyPr anchorCtr="0" anchor="t" bIns="45700" lIns="91425" spcFirstLastPara="1" rIns="91425" wrap="square" tIns="45700">
+            <a:noAutofit/>
+          </a:bodyPr>
+          <a:lstStyle/>
+          <a:p>
+            <a:pPr indent="0" lvl="0" marL="0" rtl="0" algn="l">
+              <a:spcBef>
+                <a:spcPts val="1000"/>
+              </a:spcBef>
+              <a:spcAft>
+                <a:spcPts val="0"/>
+              </a:spcAft>
+              <a:buNone/>
+            </a:pPr>
+            <a:endParaRPr>
+              <a:latin typeface="JetBrains Mono"/>
+              <a:ea typeface="JetBrains Mono"/>
+              <a:cs typeface="JetBrains Mono"/>
+              <a:sym typeface="JetBrains Mono"/>
+            </a:endParaRPr>
+            <a:r>
+              <a:rPr lang="ru-RU" altLang="en-US" sz="2300">
+                <a:latin typeface="JetBrains Mono"/>
+                <a:ea typeface="JetBrains Mono"/>
+                <a:cs typeface="JetBrains Mono"/>
+                <a:sym typeface="JetBrains Mono"/>
+                <a:solidFill>
+                  <a:srgbClr val="95a5a6"/>
+                </a:solidFill>
+              </a:rPr>
+              <a:t>(* record иммутабелен по умолчанию *)</a:t>
+            </a:r>
+          </a:p>
+          <a:p>
+            <a:pPr indent="0" lvl="0" marL="0" rtl="0" algn="l">
+              <a:spcBef>
+                <a:spcPts val="1000"/>
+              </a:spcBef>
+              <a:spcAft>
+                <a:spcPts val="0"/>
+              </a:spcAft>
+              <a:buNone/>
+            </a:pPr>
+            <a:endParaRPr>
+              <a:latin typeface="JetBrains Mono"/>
+              <a:ea typeface="JetBrains Mono"/>
+              <a:cs typeface="JetBrains Mono"/>
+              <a:sym typeface="JetBrains Mono"/>
+            </a:endParaRPr>
+            <a:r>
+              <a:rPr lang="ru-RU" altLang="en-US" sz="2300">
+                <a:latin typeface="JetBrains Mono"/>
+                <a:ea typeface="JetBrains Mono"/>
+                <a:cs typeface="JetBrains Mono"/>
+                <a:sym typeface="JetBrains Mono"/>
+                <a:solidFill>
+                  <a:srgbClr val="c0392b"/>
+                </a:solidFill>
+              </a:rPr>
+              <a:t>type</a:t>
+            </a:r>
+            <a:r>
+              <a:rPr lang="ru-RU" altLang="en-US" sz="2300">
+                <a:latin typeface="JetBrains Mono"/>
+                <a:ea typeface="JetBrains Mono"/>
+                <a:cs typeface="JetBrains Mono"/>
+                <a:sym typeface="JetBrains Mono"/>
+                <a:solidFill>
+                  <a:srgbClr val="1a1a1a"/>
+                </a:solidFill>
+              </a:rPr>
+              <a:t> user = {</a:t>
+            </a:r>
+          </a:p>
+          <a:p>
+            <a:pPr indent="0" lvl="0" marL="0" rtl="0" algn="l">
+              <a:spcBef>
+                <a:spcPts val="1000"/>
+              </a:spcBef>
+              <a:spcAft>
+                <a:spcPts val="0"/>
+              </a:spcAft>
+              <a:buNone/>
+            </a:pPr>
+            <a:endParaRPr>
+              <a:latin typeface="JetBrains Mono"/>
+              <a:ea typeface="JetBrains Mono"/>
+              <a:cs typeface="JetBrains Mono"/>
+              <a:sym typeface="JetBrains Mono"/>
+            </a:endParaRPr>
+            <a:r>
+              <a:rPr lang="ru-RU" altLang="en-US" sz="2300">
+                <a:latin typeface="JetBrains Mono"/>
+                <a:ea typeface="JetBrains Mono"/>
+                <a:cs typeface="JetBrains Mono"/>
+                <a:sym typeface="JetBrains Mono"/>
+                <a:solidFill>
+                  <a:srgbClr val="1a1a1a"/>
+                </a:solidFill>
+              </a:rPr>
+              <a:t>  name: </a:t>
+            </a:r>
+            <a:r>
+              <a:rPr lang="ru-RU" altLang="en-US" sz="2300">
+                <a:latin typeface="JetBrains Mono"/>
+                <a:ea typeface="JetBrains Mono"/>
+                <a:cs typeface="JetBrains Mono"/>
+                <a:sym typeface="JetBrains Mono"/>
+                <a:solidFill>
+                  <a:srgbClr val="2c6fa6"/>
+                </a:solidFill>
+              </a:rPr>
+              <a:t>string</a:t>
+            </a:r>
+            <a:r>
+              <a:rPr lang="ru-RU" altLang="en-US" sz="2300">
+                <a:latin typeface="JetBrains Mono"/>
+                <a:ea typeface="JetBrains Mono"/>
+                <a:cs typeface="JetBrains Mono"/>
+                <a:sym typeface="JetBrains Mono"/>
+                <a:solidFill>
+                  <a:srgbClr val="1a1a1a"/>
+                </a:solidFill>
+              </a:rPr>
+              <a:t>;</a:t>
+            </a:r>
+          </a:p>
+          <a:p>
+            <a:pPr indent="0" lvl="0" marL="0" rtl="0" algn="l">
+              <a:spcBef>
+                <a:spcPts val="1000"/>
+              </a:spcBef>
+              <a:spcAft>
+                <a:spcPts val="0"/>
+              </a:spcAft>
+              <a:buNone/>
+            </a:pPr>
+            <a:endParaRPr>
+              <a:latin typeface="JetBrains Mono"/>
+              <a:ea typeface="JetBrains Mono"/>
+              <a:cs typeface="JetBrains Mono"/>
+              <a:sym typeface="JetBrains Mono"/>
+            </a:endParaRPr>
+            <a:r>
+              <a:rPr lang="ru-RU" altLang="en-US" sz="2300">
+                <a:latin typeface="JetBrains Mono"/>
+                <a:ea typeface="JetBrains Mono"/>
+                <a:cs typeface="JetBrains Mono"/>
+                <a:sym typeface="JetBrains Mono"/>
+                <a:solidFill>
+                  <a:srgbClr val="1a1a1a"/>
+                </a:solidFill>
+              </a:rPr>
+              <a:t>  age:  </a:t>
+            </a:r>
+            <a:r>
+              <a:rPr lang="ru-RU" altLang="en-US" sz="2300">
+                <a:latin typeface="JetBrains Mono"/>
+                <a:ea typeface="JetBrains Mono"/>
+                <a:cs typeface="JetBrains Mono"/>
+                <a:sym typeface="JetBrains Mono"/>
+                <a:solidFill>
+                  <a:srgbClr val="2c6fa6"/>
+                </a:solidFill>
+              </a:rPr>
+              <a:t>int</a:t>
+            </a:r>
+            <a:r>
+              <a:rPr lang="ru-RU" altLang="en-US" sz="2300">
+                <a:latin typeface="JetBrains Mono"/>
+                <a:ea typeface="JetBrains Mono"/>
+                <a:cs typeface="JetBrains Mono"/>
+                <a:sym typeface="JetBrains Mono"/>
+                <a:solidFill>
+                  <a:srgbClr val="1a1a1a"/>
+                </a:solidFill>
+              </a:rPr>
+              <a:t>;</a:t>
+            </a:r>
+          </a:p>
+          <a:p>
+            <a:pPr indent="0" lvl="0" marL="0" rtl="0" algn="l">
+              <a:spcBef>
+                <a:spcPts val="1000"/>
+              </a:spcBef>
+              <a:spcAft>
+                <a:spcPts val="0"/>
+              </a:spcAft>
+              <a:buNone/>
+            </a:pPr>
+            <a:endParaRPr>
+              <a:latin typeface="JetBrains Mono"/>
+              <a:ea typeface="JetBrains Mono"/>
+              <a:cs typeface="JetBrains Mono"/>
+              <a:sym typeface="JetBrains Mono"/>
+            </a:endParaRPr>
+            <a:r>
+              <a:rPr lang="ru-RU" altLang="en-US" sz="2300">
+                <a:latin typeface="JetBrains Mono"/>
+                <a:ea typeface="JetBrains Mono"/>
+                <a:cs typeface="JetBrains Mono"/>
+                <a:sym typeface="JetBrains Mono"/>
+                <a:solidFill>
+                  <a:srgbClr val="1a1a1a"/>
+                </a:solidFill>
+              </a:rPr>
+              <a:t>}</a:t>
+            </a:r>
+          </a:p>
+          <a:p>
+            <a:pPr indent="0" lvl="0" marL="0" rtl="0" algn="l">
+              <a:spcBef>
+                <a:spcPts val="1000"/>
+              </a:spcBef>
+              <a:spcAft>
+                <a:spcPts val="0"/>
+              </a:spcAft>
+              <a:buNone/>
+            </a:pPr>
+            <a:endParaRPr>
+              <a:latin typeface="JetBrains Mono"/>
+              <a:ea typeface="JetBrains Mono"/>
+              <a:cs typeface="JetBrains Mono"/>
+              <a:sym typeface="JetBrains Mono"/>
+            </a:endParaRPr>
+            <a:r>
+              <a:rPr lang="ru-RU" altLang="en-US" sz="2300">
+                <a:latin typeface="JetBrains Mono"/>
+                <a:ea typeface="JetBrains Mono"/>
+                <a:cs typeface="JetBrains Mono"/>
+                <a:sym typeface="JetBrains Mono"/>
+                <a:solidFill>
+                  <a:srgbClr val="1a1a1a"/>
+                </a:solidFill>
+              </a:rPr>
+              <a:t/>
+            </a:r>
+          </a:p>
+          <a:p>
+            <a:pPr indent="0" lvl="0" marL="0" rtl="0" algn="l">
+              <a:spcBef>
+                <a:spcPts val="1000"/>
+              </a:spcBef>
+              <a:spcAft>
+                <a:spcPts val="0"/>
+              </a:spcAft>
+              <a:buNone/>
+            </a:pPr>
+            <a:endParaRPr>
+              <a:latin typeface="JetBrains Mono"/>
+              <a:ea typeface="JetBrains Mono"/>
+              <a:cs typeface="JetBrains Mono"/>
+              <a:sym typeface="JetBrains Mono"/>
+            </a:endParaRPr>
+            <a:r>
+              <a:rPr lang="ru-RU" altLang="en-US" sz="2300">
+                <a:latin typeface="JetBrains Mono"/>
+                <a:ea typeface="JetBrains Mono"/>
+                <a:cs typeface="JetBrains Mono"/>
+                <a:sym typeface="JetBrains Mono"/>
+                <a:solidFill>
+                  <a:srgbClr val="c0392b"/>
+                </a:solidFill>
+              </a:rPr>
+              <a:t>let</a:t>
+            </a:r>
+            <a:r>
+              <a:rPr lang="ru-RU" altLang="en-US" sz="2300">
+                <a:latin typeface="JetBrains Mono"/>
+                <a:ea typeface="JetBrains Mono"/>
+                <a:cs typeface="JetBrains Mono"/>
+                <a:sym typeface="JetBrains Mono"/>
+                <a:solidFill>
+                  <a:srgbClr val="1a1a1a"/>
+                </a:solidFill>
+              </a:rPr>
+              <a:t> user = { name = </a:t>
+            </a:r>
+            <a:r>
+              <a:rPr lang="ru-RU" altLang="en-US" sz="2300">
+                <a:latin typeface="JetBrains Mono"/>
+                <a:ea typeface="JetBrains Mono"/>
+                <a:cs typeface="JetBrains Mono"/>
+                <a:sym typeface="JetBrains Mono"/>
+                <a:solidFill>
+                  <a:srgbClr val="7f8c8d"/>
+                </a:solidFill>
+              </a:rPr>
+              <a:t>"Alice"</a:t>
+            </a:r>
+            <a:r>
+              <a:rPr lang="ru-RU" altLang="en-US" sz="2300">
+                <a:latin typeface="JetBrains Mono"/>
+                <a:ea typeface="JetBrains Mono"/>
+                <a:cs typeface="JetBrains Mono"/>
+                <a:sym typeface="JetBrains Mono"/>
+                <a:solidFill>
+                  <a:srgbClr val="1a1a1a"/>
+                </a:solidFill>
+              </a:rPr>
+              <a:t>; age = </a:t>
+            </a:r>
+            <a:r>
+              <a:rPr lang="ru-RU" altLang="en-US" sz="2300">
+                <a:latin typeface="JetBrains Mono"/>
+                <a:ea typeface="JetBrains Mono"/>
+                <a:cs typeface="JetBrains Mono"/>
+                <a:sym typeface="JetBrains Mono"/>
+                <a:solidFill>
+                  <a:srgbClr val="7f8c8d"/>
+                </a:solidFill>
+              </a:rPr>
+              <a:t>30</a:t>
+            </a:r>
+            <a:r>
+              <a:rPr lang="ru-RU" altLang="en-US" sz="2300">
+                <a:latin typeface="JetBrains Mono"/>
+                <a:ea typeface="JetBrains Mono"/>
+                <a:cs typeface="JetBrains Mono"/>
+                <a:sym typeface="JetBrains Mono"/>
+                <a:solidFill>
+                  <a:srgbClr val="1a1a1a"/>
+                </a:solidFill>
+              </a:rPr>
+              <a:t> }</a:t>
+            </a:r>
+          </a:p>
+          <a:p>
+            <a:pPr indent="0" lvl="0" marL="0" rtl="0" algn="l">
+              <a:spcBef>
+                <a:spcPts val="1000"/>
+              </a:spcBef>
+              <a:spcAft>
+                <a:spcPts val="0"/>
+              </a:spcAft>
+              <a:buNone/>
+            </a:pPr>
+            <a:endParaRPr>
+              <a:latin typeface="JetBrains Mono"/>
+              <a:ea typeface="JetBrains Mono"/>
+              <a:cs typeface="JetBrains Mono"/>
+              <a:sym typeface="JetBrains Mono"/>
+            </a:endParaRPr>
+            <a:r>
+              <a:rPr lang="ru-RU" altLang="en-US" sz="2300">
+                <a:latin typeface="JetBrains Mono"/>
+                <a:ea typeface="JetBrains Mono"/>
+                <a:cs typeface="JetBrains Mono"/>
+                <a:sym typeface="JetBrains Mono"/>
+                <a:solidFill>
+                  <a:srgbClr val="c0392b"/>
+                </a:solidFill>
+              </a:rPr>
+              <a:t>let</a:t>
+            </a:r>
+            <a:r>
+              <a:rPr lang="ru-RU" altLang="en-US" sz="2300">
+                <a:latin typeface="JetBrains Mono"/>
+                <a:ea typeface="JetBrains Mono"/>
+                <a:cs typeface="JetBrains Mono"/>
+                <a:sym typeface="JetBrains Mono"/>
+                <a:solidFill>
+                  <a:srgbClr val="1a1a1a"/>
+                </a:solidFill>
+              </a:rPr>
+              <a:t> older = { user </a:t>
+            </a:r>
+            <a:r>
+              <a:rPr lang="ru-RU" altLang="en-US" sz="2300">
+                <a:latin typeface="JetBrains Mono"/>
+                <a:ea typeface="JetBrains Mono"/>
+                <a:cs typeface="JetBrains Mono"/>
+                <a:sym typeface="JetBrains Mono"/>
+                <a:solidFill>
+                  <a:srgbClr val="c0392b"/>
+                </a:solidFill>
+              </a:rPr>
+              <a:t>with</a:t>
+            </a:r>
+            <a:r>
+              <a:rPr lang="ru-RU" altLang="en-US" sz="2300">
+                <a:latin typeface="JetBrains Mono"/>
+                <a:ea typeface="JetBrains Mono"/>
+                <a:cs typeface="JetBrains Mono"/>
+                <a:sym typeface="JetBrains Mono"/>
+                <a:solidFill>
+                  <a:srgbClr val="1a1a1a"/>
+                </a:solidFill>
+              </a:rPr>
+              <a:t> age = </a:t>
+            </a:r>
+            <a:r>
+              <a:rPr lang="ru-RU" altLang="en-US" sz="2300">
+                <a:latin typeface="JetBrains Mono"/>
+                <a:ea typeface="JetBrains Mono"/>
+                <a:cs typeface="JetBrains Mono"/>
+                <a:sym typeface="JetBrains Mono"/>
+                <a:solidFill>
+                  <a:srgbClr val="7f8c8d"/>
+                </a:solidFill>
+              </a:rPr>
+              <a:t>31</a:t>
+            </a:r>
+            <a:r>
+              <a:rPr lang="ru-RU" altLang="en-US" sz="2300">
+                <a:latin typeface="JetBrains Mono"/>
+                <a:ea typeface="JetBrains Mono"/>
+                <a:cs typeface="JetBrains Mono"/>
+                <a:sym typeface="JetBrains Mono"/>
+                <a:solidFill>
+                  <a:srgbClr val="1a1a1a"/>
+                </a:solidFill>
+              </a:rPr>
+              <a:t> }</a:t>
+            </a:r>
+          </a:p>
+          <a:p>
+            <a:pPr indent="0" lvl="0" marL="0" rtl="0" algn="l">
+              <a:spcBef>
+                <a:spcPts val="1000"/>
+              </a:spcBef>
+              <a:spcAft>
+                <a:spcPts val="0"/>
+              </a:spcAft>
+              <a:buNone/>
+            </a:pPr>
+            <a:endParaRPr>
+              <a:latin typeface="JetBrains Mono"/>
+              <a:ea typeface="JetBrains Mono"/>
+              <a:cs typeface="JetBrains Mono"/>
+              <a:sym typeface="JetBrains Mono"/>
+            </a:endParaRPr>
+            <a:r>
+              <a:rPr lang="ru-RU" altLang="en-US" sz="2300">
+                <a:latin typeface="JetBrains Mono"/>
+                <a:ea typeface="JetBrains Mono"/>
+                <a:cs typeface="JetBrains Mono"/>
+                <a:sym typeface="JetBrains Mono"/>
+                <a:solidFill>
+                  <a:srgbClr val="95a5a6"/>
+                </a:solidFill>
+              </a:rPr>
+              <a:t>(* user не изменился *)</a:t>
+            </a:r>
+          </a:p>
+        </p:txBody>
+      </p:sp>
+    </p:spTree>
+  </p:cSld>
+  <p:clrMapOvr>
+    <a:masterClrMapping/>
+  </p:clrMapOvr>
+</p:sld>
+</file>
+
+<file path=ppt/slides/slide45.xml><?xml version="1.0" encoding="utf-8"?>
+<p:sld xmlns:a="http://schemas.openxmlformats.org/drawingml/2006/main" xmlns:p="http://schemas.openxmlformats.org/presentationml/2006/main" xmlns:r="http://schemas.openxmlformats.org/officeDocument/2006/relationships">
+  <p:cSld>
+    <p:spTree>
+      <p:nvGrpSpPr>
+        <p:cNvPr id="150" name="Shape 150"/>
+        <p:cNvGrpSpPr/>
+        <p:nvPr/>
+      </p:nvGrpSpPr>
+      <p:grpSpPr>
+        <a:xfrm>
+          <a:off x="0" y="0"/>
+          <a:ext cx="0" cy="0"/>
+          <a:chOff x="0" y="0"/>
+          <a:chExt cx="0" cy="0"/>
+        </a:xfrm>
+      </p:grpSpPr>
+      <p:sp>
+        <p:nvSpPr>
+          <p:cNvPr id="151" name="Google Shape;151;g3d09141108f_0_54"/>
+          <p:cNvSpPr txBox="1"/>
+          <p:nvPr>
+            <p:ph idx="12" type="sldNum"/>
+          </p:nvPr>
+        </p:nvSpPr>
+        <p:spPr>
+          <a:xfrm>
+            <a:off x="8610600" y="6356350"/>
+            <a:ext cx="2743200" cy="365100"/>
+          </a:xfrm>
+          <a:prstGeom prst="rect">
+            <a:avLst/>
+          </a:prstGeom>
+        </p:spPr>
+        <p:txBody>
+          <a:bodyPr anchorCtr="0" anchor="t" bIns="45700" lIns="91425" spcFirstLastPara="1" rIns="91425" wrap="square" tIns="45700">
+            <a:noAutofit/>
+          </a:bodyPr>
+          <a:lstStyle/>
+          <a:p>
+            <a:pPr indent="0" lvl="0" marL="0" rtl="0" algn="r">
+              <a:spcBef>
+                <a:spcPts val="0"/>
+              </a:spcBef>
+              <a:spcAft>
+                <a:spcPts val="0"/>
+              </a:spcAft>
+              <a:buNone/>
+            </a:pPr>
+            <a:fld id="{00000000-1234-1234-1234-123412341234}" type="slidenum">
+              <a:rPr lang="ru-RU"/>
+              <a:t>‹#›</a:t>
+            </a:fld>
+            <a:endParaRPr/>
+          </a:p>
+        </p:txBody>
+      </p:sp>
+      <p:sp>
+        <p:nvSpPr>
+          <p:cNvPr id="152" name="Google Shape;152;g3d09141108f_0_54"/>
+          <p:cNvSpPr txBox="1"/>
+          <p:nvPr>
+            <p:ph idx="1" type="body"/>
+          </p:nvPr>
+        </p:nvSpPr>
+        <p:spPr>
+          <a:xfrm>
+            <a:off x="838198" y="543878"/>
+            <a:ext cx="10942500" cy="1219200"/>
+          </a:xfrm>
+          <a:prstGeom prst="rect">
+            <a:avLst/>
+          </a:prstGeom>
+        </p:spPr>
+        <p:txBody>
+          <a:bodyPr anchorCtr="0" anchor="ctr" bIns="45700" lIns="91425" spcFirstLastPara="1" rIns="91425" wrap="square" tIns="45700">
+            <a:noAutofit/>
+          </a:bodyPr>
+          <a:lstStyle/>
+          <a:p>
+            <a:pPr indent="0" lvl="0" marL="0" rtl="0" algn="l">
+              <a:spcBef>
+                <a:spcPts val="1000"/>
+              </a:spcBef>
+              <a:spcAft>
+                <a:spcPts val="0"/>
+              </a:spcAft>
+              <a:buNone/>
+            </a:pPr>
+            <a:r>
+              <a:rPr lang="ru-RU"/>
+              <a:t>Иммутабельность: Scala</a:t>
+            </a:r>
+          </a:p>
+        </p:txBody>
+      </p:sp>
+      <p:sp>
+        <p:nvSpPr>
+          <p:cNvPr id="153" name="Google Shape;153;g3d09141108f_0_54"/>
+          <p:cNvSpPr txBox="1"/>
+          <p:nvPr>
+            <p:ph idx="2" type="body"/>
+          </p:nvPr>
+        </p:nvSpPr>
+        <p:spPr>
+          <a:xfrm>
+            <a:off x="1138200" y="1763063"/>
+            <a:ext cx="10642500" cy="3254400"/>
+          </a:xfrm>
+          <a:prstGeom prst="rect">
+            <a:avLst/>
+          </a:prstGeom>
+        </p:spPr>
+        <p:txBody>
+          <a:bodyPr anchorCtr="0" anchor="t" bIns="45700" lIns="91425" spcFirstLastPara="1" rIns="91425" wrap="square" tIns="45700">
+            <a:noAutofit/>
+          </a:bodyPr>
+          <a:lstStyle/>
+          <a:p>
+            <a:pPr indent="0" lvl="0" marL="0" rtl="0" algn="l">
+              <a:spcBef>
+                <a:spcPts val="1000"/>
+              </a:spcBef>
+              <a:spcAft>
+                <a:spcPts val="0"/>
+              </a:spcAft>
+              <a:buNone/>
+            </a:pPr>
+            <a:endParaRPr>
+              <a:latin typeface="JetBrains Mono"/>
+              <a:ea typeface="JetBrains Mono"/>
+              <a:cs typeface="JetBrains Mono"/>
+              <a:sym typeface="JetBrains Mono"/>
+            </a:endParaRPr>
+            <a:r>
+              <a:rPr lang="ru-RU" altLang="en-US" sz="2300">
+                <a:latin typeface="JetBrains Mono"/>
+                <a:ea typeface="JetBrains Mono"/>
+                <a:cs typeface="JetBrains Mono"/>
+                <a:sym typeface="JetBrains Mono"/>
+                <a:solidFill>
+                  <a:srgbClr val="c0392b"/>
+                </a:solidFill>
+              </a:rPr>
+              <a:t>case class</a:t>
+            </a:r>
+            <a:r>
+              <a:rPr lang="ru-RU" altLang="en-US" sz="2300">
+                <a:latin typeface="JetBrains Mono"/>
+                <a:ea typeface="JetBrains Mono"/>
+                <a:cs typeface="JetBrains Mono"/>
+                <a:sym typeface="JetBrains Mono"/>
+                <a:solidFill>
+                  <a:srgbClr val="1a1a1a"/>
+                </a:solidFill>
+              </a:rPr>
+              <a:t> </a:t>
+            </a:r>
+            <a:r>
+              <a:rPr lang="ru-RU" altLang="en-US" sz="2300">
+                <a:latin typeface="JetBrains Mono"/>
+                <a:ea typeface="JetBrains Mono"/>
+                <a:cs typeface="JetBrains Mono"/>
+                <a:sym typeface="JetBrains Mono"/>
+                <a:solidFill>
+                  <a:srgbClr val="2c6fa6"/>
+                </a:solidFill>
+              </a:rPr>
+              <a:t>User</a:t>
+            </a:r>
+            <a:r>
+              <a:rPr lang="ru-RU" altLang="en-US" sz="2300">
+                <a:latin typeface="JetBrains Mono"/>
+                <a:ea typeface="JetBrains Mono"/>
+                <a:cs typeface="JetBrains Mono"/>
+                <a:sym typeface="JetBrains Mono"/>
+                <a:solidFill>
+                  <a:srgbClr val="1a1a1a"/>
+                </a:solidFill>
+              </a:rPr>
+              <a:t>(name: </a:t>
+            </a:r>
+            <a:r>
+              <a:rPr lang="ru-RU" altLang="en-US" sz="2300">
+                <a:latin typeface="JetBrains Mono"/>
+                <a:ea typeface="JetBrains Mono"/>
+                <a:cs typeface="JetBrains Mono"/>
+                <a:sym typeface="JetBrains Mono"/>
+                <a:solidFill>
+                  <a:srgbClr val="2c6fa6"/>
+                </a:solidFill>
+              </a:rPr>
+              <a:t>String</a:t>
+            </a:r>
+            <a:r>
+              <a:rPr lang="ru-RU" altLang="en-US" sz="2300">
+                <a:latin typeface="JetBrains Mono"/>
+                <a:ea typeface="JetBrains Mono"/>
+                <a:cs typeface="JetBrains Mono"/>
+                <a:sym typeface="JetBrains Mono"/>
+                <a:solidFill>
+                  <a:srgbClr val="1a1a1a"/>
+                </a:solidFill>
+              </a:rPr>
+              <a:t>, age: </a:t>
+            </a:r>
+            <a:r>
+              <a:rPr lang="ru-RU" altLang="en-US" sz="2300">
+                <a:latin typeface="JetBrains Mono"/>
+                <a:ea typeface="JetBrains Mono"/>
+                <a:cs typeface="JetBrains Mono"/>
+                <a:sym typeface="JetBrains Mono"/>
+                <a:solidFill>
+                  <a:srgbClr val="2c6fa6"/>
+                </a:solidFill>
+              </a:rPr>
+              <a:t>Int</a:t>
+            </a:r>
+            <a:r>
+              <a:rPr lang="ru-RU" altLang="en-US" sz="2300">
+                <a:latin typeface="JetBrains Mono"/>
+                <a:ea typeface="JetBrains Mono"/>
+                <a:cs typeface="JetBrains Mono"/>
+                <a:sym typeface="JetBrains Mono"/>
+                <a:solidFill>
+                  <a:srgbClr val="1a1a1a"/>
+                </a:solidFill>
+              </a:rPr>
+              <a:t>)</a:t>
+            </a:r>
+          </a:p>
+          <a:p>
+            <a:pPr indent="0" lvl="0" marL="0" rtl="0" algn="l">
+              <a:spcBef>
+                <a:spcPts val="1000"/>
+              </a:spcBef>
+              <a:spcAft>
+                <a:spcPts val="0"/>
+              </a:spcAft>
+              <a:buNone/>
+            </a:pPr>
+            <a:endParaRPr>
+              <a:latin typeface="JetBrains Mono"/>
+              <a:ea typeface="JetBrains Mono"/>
+              <a:cs typeface="JetBrains Mono"/>
+              <a:sym typeface="JetBrains Mono"/>
+            </a:endParaRPr>
+            <a:r>
+              <a:rPr lang="ru-RU" altLang="en-US" sz="2300">
+                <a:latin typeface="JetBrains Mono"/>
+                <a:ea typeface="JetBrains Mono"/>
+                <a:cs typeface="JetBrains Mono"/>
+                <a:sym typeface="JetBrains Mono"/>
+                <a:solidFill>
+                  <a:srgbClr val="1a1a1a"/>
+                </a:solidFill>
+              </a:rPr>
+              <a:t/>
+            </a:r>
+          </a:p>
+          <a:p>
+            <a:pPr indent="0" lvl="0" marL="0" rtl="0" algn="l">
+              <a:spcBef>
+                <a:spcPts val="1000"/>
+              </a:spcBef>
+              <a:spcAft>
+                <a:spcPts val="0"/>
+              </a:spcAft>
+              <a:buNone/>
+            </a:pPr>
+            <a:endParaRPr>
+              <a:latin typeface="JetBrains Mono"/>
+              <a:ea typeface="JetBrains Mono"/>
+              <a:cs typeface="JetBrains Mono"/>
+              <a:sym typeface="JetBrains Mono"/>
+            </a:endParaRPr>
+            <a:r>
+              <a:rPr lang="ru-RU" altLang="en-US" sz="2300">
+                <a:latin typeface="JetBrains Mono"/>
+                <a:ea typeface="JetBrains Mono"/>
+                <a:cs typeface="JetBrains Mono"/>
+                <a:sym typeface="JetBrains Mono"/>
+                <a:solidFill>
+                  <a:srgbClr val="c0392b"/>
+                </a:solidFill>
+              </a:rPr>
+              <a:t>val</a:t>
+            </a:r>
+            <a:r>
+              <a:rPr lang="ru-RU" altLang="en-US" sz="2300">
+                <a:latin typeface="JetBrains Mono"/>
+                <a:ea typeface="JetBrains Mono"/>
+                <a:cs typeface="JetBrains Mono"/>
+                <a:sym typeface="JetBrains Mono"/>
+                <a:solidFill>
+                  <a:srgbClr val="1a1a1a"/>
+                </a:solidFill>
+              </a:rPr>
+              <a:t> user = </a:t>
+            </a:r>
+            <a:r>
+              <a:rPr lang="ru-RU" altLang="en-US" sz="2300">
+                <a:latin typeface="JetBrains Mono"/>
+                <a:ea typeface="JetBrains Mono"/>
+                <a:cs typeface="JetBrains Mono"/>
+                <a:sym typeface="JetBrains Mono"/>
+                <a:solidFill>
+                  <a:srgbClr val="2c6fa6"/>
+                </a:solidFill>
+              </a:rPr>
+              <a:t>User</a:t>
+            </a:r>
+            <a:r>
+              <a:rPr lang="ru-RU" altLang="en-US" sz="2300">
+                <a:latin typeface="JetBrains Mono"/>
+                <a:ea typeface="JetBrains Mono"/>
+                <a:cs typeface="JetBrains Mono"/>
+                <a:sym typeface="JetBrains Mono"/>
+                <a:solidFill>
+                  <a:srgbClr val="1a1a1a"/>
+                </a:solidFill>
+              </a:rPr>
+              <a:t>(</a:t>
+            </a:r>
+            <a:r>
+              <a:rPr lang="ru-RU" altLang="en-US" sz="2300">
+                <a:latin typeface="JetBrains Mono"/>
+                <a:ea typeface="JetBrains Mono"/>
+                <a:cs typeface="JetBrains Mono"/>
+                <a:sym typeface="JetBrains Mono"/>
+                <a:solidFill>
+                  <a:srgbClr val="7f8c8d"/>
+                </a:solidFill>
+              </a:rPr>
+              <a:t>"Alice"</a:t>
+            </a:r>
+            <a:r>
+              <a:rPr lang="ru-RU" altLang="en-US" sz="2300">
+                <a:latin typeface="JetBrains Mono"/>
+                <a:ea typeface="JetBrains Mono"/>
+                <a:cs typeface="JetBrains Mono"/>
+                <a:sym typeface="JetBrains Mono"/>
+                <a:solidFill>
+                  <a:srgbClr val="1a1a1a"/>
+                </a:solidFill>
+              </a:rPr>
+              <a:t>, </a:t>
+            </a:r>
+            <a:r>
+              <a:rPr lang="ru-RU" altLang="en-US" sz="2300">
+                <a:latin typeface="JetBrains Mono"/>
+                <a:ea typeface="JetBrains Mono"/>
+                <a:cs typeface="JetBrains Mono"/>
+                <a:sym typeface="JetBrains Mono"/>
+                <a:solidFill>
+                  <a:srgbClr val="7f8c8d"/>
+                </a:solidFill>
+              </a:rPr>
+              <a:t>30</a:t>
+            </a:r>
+            <a:r>
+              <a:rPr lang="ru-RU" altLang="en-US" sz="2300">
+                <a:latin typeface="JetBrains Mono"/>
+                <a:ea typeface="JetBrains Mono"/>
+                <a:cs typeface="JetBrains Mono"/>
+                <a:sym typeface="JetBrains Mono"/>
+                <a:solidFill>
+                  <a:srgbClr val="1a1a1a"/>
+                </a:solidFill>
+              </a:rPr>
+              <a:t>)</a:t>
+            </a:r>
+          </a:p>
+          <a:p>
+            <a:pPr indent="0" lvl="0" marL="0" rtl="0" algn="l">
+              <a:spcBef>
+                <a:spcPts val="1000"/>
+              </a:spcBef>
+              <a:spcAft>
+                <a:spcPts val="0"/>
+              </a:spcAft>
+              <a:buNone/>
+            </a:pPr>
+            <a:endParaRPr>
+              <a:latin typeface="JetBrains Mono"/>
+              <a:ea typeface="JetBrains Mono"/>
+              <a:cs typeface="JetBrains Mono"/>
+              <a:sym typeface="JetBrains Mono"/>
+            </a:endParaRPr>
+            <a:r>
+              <a:rPr lang="ru-RU" altLang="en-US" sz="2300">
+                <a:latin typeface="JetBrains Mono"/>
+                <a:ea typeface="JetBrains Mono"/>
+                <a:cs typeface="JetBrains Mono"/>
+                <a:sym typeface="JetBrains Mono"/>
+                <a:solidFill>
+                  <a:srgbClr val="c0392b"/>
+                </a:solidFill>
+              </a:rPr>
+              <a:t>val</a:t>
+            </a:r>
+            <a:r>
+              <a:rPr lang="ru-RU" altLang="en-US" sz="2300">
+                <a:latin typeface="JetBrains Mono"/>
+                <a:ea typeface="JetBrains Mono"/>
+                <a:cs typeface="JetBrains Mono"/>
+                <a:sym typeface="JetBrains Mono"/>
+                <a:solidFill>
+                  <a:srgbClr val="1a1a1a"/>
+                </a:solidFill>
+              </a:rPr>
+              <a:t> older = user.copy(age = </a:t>
+            </a:r>
+            <a:r>
+              <a:rPr lang="ru-RU" altLang="en-US" sz="2300">
+                <a:latin typeface="JetBrains Mono"/>
+                <a:ea typeface="JetBrains Mono"/>
+                <a:cs typeface="JetBrains Mono"/>
+                <a:sym typeface="JetBrains Mono"/>
+                <a:solidFill>
+                  <a:srgbClr val="7f8c8d"/>
+                </a:solidFill>
+              </a:rPr>
+              <a:t>31</a:t>
+            </a:r>
+            <a:r>
+              <a:rPr lang="ru-RU" altLang="en-US" sz="2300">
+                <a:latin typeface="JetBrains Mono"/>
+                <a:ea typeface="JetBrains Mono"/>
+                <a:cs typeface="JetBrains Mono"/>
+                <a:sym typeface="JetBrains Mono"/>
+                <a:solidFill>
+                  <a:srgbClr val="1a1a1a"/>
+                </a:solidFill>
+              </a:rPr>
+              <a:t>)</a:t>
+            </a:r>
+          </a:p>
+          <a:p>
+            <a:pPr indent="0" lvl="0" marL="0" rtl="0" algn="l">
+              <a:spcBef>
+                <a:spcPts val="1000"/>
+              </a:spcBef>
+              <a:spcAft>
+                <a:spcPts val="0"/>
+              </a:spcAft>
+              <a:buNone/>
+            </a:pPr>
+            <a:endParaRPr>
+              <a:latin typeface="JetBrains Mono"/>
+              <a:ea typeface="JetBrains Mono"/>
+              <a:cs typeface="JetBrains Mono"/>
+              <a:sym typeface="JetBrains Mono"/>
+            </a:endParaRPr>
+            <a:r>
+              <a:rPr lang="ru-RU" altLang="en-US" sz="2300">
+                <a:latin typeface="JetBrains Mono"/>
+                <a:ea typeface="JetBrains Mono"/>
+                <a:cs typeface="JetBrains Mono"/>
+                <a:sym typeface="JetBrains Mono"/>
+                <a:solidFill>
+                  <a:srgbClr val="95a5a6"/>
+                </a:solidFill>
+              </a:rPr>
+              <a:t>// user.age = 31 → error: reassignment to val</a:t>
+            </a:r>
+          </a:p>
+        </p:txBody>
+      </p:sp>
+    </p:spTree>
+  </p:cSld>
+  <p:clrMapOvr>
+    <a:masterClrMapping/>
+  </p:clrMapOvr>
+</p:sld>
+</file>
+
+<file path=ppt/slides/slide46.xml><?xml version="1.0" encoding="utf-8"?>
+<p:sld xmlns:a="http://schemas.openxmlformats.org/drawingml/2006/main" xmlns:p="http://schemas.openxmlformats.org/presentationml/2006/main" xmlns:r="http://schemas.openxmlformats.org/officeDocument/2006/relationships">
+  <p:cSld>
+    <p:spTree>
+      <p:nvGrpSpPr>
+        <p:cNvPr id="157" name="Shape 157"/>
+        <p:cNvGrpSpPr/>
+        <p:nvPr/>
+      </p:nvGrpSpPr>
+      <p:grpSpPr>
+        <a:xfrm>
+          <a:off x="0" y="0"/>
+          <a:ext cx="0" cy="0"/>
+          <a:chOff x="0" y="0"/>
+          <a:chExt cx="0" cy="0"/>
+        </a:xfrm>
+      </p:grpSpPr>
+      <p:sp>
+        <p:nvSpPr>
+          <p:cNvPr id="158" name="Google Shape;158;g3d09141108f_0_60"/>
+          <p:cNvSpPr txBox="1"/>
+          <p:nvPr>
+            <p:ph idx="12" type="sldNum"/>
+          </p:nvPr>
+        </p:nvSpPr>
+        <p:spPr>
+          <a:xfrm>
+            <a:off x="8610600" y="6356350"/>
+            <a:ext cx="2743200" cy="365100"/>
+          </a:xfrm>
+          <a:prstGeom prst="rect">
+            <a:avLst/>
+          </a:prstGeom>
+        </p:spPr>
+        <p:txBody>
+          <a:bodyPr anchorCtr="0" anchor="t" bIns="45700" lIns="91425" spcFirstLastPara="1" rIns="91425" wrap="square" tIns="45700">
+            <a:noAutofit/>
+          </a:bodyPr>
+          <a:lstStyle/>
+          <a:p>
+            <a:pPr indent="0" lvl="0" marL="0" rtl="0" algn="r">
+              <a:spcBef>
+                <a:spcPts val="0"/>
+              </a:spcBef>
+              <a:spcAft>
+                <a:spcPts val="0"/>
+              </a:spcAft>
+              <a:buNone/>
+            </a:pPr>
+            <a:fld id="{00000000-1234-1234-1234-123412341234}" type="slidenum">
+              <a:rPr lang="ru-RU"/>
+              <a:t>‹#›</a:t>
+            </a:fld>
+            <a:endParaRPr/>
+          </a:p>
+        </p:txBody>
+      </p:sp>
+      <p:sp>
+        <p:nvSpPr>
+          <p:cNvPr id="159" name="Google Shape;159;g3d09141108f_0_60"/>
+          <p:cNvSpPr txBox="1"/>
+          <p:nvPr>
+            <p:ph idx="1" type="body"/>
+          </p:nvPr>
+        </p:nvSpPr>
+        <p:spPr>
+          <a:xfrm>
+            <a:off x="838198" y="543878"/>
+            <a:ext cx="10942500" cy="1219200"/>
+          </a:xfrm>
+          <a:prstGeom prst="rect">
+            <a:avLst/>
+          </a:prstGeom>
+        </p:spPr>
+        <p:txBody>
+          <a:bodyPr anchorCtr="0" anchor="ctr" bIns="45700" lIns="91425" spcFirstLastPara="1" rIns="91425" wrap="square" tIns="45700">
+            <a:noAutofit/>
+          </a:bodyPr>
+          <a:lstStyle/>
+          <a:p>
+            <a:pPr indent="0" lvl="0" marL="0" rtl="0" algn="l">
+              <a:spcBef>
+                <a:spcPts val="1000"/>
+              </a:spcBef>
+              <a:spcAft>
+                <a:spcPts val="0"/>
+              </a:spcAft>
+              <a:buNone/>
+            </a:pPr>
+            <a:r>
+              <a:rPr lang="ru-RU"/>
+              <a:t>Иммутабельность: Rust</a:t>
+            </a:r>
+          </a:p>
+        </p:txBody>
+      </p:sp>
+      <p:sp>
+        <p:nvSpPr>
+          <p:cNvPr id="160" name="Google Shape;160;g3d09141108f_0_60"/>
+          <p:cNvSpPr txBox="1"/>
+          <p:nvPr>
+            <p:ph idx="2" type="body"/>
+          </p:nvPr>
+        </p:nvSpPr>
+        <p:spPr>
+          <a:xfrm>
+            <a:off x="1138200" y="1763063"/>
+            <a:ext cx="10642500" cy="3254400"/>
+          </a:xfrm>
+          <a:prstGeom prst="rect">
+            <a:avLst/>
+          </a:prstGeom>
+        </p:spPr>
+        <p:txBody>
+          <a:bodyPr anchorCtr="0" anchor="t" bIns="45700" lIns="91425" spcFirstLastPara="1" rIns="91425" wrap="square" tIns="45700">
+            <a:noAutofit/>
+          </a:bodyPr>
+          <a:lstStyle/>
+          <a:p>
+            <a:pPr indent="0" lvl="0" marL="0" rtl="0" algn="l">
+              <a:spcBef>
+                <a:spcPts val="1000"/>
+              </a:spcBef>
+              <a:spcAft>
+                <a:spcPts val="0"/>
+              </a:spcAft>
+              <a:buNone/>
+            </a:pPr>
+            <a:endParaRPr sz="2300">
+              <a:latin typeface="JetBrains Mono"/>
+              <a:ea typeface="JetBrains Mono"/>
+              <a:cs typeface="JetBrains Mono"/>
+              <a:sym typeface="JetBrains Mono"/>
+            </a:endParaRPr>
+            <a:r>
+              <a:rPr lang="ru-RU" altLang="en-US" sz="2300">
+                <a:latin typeface="JetBrains Mono"/>
+                <a:ea typeface="JetBrains Mono"/>
+                <a:cs typeface="JetBrains Mono"/>
+                <a:sym typeface="JetBrains Mono"/>
+                <a:solidFill>
+                  <a:srgbClr val="c0392b"/>
+                </a:solidFill>
+              </a:rPr>
+              <a:t>struct</a:t>
+            </a:r>
+            <a:r>
+              <a:rPr lang="ru-RU" altLang="en-US" sz="2300">
+                <a:latin typeface="JetBrains Mono"/>
+                <a:ea typeface="JetBrains Mono"/>
+                <a:cs typeface="JetBrains Mono"/>
+                <a:sym typeface="JetBrains Mono"/>
+                <a:solidFill>
+                  <a:srgbClr val="1a1a1a"/>
+                </a:solidFill>
+              </a:rPr>
+              <a:t> </a:t>
+            </a:r>
+            <a:r>
+              <a:rPr lang="ru-RU" altLang="en-US" sz="2300">
+                <a:latin typeface="JetBrains Mono"/>
+                <a:ea typeface="JetBrains Mono"/>
+                <a:cs typeface="JetBrains Mono"/>
+                <a:sym typeface="JetBrains Mono"/>
+                <a:solidFill>
+                  <a:srgbClr val="2c6fa6"/>
+                </a:solidFill>
+              </a:rPr>
+              <a:t>User</a:t>
+            </a:r>
+            <a:r>
+              <a:rPr lang="ru-RU" altLang="en-US" sz="2300">
+                <a:latin typeface="JetBrains Mono"/>
+                <a:ea typeface="JetBrains Mono"/>
+                <a:cs typeface="JetBrains Mono"/>
+                <a:sym typeface="JetBrains Mono"/>
+                <a:solidFill>
+                  <a:srgbClr val="1a1a1a"/>
+                </a:solidFill>
+              </a:rPr>
+              <a:t> { name: </a:t>
+            </a:r>
+            <a:r>
+              <a:rPr lang="ru-RU" altLang="en-US" sz="2300">
+                <a:latin typeface="JetBrains Mono"/>
+                <a:ea typeface="JetBrains Mono"/>
+                <a:cs typeface="JetBrains Mono"/>
+                <a:sym typeface="JetBrains Mono"/>
+                <a:solidFill>
+                  <a:srgbClr val="2c6fa6"/>
+                </a:solidFill>
+              </a:rPr>
+              <a:t>String</a:t>
+            </a:r>
+            <a:r>
+              <a:rPr lang="ru-RU" altLang="en-US" sz="2300">
+                <a:latin typeface="JetBrains Mono"/>
+                <a:ea typeface="JetBrains Mono"/>
+                <a:cs typeface="JetBrains Mono"/>
+                <a:sym typeface="JetBrains Mono"/>
+                <a:solidFill>
+                  <a:srgbClr val="1a1a1a"/>
+                </a:solidFill>
+              </a:rPr>
+              <a:t>, age: </a:t>
+            </a:r>
+            <a:r>
+              <a:rPr lang="ru-RU" altLang="en-US" sz="2300">
+                <a:latin typeface="JetBrains Mono"/>
+                <a:ea typeface="JetBrains Mono"/>
+                <a:cs typeface="JetBrains Mono"/>
+                <a:sym typeface="JetBrains Mono"/>
+                <a:solidFill>
+                  <a:srgbClr val="2c6fa6"/>
+                </a:solidFill>
+              </a:rPr>
+              <a:t>u32</a:t>
+            </a:r>
+            <a:r>
+              <a:rPr lang="ru-RU" altLang="en-US" sz="2300">
+                <a:latin typeface="JetBrains Mono"/>
+                <a:ea typeface="JetBrains Mono"/>
+                <a:cs typeface="JetBrains Mono"/>
+                <a:sym typeface="JetBrains Mono"/>
+                <a:solidFill>
+                  <a:srgbClr val="1a1a1a"/>
+                </a:solidFill>
+              </a:rPr>
+              <a:t> }</a:t>
+            </a:r>
+          </a:p>
+          <a:p>
+            <a:pPr indent="0" lvl="0" marL="0" rtl="0" algn="l">
+              <a:spcBef>
+                <a:spcPts val="1000"/>
+              </a:spcBef>
+              <a:spcAft>
+                <a:spcPts val="0"/>
+              </a:spcAft>
+              <a:buNone/>
+            </a:pPr>
+            <a:endParaRPr sz="2300">
+              <a:latin typeface="JetBrains Mono"/>
+              <a:ea typeface="JetBrains Mono"/>
+              <a:cs typeface="JetBrains Mono"/>
+              <a:sym typeface="JetBrains Mono"/>
+            </a:endParaRPr>
+            <a:r>
+              <a:rPr lang="ru-RU" altLang="en-US" sz="2300">
+                <a:latin typeface="JetBrains Mono"/>
+                <a:ea typeface="JetBrains Mono"/>
+                <a:cs typeface="JetBrains Mono"/>
+                <a:sym typeface="JetBrains Mono"/>
+                <a:solidFill>
+                  <a:srgbClr val="1a1a1a"/>
+                </a:solidFill>
+              </a:rPr>
+              <a:t/>
+            </a:r>
+          </a:p>
+          <a:p>
+            <a:pPr indent="0" lvl="0" marL="0" rtl="0" algn="l">
+              <a:spcBef>
+                <a:spcPts val="1000"/>
+              </a:spcBef>
+              <a:spcAft>
+                <a:spcPts val="0"/>
+              </a:spcAft>
+              <a:buNone/>
+            </a:pPr>
+            <a:endParaRPr sz="2300">
+              <a:latin typeface="JetBrains Mono"/>
+              <a:ea typeface="JetBrains Mono"/>
+              <a:cs typeface="JetBrains Mono"/>
+              <a:sym typeface="JetBrains Mono"/>
+            </a:endParaRPr>
+            <a:r>
+              <a:rPr lang="ru-RU" altLang="en-US" sz="2300">
+                <a:latin typeface="JetBrains Mono"/>
+                <a:ea typeface="JetBrains Mono"/>
+                <a:cs typeface="JetBrains Mono"/>
+                <a:sym typeface="JetBrains Mono"/>
+                <a:solidFill>
+                  <a:srgbClr val="c0392b"/>
+                </a:solidFill>
+              </a:rPr>
+              <a:t>let</a:t>
+            </a:r>
+            <a:r>
+              <a:rPr lang="ru-RU" altLang="en-US" sz="2300">
+                <a:latin typeface="JetBrains Mono"/>
+                <a:ea typeface="JetBrains Mono"/>
+                <a:cs typeface="JetBrains Mono"/>
+                <a:sym typeface="JetBrains Mono"/>
+                <a:solidFill>
+                  <a:srgbClr val="1a1a1a"/>
+                </a:solidFill>
+              </a:rPr>
+              <a:t> user = </a:t>
+            </a:r>
+            <a:r>
+              <a:rPr lang="ru-RU" altLang="en-US" sz="2300">
+                <a:latin typeface="JetBrains Mono"/>
+                <a:ea typeface="JetBrains Mono"/>
+                <a:cs typeface="JetBrains Mono"/>
+                <a:sym typeface="JetBrains Mono"/>
+                <a:solidFill>
+                  <a:srgbClr val="2c6fa6"/>
+                </a:solidFill>
+              </a:rPr>
+              <a:t>User</a:t>
+            </a:r>
+            <a:r>
+              <a:rPr lang="ru-RU" altLang="en-US" sz="2300">
+                <a:latin typeface="JetBrains Mono"/>
+                <a:ea typeface="JetBrains Mono"/>
+                <a:cs typeface="JetBrains Mono"/>
+                <a:sym typeface="JetBrains Mono"/>
+                <a:solidFill>
+                  <a:srgbClr val="1a1a1a"/>
+                </a:solidFill>
+              </a:rPr>
+              <a:t> { name: </a:t>
+            </a:r>
+            <a:r>
+              <a:rPr lang="ru-RU" altLang="en-US" sz="2300">
+                <a:latin typeface="JetBrains Mono"/>
+                <a:ea typeface="JetBrains Mono"/>
+                <a:cs typeface="JetBrains Mono"/>
+                <a:sym typeface="JetBrains Mono"/>
+                <a:solidFill>
+                  <a:srgbClr val="7f8c8d"/>
+                </a:solidFill>
+              </a:rPr>
+              <a:t>"Alice"</a:t>
+            </a:r>
+            <a:r>
+              <a:rPr lang="ru-RU" altLang="en-US" sz="2300">
+                <a:latin typeface="JetBrains Mono"/>
+                <a:ea typeface="JetBrains Mono"/>
+                <a:cs typeface="JetBrains Mono"/>
+                <a:sym typeface="JetBrains Mono"/>
+                <a:solidFill>
+                  <a:srgbClr val="1a1a1a"/>
+                </a:solidFill>
+              </a:rPr>
+              <a:t>.into(), age: </a:t>
+            </a:r>
+            <a:r>
+              <a:rPr lang="ru-RU" altLang="en-US" sz="2300">
+                <a:latin typeface="JetBrains Mono"/>
+                <a:ea typeface="JetBrains Mono"/>
+                <a:cs typeface="JetBrains Mono"/>
+                <a:sym typeface="JetBrains Mono"/>
+                <a:solidFill>
+                  <a:srgbClr val="7f8c8d"/>
+                </a:solidFill>
+              </a:rPr>
+              <a:t>30</a:t>
+            </a:r>
+            <a:r>
+              <a:rPr lang="ru-RU" altLang="en-US" sz="2300">
+                <a:latin typeface="JetBrains Mono"/>
+                <a:ea typeface="JetBrains Mono"/>
+                <a:cs typeface="JetBrains Mono"/>
+                <a:sym typeface="JetBrains Mono"/>
+                <a:solidFill>
+                  <a:srgbClr val="1a1a1a"/>
+                </a:solidFill>
+              </a:rPr>
+              <a:t> };</a:t>
+            </a:r>
+          </a:p>
+          <a:p>
+            <a:pPr indent="0" lvl="0" marL="0" rtl="0" algn="l">
+              <a:spcBef>
+                <a:spcPts val="1000"/>
+              </a:spcBef>
+              <a:spcAft>
+                <a:spcPts val="0"/>
+              </a:spcAft>
+              <a:buNone/>
+            </a:pPr>
+            <a:endParaRPr sz="2300">
+              <a:latin typeface="JetBrains Mono"/>
+              <a:ea typeface="JetBrains Mono"/>
+              <a:cs typeface="JetBrains Mono"/>
+              <a:sym typeface="JetBrains Mono"/>
+            </a:endParaRPr>
+            <a:r>
+              <a:rPr lang="ru-RU" altLang="en-US" sz="2300">
+                <a:latin typeface="JetBrains Mono"/>
+                <a:ea typeface="JetBrains Mono"/>
+                <a:cs typeface="JetBrains Mono"/>
+                <a:sym typeface="JetBrains Mono"/>
+                <a:solidFill>
+                  <a:srgbClr val="c0392b"/>
+                </a:solidFill>
+              </a:rPr>
+              <a:t>let</a:t>
+            </a:r>
+            <a:r>
+              <a:rPr lang="ru-RU" altLang="en-US" sz="2300">
+                <a:latin typeface="JetBrains Mono"/>
+                <a:ea typeface="JetBrains Mono"/>
+                <a:cs typeface="JetBrains Mono"/>
+                <a:sym typeface="JetBrains Mono"/>
+                <a:solidFill>
+                  <a:srgbClr val="1a1a1a"/>
+                </a:solidFill>
+              </a:rPr>
+              <a:t> older = </a:t>
+            </a:r>
+            <a:r>
+              <a:rPr lang="ru-RU" altLang="en-US" sz="2300">
+                <a:latin typeface="JetBrains Mono"/>
+                <a:ea typeface="JetBrains Mono"/>
+                <a:cs typeface="JetBrains Mono"/>
+                <a:sym typeface="JetBrains Mono"/>
+                <a:solidFill>
+                  <a:srgbClr val="2c6fa6"/>
+                </a:solidFill>
+              </a:rPr>
+              <a:t>User</a:t>
+            </a:r>
+            <a:r>
+              <a:rPr lang="ru-RU" altLang="en-US" sz="2300">
+                <a:latin typeface="JetBrains Mono"/>
+                <a:ea typeface="JetBrains Mono"/>
+                <a:cs typeface="JetBrains Mono"/>
+                <a:sym typeface="JetBrains Mono"/>
+                <a:solidFill>
+                  <a:srgbClr val="1a1a1a"/>
+                </a:solidFill>
+              </a:rPr>
+              <a:t> { age: </a:t>
+            </a:r>
+            <a:r>
+              <a:rPr lang="ru-RU" altLang="en-US" sz="2300">
+                <a:latin typeface="JetBrains Mono"/>
+                <a:ea typeface="JetBrains Mono"/>
+                <a:cs typeface="JetBrains Mono"/>
+                <a:sym typeface="JetBrains Mono"/>
+                <a:solidFill>
+                  <a:srgbClr val="7f8c8d"/>
+                </a:solidFill>
+              </a:rPr>
+              <a:t>31</a:t>
+            </a:r>
+            <a:r>
+              <a:rPr lang="ru-RU" altLang="en-US" sz="2300">
+                <a:latin typeface="JetBrains Mono"/>
+                <a:ea typeface="JetBrains Mono"/>
+                <a:cs typeface="JetBrains Mono"/>
+                <a:sym typeface="JetBrains Mono"/>
+                <a:solidFill>
+                  <a:srgbClr val="1a1a1a"/>
+                </a:solidFill>
+              </a:rPr>
+              <a:t>, ..user };</a:t>
+            </a:r>
+          </a:p>
+          <a:p>
+            <a:pPr indent="0" lvl="0" marL="0" rtl="0" algn="l">
+              <a:spcBef>
+                <a:spcPts val="1000"/>
+              </a:spcBef>
+              <a:spcAft>
+                <a:spcPts val="0"/>
+              </a:spcAft>
+              <a:buNone/>
+            </a:pPr>
+            <a:endParaRPr sz="2300">
+              <a:latin typeface="JetBrains Mono"/>
+              <a:ea typeface="JetBrains Mono"/>
+              <a:cs typeface="JetBrains Mono"/>
+              <a:sym typeface="JetBrains Mono"/>
+            </a:endParaRPr>
+            <a:r>
+              <a:rPr lang="ru-RU" altLang="en-US" sz="2300">
+                <a:latin typeface="JetBrains Mono"/>
+                <a:ea typeface="JetBrains Mono"/>
+                <a:cs typeface="JetBrains Mono"/>
+                <a:sym typeface="JetBrains Mono"/>
+                <a:solidFill>
+                  <a:srgbClr val="1a1a1a"/>
+                </a:solidFill>
+              </a:rPr>
+              <a:t/>
+            </a:r>
+          </a:p>
+          <a:p>
+            <a:pPr indent="0" lvl="0" marL="0" rtl="0" algn="l">
+              <a:spcBef>
+                <a:spcPts val="1000"/>
+              </a:spcBef>
+              <a:spcAft>
+                <a:spcPts val="0"/>
+              </a:spcAft>
+              <a:buNone/>
+            </a:pPr>
+            <a:endParaRPr sz="2300">
+              <a:latin typeface="JetBrains Mono"/>
+              <a:ea typeface="JetBrains Mono"/>
+              <a:cs typeface="JetBrains Mono"/>
+              <a:sym typeface="JetBrains Mono"/>
+            </a:endParaRPr>
+            <a:r>
+              <a:rPr lang="ru-RU" altLang="en-US" sz="2300">
+                <a:latin typeface="JetBrains Mono"/>
+                <a:ea typeface="JetBrains Mono"/>
+                <a:cs typeface="JetBrains Mono"/>
+                <a:sym typeface="JetBrains Mono"/>
+                <a:solidFill>
+                  <a:srgbClr val="c0392b"/>
+                </a:solidFill>
+              </a:rPr>
+              <a:t>let mut</a:t>
+            </a:r>
+            <a:r>
+              <a:rPr lang="ru-RU" altLang="en-US" sz="2300">
+                <a:latin typeface="JetBrains Mono"/>
+                <a:ea typeface="JetBrains Mono"/>
+                <a:cs typeface="JetBrains Mono"/>
+                <a:sym typeface="JetBrains Mono"/>
+                <a:solidFill>
+                  <a:srgbClr val="1a1a1a"/>
+                </a:solidFill>
+              </a:rPr>
+              <a:t> draft = </a:t>
+            </a:r>
+            <a:r>
+              <a:rPr lang="ru-RU" altLang="en-US" sz="2300">
+                <a:latin typeface="JetBrains Mono"/>
+                <a:ea typeface="JetBrains Mono"/>
+                <a:cs typeface="JetBrains Mono"/>
+                <a:sym typeface="JetBrains Mono"/>
+                <a:solidFill>
+                  <a:srgbClr val="2c6fa6"/>
+                </a:solidFill>
+              </a:rPr>
+              <a:t>User</a:t>
+            </a:r>
+            <a:r>
+              <a:rPr lang="ru-RU" altLang="en-US" sz="2300">
+                <a:latin typeface="JetBrains Mono"/>
+                <a:ea typeface="JetBrains Mono"/>
+                <a:cs typeface="JetBrains Mono"/>
+                <a:sym typeface="JetBrains Mono"/>
+                <a:solidFill>
+                  <a:srgbClr val="1a1a1a"/>
+                </a:solidFill>
+              </a:rPr>
+              <a:t> { name: </a:t>
+            </a:r>
+            <a:r>
+              <a:rPr lang="ru-RU" altLang="en-US" sz="2300">
+                <a:latin typeface="JetBrains Mono"/>
+                <a:ea typeface="JetBrains Mono"/>
+                <a:cs typeface="JetBrains Mono"/>
+                <a:sym typeface="JetBrains Mono"/>
+                <a:solidFill>
+                  <a:srgbClr val="7f8c8d"/>
+                </a:solidFill>
+              </a:rPr>
+              <a:t>"Bob"</a:t>
+            </a:r>
+            <a:r>
+              <a:rPr lang="ru-RU" altLang="en-US" sz="2300">
+                <a:latin typeface="JetBrains Mono"/>
+                <a:ea typeface="JetBrains Mono"/>
+                <a:cs typeface="JetBrains Mono"/>
+                <a:sym typeface="JetBrains Mono"/>
+                <a:solidFill>
+                  <a:srgbClr val="1a1a1a"/>
+                </a:solidFill>
+              </a:rPr>
+              <a:t>.into(), age: </a:t>
+            </a:r>
+            <a:r>
+              <a:rPr lang="ru-RU" altLang="en-US" sz="2300">
+                <a:latin typeface="JetBrains Mono"/>
+                <a:ea typeface="JetBrains Mono"/>
+                <a:cs typeface="JetBrains Mono"/>
+                <a:sym typeface="JetBrains Mono"/>
+                <a:solidFill>
+                  <a:srgbClr val="7f8c8d"/>
+                </a:solidFill>
+              </a:rPr>
+              <a:t>25</a:t>
+            </a:r>
+            <a:r>
+              <a:rPr lang="ru-RU" altLang="en-US" sz="2300">
+                <a:latin typeface="JetBrains Mono"/>
+                <a:ea typeface="JetBrains Mono"/>
+                <a:cs typeface="JetBrains Mono"/>
+                <a:sym typeface="JetBrains Mono"/>
+                <a:solidFill>
+                  <a:srgbClr val="1a1a1a"/>
+                </a:solidFill>
+              </a:rPr>
+              <a:t> };</a:t>
+            </a:r>
+          </a:p>
+          <a:p>
+            <a:pPr indent="0" lvl="0" marL="0" rtl="0" algn="l">
+              <a:spcBef>
+                <a:spcPts val="1000"/>
+              </a:spcBef>
+              <a:spcAft>
+                <a:spcPts val="0"/>
+              </a:spcAft>
+              <a:buNone/>
+            </a:pPr>
+            <a:endParaRPr sz="2300">
+              <a:latin typeface="JetBrains Mono"/>
+              <a:ea typeface="JetBrains Mono"/>
+              <a:cs typeface="JetBrains Mono"/>
+              <a:sym typeface="JetBrains Mono"/>
+            </a:endParaRPr>
+            <a:r>
+              <a:rPr lang="ru-RU" altLang="en-US" sz="2300">
+                <a:latin typeface="JetBrains Mono"/>
+                <a:ea typeface="JetBrains Mono"/>
+                <a:cs typeface="JetBrains Mono"/>
+                <a:sym typeface="JetBrains Mono"/>
+                <a:solidFill>
+                  <a:srgbClr val="1a1a1a"/>
+                </a:solidFill>
+              </a:rPr>
+              <a:t>draft.age = </a:t>
+            </a:r>
+            <a:r>
+              <a:rPr lang="ru-RU" altLang="en-US" sz="2300">
+                <a:latin typeface="JetBrains Mono"/>
+                <a:ea typeface="JetBrains Mono"/>
+                <a:cs typeface="JetBrains Mono"/>
+                <a:sym typeface="JetBrains Mono"/>
+                <a:solidFill>
+                  <a:srgbClr val="7f8c8d"/>
+                </a:solidFill>
+              </a:rPr>
+              <a:t>26</a:t>
+            </a:r>
+            <a:r>
+              <a:rPr lang="ru-RU" altLang="en-US" sz="2300">
+                <a:latin typeface="JetBrains Mono"/>
+                <a:ea typeface="JetBrains Mono"/>
+                <a:cs typeface="JetBrains Mono"/>
+                <a:sym typeface="JetBrains Mono"/>
+                <a:solidFill>
+                  <a:srgbClr val="1a1a1a"/>
+                </a:solidFill>
+              </a:rPr>
+              <a:t>;</a:t>
+            </a:r>
+            <a:r>
+              <a:rPr lang="ru-RU" altLang="en-US" sz="2300">
+                <a:latin typeface="JetBrains Mono"/>
+                <a:ea typeface="JetBrains Mono"/>
+                <a:cs typeface="JetBrains Mono"/>
+                <a:sym typeface="JetBrains Mono"/>
+                <a:solidFill>
+                  <a:srgbClr val="95a5a6"/>
+                </a:solidFill>
+              </a:rPr>
+              <a:t>  // только let mut допускает мутацию</a:t>
+            </a:r>
+          </a:p>
+        </p:txBody>
+      </p:sp>
+    </p:spTree>
+  </p:cSld>
+  <p:clrMapOvr>
+    <a:masterClrMapping/>
+  </p:clrMapOvr>
+</p:sld>
+</file>
+
+<file path=ppt/slides/slide47.xml><?xml version="1.0" encoding="utf-8"?>
+<p:sld xmlns:a="http://schemas.openxmlformats.org/drawingml/2006/main" xmlns:p="http://schemas.openxmlformats.org/presentationml/2006/main" xmlns:r="http://schemas.openxmlformats.org/officeDocument/2006/relationships">
+  <p:cSld>
+    <p:spTree>
+      <p:nvGrpSpPr>
+        <p:cNvPr id="157" name="Shape 157"/>
+        <p:cNvGrpSpPr/>
+        <p:nvPr/>
+      </p:nvGrpSpPr>
+      <p:grpSpPr>
+        <a:xfrm>
+          <a:off x="0" y="0"/>
+          <a:ext cx="0" cy="0"/>
+          <a:chOff x="0" y="0"/>
+          <a:chExt cx="0" cy="0"/>
+        </a:xfrm>
+      </p:grpSpPr>
+      <p:sp>
+        <p:nvSpPr>
+          <p:cNvPr id="158" name="Google Shape;158;g3d09141108f_0_60"/>
+          <p:cNvSpPr txBox="1"/>
+          <p:nvPr>
+            <p:ph idx="12" type="sldNum"/>
+          </p:nvPr>
+        </p:nvSpPr>
+        <p:spPr>
+          <a:xfrm>
+            <a:off x="8610600" y="6356350"/>
+            <a:ext cx="2743200" cy="365100"/>
+          </a:xfrm>
+          <a:prstGeom prst="rect">
+            <a:avLst/>
+          </a:prstGeom>
+        </p:spPr>
+        <p:txBody>
+          <a:bodyPr anchorCtr="0" anchor="t" bIns="45700" lIns="91425" spcFirstLastPara="1" rIns="91425" wrap="square" tIns="45700">
+            <a:noAutofit/>
+          </a:bodyPr>
+          <a:lstStyle/>
+          <a:p>
+            <a:pPr indent="0" lvl="0" marL="0" rtl="0" algn="r">
+              <a:spcBef>
+                <a:spcPts val="0"/>
+              </a:spcBef>
+              <a:spcAft>
+                <a:spcPts val="0"/>
+              </a:spcAft>
+              <a:buNone/>
+            </a:pPr>
+            <a:fld id="{00000000-1234-1234-1234-123412341234}" type="slidenum">
+              <a:rPr lang="ru-RU"/>
+              <a:t>‹#›</a:t>
+            </a:fld>
+            <a:endParaRPr/>
+          </a:p>
+        </p:txBody>
+      </p:sp>
+      <p:sp>
+        <p:nvSpPr>
+          <p:cNvPr id="159" name="Google Shape;159;g3d09141108f_0_60"/>
+          <p:cNvSpPr txBox="1"/>
+          <p:nvPr>
+            <p:ph idx="1" type="body"/>
+          </p:nvPr>
+        </p:nvSpPr>
+        <p:spPr>
+          <a:xfrm>
+            <a:off x="838198" y="543878"/>
+            <a:ext cx="10942500" cy="1219200"/>
+          </a:xfrm>
+          <a:prstGeom prst="rect">
+            <a:avLst/>
+          </a:prstGeom>
+        </p:spPr>
+        <p:txBody>
+          <a:bodyPr anchorCtr="0" anchor="ctr" bIns="45700" lIns="91425" spcFirstLastPara="1" rIns="91425" wrap="square" tIns="45700">
+            <a:noAutofit/>
+          </a:bodyPr>
+          <a:lstStyle/>
+          <a:p>
+            <a:pPr indent="0" lvl="0" marL="0" rtl="0" algn="l">
+              <a:spcBef>
+                <a:spcPts val="1000"/>
+              </a:spcBef>
+              <a:spcAft>
+                <a:spcPts val="0"/>
+              </a:spcAft>
+              <a:buNone/>
+            </a:pPr>
+            <a:r>
+              <a:rPr lang="ru-RU"/>
+              <a:t>Иммутабельность: Python</a:t>
+            </a:r>
+          </a:p>
+        </p:txBody>
+      </p:sp>
+      <p:sp>
+        <p:nvSpPr>
+          <p:cNvPr id="160" name="Google Shape;160;g3d09141108f_0_60"/>
+          <p:cNvSpPr txBox="1"/>
+          <p:nvPr>
+            <p:ph idx="2" type="body"/>
+          </p:nvPr>
+        </p:nvSpPr>
+        <p:spPr>
+          <a:xfrm>
+            <a:off x="1138200" y="1763063"/>
+            <a:ext cx="10642500" cy="3254400"/>
+          </a:xfrm>
+          <a:prstGeom prst="rect">
+            <a:avLst/>
+          </a:prstGeom>
+        </p:spPr>
+        <p:txBody>
+          <a:bodyPr anchorCtr="0" anchor="t" bIns="45700" lIns="91425" spcFirstLastPara="1" rIns="91425" wrap="square" tIns="45700">
+            <a:noAutofit/>
+          </a:bodyPr>
+          <a:lstStyle/>
+          <a:p>
+            <a:pPr indent="0" lvl="0" marL="0" rtl="0" algn="l">
+              <a:spcBef>
+                <a:spcPts val="1000"/>
+              </a:spcBef>
+              <a:spcAft>
+                <a:spcPts val="0"/>
+              </a:spcAft>
+              <a:buNone/>
+            </a:pPr>
+            <a:endParaRPr>
+              <a:latin typeface="JetBrains Mono"/>
+              <a:ea typeface="JetBrains Mono"/>
+              <a:cs typeface="JetBrains Mono"/>
+              <a:sym typeface="JetBrains Mono"/>
+            </a:endParaRPr>
+            <a:r>
+              <a:rPr lang="ru-RU" altLang="en-US" sz="2300">
+                <a:latin typeface="JetBrains Mono"/>
+                <a:ea typeface="JetBrains Mono"/>
+                <a:cs typeface="JetBrains Mono"/>
+                <a:sym typeface="JetBrains Mono"/>
+                <a:solidFill>
+                  <a:srgbClr val="c0392b"/>
+                </a:solidFill>
+              </a:rPr>
+              <a:t>from</a:t>
+            </a:r>
+            <a:r>
+              <a:rPr lang="ru-RU" altLang="en-US" sz="2300">
+                <a:latin typeface="JetBrains Mono"/>
+                <a:ea typeface="JetBrains Mono"/>
+                <a:cs typeface="JetBrains Mono"/>
+                <a:sym typeface="JetBrains Mono"/>
+                <a:solidFill>
+                  <a:srgbClr val="1a1a1a"/>
+                </a:solidFill>
+              </a:rPr>
+              <a:t> dataclasses </a:t>
+            </a:r>
+            <a:r>
+              <a:rPr lang="ru-RU" altLang="en-US" sz="2300">
+                <a:latin typeface="JetBrains Mono"/>
+                <a:ea typeface="JetBrains Mono"/>
+                <a:cs typeface="JetBrains Mono"/>
+                <a:sym typeface="JetBrains Mono"/>
+                <a:solidFill>
+                  <a:srgbClr val="c0392b"/>
+                </a:solidFill>
+              </a:rPr>
+              <a:t>import</a:t>
+            </a:r>
+            <a:r>
+              <a:rPr lang="ru-RU" altLang="en-US" sz="2300">
+                <a:latin typeface="JetBrains Mono"/>
+                <a:ea typeface="JetBrains Mono"/>
+                <a:cs typeface="JetBrains Mono"/>
+                <a:sym typeface="JetBrains Mono"/>
+                <a:solidFill>
+                  <a:srgbClr val="1a1a1a"/>
+                </a:solidFill>
+              </a:rPr>
+              <a:t> dataclass, replace</a:t>
+            </a:r>
+          </a:p>
+          <a:p>
+            <a:pPr indent="0" lvl="0" marL="0" rtl="0" algn="l">
+              <a:spcBef>
+                <a:spcPts val="1000"/>
+              </a:spcBef>
+              <a:spcAft>
+                <a:spcPts val="0"/>
+              </a:spcAft>
+              <a:buNone/>
+            </a:pPr>
+            <a:endParaRPr>
+              <a:latin typeface="JetBrains Mono"/>
+              <a:ea typeface="JetBrains Mono"/>
+              <a:cs typeface="JetBrains Mono"/>
+              <a:sym typeface="JetBrains Mono"/>
+            </a:endParaRPr>
+            <a:r>
+              <a:rPr lang="ru-RU" altLang="en-US" sz="2300">
+                <a:latin typeface="JetBrains Mono"/>
+                <a:ea typeface="JetBrains Mono"/>
+                <a:cs typeface="JetBrains Mono"/>
+                <a:sym typeface="JetBrains Mono"/>
+                <a:solidFill>
+                  <a:srgbClr val="1a1a1a"/>
+                </a:solidFill>
+              </a:rPr>
+              <a:t/>
+            </a:r>
+          </a:p>
+          <a:p>
+            <a:pPr indent="0" lvl="0" marL="0" rtl="0" algn="l">
+              <a:spcBef>
+                <a:spcPts val="1000"/>
+              </a:spcBef>
+              <a:spcAft>
+                <a:spcPts val="0"/>
+              </a:spcAft>
+              <a:buNone/>
+            </a:pPr>
+            <a:endParaRPr>
+              <a:latin typeface="JetBrains Mono"/>
+              <a:ea typeface="JetBrains Mono"/>
+              <a:cs typeface="JetBrains Mono"/>
+              <a:sym typeface="JetBrains Mono"/>
+            </a:endParaRPr>
+            <a:r>
+              <a:rPr lang="ru-RU" altLang="en-US" sz="2300">
+                <a:latin typeface="JetBrains Mono"/>
+                <a:ea typeface="JetBrains Mono"/>
+                <a:cs typeface="JetBrains Mono"/>
+                <a:sym typeface="JetBrains Mono"/>
+                <a:solidFill>
+                  <a:srgbClr val="1a1a1a"/>
+                </a:solidFill>
+              </a:rPr>
+              <a:t>@dataclass(frozen=</a:t>
+            </a:r>
+            <a:r>
+              <a:rPr lang="ru-RU" altLang="en-US" sz="2300">
+                <a:latin typeface="JetBrains Mono"/>
+                <a:ea typeface="JetBrains Mono"/>
+                <a:cs typeface="JetBrains Mono"/>
+                <a:sym typeface="JetBrains Mono"/>
+                <a:solidFill>
+                  <a:srgbClr val="c0392b"/>
+                </a:solidFill>
+              </a:rPr>
+              <a:t>True</a:t>
+            </a:r>
+            <a:r>
+              <a:rPr lang="ru-RU" altLang="en-US" sz="2300">
+                <a:latin typeface="JetBrains Mono"/>
+                <a:ea typeface="JetBrains Mono"/>
+                <a:cs typeface="JetBrains Mono"/>
+                <a:sym typeface="JetBrains Mono"/>
+                <a:solidFill>
+                  <a:srgbClr val="1a1a1a"/>
+                </a:solidFill>
+              </a:rPr>
+              <a:t>)</a:t>
+            </a:r>
+          </a:p>
+          <a:p>
+            <a:pPr indent="0" lvl="0" marL="0" rtl="0" algn="l">
+              <a:spcBef>
+                <a:spcPts val="1000"/>
+              </a:spcBef>
+              <a:spcAft>
+                <a:spcPts val="0"/>
+              </a:spcAft>
+              <a:buNone/>
+            </a:pPr>
+            <a:endParaRPr>
+              <a:latin typeface="JetBrains Mono"/>
+              <a:ea typeface="JetBrains Mono"/>
+              <a:cs typeface="JetBrains Mono"/>
+              <a:sym typeface="JetBrains Mono"/>
+            </a:endParaRPr>
+            <a:r>
+              <a:rPr lang="ru-RU" altLang="en-US" sz="2300">
+                <a:latin typeface="JetBrains Mono"/>
+                <a:ea typeface="JetBrains Mono"/>
+                <a:cs typeface="JetBrains Mono"/>
+                <a:sym typeface="JetBrains Mono"/>
+                <a:solidFill>
+                  <a:srgbClr val="c0392b"/>
+                </a:solidFill>
+              </a:rPr>
+              <a:t>class</a:t>
+            </a:r>
+            <a:r>
+              <a:rPr lang="ru-RU" altLang="en-US" sz="2300">
+                <a:latin typeface="JetBrains Mono"/>
+                <a:ea typeface="JetBrains Mono"/>
+                <a:cs typeface="JetBrains Mono"/>
+                <a:sym typeface="JetBrains Mono"/>
+                <a:solidFill>
+                  <a:srgbClr val="1a1a1a"/>
+                </a:solidFill>
+              </a:rPr>
+              <a:t> </a:t>
+            </a:r>
+            <a:r>
+              <a:rPr lang="ru-RU" altLang="en-US" sz="2300">
+                <a:latin typeface="JetBrains Mono"/>
+                <a:ea typeface="JetBrains Mono"/>
+                <a:cs typeface="JetBrains Mono"/>
+                <a:sym typeface="JetBrains Mono"/>
+                <a:solidFill>
+                  <a:srgbClr val="2c6fa6"/>
+                </a:solidFill>
+              </a:rPr>
+              <a:t>User</a:t>
+            </a:r>
+            <a:r>
+              <a:rPr lang="ru-RU" altLang="en-US" sz="2300">
+                <a:latin typeface="JetBrains Mono"/>
+                <a:ea typeface="JetBrains Mono"/>
+                <a:cs typeface="JetBrains Mono"/>
+                <a:sym typeface="JetBrains Mono"/>
+                <a:solidFill>
+                  <a:srgbClr val="1a1a1a"/>
+                </a:solidFill>
+              </a:rPr>
+              <a:t>:</a:t>
+            </a:r>
+          </a:p>
+          <a:p>
+            <a:pPr indent="0" lvl="0" marL="0" rtl="0" algn="l">
+              <a:spcBef>
+                <a:spcPts val="1000"/>
+              </a:spcBef>
+              <a:spcAft>
+                <a:spcPts val="0"/>
+              </a:spcAft>
+              <a:buNone/>
+            </a:pPr>
+            <a:endParaRPr>
+              <a:latin typeface="JetBrains Mono"/>
+              <a:ea typeface="JetBrains Mono"/>
+              <a:cs typeface="JetBrains Mono"/>
+              <a:sym typeface="JetBrains Mono"/>
+            </a:endParaRPr>
+            <a:r>
+              <a:rPr lang="ru-RU" altLang="en-US" sz="2300">
+                <a:latin typeface="JetBrains Mono"/>
+                <a:ea typeface="JetBrains Mono"/>
+                <a:cs typeface="JetBrains Mono"/>
+                <a:sym typeface="JetBrains Mono"/>
+                <a:solidFill>
+                  <a:srgbClr val="1a1a1a"/>
+                </a:solidFill>
+              </a:rPr>
+              <a:t>    name: </a:t>
+            </a:r>
+            <a:r>
+              <a:rPr lang="ru-RU" altLang="en-US" sz="2300">
+                <a:latin typeface="JetBrains Mono"/>
+                <a:ea typeface="JetBrains Mono"/>
+                <a:cs typeface="JetBrains Mono"/>
+                <a:sym typeface="JetBrains Mono"/>
+                <a:solidFill>
+                  <a:srgbClr val="2c6fa6"/>
+                </a:solidFill>
+              </a:rPr>
+              <a:t>str</a:t>
+            </a:r>
+          </a:p>
+          <a:p>
+            <a:pPr indent="0" lvl="0" marL="0" rtl="0" algn="l">
+              <a:spcBef>
+                <a:spcPts val="1000"/>
+              </a:spcBef>
+              <a:spcAft>
+                <a:spcPts val="0"/>
+              </a:spcAft>
+              <a:buNone/>
+            </a:pPr>
+            <a:endParaRPr>
+              <a:latin typeface="JetBrains Mono"/>
+              <a:ea typeface="JetBrains Mono"/>
+              <a:cs typeface="JetBrains Mono"/>
+              <a:sym typeface="JetBrains Mono"/>
+            </a:endParaRPr>
+            <a:r>
+              <a:rPr lang="ru-RU" altLang="en-US" sz="2300">
+                <a:latin typeface="JetBrains Mono"/>
+                <a:ea typeface="JetBrains Mono"/>
+                <a:cs typeface="JetBrains Mono"/>
+                <a:sym typeface="JetBrains Mono"/>
+                <a:solidFill>
+                  <a:srgbClr val="1a1a1a"/>
+                </a:solidFill>
+              </a:rPr>
+              <a:t>    age:  </a:t>
+            </a:r>
+            <a:r>
+              <a:rPr lang="ru-RU" altLang="en-US" sz="2300">
+                <a:latin typeface="JetBrains Mono"/>
+                <a:ea typeface="JetBrains Mono"/>
+                <a:cs typeface="JetBrains Mono"/>
+                <a:sym typeface="JetBrains Mono"/>
+                <a:solidFill>
+                  <a:srgbClr val="2c6fa6"/>
+                </a:solidFill>
+              </a:rPr>
+              <a:t>int</a:t>
+            </a:r>
+          </a:p>
+          <a:p>
+            <a:pPr indent="0" lvl="0" marL="0" rtl="0" algn="l">
+              <a:spcBef>
+                <a:spcPts val="1000"/>
+              </a:spcBef>
+              <a:spcAft>
+                <a:spcPts val="0"/>
+              </a:spcAft>
+              <a:buNone/>
+            </a:pPr>
+            <a:endParaRPr>
+              <a:latin typeface="JetBrains Mono"/>
+              <a:ea typeface="JetBrains Mono"/>
+              <a:cs typeface="JetBrains Mono"/>
+              <a:sym typeface="JetBrains Mono"/>
+            </a:endParaRPr>
+            <a:r>
+              <a:rPr lang="ru-RU" altLang="en-US" sz="2300">
+                <a:latin typeface="JetBrains Mono"/>
+                <a:ea typeface="JetBrains Mono"/>
+                <a:cs typeface="JetBrains Mono"/>
+                <a:sym typeface="JetBrains Mono"/>
+                <a:solidFill>
+                  <a:srgbClr val="1a1a1a"/>
+                </a:solidFill>
+              </a:rPr>
+              <a:t/>
+            </a:r>
+          </a:p>
+          <a:p>
+            <a:pPr indent="0" lvl="0" marL="0" rtl="0" algn="l">
+              <a:spcBef>
+                <a:spcPts val="1000"/>
+              </a:spcBef>
+              <a:spcAft>
+                <a:spcPts val="0"/>
+              </a:spcAft>
+              <a:buNone/>
+            </a:pPr>
+            <a:endParaRPr>
+              <a:latin typeface="JetBrains Mono"/>
+              <a:ea typeface="JetBrains Mono"/>
+              <a:cs typeface="JetBrains Mono"/>
+              <a:sym typeface="JetBrains Mono"/>
+            </a:endParaRPr>
+            <a:r>
+              <a:rPr lang="ru-RU" altLang="en-US" sz="2300">
+                <a:latin typeface="JetBrains Mono"/>
+                <a:ea typeface="JetBrains Mono"/>
+                <a:cs typeface="JetBrains Mono"/>
+                <a:sym typeface="JetBrains Mono"/>
+                <a:solidFill>
+                  <a:srgbClr val="1a1a1a"/>
+                </a:solidFill>
+              </a:rPr>
+              <a:t>user  = </a:t>
+            </a:r>
+            <a:r>
+              <a:rPr lang="ru-RU" altLang="en-US" sz="2300">
+                <a:latin typeface="JetBrains Mono"/>
+                <a:ea typeface="JetBrains Mono"/>
+                <a:cs typeface="JetBrains Mono"/>
+                <a:sym typeface="JetBrains Mono"/>
+                <a:solidFill>
+                  <a:srgbClr val="2c6fa6"/>
+                </a:solidFill>
+              </a:rPr>
+              <a:t>User</a:t>
+            </a:r>
+            <a:r>
+              <a:rPr lang="ru-RU" altLang="en-US" sz="2300">
+                <a:latin typeface="JetBrains Mono"/>
+                <a:ea typeface="JetBrains Mono"/>
+                <a:cs typeface="JetBrains Mono"/>
+                <a:sym typeface="JetBrains Mono"/>
+                <a:solidFill>
+                  <a:srgbClr val="1a1a1a"/>
+                </a:solidFill>
+              </a:rPr>
+              <a:t>(</a:t>
+            </a:r>
+            <a:r>
+              <a:rPr lang="ru-RU" altLang="en-US" sz="2300">
+                <a:latin typeface="JetBrains Mono"/>
+                <a:ea typeface="JetBrains Mono"/>
+                <a:cs typeface="JetBrains Mono"/>
+                <a:sym typeface="JetBrains Mono"/>
+                <a:solidFill>
+                  <a:srgbClr val="7f8c8d"/>
+                </a:solidFill>
+              </a:rPr>
+              <a:t>"Alice"</a:t>
+            </a:r>
+            <a:r>
+              <a:rPr lang="ru-RU" altLang="en-US" sz="2300">
+                <a:latin typeface="JetBrains Mono"/>
+                <a:ea typeface="JetBrains Mono"/>
+                <a:cs typeface="JetBrains Mono"/>
+                <a:sym typeface="JetBrains Mono"/>
+                <a:solidFill>
+                  <a:srgbClr val="1a1a1a"/>
+                </a:solidFill>
+              </a:rPr>
+              <a:t>, </a:t>
+            </a:r>
+            <a:r>
+              <a:rPr lang="ru-RU" altLang="en-US" sz="2300">
+                <a:latin typeface="JetBrains Mono"/>
+                <a:ea typeface="JetBrains Mono"/>
+                <a:cs typeface="JetBrains Mono"/>
+                <a:sym typeface="JetBrains Mono"/>
+                <a:solidFill>
+                  <a:srgbClr val="7f8c8d"/>
+                </a:solidFill>
+              </a:rPr>
+              <a:t>30</a:t>
+            </a:r>
+            <a:r>
+              <a:rPr lang="ru-RU" altLang="en-US" sz="2300">
+                <a:latin typeface="JetBrains Mono"/>
+                <a:ea typeface="JetBrains Mono"/>
+                <a:cs typeface="JetBrains Mono"/>
+                <a:sym typeface="JetBrains Mono"/>
+                <a:solidFill>
+                  <a:srgbClr val="1a1a1a"/>
+                </a:solidFill>
+              </a:rPr>
+              <a:t>)</a:t>
+            </a:r>
+          </a:p>
+          <a:p>
+            <a:pPr indent="0" lvl="0" marL="0" rtl="0" algn="l">
+              <a:spcBef>
+                <a:spcPts val="1000"/>
+              </a:spcBef>
+              <a:spcAft>
+                <a:spcPts val="0"/>
+              </a:spcAft>
+              <a:buNone/>
+            </a:pPr>
+            <a:endParaRPr>
+              <a:latin typeface="JetBrains Mono"/>
+              <a:ea typeface="JetBrains Mono"/>
+              <a:cs typeface="JetBrains Mono"/>
+              <a:sym typeface="JetBrains Mono"/>
+            </a:endParaRPr>
+            <a:r>
+              <a:rPr lang="ru-RU" altLang="en-US" sz="2300">
+                <a:latin typeface="JetBrains Mono"/>
+                <a:ea typeface="JetBrains Mono"/>
+                <a:cs typeface="JetBrains Mono"/>
+                <a:sym typeface="JetBrains Mono"/>
+                <a:solidFill>
+                  <a:srgbClr val="1a1a1a"/>
+                </a:solidFill>
+              </a:rPr>
+              <a:t>older = replace(user, age=</a:t>
+            </a:r>
+            <a:r>
+              <a:rPr lang="ru-RU" altLang="en-US" sz="2300">
+                <a:latin typeface="JetBrains Mono"/>
+                <a:ea typeface="JetBrains Mono"/>
+                <a:cs typeface="JetBrains Mono"/>
+                <a:sym typeface="JetBrains Mono"/>
+                <a:solidFill>
+                  <a:srgbClr val="7f8c8d"/>
+                </a:solidFill>
+              </a:rPr>
+              <a:t>31</a:t>
+            </a:r>
+            <a:r>
+              <a:rPr lang="ru-RU" altLang="en-US" sz="2300">
+                <a:latin typeface="JetBrains Mono"/>
+                <a:ea typeface="JetBrains Mono"/>
+                <a:cs typeface="JetBrains Mono"/>
+                <a:sym typeface="JetBrains Mono"/>
+                <a:solidFill>
+                  <a:srgbClr val="1a1a1a"/>
+                </a:solidFill>
+              </a:rPr>
+              <a:t>)</a:t>
+            </a:r>
+          </a:p>
+          <a:p>
+            <a:pPr indent="0" lvl="0" marL="0" rtl="0" algn="l">
+              <a:spcBef>
+                <a:spcPts val="1000"/>
+              </a:spcBef>
+              <a:spcAft>
+                <a:spcPts val="0"/>
+              </a:spcAft>
+              <a:buNone/>
+            </a:pPr>
+            <a:endParaRPr>
+              <a:latin typeface="JetBrains Mono"/>
+              <a:ea typeface="JetBrains Mono"/>
+              <a:cs typeface="JetBrains Mono"/>
+              <a:sym typeface="JetBrains Mono"/>
+            </a:endParaRPr>
+            <a:r>
+              <a:rPr lang="ru-RU" altLang="en-US" sz="2300">
+                <a:latin typeface="JetBrains Mono"/>
+                <a:ea typeface="JetBrains Mono"/>
+                <a:cs typeface="JetBrains Mono"/>
+                <a:sym typeface="JetBrains Mono"/>
+                <a:solidFill>
+                  <a:srgbClr val="1a1a1a"/>
+                </a:solidFill>
+              </a:rPr>
+              <a:t>user.age = </a:t>
+            </a:r>
+            <a:r>
+              <a:rPr lang="ru-RU" altLang="en-US" sz="2300">
+                <a:latin typeface="JetBrains Mono"/>
+                <a:ea typeface="JetBrains Mono"/>
+                <a:cs typeface="JetBrains Mono"/>
+                <a:sym typeface="JetBrains Mono"/>
+                <a:solidFill>
+                  <a:srgbClr val="7f8c8d"/>
+                </a:solidFill>
+              </a:rPr>
+              <a:t>31</a:t>
+            </a:r>
+            <a:r>
+              <a:rPr lang="ru-RU" altLang="en-US" sz="2300">
+                <a:latin typeface="JetBrains Mono"/>
+                <a:ea typeface="JetBrains Mono"/>
+                <a:cs typeface="JetBrains Mono"/>
+                <a:sym typeface="JetBrains Mono"/>
+                <a:solidFill>
+                  <a:srgbClr val="1a1a1a"/>
+                </a:solidFill>
+              </a:rPr>
+              <a:t>  </a:t>
+            </a:r>
+            <a:r>
+              <a:rPr lang="ru-RU" altLang="en-US" sz="2300">
+                <a:latin typeface="JetBrains Mono"/>
+                <a:ea typeface="JetBrains Mono"/>
+                <a:cs typeface="JetBrains Mono"/>
+                <a:sym typeface="JetBrains Mono"/>
+                <a:solidFill>
+                  <a:srgbClr val="95a5a6"/>
+                </a:solidFill>
+              </a:rPr>
+              <a:t># FrozenInstanceError</a:t>
+            </a:r>
+          </a:p>
+        </p:txBody>
+      </p:sp>
+    </p:spTree>
+  </p:cSld>
+  <p:clrMapOvr>
+    <a:masterClrMapping/>
+  </p:clrMapOvr>
+</p:sld>
+</file>
+
+<file path=ppt/slides/slide48.xml><?xml version="1.0" encoding="utf-8"?>
+<p:sld xmlns:a="http://schemas.openxmlformats.org/drawingml/2006/main" xmlns:p="http://schemas.openxmlformats.org/presentationml/2006/main" xmlns:r="http://schemas.openxmlformats.org/officeDocument/2006/relationships">
+  <p:cSld>
+    <p:spTree>
+      <p:nvGrpSpPr>
+        <p:cNvPr id="157" name="Shape 157"/>
+        <p:cNvGrpSpPr/>
+        <p:nvPr/>
+      </p:nvGrpSpPr>
+      <p:grpSpPr>
+        <a:xfrm>
+          <a:off x="0" y="0"/>
+          <a:ext cx="0" cy="0"/>
+          <a:chOff x="0" y="0"/>
+          <a:chExt cx="0" cy="0"/>
+        </a:xfrm>
+      </p:grpSpPr>
+      <p:sp>
+        <p:nvSpPr>
+          <p:cNvPr id="158" name="Google Shape;158;g3d09141108f_0_60"/>
+          <p:cNvSpPr txBox="1"/>
+          <p:nvPr>
+            <p:ph idx="12" type="sldNum"/>
+          </p:nvPr>
+        </p:nvSpPr>
+        <p:spPr>
+          <a:xfrm>
+            <a:off x="8610600" y="6356350"/>
+            <a:ext cx="2743200" cy="365100"/>
+          </a:xfrm>
+          <a:prstGeom prst="rect">
+            <a:avLst/>
+          </a:prstGeom>
+        </p:spPr>
+        <p:txBody>
+          <a:bodyPr anchorCtr="0" anchor="t" bIns="45700" lIns="91425" spcFirstLastPara="1" rIns="91425" wrap="square" tIns="45700">
+            <a:noAutofit/>
+          </a:bodyPr>
+          <a:lstStyle/>
+          <a:p>
+            <a:pPr indent="0" lvl="0" marL="0" rtl="0" algn="r">
+              <a:spcBef>
+                <a:spcPts val="0"/>
+              </a:spcBef>
+              <a:spcAft>
+                <a:spcPts val="0"/>
+              </a:spcAft>
+              <a:buNone/>
+            </a:pPr>
+            <a:fld id="{00000000-1234-1234-1234-123412341234}" type="slidenum">
+              <a:rPr lang="ru-RU"/>
+              <a:t>‹#›</a:t>
+            </a:fld>
+            <a:endParaRPr/>
+          </a:p>
+        </p:txBody>
+      </p:sp>
+      <p:sp>
+        <p:nvSpPr>
+          <p:cNvPr id="159" name="Google Shape;159;g3d09141108f_0_60"/>
+          <p:cNvSpPr txBox="1"/>
+          <p:nvPr>
+            <p:ph idx="1" type="body"/>
+          </p:nvPr>
+        </p:nvSpPr>
+        <p:spPr>
+          <a:xfrm>
+            <a:off x="838198" y="543878"/>
+            <a:ext cx="10942500" cy="1219200"/>
+          </a:xfrm>
+          <a:prstGeom prst="rect">
+            <a:avLst/>
+          </a:prstGeom>
+        </p:spPr>
+        <p:txBody>
+          <a:bodyPr anchorCtr="0" anchor="ctr" bIns="45700" lIns="91425" spcFirstLastPara="1" rIns="91425" wrap="square" tIns="45700">
+            <a:noAutofit/>
+          </a:bodyPr>
+          <a:lstStyle/>
+          <a:p>
+            <a:pPr indent="0" lvl="0" marL="0" rtl="0" algn="l">
+              <a:spcBef>
+                <a:spcPts val="1000"/>
+              </a:spcBef>
+              <a:spcAft>
+                <a:spcPts val="0"/>
+              </a:spcAft>
+              <a:buNone/>
+            </a:pPr>
+            <a:r>
+              <a:rPr lang="ru-RU"/>
+              <a:t>Иммутабельность: JS</a:t>
+            </a:r>
+          </a:p>
+        </p:txBody>
+      </p:sp>
+      <p:sp>
+        <p:nvSpPr>
+          <p:cNvPr id="160" name="Google Shape;160;g3d09141108f_0_60"/>
+          <p:cNvSpPr txBox="1"/>
+          <p:nvPr>
+            <p:ph idx="2" type="body"/>
+          </p:nvPr>
+        </p:nvSpPr>
+        <p:spPr>
+          <a:xfrm>
+            <a:off x="1138200" y="1763063"/>
+            <a:ext cx="10642500" cy="3254400"/>
+          </a:xfrm>
+          <a:prstGeom prst="rect">
+            <a:avLst/>
+          </a:prstGeom>
+        </p:spPr>
+        <p:txBody>
+          <a:bodyPr anchorCtr="0" anchor="t" bIns="45700" lIns="91425" spcFirstLastPara="1" rIns="91425" wrap="square" tIns="45700">
+            <a:noAutofit/>
+          </a:bodyPr>
+          <a:lstStyle/>
+          <a:p>
+            <a:pPr indent="0" lvl="0" marL="0" rtl="0" algn="l">
+              <a:spcBef>
+                <a:spcPts val="1000"/>
+              </a:spcBef>
+              <a:spcAft>
+                <a:spcPts val="0"/>
+              </a:spcAft>
+              <a:buNone/>
+            </a:pPr>
+            <a:endParaRPr sz="2000">
+              <a:latin typeface="JetBrains Mono"/>
+              <a:ea typeface="JetBrains Mono"/>
+              <a:cs typeface="JetBrains Mono"/>
+              <a:sym typeface="JetBrains Mono"/>
+            </a:endParaRPr>
+            <a:r>
+              <a:rPr lang="ru-RU" altLang="en-US" sz="2000">
+                <a:latin typeface="JetBrains Mono"/>
+                <a:ea typeface="JetBrains Mono"/>
+                <a:cs typeface="JetBrains Mono"/>
+                <a:sym typeface="JetBrains Mono"/>
+                <a:solidFill>
+                  <a:srgbClr val="7f8c8d"/>
+                </a:solidFill>
+              </a:rPr>
+              <a:t>"use strict"</a:t>
+            </a:r>
+            <a:r>
+              <a:rPr lang="ru-RU" altLang="en-US" sz="2000">
+                <a:latin typeface="JetBrains Mono"/>
+                <a:ea typeface="JetBrains Mono"/>
+                <a:cs typeface="JetBrains Mono"/>
+                <a:sym typeface="JetBrains Mono"/>
+                <a:solidFill>
+                  <a:srgbClr val="1a1a1a"/>
+                </a:solidFill>
+              </a:rPr>
+              <a:t>;</a:t>
+            </a:r>
+          </a:p>
+          <a:p>
+            <a:pPr indent="0" lvl="0" marL="0" rtl="0" algn="l">
+              <a:spcBef>
+                <a:spcPts val="1000"/>
+              </a:spcBef>
+              <a:spcAft>
+                <a:spcPts val="0"/>
+              </a:spcAft>
+              <a:buNone/>
+            </a:pPr>
+            <a:endParaRPr sz="2000">
+              <a:latin typeface="JetBrains Mono"/>
+              <a:ea typeface="JetBrains Mono"/>
+              <a:cs typeface="JetBrains Mono"/>
+              <a:sym typeface="JetBrains Mono"/>
+            </a:endParaRPr>
+            <a:r>
+              <a:rPr lang="ru-RU" altLang="en-US" sz="2000">
+                <a:latin typeface="JetBrains Mono"/>
+                <a:ea typeface="JetBrains Mono"/>
+                <a:cs typeface="JetBrains Mono"/>
+                <a:sym typeface="JetBrains Mono"/>
+                <a:solidFill>
+                  <a:srgbClr val="1a1a1a"/>
+                </a:solidFill>
+              </a:rPr>
+              <a:t/>
+            </a:r>
+          </a:p>
+          <a:p>
+            <a:pPr indent="0" lvl="0" marL="0" rtl="0" algn="l">
+              <a:spcBef>
+                <a:spcPts val="1000"/>
+              </a:spcBef>
+              <a:spcAft>
+                <a:spcPts val="0"/>
+              </a:spcAft>
+              <a:buNone/>
+            </a:pPr>
+            <a:endParaRPr sz="2000">
+              <a:latin typeface="JetBrains Mono"/>
+              <a:ea typeface="JetBrains Mono"/>
+              <a:cs typeface="JetBrains Mono"/>
+              <a:sym typeface="JetBrains Mono"/>
+            </a:endParaRPr>
+            <a:r>
+              <a:rPr lang="ru-RU" altLang="en-US" sz="2000">
+                <a:latin typeface="JetBrains Mono"/>
+                <a:ea typeface="JetBrains Mono"/>
+                <a:cs typeface="JetBrains Mono"/>
+                <a:sym typeface="JetBrains Mono"/>
+                <a:solidFill>
+                  <a:srgbClr val="c0392b"/>
+                </a:solidFill>
+              </a:rPr>
+              <a:t>const</a:t>
+            </a:r>
+            <a:r>
+              <a:rPr lang="ru-RU" altLang="en-US" sz="2000">
+                <a:latin typeface="JetBrains Mono"/>
+                <a:ea typeface="JetBrains Mono"/>
+                <a:cs typeface="JetBrains Mono"/>
+                <a:sym typeface="JetBrains Mono"/>
+                <a:solidFill>
+                  <a:srgbClr val="1a1a1a"/>
+                </a:solidFill>
+              </a:rPr>
+              <a:t> user = Object.freeze({ name: </a:t>
+            </a:r>
+            <a:r>
+              <a:rPr lang="ru-RU" altLang="en-US" sz="2000">
+                <a:latin typeface="JetBrains Mono"/>
+                <a:ea typeface="JetBrains Mono"/>
+                <a:cs typeface="JetBrains Mono"/>
+                <a:sym typeface="JetBrains Mono"/>
+                <a:solidFill>
+                  <a:srgbClr val="7f8c8d"/>
+                </a:solidFill>
+              </a:rPr>
+              <a:t>"Alice"</a:t>
+            </a:r>
+            <a:r>
+              <a:rPr lang="ru-RU" altLang="en-US" sz="2000">
+                <a:latin typeface="JetBrains Mono"/>
+                <a:ea typeface="JetBrains Mono"/>
+                <a:cs typeface="JetBrains Mono"/>
+                <a:sym typeface="JetBrains Mono"/>
+                <a:solidFill>
+                  <a:srgbClr val="1a1a1a"/>
+                </a:solidFill>
+              </a:rPr>
+              <a:t>, age: </a:t>
+            </a:r>
+            <a:r>
+              <a:rPr lang="ru-RU" altLang="en-US" sz="2000">
+                <a:latin typeface="JetBrains Mono"/>
+                <a:ea typeface="JetBrains Mono"/>
+                <a:cs typeface="JetBrains Mono"/>
+                <a:sym typeface="JetBrains Mono"/>
+                <a:solidFill>
+                  <a:srgbClr val="7f8c8d"/>
+                </a:solidFill>
+              </a:rPr>
+              <a:t>30</a:t>
+            </a:r>
+            <a:r>
+              <a:rPr lang="ru-RU" altLang="en-US" sz="2000">
+                <a:latin typeface="JetBrains Mono"/>
+                <a:ea typeface="JetBrains Mono"/>
+                <a:cs typeface="JetBrains Mono"/>
+                <a:sym typeface="JetBrains Mono"/>
+                <a:solidFill>
+                  <a:srgbClr val="1a1a1a"/>
+                </a:solidFill>
+              </a:rPr>
+              <a:t> });</a:t>
+            </a:r>
+          </a:p>
+          <a:p>
+            <a:pPr indent="0" lvl="0" marL="0" rtl="0" algn="l">
+              <a:spcBef>
+                <a:spcPts val="1000"/>
+              </a:spcBef>
+              <a:spcAft>
+                <a:spcPts val="0"/>
+              </a:spcAft>
+              <a:buNone/>
+            </a:pPr>
+            <a:endParaRPr sz="2000">
+              <a:latin typeface="JetBrains Mono"/>
+              <a:ea typeface="JetBrains Mono"/>
+              <a:cs typeface="JetBrains Mono"/>
+              <a:sym typeface="JetBrains Mono"/>
+            </a:endParaRPr>
+            <a:r>
+              <a:rPr lang="ru-RU" altLang="en-US" sz="2000">
+                <a:latin typeface="JetBrains Mono"/>
+                <a:ea typeface="JetBrains Mono"/>
+                <a:cs typeface="JetBrains Mono"/>
+                <a:sym typeface="JetBrains Mono"/>
+                <a:solidFill>
+                  <a:srgbClr val="c0392b"/>
+                </a:solidFill>
+              </a:rPr>
+              <a:t>const</a:t>
+            </a:r>
+            <a:r>
+              <a:rPr lang="ru-RU" altLang="en-US" sz="2000">
+                <a:latin typeface="JetBrains Mono"/>
+                <a:ea typeface="JetBrains Mono"/>
+                <a:cs typeface="JetBrains Mono"/>
+                <a:sym typeface="JetBrains Mono"/>
+                <a:solidFill>
+                  <a:srgbClr val="1a1a1a"/>
+                </a:solidFill>
+              </a:rPr>
+              <a:t> older = { ...user, age: </a:t>
+            </a:r>
+            <a:r>
+              <a:rPr lang="ru-RU" altLang="en-US" sz="2000">
+                <a:latin typeface="JetBrains Mono"/>
+                <a:ea typeface="JetBrains Mono"/>
+                <a:cs typeface="JetBrains Mono"/>
+                <a:sym typeface="JetBrains Mono"/>
+                <a:solidFill>
+                  <a:srgbClr val="7f8c8d"/>
+                </a:solidFill>
+              </a:rPr>
+              <a:t>31</a:t>
+            </a:r>
+            <a:r>
+              <a:rPr lang="ru-RU" altLang="en-US" sz="2000">
+                <a:latin typeface="JetBrains Mono"/>
+                <a:ea typeface="JetBrains Mono"/>
+                <a:cs typeface="JetBrains Mono"/>
+                <a:sym typeface="JetBrains Mono"/>
+                <a:solidFill>
+                  <a:srgbClr val="1a1a1a"/>
+                </a:solidFill>
+              </a:rPr>
+              <a:t> };</a:t>
+            </a:r>
+          </a:p>
+          <a:p>
+            <a:pPr indent="0" lvl="0" marL="0" rtl="0" algn="l">
+              <a:spcBef>
+                <a:spcPts val="1000"/>
+              </a:spcBef>
+              <a:spcAft>
+                <a:spcPts val="0"/>
+              </a:spcAft>
+              <a:buNone/>
+            </a:pPr>
+            <a:endParaRPr sz="2000">
+              <a:latin typeface="JetBrains Mono"/>
+              <a:ea typeface="JetBrains Mono"/>
+              <a:cs typeface="JetBrains Mono"/>
+              <a:sym typeface="JetBrains Mono"/>
+            </a:endParaRPr>
+            <a:r>
+              <a:rPr lang="ru-RU" altLang="en-US" sz="2000">
+                <a:latin typeface="JetBrains Mono"/>
+                <a:ea typeface="JetBrains Mono"/>
+                <a:cs typeface="JetBrains Mono"/>
+                <a:sym typeface="JetBrains Mono"/>
+                <a:solidFill>
+                  <a:srgbClr val="1a1a1a"/>
+                </a:solidFill>
+              </a:rPr>
+              <a:t/>
+            </a:r>
+          </a:p>
+          <a:p>
+            <a:pPr indent="0" lvl="0" marL="0" rtl="0" algn="l">
+              <a:spcBef>
+                <a:spcPts val="1000"/>
+              </a:spcBef>
+              <a:spcAft>
+                <a:spcPts val="0"/>
+              </a:spcAft>
+              <a:buNone/>
+            </a:pPr>
+            <a:endParaRPr sz="2000">
+              <a:latin typeface="JetBrains Mono"/>
+              <a:ea typeface="JetBrains Mono"/>
+              <a:cs typeface="JetBrains Mono"/>
+              <a:sym typeface="JetBrains Mono"/>
+            </a:endParaRPr>
+            <a:r>
+              <a:rPr lang="ru-RU" altLang="en-US" sz="2000">
+                <a:latin typeface="JetBrains Mono"/>
+                <a:ea typeface="JetBrains Mono"/>
+                <a:cs typeface="JetBrains Mono"/>
+                <a:sym typeface="JetBrains Mono"/>
+                <a:solidFill>
+                  <a:srgbClr val="1a1a1a"/>
+                </a:solidFill>
+              </a:rPr>
+              <a:t>user.age = </a:t>
+            </a:r>
+            <a:r>
+              <a:rPr lang="ru-RU" altLang="en-US" sz="2000">
+                <a:latin typeface="JetBrains Mono"/>
+                <a:ea typeface="JetBrains Mono"/>
+                <a:cs typeface="JetBrains Mono"/>
+                <a:sym typeface="JetBrains Mono"/>
+                <a:solidFill>
+                  <a:srgbClr val="7f8c8d"/>
+                </a:solidFill>
+              </a:rPr>
+              <a:t>31</a:t>
+            </a:r>
+            <a:r>
+              <a:rPr lang="ru-RU" altLang="en-US" sz="2000">
+                <a:latin typeface="JetBrains Mono"/>
+                <a:ea typeface="JetBrains Mono"/>
+                <a:cs typeface="JetBrains Mono"/>
+                <a:sym typeface="JetBrains Mono"/>
+                <a:solidFill>
+                  <a:srgbClr val="1a1a1a"/>
+                </a:solidFill>
+              </a:rPr>
+              <a:t>;  </a:t>
+            </a:r>
+            <a:r>
+              <a:rPr lang="ru-RU" altLang="en-US" sz="2000">
+                <a:latin typeface="JetBrains Mono"/>
+                <a:ea typeface="JetBrains Mono"/>
+                <a:cs typeface="JetBrains Mono"/>
+                <a:sym typeface="JetBrains Mono"/>
+                <a:solidFill>
+                  <a:srgbClr val="95a5a6"/>
+                </a:solidFill>
+              </a:rPr>
+              <a:t>// TypeError: Cannot assign to read only property</a:t>
+            </a:r>
+          </a:p>
+        </p:txBody>
+      </p:sp>
+    </p:spTree>
+  </p:cSld>
+  <p:clrMapOvr>
+    <a:masterClrMapping/>
+  </p:clrMapOvr>
+</p:sld>
+</file>
+
+<file path=ppt/slides/slide49.xml><?xml version="1.0" encoding="utf-8"?>
+<p:sld xmlns:a="http://schemas.openxmlformats.org/drawingml/2006/main" xmlns:p="http://schemas.openxmlformats.org/presentationml/2006/main" xmlns:r="http://schemas.openxmlformats.org/officeDocument/2006/relationships">
+  <p:cSld>
+    <p:spTree>
+      <p:nvGrpSpPr>
+        <p:cNvPr id="122" name="Shape 122"/>
+        <p:cNvGrpSpPr/>
+        <p:nvPr/>
+      </p:nvGrpSpPr>
+      <p:grpSpPr>
+        <a:xfrm>
+          <a:off x="0" y="0"/>
+          <a:ext cx="0" cy="0"/>
+          <a:chOff x="0" y="0"/>
+          <a:chExt cx="0" cy="0"/>
+        </a:xfrm>
+      </p:grpSpPr>
+      <p:sp>
+        <p:nvSpPr>
+          <p:cNvPr id="123" name="Google Shape;123;g3d09141108f_0_33"/>
+          <p:cNvSpPr txBox="1"/>
+          <p:nvPr>
+            <p:ph idx="12" type="sldNum"/>
+          </p:nvPr>
+        </p:nvSpPr>
+        <p:spPr>
+          <a:xfrm>
+            <a:off x="8610600" y="6356350"/>
+            <a:ext cx="2743200" cy="365100"/>
+          </a:xfrm>
+          <a:prstGeom prst="rect">
+            <a:avLst/>
+          </a:prstGeom>
+        </p:spPr>
+        <p:txBody>
+          <a:bodyPr anchorCtr="0" anchor="t" bIns="45700" lIns="91425" spcFirstLastPara="1" rIns="91425" wrap="square" tIns="45700">
+            <a:noAutofit/>
+          </a:bodyPr>
+          <a:lstStyle/>
+          <a:p>
+            <a:pPr indent="0" lvl="0" marL="0" rtl="0" algn="r">
+              <a:spcBef>
+                <a:spcPts val="0"/>
+              </a:spcBef>
+              <a:spcAft>
+                <a:spcPts val="0"/>
+              </a:spcAft>
+              <a:buClr>
+                <a:srgbClr val="000000"/>
+              </a:buClr>
+              <a:buSzPts val="1800"/>
+              <a:buFont typeface="Arial"/>
+              <a:buNone/>
+            </a:pPr>
+            <a:fld id="{00000000-1234-1234-1234-123412341234}" type="slidenum">
+              <a:rPr lang="ru-RU"/>
+              <a:t>‹#›</a:t>
+            </a:fld>
+            <a:endParaRPr/>
+          </a:p>
+        </p:txBody>
+      </p:sp>
+      <p:sp>
+        <p:nvSpPr>
+          <p:cNvPr id="124" name="Google Shape;124;g3d09141108f_0_33"/>
+          <p:cNvSpPr txBox="1"/>
+          <p:nvPr>
+            <p:ph idx="1" type="body"/>
+          </p:nvPr>
+        </p:nvSpPr>
+        <p:spPr>
+          <a:xfrm>
+            <a:off x="838198" y="300000"/>
+            <a:ext cx="10942500" cy="1219200"/>
+          </a:xfrm>
+          <a:prstGeom prst="rect">
+            <a:avLst/>
+          </a:prstGeom>
+        </p:spPr>
+        <p:txBody>
+          <a:bodyPr anchorCtr="0" anchor="ctr" bIns="45700" lIns="91425" spcFirstLastPara="1" rIns="91425" wrap="square" tIns="45700">
+            <a:noAutofit/>
+          </a:bodyPr>
+          <a:lstStyle/>
+          <a:p>
+            <a:pPr indent="0" lvl="0" marL="0" rtl="0" algn="l">
+              <a:spcBef>
+                <a:spcPts val="1000"/>
+              </a:spcBef>
+              <a:spcAft>
+                <a:spcPts val="0"/>
+              </a:spcAft>
+              <a:buNone/>
+            </a:pPr>
+            <a:r>
+              <a:rPr lang="ru-RU"/>
+              <a:t>Итог: пять свойств × пять языков</a:t>
+            </a:r>
+          </a:p>
+        </p:txBody>
+      </p:sp>
+      <p:graphicFrame>
+        <p:nvGraphicFramePr>
+          <p:cNvPr id="125" name="Table 124"/>
+          <p:cNvGraphicFramePr>
+            <a:graphicFrameLocks noGrp="1"/>
+          </p:cNvGraphicFramePr>
+          <p:nvPr/>
+        </p:nvGraphicFramePr>
+        <p:xfrm>
+          <a:off x="838200" y="1400000"/>
+          <a:ext cx="10942500" cy="4300000"/>
+        </p:xfrm>
+        <a:graphic>
+          <a:graphicData uri="http://schemas.openxmlformats.org/drawingml/2006/table">
+            <a:tbl>
+              <a:tblPr firstRow="1" bandRow="1">
+                <a:tableStyleId>{5C22544A-7EE6-4342-B048-85BDC9FD1C3A}</a:tableStyleId>
+              </a:tblPr>
+              <a:tblGrid>
+                <a:gridCol w="3500000"/>
+                <a:gridCol w="1488500"/>
+                <a:gridCol w="1488500"/>
+                <a:gridCol w="1488500"/>
+                <a:gridCol w="1488500"/>
+                <a:gridCol w="1488500"/>
+              </a:tblGrid>
+              <a:tr h="716666">
+                <a:tc>
+                  <a:txBody>
+                    <a:bodyPr wrap="none"/>
+                    <a:lstStyle/>
+                    <a:p>
+                      <a:pPr algn="l"/>
+                      <a:r>
+                        <a:rPr b="0" sz="1600">
+                          <a:solidFill>
+                            <a:srgbClr val="1A1A1A"/>
+                          </a:solidFill>
+                        </a:rPr>
+                        <a:t>Свойство</a:t>
+                      </a:r>
+                    </a:p>
+                  </a:txBody>
+                  <a:tcPr>
+                    <a:solidFill>
+                      <a:srgbClr val="f0f0f0"/>
+                    </a:solidFill>
+                  </a:tcPr>
+                </a:tc>
+                <a:tc>
+                  <a:txBody>
+                    <a:bodyPr wrap="none"/>
+                    <a:lstStyle/>
+                    <a:p>
+                      <a:pPr algn="ctr"/>
+                      <a:r>
+                        <a:rPr b="1" sz="1600">
+                          <a:solidFill>
+                            <a:srgbClr val="1A1A1A"/>
+                          </a:solidFill>
+                        </a:rPr>
+                        <a:t>OCaml</a:t>
+                      </a:r>
+                    </a:p>
+                  </a:txBody>
+                  <a:tcPr>
+                    <a:solidFill>
+                      <a:srgbClr val="f0f0f0"/>
+                    </a:solidFill>
+                  </a:tcPr>
+                </a:tc>
+                <a:tc>
+                  <a:txBody>
+                    <a:bodyPr wrap="none"/>
+                    <a:lstStyle/>
+                    <a:p>
+                      <a:pPr algn="ctr"/>
+                      <a:r>
+                        <a:rPr b="1" sz="1600">
+                          <a:solidFill>
+                            <a:srgbClr val="1A1A1A"/>
+                          </a:solidFill>
+                        </a:rPr>
+                        <a:t>Scala</a:t>
+                      </a:r>
+                    </a:p>
+                  </a:txBody>
+                  <a:tcPr>
+                    <a:solidFill>
+                      <a:srgbClr val="f0f0f0"/>
+                    </a:solidFill>
+                  </a:tcPr>
+                </a:tc>
+                <a:tc>
+                  <a:txBody>
+                    <a:bodyPr wrap="none"/>
+                    <a:lstStyle/>
+                    <a:p>
+                      <a:pPr algn="ctr"/>
+                      <a:r>
+                        <a:rPr b="1" sz="1600">
+                          <a:solidFill>
+                            <a:srgbClr val="1A1A1A"/>
+                          </a:solidFill>
+                        </a:rPr>
+                        <a:t>Rust</a:t>
+                      </a:r>
+                    </a:p>
+                  </a:txBody>
+                  <a:tcPr>
+                    <a:solidFill>
+                      <a:srgbClr val="f0f0f0"/>
+                    </a:solidFill>
+                  </a:tcPr>
+                </a:tc>
+                <a:tc>
+                  <a:txBody>
+                    <a:bodyPr wrap="none"/>
+                    <a:lstStyle/>
+                    <a:p>
+                      <a:pPr algn="ctr"/>
+                      <a:r>
+                        <a:rPr b="1" sz="1600">
+                          <a:solidFill>
+                            <a:srgbClr val="1A1A1A"/>
+                          </a:solidFill>
+                        </a:rPr>
+                        <a:t>Python</a:t>
+                      </a:r>
+                    </a:p>
+                  </a:txBody>
+                  <a:tcPr>
+                    <a:solidFill>
+                      <a:srgbClr val="f0f0f0"/>
+                    </a:solidFill>
+                  </a:tcPr>
+                </a:tc>
+                <a:tc>
+                  <a:txBody>
+                    <a:bodyPr wrap="none"/>
+                    <a:lstStyle/>
+                    <a:p>
+                      <a:pPr algn="ctr"/>
+                      <a:r>
+                        <a:rPr b="1" sz="1600">
+                          <a:solidFill>
+                            <a:srgbClr val="1A1A1A"/>
+                          </a:solidFill>
+                        </a:rPr>
+                        <a:t>JS</a:t>
+                      </a:r>
+                    </a:p>
+                  </a:txBody>
+                  <a:tcPr>
+                    <a:solidFill>
+                      <a:srgbClr val="f0f0f0"/>
+                    </a:solidFill>
+                  </a:tcPr>
+                </a:tc>
+              </a:tr>
+              <a:tr h="716666">
+                <a:tc>
+                  <a:txBody>
+                    <a:bodyPr wrap="none"/>
+                    <a:lstStyle/>
+                    <a:p>
+                      <a:pPr algn="l"/>
+                      <a:r>
+                        <a:rPr b="0" sz="1700">
+                          <a:solidFill>
+                            <a:srgbClr val="1A1A1A"/>
+                          </a:solidFill>
+                        </a:rPr>
+                        <a:t>Декларативность</a:t>
+                      </a:r>
+                    </a:p>
+                  </a:txBody>
+                  <a:tcPr/>
+                </a:tc>
+                <a:tc>
+                  <a:txBody>
+                    <a:bodyPr wrap="none"/>
+                    <a:lstStyle/>
+                    <a:p>
+                      <a:pPr algn="ctr"/>
+                      <a:r>
+                        <a:rPr b="1" sz="1700">
+                          <a:solidFill>
+                            <a:srgbClr val="1A1A1A"/>
+                          </a:solidFill>
+                        </a:rPr>
+                        <a:t>+++</a:t>
+                      </a:r>
+                    </a:p>
+                  </a:txBody>
+                  <a:tcPr/>
+                </a:tc>
+                <a:tc>
+                  <a:txBody>
+                    <a:bodyPr wrap="none"/>
+                    <a:lstStyle/>
+                    <a:p>
+                      <a:pPr algn="ctr"/>
+                      <a:r>
+                        <a:rPr b="1" sz="1700">
+                          <a:solidFill>
+                            <a:srgbClr val="1A1A1A"/>
+                          </a:solidFill>
+                        </a:rPr>
+                        <a:t>+++</a:t>
+                      </a:r>
+                    </a:p>
+                  </a:txBody>
+                  <a:tcPr/>
+                </a:tc>
+                <a:tc>
+                  <a:txBody>
+                    <a:bodyPr wrap="none"/>
+                    <a:lstStyle/>
+                    <a:p>
+                      <a:pPr algn="ctr"/>
+                      <a:r>
+                        <a:rPr b="1" sz="1700">
+                          <a:solidFill>
+                            <a:srgbClr val="1A1A1A"/>
+                          </a:solidFill>
+                        </a:rPr>
+                        <a:t>+++</a:t>
+                      </a:r>
+                    </a:p>
+                  </a:txBody>
+                  <a:tcPr/>
+                </a:tc>
+                <a:tc>
+                  <a:txBody>
+                    <a:bodyPr wrap="none"/>
+                    <a:lstStyle/>
+                    <a:p>
+                      <a:pPr algn="ctr"/>
+                      <a:r>
+                        <a:rPr b="0" sz="1700">
+                          <a:solidFill>
+                            <a:srgbClr val="1A1A1A"/>
+                          </a:solidFill>
+                        </a:rPr>
+                        <a:t>++</a:t>
+                      </a:r>
+                    </a:p>
+                  </a:txBody>
+                  <a:tcPr/>
+                </a:tc>
+                <a:tc>
+                  <a:txBody>
+                    <a:bodyPr wrap="none"/>
+                    <a:lstStyle/>
+                    <a:p>
+                      <a:pPr algn="ctr"/>
+                      <a:r>
+                        <a:rPr b="0" sz="1700">
+                          <a:solidFill>
+                            <a:srgbClr val="1A1A1A"/>
+                          </a:solidFill>
+                        </a:rPr>
+                        <a:t>++</a:t>
+                      </a:r>
+                    </a:p>
+                  </a:txBody>
+                  <a:tcPr/>
+                </a:tc>
+              </a:tr>
+              <a:tr h="716666">
+                <a:tc>
+                  <a:txBody>
+                    <a:bodyPr wrap="none"/>
+                    <a:lstStyle/>
+                    <a:p>
+                      <a:pPr algn="l"/>
+                      <a:r>
+                        <a:rPr b="0" sz="1700">
+                          <a:solidFill>
+                            <a:srgbClr val="1A1A1A"/>
+                          </a:solidFill>
+                        </a:rPr>
+                        <a:t>Выражения</a:t>
+                      </a:r>
+                    </a:p>
+                  </a:txBody>
+                  <a:tcPr/>
+                </a:tc>
+                <a:tc>
+                  <a:txBody>
+                    <a:bodyPr wrap="none"/>
+                    <a:lstStyle/>
+                    <a:p>
+                      <a:pPr algn="ctr"/>
+                      <a:r>
+                        <a:rPr b="1" sz="1700">
+                          <a:solidFill>
+                            <a:srgbClr val="1A1A1A"/>
+                          </a:solidFill>
+                        </a:rPr>
+                        <a:t>+++</a:t>
+                      </a:r>
+                    </a:p>
+                  </a:txBody>
+                  <a:tcPr/>
+                </a:tc>
+                <a:tc>
+                  <a:txBody>
+                    <a:bodyPr wrap="none"/>
+                    <a:lstStyle/>
+                    <a:p>
+                      <a:pPr algn="ctr"/>
+                      <a:r>
+                        <a:rPr b="0" sz="1700">
+                          <a:solidFill>
+                            <a:srgbClr val="1A1A1A"/>
+                          </a:solidFill>
+                        </a:rPr>
+                        <a:t>++</a:t>
+                      </a:r>
+                    </a:p>
+                  </a:txBody>
+                  <a:tcPr/>
+                </a:tc>
+                <a:tc>
+                  <a:txBody>
+                    <a:bodyPr wrap="none"/>
+                    <a:lstStyle/>
+                    <a:p>
+                      <a:pPr algn="ctr"/>
+                      <a:r>
+                        <a:rPr b="1" sz="1700">
+                          <a:solidFill>
+                            <a:srgbClr val="1A1A1A"/>
+                          </a:solidFill>
+                        </a:rPr>
+                        <a:t>+++</a:t>
+                      </a:r>
+                    </a:p>
+                  </a:txBody>
+                  <a:tcPr/>
+                </a:tc>
+                <a:tc>
+                  <a:txBody>
+                    <a:bodyPr wrap="none"/>
+                    <a:lstStyle/>
+                    <a:p>
+                      <a:pPr algn="ctr"/>
+                      <a:r>
+                        <a:rPr b="0" sz="1700">
+                          <a:solidFill>
+                            <a:srgbClr val="1A1A1A"/>
+                          </a:solidFill>
+                        </a:rPr>
+                        <a:t>+</a:t>
+                      </a:r>
+                    </a:p>
+                  </a:txBody>
+                  <a:tcPr/>
+                </a:tc>
+                <a:tc>
+                  <a:txBody>
+                    <a:bodyPr wrap="none"/>
+                    <a:lstStyle/>
+                    <a:p>
+                      <a:pPr algn="ctr"/>
+                      <a:r>
+                        <a:rPr b="0" sz="1700">
+                          <a:solidFill>
+                            <a:srgbClr val="1A1A1A"/>
+                          </a:solidFill>
+                        </a:rPr>
+                        <a:t>+</a:t>
+                      </a:r>
+                    </a:p>
+                  </a:txBody>
+                  <a:tcPr/>
+                </a:tc>
+              </a:tr>
+              <a:tr h="716666">
+                <a:tc>
+                  <a:txBody>
+                    <a:bodyPr wrap="none"/>
+                    <a:lstStyle/>
+                    <a:p>
+                      <a:pPr algn="l"/>
+                      <a:r>
+                        <a:rPr b="0" sz="1700">
+                          <a:solidFill>
+                            <a:srgbClr val="1A1A1A"/>
+                          </a:solidFill>
+                        </a:rPr>
+                        <a:t>Функции как значения</a:t>
+                      </a:r>
+                    </a:p>
+                  </a:txBody>
+                  <a:tcPr/>
+                </a:tc>
+                <a:tc>
+                  <a:txBody>
+                    <a:bodyPr wrap="none"/>
+                    <a:lstStyle/>
+                    <a:p>
+                      <a:pPr algn="ctr"/>
+                      <a:r>
+                        <a:rPr b="1" sz="1700">
+                          <a:solidFill>
+                            <a:srgbClr val="1A1A1A"/>
+                          </a:solidFill>
+                        </a:rPr>
+                        <a:t>+++</a:t>
+                      </a:r>
+                    </a:p>
+                  </a:txBody>
+                  <a:tcPr/>
+                </a:tc>
+                <a:tc>
+                  <a:txBody>
+                    <a:bodyPr wrap="none"/>
+                    <a:lstStyle/>
+                    <a:p>
+                      <a:pPr algn="ctr"/>
+                      <a:r>
+                        <a:rPr b="1" sz="1700">
+                          <a:solidFill>
+                            <a:srgbClr val="1A1A1A"/>
+                          </a:solidFill>
+                        </a:rPr>
+                        <a:t>+++</a:t>
+                      </a:r>
+                    </a:p>
+                  </a:txBody>
+                  <a:tcPr/>
+                </a:tc>
+                <a:tc>
+                  <a:txBody>
+                    <a:bodyPr wrap="none"/>
+                    <a:lstStyle/>
+                    <a:p>
+                      <a:pPr algn="ctr"/>
+                      <a:r>
+                        <a:rPr b="0" sz="1700">
+                          <a:solidFill>
+                            <a:srgbClr val="1A1A1A"/>
+                          </a:solidFill>
+                        </a:rPr>
+                        <a:t>++</a:t>
+                      </a:r>
+                    </a:p>
+                  </a:txBody>
+                  <a:tcPr/>
+                </a:tc>
+                <a:tc>
+                  <a:txBody>
+                    <a:bodyPr wrap="none"/>
+                    <a:lstStyle/>
+                    <a:p>
+                      <a:pPr algn="ctr"/>
+                      <a:r>
+                        <a:rPr b="0" sz="1700">
+                          <a:solidFill>
+                            <a:srgbClr val="1A1A1A"/>
+                          </a:solidFill>
+                        </a:rPr>
+                        <a:t>++</a:t>
+                      </a:r>
+                    </a:p>
+                  </a:txBody>
+                  <a:tcPr/>
+                </a:tc>
+                <a:tc>
+                  <a:txBody>
+                    <a:bodyPr wrap="none"/>
+                    <a:lstStyle/>
+                    <a:p>
+                      <a:pPr algn="ctr"/>
+                      <a:r>
+                        <a:rPr b="1" sz="1700">
+                          <a:solidFill>
+                            <a:srgbClr val="1A1A1A"/>
+                          </a:solidFill>
+                        </a:rPr>
+                        <a:t>+++</a:t>
+                      </a:r>
+                    </a:p>
+                  </a:txBody>
+                  <a:tcPr/>
+                </a:tc>
+              </a:tr>
+              <a:tr h="716666">
+                <a:tc>
+                  <a:txBody>
+                    <a:bodyPr wrap="none"/>
+                    <a:lstStyle/>
+                    <a:p>
+                      <a:pPr algn="l"/>
+                      <a:r>
+                        <a:rPr b="0" sz="1700">
+                          <a:solidFill>
+                            <a:srgbClr val="1A1A1A"/>
+                          </a:solidFill>
+                        </a:rPr>
+                        <a:t>Ссылочная прозрачность</a:t>
+                      </a:r>
+                    </a:p>
+                  </a:txBody>
+                  <a:tcPr/>
+                </a:tc>
+                <a:tc>
+                  <a:txBody>
+                    <a:bodyPr wrap="none"/>
+                    <a:lstStyle/>
+                    <a:p>
+                      <a:pPr algn="ctr"/>
+                      <a:r>
+                        <a:rPr b="1" sz="1700">
+                          <a:solidFill>
+                            <a:srgbClr val="1A1A1A"/>
+                          </a:solidFill>
+                        </a:rPr>
+                        <a:t>+++</a:t>
+                      </a:r>
+                    </a:p>
+                  </a:txBody>
+                  <a:tcPr/>
+                </a:tc>
+                <a:tc>
+                  <a:txBody>
+                    <a:bodyPr wrap="none"/>
+                    <a:lstStyle/>
+                    <a:p>
+                      <a:pPr algn="ctr"/>
+                      <a:r>
+                        <a:rPr b="0" sz="1700">
+                          <a:solidFill>
+                            <a:srgbClr val="1A1A1A"/>
+                          </a:solidFill>
+                        </a:rPr>
+                        <a:t>++</a:t>
+                      </a:r>
+                    </a:p>
+                  </a:txBody>
+                  <a:tcPr/>
+                </a:tc>
+                <a:tc>
+                  <a:txBody>
+                    <a:bodyPr wrap="none"/>
+                    <a:lstStyle/>
+                    <a:p>
+                      <a:pPr algn="ctr"/>
+                      <a:r>
+                        <a:rPr b="0" sz="1700">
+                          <a:solidFill>
+                            <a:srgbClr val="1A1A1A"/>
+                          </a:solidFill>
+                        </a:rPr>
+                        <a:t>++</a:t>
+                      </a:r>
+                    </a:p>
+                  </a:txBody>
+                  <a:tcPr/>
+                </a:tc>
+                <a:tc>
+                  <a:txBody>
+                    <a:bodyPr wrap="none"/>
+                    <a:lstStyle/>
+                    <a:p>
+                      <a:pPr algn="ctr"/>
+                      <a:r>
+                        <a:rPr b="0" sz="1700">
+                          <a:solidFill>
+                            <a:srgbClr val="1A1A1A"/>
+                          </a:solidFill>
+                        </a:rPr>
+                        <a:t>+</a:t>
+                      </a:r>
+                    </a:p>
+                  </a:txBody>
+                  <a:tcPr/>
+                </a:tc>
+                <a:tc>
+                  <a:txBody>
+                    <a:bodyPr wrap="none"/>
+                    <a:lstStyle/>
+                    <a:p>
+                      <a:pPr algn="ctr"/>
+                      <a:r>
+                        <a:rPr b="0" sz="1700">
+                          <a:solidFill>
+                            <a:srgbClr val="1A1A1A"/>
+                          </a:solidFill>
+                        </a:rPr>
+                        <a:t>+</a:t>
+                      </a:r>
+                    </a:p>
+                  </a:txBody>
+                  <a:tcPr/>
+                </a:tc>
+              </a:tr>
+              <a:tr h="716670">
+                <a:tc>
+                  <a:txBody>
+                    <a:bodyPr wrap="none"/>
+                    <a:lstStyle/>
+                    <a:p>
+                      <a:pPr algn="l"/>
+                      <a:r>
+                        <a:rPr b="0" sz="1700">
+                          <a:solidFill>
+                            <a:srgbClr val="1A1A1A"/>
+                          </a:solidFill>
+                        </a:rPr>
+                        <a:t>Иммутабельность</a:t>
+                      </a:r>
+                    </a:p>
+                  </a:txBody>
+                  <a:tcPr/>
+                </a:tc>
+                <a:tc>
+                  <a:txBody>
+                    <a:bodyPr wrap="none"/>
+                    <a:lstStyle/>
+                    <a:p>
+                      <a:pPr algn="ctr"/>
+                      <a:r>
+                        <a:rPr b="1" sz="1700">
+                          <a:solidFill>
+                            <a:srgbClr val="1A1A1A"/>
+                          </a:solidFill>
+                        </a:rPr>
+                        <a:t>+++</a:t>
+                      </a:r>
+                    </a:p>
+                  </a:txBody>
+                  <a:tcPr/>
+                </a:tc>
+                <a:tc>
+                  <a:txBody>
+                    <a:bodyPr wrap="none"/>
+                    <a:lstStyle/>
+                    <a:p>
+                      <a:pPr algn="ctr"/>
+                      <a:r>
+                        <a:rPr b="0" sz="1700">
+                          <a:solidFill>
+                            <a:srgbClr val="1A1A1A"/>
+                          </a:solidFill>
+                        </a:rPr>
+                        <a:t>++</a:t>
+                      </a:r>
+                    </a:p>
+                  </a:txBody>
+                  <a:tcPr/>
+                </a:tc>
+                <a:tc>
+                  <a:txBody>
+                    <a:bodyPr wrap="none"/>
+                    <a:lstStyle/>
+                    <a:p>
+                      <a:pPr algn="ctr"/>
+                      <a:r>
+                        <a:rPr b="1" sz="1700">
+                          <a:solidFill>
+                            <a:srgbClr val="1A1A1A"/>
+                          </a:solidFill>
+                        </a:rPr>
+                        <a:t>+++</a:t>
+                      </a:r>
+                    </a:p>
+                  </a:txBody>
+                  <a:tcPr/>
+                </a:tc>
+                <a:tc>
+                  <a:txBody>
+                    <a:bodyPr wrap="none"/>
+                    <a:lstStyle/>
+                    <a:p>
+                      <a:pPr algn="ctr"/>
+                      <a:r>
+                        <a:rPr b="0" sz="1700">
+                          <a:solidFill>
+                            <a:srgbClr val="1A1A1A"/>
+                          </a:solidFill>
+                        </a:rPr>
+                        <a:t>+</a:t>
+                      </a:r>
+                    </a:p>
+                  </a:txBody>
+                  <a:tcPr/>
+                </a:tc>
+                <a:tc>
+                  <a:txBody>
+                    <a:bodyPr wrap="none"/>
+                    <a:lstStyle/>
+                    <a:p>
+                      <a:pPr algn="ctr"/>
+                      <a:r>
+                        <a:rPr b="0" sz="1700">
+                          <a:solidFill>
+                            <a:srgbClr val="1A1A1A"/>
+                          </a:solidFill>
+                        </a:rPr>
+                        <a:t>+</a:t>
+                      </a:r>
+                    </a:p>
+                  </a:txBody>
+                  <a:tcPr/>
+                </a:tc>
+              </a:tr>
+            </a:tbl>
+          </a:graphicData>
+        </a:graphic>
+      </p:graphicFrame>
+      <p:sp>
+        <p:nvSpPr>
+          <p:cNvPr id="126" name="TextBox 125"/>
+          <p:cNvSpPr txBox="1"/>
+          <p:nvPr/>
+        </p:nvSpPr>
+        <p:spPr>
+          <a:xfrm>
+            <a:off x="838200" y="5780000"/>
+            <a:ext cx="10942500" cy="400000"/>
+          </a:xfrm>
+          <a:prstGeom prst="rect">
+            <a:avLst/>
+          </a:prstGeom>
+          <a:noFill/>
+        </p:spPr>
+        <p:txBody>
+          <a:bodyPr wrap="none">
+            <a:spAutoFit/>
+          </a:bodyPr>
+          <a:lstStyle/>
+          <a:p>
+            <a:pPr algn="l"/>
+            <a:r>
+              <a:rPr sz="1300" b="1">
+                <a:solidFill>
+                  <a:srgbClr val="555555"/>
+                </a:solidFill>
+              </a:rPr>
+              <a:t>+++</a:t>
+            </a:r>
+            <a:r>
+              <a:rPr sz="1300" b="0">
+                <a:solidFill>
+                  <a:srgbClr val="555555"/>
+                </a:solidFill>
+              </a:rPr>
+              <a:t> — в дизайне языка, идиоматично     </a:t>
+            </a:r>
+            <a:r>
+              <a:rPr sz="1300" b="1">
+                <a:solidFill>
+                  <a:srgbClr val="555555"/>
+                </a:solidFill>
+              </a:rPr>
+              <a:t>++</a:t>
+            </a:r>
+            <a:r>
+              <a:rPr sz="1300" b="0">
+                <a:solidFill>
+                  <a:srgbClr val="555555"/>
+                </a:solidFill>
+              </a:rPr>
+              <a:t> — поддерживается, требует дисциплины     </a:t>
+            </a:r>
+            <a:r>
+              <a:rPr sz="1300" b="1">
+                <a:solidFill>
+                  <a:srgbClr val="555555"/>
+                </a:solidFill>
+              </a:rPr>
+              <a:t>+</a:t>
+            </a:r>
+            <a:r>
+              <a:rPr sz="1300" b="0">
+                <a:solidFill>
+                  <a:srgbClr val="555555"/>
+                </a:solidFill>
+              </a:rPr>
+              <a:t> — возможно, но нетипично</a:t>
             </a:r>
           </a:p>
         </p:txBody>
@@ -35494,6 +39449,429 @@
           </a:p>
         </p:txBody>
       </p:sp>
+    </p:spTree>
+  </p:cSld>
+  <p:clrMapOvr>
+    <a:masterClrMapping/>
+  </p:clrMapOvr>
+</p:sld>
+</file>
+
+<file path=ppt/slides/slide50.xml><?xml version="1.0" encoding="utf-8"?>
+<p:sld xmlns:a="http://schemas.openxmlformats.org/drawingml/2006/main" xmlns:p="http://schemas.openxmlformats.org/presentationml/2006/main" xmlns:r="http://schemas.openxmlformats.org/officeDocument/2006/relationships">
+  <p:cSld>
+    <p:spTree>
+      <p:nvGrpSpPr>
+        <p:cNvPr id="136" name="Shape 136"/>
+        <p:cNvGrpSpPr/>
+        <p:nvPr/>
+      </p:nvGrpSpPr>
+      <p:grpSpPr>
+        <a:xfrm>
+          <a:off x="0" y="0"/>
+          <a:ext cx="0" cy="0"/>
+          <a:chOff x="0" y="0"/>
+          <a:chExt cx="0" cy="0"/>
+        </a:xfrm>
+      </p:grpSpPr>
+      <p:sp>
+        <p:nvSpPr>
+          <p:cNvPr id="137" name="Google Shape;137;g3d09141108f_0_73"/>
+          <p:cNvSpPr txBox="1"/>
+          <p:nvPr>
+            <p:ph idx="12" type="sldNum"/>
+          </p:nvPr>
+        </p:nvSpPr>
+        <p:spPr>
+          <a:xfrm>
+            <a:off x="8610600" y="6356350"/>
+            <a:ext cx="2743200" cy="365100"/>
+          </a:xfrm>
+          <a:prstGeom prst="rect">
+            <a:avLst/>
+          </a:prstGeom>
+        </p:spPr>
+        <p:txBody>
+          <a:bodyPr anchorCtr="0" anchor="t" bIns="45700" lIns="91425" spcFirstLastPara="1" rIns="91425" wrap="square" tIns="45700">
+            <a:noAutofit/>
+          </a:bodyPr>
+          <a:lstStyle/>
+          <a:p>
+            <a:pPr indent="0" lvl="0" marL="0" rtl="0" algn="r">
+              <a:spcBef>
+                <a:spcPts val="0"/>
+              </a:spcBef>
+              <a:spcAft>
+                <a:spcPts val="0"/>
+              </a:spcAft>
+              <a:buNone/>
+            </a:pPr>
+            <a:fld id="{00000000-1234-1234-1234-123412341234}" type="slidenum">
+              <a:rPr lang="ru-RU"/>
+              <a:t>‹#›</a:t>
+            </a:fld>
+            <a:endParaRPr/>
+          </a:p>
+        </p:txBody>
+      </p:sp>
+      <p:sp>
+        <p:nvSpPr>
+          <p:cNvPr id="138" name="Google Shape;138;g3d09141108f_0_73"/>
+          <p:cNvSpPr txBox="1"/>
+          <p:nvPr>
+            <p:ph idx="1" type="body"/>
+          </p:nvPr>
+        </p:nvSpPr>
+        <p:spPr>
+          <a:xfrm>
+            <a:off x="838198" y="543878"/>
+            <a:ext cx="10942500" cy="1219200"/>
+          </a:xfrm>
+          <a:prstGeom prst="rect">
+            <a:avLst/>
+          </a:prstGeom>
+        </p:spPr>
+        <p:txBody>
+          <a:bodyPr anchorCtr="0" anchor="ctr" bIns="45700" lIns="91425" spcFirstLastPara="1" rIns="91425" wrap="square" tIns="45700">
+            <a:noAutofit/>
+          </a:bodyPr>
+          <a:lstStyle/>
+          <a:p>
+            <a:pPr indent="0" lvl="0" marL="0" rtl="0" algn="l">
+              <a:spcBef>
+                <a:spcPts val="1000"/>
+              </a:spcBef>
+              <a:spcAft>
+                <a:spcPts val="0"/>
+              </a:spcAft>
+              <a:buNone/>
+            </a:pPr>
+            <a:r>
+              <a:rPr lang="ru-RU"/>
+              <a:t>Задание на дом</a:t>
+            </a:r>
+          </a:p>
+        </p:txBody>
+      </p:sp>
+      <p:sp>
+        <p:nvSpPr>
+          <p:cNvPr id="139" name="Google Shape;139;g3d09141108f_0_73"/>
+          <p:cNvSpPr txBox="1"/>
+          <p:nvPr>
+            <p:ph idx="2" type="body"/>
+          </p:nvPr>
+        </p:nvSpPr>
+        <p:spPr>
+          <a:xfrm>
+            <a:off x="838200" y="2170113"/>
+            <a:ext cx="10942500" cy="3254400"/>
+          </a:xfrm>
+          <a:prstGeom prst="rect">
+            <a:avLst/>
+          </a:prstGeom>
+        </p:spPr>
+        <p:txBody>
+          <a:bodyPr anchorCtr="0" anchor="t" bIns="45700" lIns="91425" spcFirstLastPara="1" rIns="91425" wrap="square" tIns="45700">
+            <a:noAutofit/>
+          </a:bodyPr>
+          <a:lstStyle/>
+          <a:p>
+            <a:pPr indent="-457200" lvl="0" marL="457200" rtl="0" algn="l">
+              <a:spcBef>
+                <a:spcPts val="1000"/>
+              </a:spcBef>
+              <a:spcAft>
+                <a:spcPts val="0"/>
+              </a:spcAft>
+              <a:buAutoNum type="arabicPeriod"/>
+            </a:pPr>
+            <a:r>
+              <a:rPr lang="ru-RU"/>
+              <a:t>Какие из пяти свойств присутствуют в вашем текущем проекте?</a:t>
+            </a:r>
+          </a:p>
+          <a:p>
+            <a:pPr indent="-457200" lvl="0" marL="457200" rtl="0" algn="l">
+              <a:spcBef>
+                <a:spcPts val="1000"/>
+              </a:spcBef>
+              <a:spcAft>
+                <a:spcPts val="0"/>
+              </a:spcAft>
+              <a:buAutoNum type="arabicPeriod"/>
+            </a:pPr>
+            <a:r>
+              <a:rPr lang="ru-RU"/>
+              <a:t>Какие из них язык гарантирует by design, а какие — только конвенцией?</a:t>
+            </a:r>
+          </a:p>
+          <a:p>
+            <a:pPr indent="-457200" lvl="0" marL="457200" rtl="0" algn="l">
+              <a:spcBef>
+                <a:spcPts val="1000"/>
+              </a:spcBef>
+              <a:spcAft>
+                <a:spcPts val="0"/>
+              </a:spcAft>
+              <a:buAutoNum type="arabicPeriod"/>
+            </a:pPr>
+            <a:r>
+              <a:rPr lang="ru-RU"/>
+              <a:t>Где явная иммутабельность или декларативный стиль снизили бы когнитивную нагрузку в последнем PR?</a:t>
+            </a:r>
+          </a:p>
+        </p:txBody>
+      </p:sp>
+    </p:spTree>
+  </p:cSld>
+  <p:clrMapOvr>
+    <a:masterClrMapping/>
+  </p:clrMapOvr>
+</p:sld>
+</file>
+
+<file path=ppt/slides/slide51.xml><?xml version="1.0" encoding="utf-8"?>
+<p:sld xmlns:a="http://schemas.openxmlformats.org/drawingml/2006/main" xmlns:p="http://schemas.openxmlformats.org/presentationml/2006/main" xmlns:r="http://schemas.openxmlformats.org/officeDocument/2006/relationships">
+  <p:cSld>
+    <p:spTree>
+      <p:nvGrpSpPr>
+        <p:cNvPr id="178" name="Shape 178"/>
+        <p:cNvGrpSpPr/>
+        <p:nvPr/>
+      </p:nvGrpSpPr>
+      <p:grpSpPr>
+        <a:xfrm>
+          <a:off x="0" y="0"/>
+          <a:ext cx="0" cy="0"/>
+          <a:chOff x="0" y="0"/>
+          <a:chExt cx="0" cy="0"/>
+        </a:xfrm>
+      </p:grpSpPr>
+      <p:sp>
+        <p:nvSpPr>
+          <p:cNvPr id="179" name="Google Shape;179;p5"/>
+          <p:cNvSpPr txBox="1"/>
+          <p:nvPr/>
+        </p:nvSpPr>
+        <p:spPr>
+          <a:xfrm>
+            <a:off x="6096000" y="1594852"/>
+            <a:ext cx="5241925" cy="1063625"/>
+          </a:xfrm>
+          <a:prstGeom prst="rect">
+            <a:avLst/>
+          </a:prstGeom>
+          <a:noFill/>
+          <a:ln>
+            <a:noFill/>
+          </a:ln>
+        </p:spPr>
+        <p:txBody>
+          <a:bodyPr anchorCtr="0" anchor="t" bIns="45700" lIns="91425" spcFirstLastPara="1" rIns="91425" wrap="square" tIns="45700">
+            <a:noAutofit/>
+          </a:bodyPr>
+          <a:lstStyle/>
+          <a:p>
+            <a:pPr indent="0" lvl="0" marL="0" marR="0" rtl="0" algn="l">
+              <a:lnSpc>
+                <a:spcPct val="90000"/>
+              </a:lnSpc>
+              <a:spcBef>
+                <a:spcPts val="0"/>
+              </a:spcBef>
+              <a:spcAft>
+                <a:spcPts val="0"/>
+              </a:spcAft>
+              <a:buClr>
+                <a:schemeClr val="dk1"/>
+              </a:buClr>
+              <a:buSzPts val="4400"/>
+              <a:buFont typeface="Arial"/>
+              <a:buNone/>
+            </a:pPr>
+            <a:r>
+              <a:rPr b="1" i="1" lang="ru-RU" sz="4400">
+                <a:solidFill>
+                  <a:schemeClr val="dk1"/>
+                </a:solidFill>
+              </a:rPr>
+              <a:t>Павел Аргентов</a:t>
+            </a:r>
+            <a:endParaRPr b="0" i="0" sz="2800" u="none" cap="none" strike="noStrike">
+              <a:solidFill>
+                <a:schemeClr val="dk1"/>
+              </a:solidFill>
+              <a:latin typeface="Calibri"/>
+              <a:ea typeface="Calibri"/>
+              <a:cs typeface="Calibri"/>
+              <a:sym typeface="Calibri"/>
+            </a:endParaRPr>
+          </a:p>
+        </p:txBody>
+      </p:sp>
+      <p:sp>
+        <p:nvSpPr>
+          <p:cNvPr id="180" name="Google Shape;180;p5"/>
+          <p:cNvSpPr txBox="1"/>
+          <p:nvPr/>
+        </p:nvSpPr>
+        <p:spPr>
+          <a:xfrm>
+            <a:off x="6110607" y="3239501"/>
+            <a:ext cx="5241925" cy="2097882"/>
+          </a:xfrm>
+          <a:prstGeom prst="rect">
+            <a:avLst/>
+          </a:prstGeom>
+          <a:noFill/>
+          <a:ln>
+            <a:noFill/>
+          </a:ln>
+        </p:spPr>
+        <p:txBody>
+          <a:bodyPr anchorCtr="0" anchor="t" bIns="45700" lIns="91425" spcFirstLastPara="1" rIns="91425" wrap="square" tIns="45700">
+            <a:noAutofit/>
+          </a:bodyPr>
+          <a:lstStyle/>
+          <a:p>
+            <a:pPr indent="0" lvl="0" marL="0" marR="0" rtl="0" algn="l">
+              <a:lnSpc>
+                <a:spcPct val="90000"/>
+              </a:lnSpc>
+              <a:spcBef>
+                <a:spcPts val="1000"/>
+              </a:spcBef>
+              <a:spcAft>
+                <a:spcPts val="0"/>
+              </a:spcAft>
+              <a:buClr>
+                <a:schemeClr val="dk1"/>
+              </a:buClr>
+              <a:buSzPts val="2800"/>
+              <a:buFont typeface="Arial"/>
+              <a:buNone/>
+            </a:pPr>
+            <a:r>
+              <a:rPr b="0" i="1" lang="ru-RU" sz="2800" u="none" cap="none" strike="noStrike">
+                <a:solidFill>
+                  <a:schemeClr val="dk1"/>
+                </a:solidFill>
+                <a:latin typeface="Arial"/>
+                <a:ea typeface="Arial"/>
+                <a:cs typeface="Arial"/>
+                <a:sym typeface="Arial"/>
+              </a:rPr>
+              <a:t>Tg: @</a:t>
+            </a:r>
+            <a:r>
+              <a:rPr i="1" lang="ru-RU" sz="2800">
+                <a:solidFill>
+                  <a:schemeClr val="dk1"/>
+                </a:solidFill>
+              </a:rPr>
+              <a:t>argent_smith</a:t>
+            </a:r>
+            <a:endParaRPr b="0" i="0" sz="1400" u="none" cap="none" strike="noStrike">
+              <a:solidFill>
+                <a:srgbClr val="000000"/>
+              </a:solidFill>
+              <a:latin typeface="Arial"/>
+              <a:ea typeface="Arial"/>
+              <a:cs typeface="Arial"/>
+              <a:sym typeface="Arial"/>
+            </a:endParaRPr>
+          </a:p>
+          <a:p>
+            <a:pPr indent="0" lvl="0" marL="0" marR="0" rtl="0" algn="l">
+              <a:lnSpc>
+                <a:spcPct val="90000"/>
+              </a:lnSpc>
+              <a:spcBef>
+                <a:spcPts val="1000"/>
+              </a:spcBef>
+              <a:spcAft>
+                <a:spcPts val="0"/>
+              </a:spcAft>
+              <a:buClr>
+                <a:schemeClr val="dk1"/>
+              </a:buClr>
+              <a:buSzPts val="2800"/>
+              <a:buFont typeface="Arial"/>
+              <a:buNone/>
+            </a:pPr>
+            <a:r>
+              <a:t/>
+            </a:r>
+            <a:endParaRPr b="0" i="1" sz="2800" u="none" cap="none" strike="noStrike">
+              <a:solidFill>
+                <a:schemeClr val="dk1"/>
+              </a:solidFill>
+              <a:latin typeface="Arial"/>
+              <a:ea typeface="Arial"/>
+              <a:cs typeface="Arial"/>
+              <a:sym typeface="Arial"/>
+            </a:endParaRPr>
+          </a:p>
+          <a:p>
+            <a:pPr indent="0" lvl="0" marL="0" marR="0" rtl="0" algn="l">
+              <a:lnSpc>
+                <a:spcPct val="90000"/>
+              </a:lnSpc>
+              <a:spcBef>
+                <a:spcPts val="1000"/>
+              </a:spcBef>
+              <a:spcAft>
+                <a:spcPts val="0"/>
+              </a:spcAft>
+              <a:buClr>
+                <a:schemeClr val="dk1"/>
+              </a:buClr>
+              <a:buSzPts val="2800"/>
+              <a:buFont typeface="Arial"/>
+              <a:buNone/>
+            </a:pPr>
+            <a:r>
+              <a:t/>
+            </a:r>
+            <a:endParaRPr b="0" i="1" sz="2800" u="none" cap="none" strike="noStrike">
+              <a:solidFill>
+                <a:schemeClr val="dk1"/>
+              </a:solidFill>
+              <a:latin typeface="Arial"/>
+              <a:ea typeface="Arial"/>
+              <a:cs typeface="Arial"/>
+              <a:sym typeface="Arial"/>
+            </a:endParaRPr>
+          </a:p>
+        </p:txBody>
+      </p:sp>
+      <p:pic>
+        <p:nvPicPr>
+          <p:cNvPr id="181" name="Google Shape;181;p5"/>
+          <p:cNvPicPr preferRelativeResize="0"/>
+          <p:nvPr/>
+        </p:nvPicPr>
+        <p:blipFill rotWithShape="1">
+          <a:blip r:embed="rId3">
+            <a:alphaModFix/>
+          </a:blip>
+          <a:srcRect b="0" l="0" r="0" t="0"/>
+          <a:stretch/>
+        </p:blipFill>
+        <p:spPr>
+          <a:xfrm>
+            <a:off x="567954" y="810796"/>
+            <a:ext cx="4857410" cy="4857410"/>
+          </a:xfrm>
+          <a:prstGeom prst="rect">
+            <a:avLst/>
+          </a:prstGeom>
+          <a:noFill/>
+          <a:ln>
+            <a:noFill/>
+          </a:ln>
+        </p:spPr>
+      </p:pic>
     </p:spTree>
   </p:cSld>
   <p:clrMapOvr>
